--- a/docs/pptx/whole/jx-linsubhr-ratio-hosp8.pptx
+++ b/docs/pptx/whole/jx-linsubhr-ratio-hosp8.pptx
@@ -2271,7 +2271,7 @@
           </p:nvSpPr>
           <p:spPr>
             <a:xfrm>
-              <a:off x="817517" y="5114368"/>
+              <a:off x="817517" y="5142518"/>
               <a:ext cx="7799693" cy="0"/>
             </a:xfrm>
             <a:custGeom>
@@ -2314,7 +2314,7 @@
           </p:nvSpPr>
           <p:spPr>
             <a:xfrm>
-              <a:off x="817517" y="4244691"/>
+              <a:off x="817517" y="4313054"/>
               <a:ext cx="7799693" cy="0"/>
             </a:xfrm>
             <a:custGeom>
@@ -2357,7 +2357,7 @@
           </p:nvSpPr>
           <p:spPr>
             <a:xfrm>
-              <a:off x="817517" y="3375014"/>
+              <a:off x="817517" y="3483591"/>
               <a:ext cx="7799693" cy="0"/>
             </a:xfrm>
             <a:custGeom>
@@ -2400,7 +2400,7 @@
           </p:nvSpPr>
           <p:spPr>
             <a:xfrm>
-              <a:off x="817517" y="2505337"/>
+              <a:off x="817517" y="2654127"/>
               <a:ext cx="7799693" cy="0"/>
             </a:xfrm>
             <a:custGeom>
@@ -2443,15 +2443,15 @@
           </p:nvSpPr>
           <p:spPr>
             <a:xfrm>
-              <a:off x="1615213" y="1896563"/>
-              <a:ext cx="0" cy="3826579"/>
+              <a:off x="1615213" y="2073503"/>
+              <a:ext cx="0" cy="3649639"/>
             </a:xfrm>
             <a:custGeom>
               <a:avLst/>
               <a:pathLst>
-                <a:path w="0" h="3826579">
+                <a:path w="0" h="3649639">
                   <a:moveTo>
-                    <a:pt x="0" y="3826579"/>
+                    <a:pt x="0" y="3649639"/>
                   </a:moveTo>
                   <a:lnTo>
                     <a:pt x="0" y="0"/>
@@ -2486,15 +2486,15 @@
           </p:nvSpPr>
           <p:spPr>
             <a:xfrm>
-              <a:off x="3387871" y="1896563"/>
-              <a:ext cx="0" cy="3826579"/>
+              <a:off x="3387871" y="2073503"/>
+              <a:ext cx="0" cy="3649639"/>
             </a:xfrm>
             <a:custGeom>
               <a:avLst/>
               <a:pathLst>
-                <a:path w="0" h="3826579">
+                <a:path w="0" h="3649639">
                   <a:moveTo>
-                    <a:pt x="0" y="3826579"/>
+                    <a:pt x="0" y="3649639"/>
                   </a:moveTo>
                   <a:lnTo>
                     <a:pt x="0" y="0"/>
@@ -2529,15 +2529,15 @@
           </p:nvSpPr>
           <p:spPr>
             <a:xfrm>
-              <a:off x="5160528" y="1896563"/>
-              <a:ext cx="0" cy="3826579"/>
+              <a:off x="5160528" y="2073503"/>
+              <a:ext cx="0" cy="3649639"/>
             </a:xfrm>
             <a:custGeom>
               <a:avLst/>
               <a:pathLst>
-                <a:path w="0" h="3826579">
+                <a:path w="0" h="3649639">
                   <a:moveTo>
-                    <a:pt x="0" y="3826579"/>
+                    <a:pt x="0" y="3649639"/>
                   </a:moveTo>
                   <a:lnTo>
                     <a:pt x="0" y="0"/>
@@ -2572,15 +2572,15 @@
           </p:nvSpPr>
           <p:spPr>
             <a:xfrm>
-              <a:off x="6933186" y="1896563"/>
-              <a:ext cx="0" cy="3826579"/>
+              <a:off x="6933186" y="2073503"/>
+              <a:ext cx="0" cy="3649639"/>
             </a:xfrm>
             <a:custGeom>
               <a:avLst/>
               <a:pathLst>
-                <a:path w="0" h="3826579">
+                <a:path w="0" h="3649639">
                   <a:moveTo>
-                    <a:pt x="0" y="3826579"/>
+                    <a:pt x="0" y="3649639"/>
                   </a:moveTo>
                   <a:lnTo>
                     <a:pt x="0" y="0"/>
@@ -2615,7 +2615,7 @@
           </p:nvSpPr>
           <p:spPr>
             <a:xfrm>
-              <a:off x="817517" y="5549207"/>
+              <a:off x="817517" y="5557249"/>
               <a:ext cx="7799693" cy="0"/>
             </a:xfrm>
             <a:custGeom>
@@ -2658,7 +2658,7 @@
           </p:nvSpPr>
           <p:spPr>
             <a:xfrm>
-              <a:off x="817517" y="4679530"/>
+              <a:off x="817517" y="4727786"/>
               <a:ext cx="7799693" cy="0"/>
             </a:xfrm>
             <a:custGeom>
@@ -2701,7 +2701,7 @@
           </p:nvSpPr>
           <p:spPr>
             <a:xfrm>
-              <a:off x="817517" y="3809853"/>
+              <a:off x="817517" y="3898322"/>
               <a:ext cx="7799693" cy="0"/>
             </a:xfrm>
             <a:custGeom>
@@ -2744,7 +2744,7 @@
           </p:nvSpPr>
           <p:spPr>
             <a:xfrm>
-              <a:off x="817517" y="2940175"/>
+              <a:off x="817517" y="3068859"/>
               <a:ext cx="7799693" cy="0"/>
             </a:xfrm>
             <a:custGeom>
@@ -2787,7 +2787,7 @@
           </p:nvSpPr>
           <p:spPr>
             <a:xfrm>
-              <a:off x="817517" y="2070498"/>
+              <a:off x="817517" y="2239395"/>
               <a:ext cx="7799693" cy="0"/>
             </a:xfrm>
             <a:custGeom>
@@ -2830,15 +2830,15 @@
           </p:nvSpPr>
           <p:spPr>
             <a:xfrm>
-              <a:off x="2501542" y="1896563"/>
-              <a:ext cx="0" cy="3826579"/>
+              <a:off x="2501542" y="2073503"/>
+              <a:ext cx="0" cy="3649639"/>
             </a:xfrm>
             <a:custGeom>
               <a:avLst/>
               <a:pathLst>
-                <a:path w="0" h="3826579">
+                <a:path w="0" h="3649639">
                   <a:moveTo>
-                    <a:pt x="0" y="3826579"/>
+                    <a:pt x="0" y="3649639"/>
                   </a:moveTo>
                   <a:lnTo>
                     <a:pt x="0" y="0"/>
@@ -2873,15 +2873,15 @@
           </p:nvSpPr>
           <p:spPr>
             <a:xfrm>
-              <a:off x="4274200" y="1896563"/>
-              <a:ext cx="0" cy="3826579"/>
+              <a:off x="4274200" y="2073503"/>
+              <a:ext cx="0" cy="3649639"/>
             </a:xfrm>
             <a:custGeom>
               <a:avLst/>
               <a:pathLst>
-                <a:path w="0" h="3826579">
+                <a:path w="0" h="3649639">
                   <a:moveTo>
-                    <a:pt x="0" y="3826579"/>
+                    <a:pt x="0" y="3649639"/>
                   </a:moveTo>
                   <a:lnTo>
                     <a:pt x="0" y="0"/>
@@ -2916,15 +2916,15 @@
           </p:nvSpPr>
           <p:spPr>
             <a:xfrm>
-              <a:off x="6046857" y="1896563"/>
-              <a:ext cx="0" cy="3826579"/>
+              <a:off x="6046857" y="2073503"/>
+              <a:ext cx="0" cy="3649639"/>
             </a:xfrm>
             <a:custGeom>
               <a:avLst/>
               <a:pathLst>
-                <a:path w="0" h="3826579">
+                <a:path w="0" h="3649639">
                   <a:moveTo>
-                    <a:pt x="0" y="3826579"/>
+                    <a:pt x="0" y="3649639"/>
                   </a:moveTo>
                   <a:lnTo>
                     <a:pt x="0" y="0"/>
@@ -2959,15 +2959,15 @@
           </p:nvSpPr>
           <p:spPr>
             <a:xfrm>
-              <a:off x="7819515" y="1896563"/>
-              <a:ext cx="0" cy="3826579"/>
+              <a:off x="7819515" y="2073503"/>
+              <a:ext cx="0" cy="3649639"/>
             </a:xfrm>
             <a:custGeom>
               <a:avLst/>
               <a:pathLst>
-                <a:path w="0" h="3826579">
+                <a:path w="0" h="3649639">
                   <a:moveTo>
-                    <a:pt x="0" y="3826579"/>
+                    <a:pt x="0" y="3649639"/>
                   </a:moveTo>
                   <a:lnTo>
                     <a:pt x="0" y="0"/>
@@ -3002,612 +3002,612 @@
           </p:nvSpPr>
           <p:spPr>
             <a:xfrm>
-              <a:off x="817517" y="2311165"/>
-              <a:ext cx="7235830" cy="3032242"/>
+              <a:off x="817517" y="2468934"/>
+              <a:ext cx="7235830" cy="2892032"/>
             </a:xfrm>
             <a:custGeom>
               <a:avLst/>
               <a:pathLst>
-                <a:path w="7235830" h="3032242">
+                <a:path w="7235830" h="2892032">
                   <a:moveTo>
                     <a:pt x="0" y="0"/>
                   </a:moveTo>
                   <a:lnTo>
-                    <a:pt x="7347" y="9163"/>
-                  </a:lnTo>
-                  <a:lnTo>
-                    <a:pt x="81107" y="98606"/>
-                  </a:lnTo>
-                  <a:lnTo>
-                    <a:pt x="154867" y="185571"/>
-                  </a:lnTo>
-                  <a:lnTo>
-                    <a:pt x="228627" y="270126"/>
-                  </a:lnTo>
-                  <a:lnTo>
-                    <a:pt x="302387" y="352340"/>
-                  </a:lnTo>
-                  <a:lnTo>
-                    <a:pt x="376147" y="432276"/>
-                  </a:lnTo>
-                  <a:lnTo>
-                    <a:pt x="449907" y="509998"/>
-                  </a:lnTo>
-                  <a:lnTo>
-                    <a:pt x="523667" y="585567"/>
-                  </a:lnTo>
-                  <a:lnTo>
-                    <a:pt x="597427" y="659043"/>
-                  </a:lnTo>
-                  <a:lnTo>
-                    <a:pt x="671187" y="730483"/>
-                  </a:lnTo>
-                  <a:lnTo>
-                    <a:pt x="744947" y="799945"/>
-                  </a:lnTo>
-                  <a:lnTo>
-                    <a:pt x="818707" y="867482"/>
-                  </a:lnTo>
-                  <a:lnTo>
-                    <a:pt x="892467" y="933148"/>
-                  </a:lnTo>
-                  <a:lnTo>
-                    <a:pt x="966227" y="996996"/>
-                  </a:lnTo>
-                  <a:lnTo>
-                    <a:pt x="1039987" y="1059074"/>
-                  </a:lnTo>
-                  <a:lnTo>
-                    <a:pt x="1113747" y="1119433"/>
-                  </a:lnTo>
-                  <a:lnTo>
-                    <a:pt x="1187508" y="1178121"/>
-                  </a:lnTo>
-                  <a:lnTo>
-                    <a:pt x="1261268" y="1235182"/>
-                  </a:lnTo>
-                  <a:lnTo>
-                    <a:pt x="1335028" y="1290663"/>
-                  </a:lnTo>
-                  <a:lnTo>
-                    <a:pt x="1408788" y="1344607"/>
-                  </a:lnTo>
-                  <a:lnTo>
-                    <a:pt x="1482548" y="1397056"/>
-                  </a:lnTo>
-                  <a:lnTo>
-                    <a:pt x="1556308" y="1448053"/>
-                  </a:lnTo>
-                  <a:lnTo>
-                    <a:pt x="1630068" y="1497637"/>
-                  </a:lnTo>
-                  <a:lnTo>
-                    <a:pt x="1703828" y="1545848"/>
-                  </a:lnTo>
-                  <a:lnTo>
-                    <a:pt x="1777588" y="1592723"/>
-                  </a:lnTo>
-                  <a:lnTo>
-                    <a:pt x="1851348" y="1638300"/>
-                  </a:lnTo>
-                  <a:lnTo>
-                    <a:pt x="1925108" y="1682614"/>
-                  </a:lnTo>
-                  <a:lnTo>
-                    <a:pt x="1998868" y="1725700"/>
-                  </a:lnTo>
-                  <a:lnTo>
-                    <a:pt x="2072628" y="1767593"/>
-                  </a:lnTo>
-                  <a:lnTo>
-                    <a:pt x="2146388" y="1808326"/>
-                  </a:lnTo>
-                  <a:lnTo>
-                    <a:pt x="2220148" y="1847930"/>
-                  </a:lnTo>
-                  <a:lnTo>
-                    <a:pt x="2293908" y="1886437"/>
-                  </a:lnTo>
-                  <a:lnTo>
-                    <a:pt x="2367668" y="1923878"/>
-                  </a:lnTo>
-                  <a:lnTo>
-                    <a:pt x="2441428" y="1960281"/>
-                  </a:lnTo>
-                  <a:lnTo>
-                    <a:pt x="2515188" y="1995676"/>
-                  </a:lnTo>
-                  <a:lnTo>
-                    <a:pt x="2588948" y="2030091"/>
-                  </a:lnTo>
-                  <a:lnTo>
-                    <a:pt x="2662708" y="2063552"/>
-                  </a:lnTo>
-                  <a:lnTo>
-                    <a:pt x="2736468" y="2096086"/>
-                  </a:lnTo>
-                  <a:lnTo>
-                    <a:pt x="2810228" y="2127719"/>
-                  </a:lnTo>
-                  <a:lnTo>
-                    <a:pt x="2883988" y="2158476"/>
-                  </a:lnTo>
-                  <a:lnTo>
-                    <a:pt x="2957748" y="2188381"/>
-                  </a:lnTo>
-                  <a:lnTo>
-                    <a:pt x="3031508" y="2217457"/>
-                  </a:lnTo>
-                  <a:lnTo>
-                    <a:pt x="3105268" y="2245728"/>
-                  </a:lnTo>
-                  <a:lnTo>
-                    <a:pt x="3179028" y="2273216"/>
-                  </a:lnTo>
-                  <a:lnTo>
-                    <a:pt x="3252788" y="2299943"/>
-                  </a:lnTo>
-                  <a:lnTo>
-                    <a:pt x="3326548" y="2325929"/>
-                  </a:lnTo>
-                  <a:lnTo>
-                    <a:pt x="3400308" y="2351195"/>
-                  </a:lnTo>
-                  <a:lnTo>
-                    <a:pt x="3474068" y="2368575"/>
-                  </a:lnTo>
-                  <a:lnTo>
-                    <a:pt x="3547828" y="2369270"/>
-                  </a:lnTo>
-                  <a:lnTo>
-                    <a:pt x="3621588" y="2369964"/>
-                  </a:lnTo>
-                  <a:lnTo>
-                    <a:pt x="3695348" y="2370658"/>
-                  </a:lnTo>
-                  <a:lnTo>
-                    <a:pt x="3769108" y="2371351"/>
-                  </a:lnTo>
-                  <a:lnTo>
-                    <a:pt x="3842868" y="2372043"/>
-                  </a:lnTo>
-                  <a:lnTo>
-                    <a:pt x="3916628" y="2372735"/>
-                  </a:lnTo>
-                  <a:lnTo>
-                    <a:pt x="3990388" y="2373426"/>
-                  </a:lnTo>
-                  <a:lnTo>
-                    <a:pt x="4064149" y="2374117"/>
-                  </a:lnTo>
-                  <a:lnTo>
-                    <a:pt x="4137909" y="2374807"/>
-                  </a:lnTo>
-                  <a:lnTo>
-                    <a:pt x="4211669" y="2375497"/>
-                  </a:lnTo>
-                  <a:lnTo>
-                    <a:pt x="4285429" y="2376186"/>
-                  </a:lnTo>
-                  <a:lnTo>
-                    <a:pt x="4359189" y="2376874"/>
-                  </a:lnTo>
-                  <a:lnTo>
-                    <a:pt x="4432949" y="2377562"/>
-                  </a:lnTo>
-                  <a:lnTo>
-                    <a:pt x="4506709" y="2378250"/>
-                  </a:lnTo>
-                  <a:lnTo>
-                    <a:pt x="4580469" y="2378937"/>
-                  </a:lnTo>
-                  <a:lnTo>
-                    <a:pt x="4654229" y="2379623"/>
-                  </a:lnTo>
-                  <a:lnTo>
-                    <a:pt x="4727989" y="2380309"/>
-                  </a:lnTo>
-                  <a:lnTo>
-                    <a:pt x="4801749" y="2380994"/>
-                  </a:lnTo>
-                  <a:lnTo>
-                    <a:pt x="4875509" y="2381679"/>
-                  </a:lnTo>
-                  <a:lnTo>
-                    <a:pt x="4949269" y="2382363"/>
-                  </a:lnTo>
-                  <a:lnTo>
-                    <a:pt x="5023029" y="2383046"/>
-                  </a:lnTo>
-                  <a:lnTo>
-                    <a:pt x="5096789" y="2383729"/>
-                  </a:lnTo>
-                  <a:lnTo>
-                    <a:pt x="5170549" y="2384412"/>
-                  </a:lnTo>
-                  <a:lnTo>
-                    <a:pt x="5244309" y="2385094"/>
-                  </a:lnTo>
-                  <a:lnTo>
-                    <a:pt x="5318069" y="2385775"/>
-                  </a:lnTo>
-                  <a:lnTo>
-                    <a:pt x="5391829" y="2386456"/>
-                  </a:lnTo>
-                  <a:lnTo>
-                    <a:pt x="5465589" y="2387137"/>
-                  </a:lnTo>
-                  <a:lnTo>
-                    <a:pt x="5539349" y="2387816"/>
-                  </a:lnTo>
-                  <a:lnTo>
-                    <a:pt x="5613109" y="2388496"/>
-                  </a:lnTo>
-                  <a:lnTo>
-                    <a:pt x="5686869" y="2389174"/>
-                  </a:lnTo>
-                  <a:lnTo>
-                    <a:pt x="5760629" y="2389852"/>
-                  </a:lnTo>
-                  <a:lnTo>
-                    <a:pt x="5834389" y="2390530"/>
-                  </a:lnTo>
-                  <a:lnTo>
-                    <a:pt x="5908149" y="2391207"/>
-                  </a:lnTo>
-                  <a:lnTo>
-                    <a:pt x="5981909" y="2391884"/>
-                  </a:lnTo>
-                  <a:lnTo>
-                    <a:pt x="6055669" y="2392560"/>
-                  </a:lnTo>
-                  <a:lnTo>
-                    <a:pt x="6129429" y="2393235"/>
-                  </a:lnTo>
-                  <a:lnTo>
-                    <a:pt x="6203189" y="2393910"/>
-                  </a:lnTo>
-                  <a:lnTo>
-                    <a:pt x="6276949" y="2394584"/>
-                  </a:lnTo>
-                  <a:lnTo>
-                    <a:pt x="6350709" y="2395258"/>
-                  </a:lnTo>
-                  <a:lnTo>
-                    <a:pt x="6424469" y="2395932"/>
-                  </a:lnTo>
-                  <a:lnTo>
-                    <a:pt x="6498229" y="2396604"/>
-                  </a:lnTo>
-                  <a:lnTo>
-                    <a:pt x="6571989" y="2397277"/>
-                  </a:lnTo>
-                  <a:lnTo>
-                    <a:pt x="6645749" y="2397948"/>
-                  </a:lnTo>
-                  <a:lnTo>
-                    <a:pt x="6719509" y="2398619"/>
-                  </a:lnTo>
-                  <a:lnTo>
-                    <a:pt x="6793269" y="2399290"/>
-                  </a:lnTo>
-                  <a:lnTo>
-                    <a:pt x="6867029" y="2399960"/>
-                  </a:lnTo>
-                  <a:lnTo>
-                    <a:pt x="6940789" y="2400630"/>
-                  </a:lnTo>
-                  <a:lnTo>
-                    <a:pt x="7014550" y="2401299"/>
-                  </a:lnTo>
-                  <a:lnTo>
-                    <a:pt x="7088310" y="2401967"/>
-                  </a:lnTo>
-                  <a:lnTo>
-                    <a:pt x="7162070" y="2402635"/>
-                  </a:lnTo>
-                  <a:lnTo>
-                    <a:pt x="7235830" y="2403302"/>
-                  </a:lnTo>
-                  <a:lnTo>
-                    <a:pt x="7235830" y="3032242"/>
-                  </a:lnTo>
-                  <a:lnTo>
-                    <a:pt x="7162070" y="3026378"/>
-                  </a:lnTo>
-                  <a:lnTo>
-                    <a:pt x="7088310" y="3020348"/>
-                  </a:lnTo>
-                  <a:lnTo>
-                    <a:pt x="7014550" y="3014146"/>
-                  </a:lnTo>
-                  <a:lnTo>
-                    <a:pt x="6940789" y="3007767"/>
-                  </a:lnTo>
-                  <a:lnTo>
-                    <a:pt x="6867029" y="3001207"/>
-                  </a:lnTo>
-                  <a:lnTo>
-                    <a:pt x="6793269" y="2994459"/>
-                  </a:lnTo>
-                  <a:lnTo>
-                    <a:pt x="6719509" y="2987520"/>
-                  </a:lnTo>
-                  <a:lnTo>
-                    <a:pt x="6645749" y="2980382"/>
-                  </a:lnTo>
-                  <a:lnTo>
-                    <a:pt x="6571989" y="2973042"/>
-                  </a:lnTo>
-                  <a:lnTo>
-                    <a:pt x="6498229" y="2965492"/>
-                  </a:lnTo>
-                  <a:lnTo>
-                    <a:pt x="6424469" y="2957727"/>
-                  </a:lnTo>
-                  <a:lnTo>
-                    <a:pt x="6350709" y="2949741"/>
-                  </a:lnTo>
-                  <a:lnTo>
-                    <a:pt x="6276949" y="2941527"/>
-                  </a:lnTo>
-                  <a:lnTo>
-                    <a:pt x="6203189" y="2933079"/>
-                  </a:lnTo>
-                  <a:lnTo>
-                    <a:pt x="6129429" y="2924391"/>
-                  </a:lnTo>
-                  <a:lnTo>
-                    <a:pt x="6055669" y="2915455"/>
-                  </a:lnTo>
-                  <a:lnTo>
-                    <a:pt x="5981909" y="2906265"/>
-                  </a:lnTo>
-                  <a:lnTo>
-                    <a:pt x="5908149" y="2896812"/>
-                  </a:lnTo>
-                  <a:lnTo>
-                    <a:pt x="5834389" y="2887091"/>
-                  </a:lnTo>
-                  <a:lnTo>
-                    <a:pt x="5760629" y="2877092"/>
-                  </a:lnTo>
-                  <a:lnTo>
-                    <a:pt x="5686869" y="2866809"/>
-                  </a:lnTo>
-                  <a:lnTo>
-                    <a:pt x="5613109" y="2856232"/>
-                  </a:lnTo>
-                  <a:lnTo>
-                    <a:pt x="5539349" y="2845354"/>
-                  </a:lnTo>
-                  <a:lnTo>
-                    <a:pt x="5465589" y="2834167"/>
-                  </a:lnTo>
-                  <a:lnTo>
-                    <a:pt x="5391829" y="2822660"/>
-                  </a:lnTo>
-                  <a:lnTo>
-                    <a:pt x="5318069" y="2810826"/>
-                  </a:lnTo>
-                  <a:lnTo>
-                    <a:pt x="5244309" y="2798655"/>
-                  </a:lnTo>
-                  <a:lnTo>
-                    <a:pt x="5170549" y="2786137"/>
-                  </a:lnTo>
-                  <a:lnTo>
-                    <a:pt x="5096789" y="2773262"/>
-                  </a:lnTo>
-                  <a:lnTo>
-                    <a:pt x="5023029" y="2760020"/>
-                  </a:lnTo>
-                  <a:lnTo>
-                    <a:pt x="4949269" y="2746402"/>
-                  </a:lnTo>
-                  <a:lnTo>
-                    <a:pt x="4875509" y="2732395"/>
-                  </a:lnTo>
-                  <a:lnTo>
-                    <a:pt x="4801749" y="2717989"/>
-                  </a:lnTo>
-                  <a:lnTo>
-                    <a:pt x="4727989" y="2703173"/>
-                  </a:lnTo>
-                  <a:lnTo>
-                    <a:pt x="4654229" y="2687934"/>
-                  </a:lnTo>
-                  <a:lnTo>
-                    <a:pt x="4580469" y="2672262"/>
-                  </a:lnTo>
-                  <a:lnTo>
-                    <a:pt x="4506709" y="2656143"/>
-                  </a:lnTo>
-                  <a:lnTo>
-                    <a:pt x="4432949" y="2639564"/>
-                  </a:lnTo>
-                  <a:lnTo>
-                    <a:pt x="4359189" y="2622514"/>
-                  </a:lnTo>
-                  <a:lnTo>
-                    <a:pt x="4285429" y="2604977"/>
-                  </a:lnTo>
-                  <a:lnTo>
-                    <a:pt x="4211669" y="2586941"/>
-                  </a:lnTo>
-                  <a:lnTo>
-                    <a:pt x="4137909" y="2568392"/>
-                  </a:lnTo>
-                  <a:lnTo>
-                    <a:pt x="4064149" y="2549313"/>
-                  </a:lnTo>
-                  <a:lnTo>
-                    <a:pt x="3990388" y="2529691"/>
-                  </a:lnTo>
-                  <a:lnTo>
-                    <a:pt x="3916628" y="2509511"/>
-                  </a:lnTo>
-                  <a:lnTo>
-                    <a:pt x="3842868" y="2488755"/>
-                  </a:lnTo>
-                  <a:lnTo>
-                    <a:pt x="3769108" y="2467408"/>
-                  </a:lnTo>
-                  <a:lnTo>
-                    <a:pt x="3695348" y="2445452"/>
-                  </a:lnTo>
-                  <a:lnTo>
-                    <a:pt x="3621588" y="2422871"/>
-                  </a:lnTo>
-                  <a:lnTo>
-                    <a:pt x="3547828" y="2399647"/>
-                  </a:lnTo>
-                  <a:lnTo>
-                    <a:pt x="3474068" y="2375761"/>
-                  </a:lnTo>
-                  <a:lnTo>
-                    <a:pt x="3400308" y="2367880"/>
-                  </a:lnTo>
-                  <a:lnTo>
-                    <a:pt x="3326548" y="2367185"/>
-                  </a:lnTo>
-                  <a:lnTo>
-                    <a:pt x="3252788" y="2366488"/>
-                  </a:lnTo>
-                  <a:lnTo>
-                    <a:pt x="3179028" y="2365791"/>
-                  </a:lnTo>
-                  <a:lnTo>
-                    <a:pt x="3105268" y="2365094"/>
-                  </a:lnTo>
-                  <a:lnTo>
-                    <a:pt x="3031508" y="2364396"/>
-                  </a:lnTo>
-                  <a:lnTo>
-                    <a:pt x="2957748" y="2363698"/>
-                  </a:lnTo>
-                  <a:lnTo>
-                    <a:pt x="2883988" y="2362998"/>
-                  </a:lnTo>
-                  <a:lnTo>
-                    <a:pt x="2810228" y="2362299"/>
-                  </a:lnTo>
-                  <a:lnTo>
-                    <a:pt x="2736468" y="2361599"/>
-                  </a:lnTo>
-                  <a:lnTo>
-                    <a:pt x="2662708" y="2360898"/>
-                  </a:lnTo>
-                  <a:lnTo>
-                    <a:pt x="2588948" y="2360197"/>
-                  </a:lnTo>
-                  <a:lnTo>
-                    <a:pt x="2515188" y="2359495"/>
-                  </a:lnTo>
-                  <a:lnTo>
-                    <a:pt x="2441428" y="2358792"/>
-                  </a:lnTo>
-                  <a:lnTo>
-                    <a:pt x="2367668" y="2358089"/>
-                  </a:lnTo>
-                  <a:lnTo>
-                    <a:pt x="2293908" y="2357386"/>
-                  </a:lnTo>
-                  <a:lnTo>
-                    <a:pt x="2220148" y="2356682"/>
-                  </a:lnTo>
-                  <a:lnTo>
-                    <a:pt x="2146388" y="2355977"/>
-                  </a:lnTo>
-                  <a:lnTo>
-                    <a:pt x="2072628" y="2355272"/>
-                  </a:lnTo>
-                  <a:lnTo>
-                    <a:pt x="1998868" y="2354566"/>
-                  </a:lnTo>
-                  <a:lnTo>
-                    <a:pt x="1925108" y="2353860"/>
-                  </a:lnTo>
-                  <a:lnTo>
-                    <a:pt x="1851348" y="2353153"/>
-                  </a:lnTo>
-                  <a:lnTo>
-                    <a:pt x="1777588" y="2352445"/>
-                  </a:lnTo>
-                  <a:lnTo>
-                    <a:pt x="1703828" y="2351737"/>
-                  </a:lnTo>
-                  <a:lnTo>
-                    <a:pt x="1630068" y="2351028"/>
-                  </a:lnTo>
-                  <a:lnTo>
-                    <a:pt x="1556308" y="2350319"/>
-                  </a:lnTo>
-                  <a:lnTo>
-                    <a:pt x="1482548" y="2349609"/>
-                  </a:lnTo>
-                  <a:lnTo>
-                    <a:pt x="1408788" y="2348899"/>
-                  </a:lnTo>
-                  <a:lnTo>
-                    <a:pt x="1335028" y="2348188"/>
-                  </a:lnTo>
-                  <a:lnTo>
-                    <a:pt x="1261268" y="2347477"/>
-                  </a:lnTo>
-                  <a:lnTo>
-                    <a:pt x="1187508" y="2346765"/>
-                  </a:lnTo>
-                  <a:lnTo>
-                    <a:pt x="1113747" y="2346052"/>
-                  </a:lnTo>
-                  <a:lnTo>
-                    <a:pt x="1039987" y="2345339"/>
-                  </a:lnTo>
-                  <a:lnTo>
-                    <a:pt x="966227" y="2344625"/>
-                  </a:lnTo>
-                  <a:lnTo>
-                    <a:pt x="892467" y="2343911"/>
-                  </a:lnTo>
-                  <a:lnTo>
-                    <a:pt x="818707" y="2343196"/>
-                  </a:lnTo>
-                  <a:lnTo>
-                    <a:pt x="744947" y="2342480"/>
-                  </a:lnTo>
-                  <a:lnTo>
-                    <a:pt x="671187" y="2341764"/>
-                  </a:lnTo>
-                  <a:lnTo>
-                    <a:pt x="597427" y="2341048"/>
-                  </a:lnTo>
-                  <a:lnTo>
-                    <a:pt x="523667" y="2340331"/>
-                  </a:lnTo>
-                  <a:lnTo>
-                    <a:pt x="449907" y="2339613"/>
-                  </a:lnTo>
-                  <a:lnTo>
-                    <a:pt x="376147" y="2338895"/>
-                  </a:lnTo>
-                  <a:lnTo>
-                    <a:pt x="302387" y="2338176"/>
-                  </a:lnTo>
-                  <a:lnTo>
-                    <a:pt x="228627" y="2337456"/>
-                  </a:lnTo>
-                  <a:lnTo>
-                    <a:pt x="154867" y="2336736"/>
-                  </a:lnTo>
-                  <a:lnTo>
-                    <a:pt x="81107" y="2336015"/>
-                  </a:lnTo>
-                  <a:lnTo>
-                    <a:pt x="7347" y="2335294"/>
-                  </a:lnTo>
-                  <a:lnTo>
-                    <a:pt x="0" y="2335222"/>
+                    <a:pt x="7347" y="8739"/>
+                  </a:lnTo>
+                  <a:lnTo>
+                    <a:pt x="81107" y="94046"/>
+                  </a:lnTo>
+                  <a:lnTo>
+                    <a:pt x="154867" y="176990"/>
+                  </a:lnTo>
+                  <a:lnTo>
+                    <a:pt x="228627" y="257636"/>
+                  </a:lnTo>
+                  <a:lnTo>
+                    <a:pt x="302387" y="336048"/>
+                  </a:lnTo>
+                  <a:lnTo>
+                    <a:pt x="376147" y="412288"/>
+                  </a:lnTo>
+                  <a:lnTo>
+                    <a:pt x="449907" y="486416"/>
+                  </a:lnTo>
+                  <a:lnTo>
+                    <a:pt x="523667" y="558491"/>
+                  </a:lnTo>
+                  <a:lnTo>
+                    <a:pt x="597427" y="628569"/>
+                  </a:lnTo>
+                  <a:lnTo>
+                    <a:pt x="671187" y="696706"/>
+                  </a:lnTo>
+                  <a:lnTo>
+                    <a:pt x="744947" y="762955"/>
+                  </a:lnTo>
+                  <a:lnTo>
+                    <a:pt x="818707" y="827370"/>
+                  </a:lnTo>
+                  <a:lnTo>
+                    <a:pt x="892467" y="890000"/>
+                  </a:lnTo>
+                  <a:lnTo>
+                    <a:pt x="966227" y="950895"/>
+                  </a:lnTo>
+                  <a:lnTo>
+                    <a:pt x="1039987" y="1010103"/>
+                  </a:lnTo>
+                  <a:lnTo>
+                    <a:pt x="1113747" y="1067671"/>
+                  </a:lnTo>
+                  <a:lnTo>
+                    <a:pt x="1187508" y="1123645"/>
+                  </a:lnTo>
+                  <a:lnTo>
+                    <a:pt x="1261268" y="1178068"/>
+                  </a:lnTo>
+                  <a:lnTo>
+                    <a:pt x="1335028" y="1230983"/>
+                  </a:lnTo>
+                  <a:lnTo>
+                    <a:pt x="1408788" y="1282433"/>
+                  </a:lnTo>
+                  <a:lnTo>
+                    <a:pt x="1482548" y="1332457"/>
+                  </a:lnTo>
+                  <a:lnTo>
+                    <a:pt x="1556308" y="1381096"/>
+                  </a:lnTo>
+                  <a:lnTo>
+                    <a:pt x="1630068" y="1428387"/>
+                  </a:lnTo>
+                  <a:lnTo>
+                    <a:pt x="1703828" y="1474368"/>
+                  </a:lnTo>
+                  <a:lnTo>
+                    <a:pt x="1777588" y="1519076"/>
+                  </a:lnTo>
+                  <a:lnTo>
+                    <a:pt x="1851348" y="1562545"/>
+                  </a:lnTo>
+                  <a:lnTo>
+                    <a:pt x="1925108" y="1604810"/>
+                  </a:lnTo>
+                  <a:lnTo>
+                    <a:pt x="1998868" y="1645905"/>
+                  </a:lnTo>
+                  <a:lnTo>
+                    <a:pt x="2072628" y="1685861"/>
+                  </a:lnTo>
+                  <a:lnTo>
+                    <a:pt x="2146388" y="1724710"/>
+                  </a:lnTo>
+                  <a:lnTo>
+                    <a:pt x="2220148" y="1762483"/>
+                  </a:lnTo>
+                  <a:lnTo>
+                    <a:pt x="2293908" y="1799209"/>
+                  </a:lnTo>
+                  <a:lnTo>
+                    <a:pt x="2367668" y="1834919"/>
+                  </a:lnTo>
+                  <a:lnTo>
+                    <a:pt x="2441428" y="1869639"/>
+                  </a:lnTo>
+                  <a:lnTo>
+                    <a:pt x="2515188" y="1903397"/>
+                  </a:lnTo>
+                  <a:lnTo>
+                    <a:pt x="2588948" y="1936220"/>
+                  </a:lnTo>
+                  <a:lnTo>
+                    <a:pt x="2662708" y="1968134"/>
+                  </a:lnTo>
+                  <a:lnTo>
+                    <a:pt x="2736468" y="1999164"/>
+                  </a:lnTo>
+                  <a:lnTo>
+                    <a:pt x="2810228" y="2029334"/>
+                  </a:lnTo>
+                  <a:lnTo>
+                    <a:pt x="2883988" y="2058669"/>
+                  </a:lnTo>
+                  <a:lnTo>
+                    <a:pt x="2957748" y="2087191"/>
+                  </a:lnTo>
+                  <a:lnTo>
+                    <a:pt x="3031508" y="2114923"/>
+                  </a:lnTo>
+                  <a:lnTo>
+                    <a:pt x="3105268" y="2141887"/>
+                  </a:lnTo>
+                  <a:lnTo>
+                    <a:pt x="3179028" y="2168104"/>
+                  </a:lnTo>
+                  <a:lnTo>
+                    <a:pt x="3252788" y="2193594"/>
+                  </a:lnTo>
+                  <a:lnTo>
+                    <a:pt x="3326548" y="2218379"/>
+                  </a:lnTo>
+                  <a:lnTo>
+                    <a:pt x="3400308" y="2242477"/>
+                  </a:lnTo>
+                  <a:lnTo>
+                    <a:pt x="3474068" y="2259053"/>
+                  </a:lnTo>
+                  <a:lnTo>
+                    <a:pt x="3547828" y="2259716"/>
+                  </a:lnTo>
+                  <a:lnTo>
+                    <a:pt x="3621588" y="2260378"/>
+                  </a:lnTo>
+                  <a:lnTo>
+                    <a:pt x="3695348" y="2261039"/>
+                  </a:lnTo>
+                  <a:lnTo>
+                    <a:pt x="3769108" y="2261700"/>
+                  </a:lnTo>
+                  <a:lnTo>
+                    <a:pt x="3842868" y="2262361"/>
+                  </a:lnTo>
+                  <a:lnTo>
+                    <a:pt x="3916628" y="2263020"/>
+                  </a:lnTo>
+                  <a:lnTo>
+                    <a:pt x="3990388" y="2263680"/>
+                  </a:lnTo>
+                  <a:lnTo>
+                    <a:pt x="4064149" y="2264339"/>
+                  </a:lnTo>
+                  <a:lnTo>
+                    <a:pt x="4137909" y="2264997"/>
+                  </a:lnTo>
+                  <a:lnTo>
+                    <a:pt x="4211669" y="2265655"/>
+                  </a:lnTo>
+                  <a:lnTo>
+                    <a:pt x="4285429" y="2266312"/>
+                  </a:lnTo>
+                  <a:lnTo>
+                    <a:pt x="4359189" y="2266968"/>
+                  </a:lnTo>
+                  <a:lnTo>
+                    <a:pt x="4432949" y="2267625"/>
+                  </a:lnTo>
+                  <a:lnTo>
+                    <a:pt x="4506709" y="2268280"/>
+                  </a:lnTo>
+                  <a:lnTo>
+                    <a:pt x="4580469" y="2268935"/>
+                  </a:lnTo>
+                  <a:lnTo>
+                    <a:pt x="4654229" y="2269590"/>
+                  </a:lnTo>
+                  <a:lnTo>
+                    <a:pt x="4727989" y="2270244"/>
+                  </a:lnTo>
+                  <a:lnTo>
+                    <a:pt x="4801749" y="2270898"/>
+                  </a:lnTo>
+                  <a:lnTo>
+                    <a:pt x="4875509" y="2271551"/>
+                  </a:lnTo>
+                  <a:lnTo>
+                    <a:pt x="4949269" y="2272203"/>
+                  </a:lnTo>
+                  <a:lnTo>
+                    <a:pt x="5023029" y="2272855"/>
+                  </a:lnTo>
+                  <a:lnTo>
+                    <a:pt x="5096789" y="2273507"/>
+                  </a:lnTo>
+                  <a:lnTo>
+                    <a:pt x="5170549" y="2274158"/>
+                  </a:lnTo>
+                  <a:lnTo>
+                    <a:pt x="5244309" y="2274808"/>
+                  </a:lnTo>
+                  <a:lnTo>
+                    <a:pt x="5318069" y="2275458"/>
+                  </a:lnTo>
+                  <a:lnTo>
+                    <a:pt x="5391829" y="2276107"/>
+                  </a:lnTo>
+                  <a:lnTo>
+                    <a:pt x="5465589" y="2276756"/>
+                  </a:lnTo>
+                  <a:lnTo>
+                    <a:pt x="5539349" y="2277405"/>
+                  </a:lnTo>
+                  <a:lnTo>
+                    <a:pt x="5613109" y="2278052"/>
+                  </a:lnTo>
+                  <a:lnTo>
+                    <a:pt x="5686869" y="2278700"/>
+                  </a:lnTo>
+                  <a:lnTo>
+                    <a:pt x="5760629" y="2279347"/>
+                  </a:lnTo>
+                  <a:lnTo>
+                    <a:pt x="5834389" y="2279993"/>
+                  </a:lnTo>
+                  <a:lnTo>
+                    <a:pt x="5908149" y="2280639"/>
+                  </a:lnTo>
+                  <a:lnTo>
+                    <a:pt x="5981909" y="2281284"/>
+                  </a:lnTo>
+                  <a:lnTo>
+                    <a:pt x="6055669" y="2281929"/>
+                  </a:lnTo>
+                  <a:lnTo>
+                    <a:pt x="6129429" y="2282573"/>
+                  </a:lnTo>
+                  <a:lnTo>
+                    <a:pt x="6203189" y="2283217"/>
+                  </a:lnTo>
+                  <a:lnTo>
+                    <a:pt x="6276949" y="2283860"/>
+                  </a:lnTo>
+                  <a:lnTo>
+                    <a:pt x="6350709" y="2284502"/>
+                  </a:lnTo>
+                  <a:lnTo>
+                    <a:pt x="6424469" y="2285145"/>
+                  </a:lnTo>
+                  <a:lnTo>
+                    <a:pt x="6498229" y="2285786"/>
+                  </a:lnTo>
+                  <a:lnTo>
+                    <a:pt x="6571989" y="2286427"/>
+                  </a:lnTo>
+                  <a:lnTo>
+                    <a:pt x="6645749" y="2287068"/>
+                  </a:lnTo>
+                  <a:lnTo>
+                    <a:pt x="6719509" y="2287708"/>
+                  </a:lnTo>
+                  <a:lnTo>
+                    <a:pt x="6793269" y="2288348"/>
+                  </a:lnTo>
+                  <a:lnTo>
+                    <a:pt x="6867029" y="2288987"/>
+                  </a:lnTo>
+                  <a:lnTo>
+                    <a:pt x="6940789" y="2289625"/>
+                  </a:lnTo>
+                  <a:lnTo>
+                    <a:pt x="7014550" y="2290263"/>
+                  </a:lnTo>
+                  <a:lnTo>
+                    <a:pt x="7088310" y="2290901"/>
+                  </a:lnTo>
+                  <a:lnTo>
+                    <a:pt x="7162070" y="2291538"/>
+                  </a:lnTo>
+                  <a:lnTo>
+                    <a:pt x="7235830" y="2292175"/>
+                  </a:lnTo>
+                  <a:lnTo>
+                    <a:pt x="7235830" y="2892032"/>
+                  </a:lnTo>
+                  <a:lnTo>
+                    <a:pt x="7162070" y="2886440"/>
+                  </a:lnTo>
+                  <a:lnTo>
+                    <a:pt x="7088310" y="2880688"/>
+                  </a:lnTo>
+                  <a:lnTo>
+                    <a:pt x="7014550" y="2874773"/>
+                  </a:lnTo>
+                  <a:lnTo>
+                    <a:pt x="6940789" y="2868689"/>
+                  </a:lnTo>
+                  <a:lnTo>
+                    <a:pt x="6867029" y="2862432"/>
+                  </a:lnTo>
+                  <a:lnTo>
+                    <a:pt x="6793269" y="2855997"/>
+                  </a:lnTo>
+                  <a:lnTo>
+                    <a:pt x="6719509" y="2849378"/>
+                  </a:lnTo>
+                  <a:lnTo>
+                    <a:pt x="6645749" y="2842571"/>
+                  </a:lnTo>
+                  <a:lnTo>
+                    <a:pt x="6571989" y="2835569"/>
+                  </a:lnTo>
+                  <a:lnTo>
+                    <a:pt x="6498229" y="2828369"/>
+                  </a:lnTo>
+                  <a:lnTo>
+                    <a:pt x="6424469" y="2820963"/>
+                  </a:lnTo>
+                  <a:lnTo>
+                    <a:pt x="6350709" y="2813346"/>
+                  </a:lnTo>
+                  <a:lnTo>
+                    <a:pt x="6276949" y="2805512"/>
+                  </a:lnTo>
+                  <a:lnTo>
+                    <a:pt x="6203189" y="2797455"/>
+                  </a:lnTo>
+                  <a:lnTo>
+                    <a:pt x="6129429" y="2789168"/>
+                  </a:lnTo>
+                  <a:lnTo>
+                    <a:pt x="6055669" y="2780645"/>
+                  </a:lnTo>
+                  <a:lnTo>
+                    <a:pt x="5981909" y="2771880"/>
+                  </a:lnTo>
+                  <a:lnTo>
+                    <a:pt x="5908149" y="2762865"/>
+                  </a:lnTo>
+                  <a:lnTo>
+                    <a:pt x="5834389" y="2753593"/>
+                  </a:lnTo>
+                  <a:lnTo>
+                    <a:pt x="5760629" y="2744056"/>
+                  </a:lnTo>
+                  <a:lnTo>
+                    <a:pt x="5686869" y="2734248"/>
+                  </a:lnTo>
+                  <a:lnTo>
+                    <a:pt x="5613109" y="2724161"/>
+                  </a:lnTo>
+                  <a:lnTo>
+                    <a:pt x="5539349" y="2713786"/>
+                  </a:lnTo>
+                  <a:lnTo>
+                    <a:pt x="5465589" y="2703116"/>
+                  </a:lnTo>
+                  <a:lnTo>
+                    <a:pt x="5391829" y="2692142"/>
+                  </a:lnTo>
+                  <a:lnTo>
+                    <a:pt x="5318069" y="2680855"/>
+                  </a:lnTo>
+                  <a:lnTo>
+                    <a:pt x="5244309" y="2669246"/>
+                  </a:lnTo>
+                  <a:lnTo>
+                    <a:pt x="5170549" y="2657307"/>
+                  </a:lnTo>
+                  <a:lnTo>
+                    <a:pt x="5096789" y="2645027"/>
+                  </a:lnTo>
+                  <a:lnTo>
+                    <a:pt x="5023029" y="2632398"/>
+                  </a:lnTo>
+                  <a:lnTo>
+                    <a:pt x="4949269" y="2619409"/>
+                  </a:lnTo>
+                  <a:lnTo>
+                    <a:pt x="4875509" y="2606050"/>
+                  </a:lnTo>
+                  <a:lnTo>
+                    <a:pt x="4801749" y="2592310"/>
+                  </a:lnTo>
+                  <a:lnTo>
+                    <a:pt x="4727989" y="2578179"/>
+                  </a:lnTo>
+                  <a:lnTo>
+                    <a:pt x="4654229" y="2563645"/>
+                  </a:lnTo>
+                  <a:lnTo>
+                    <a:pt x="4580469" y="2548697"/>
+                  </a:lnTo>
+                  <a:lnTo>
+                    <a:pt x="4506709" y="2533324"/>
+                  </a:lnTo>
+                  <a:lnTo>
+                    <a:pt x="4432949" y="2517512"/>
+                  </a:lnTo>
+                  <a:lnTo>
+                    <a:pt x="4359189" y="2501250"/>
+                  </a:lnTo>
+                  <a:lnTo>
+                    <a:pt x="4285429" y="2484524"/>
+                  </a:lnTo>
+                  <a:lnTo>
+                    <a:pt x="4211669" y="2467322"/>
+                  </a:lnTo>
+                  <a:lnTo>
+                    <a:pt x="4137909" y="2449630"/>
+                  </a:lnTo>
+                  <a:lnTo>
+                    <a:pt x="4064149" y="2431434"/>
+                  </a:lnTo>
+                  <a:lnTo>
+                    <a:pt x="3990388" y="2412719"/>
+                  </a:lnTo>
+                  <a:lnTo>
+                    <a:pt x="3916628" y="2393472"/>
+                  </a:lnTo>
+                  <a:lnTo>
+                    <a:pt x="3842868" y="2373676"/>
+                  </a:lnTo>
+                  <a:lnTo>
+                    <a:pt x="3769108" y="2353316"/>
+                  </a:lnTo>
+                  <a:lnTo>
+                    <a:pt x="3695348" y="2332375"/>
+                  </a:lnTo>
+                  <a:lnTo>
+                    <a:pt x="3621588" y="2310839"/>
+                  </a:lnTo>
+                  <a:lnTo>
+                    <a:pt x="3547828" y="2288688"/>
+                  </a:lnTo>
+                  <a:lnTo>
+                    <a:pt x="3474068" y="2265907"/>
+                  </a:lnTo>
+                  <a:lnTo>
+                    <a:pt x="3400308" y="2258390"/>
+                  </a:lnTo>
+                  <a:lnTo>
+                    <a:pt x="3326548" y="2257727"/>
+                  </a:lnTo>
+                  <a:lnTo>
+                    <a:pt x="3252788" y="2257063"/>
+                  </a:lnTo>
+                  <a:lnTo>
+                    <a:pt x="3179028" y="2256398"/>
+                  </a:lnTo>
+                  <a:lnTo>
+                    <a:pt x="3105268" y="2255733"/>
+                  </a:lnTo>
+                  <a:lnTo>
+                    <a:pt x="3031508" y="2255067"/>
+                  </a:lnTo>
+                  <a:lnTo>
+                    <a:pt x="2957748" y="2254401"/>
+                  </a:lnTo>
+                  <a:lnTo>
+                    <a:pt x="2883988" y="2253734"/>
+                  </a:lnTo>
+                  <a:lnTo>
+                    <a:pt x="2810228" y="2253067"/>
+                  </a:lnTo>
+                  <a:lnTo>
+                    <a:pt x="2736468" y="2252399"/>
+                  </a:lnTo>
+                  <a:lnTo>
+                    <a:pt x="2662708" y="2251731"/>
+                  </a:lnTo>
+                  <a:lnTo>
+                    <a:pt x="2588948" y="2251062"/>
+                  </a:lnTo>
+                  <a:lnTo>
+                    <a:pt x="2515188" y="2250393"/>
+                  </a:lnTo>
+                  <a:lnTo>
+                    <a:pt x="2441428" y="2249723"/>
+                  </a:lnTo>
+                  <a:lnTo>
+                    <a:pt x="2367668" y="2249052"/>
+                  </a:lnTo>
+                  <a:lnTo>
+                    <a:pt x="2293908" y="2248381"/>
+                  </a:lnTo>
+                  <a:lnTo>
+                    <a:pt x="2220148" y="2247710"/>
+                  </a:lnTo>
+                  <a:lnTo>
+                    <a:pt x="2146388" y="2247037"/>
+                  </a:lnTo>
+                  <a:lnTo>
+                    <a:pt x="2072628" y="2246365"/>
+                  </a:lnTo>
+                  <a:lnTo>
+                    <a:pt x="1998868" y="2245692"/>
+                  </a:lnTo>
+                  <a:lnTo>
+                    <a:pt x="1925108" y="2245018"/>
+                  </a:lnTo>
+                  <a:lnTo>
+                    <a:pt x="1851348" y="2244344"/>
+                  </a:lnTo>
+                  <a:lnTo>
+                    <a:pt x="1777588" y="2243669"/>
+                  </a:lnTo>
+                  <a:lnTo>
+                    <a:pt x="1703828" y="2242994"/>
+                  </a:lnTo>
+                  <a:lnTo>
+                    <a:pt x="1630068" y="2242318"/>
+                  </a:lnTo>
+                  <a:lnTo>
+                    <a:pt x="1556308" y="2241641"/>
+                  </a:lnTo>
+                  <a:lnTo>
+                    <a:pt x="1482548" y="2240964"/>
+                  </a:lnTo>
+                  <a:lnTo>
+                    <a:pt x="1408788" y="2240287"/>
+                  </a:lnTo>
+                  <a:lnTo>
+                    <a:pt x="1335028" y="2239609"/>
+                  </a:lnTo>
+                  <a:lnTo>
+                    <a:pt x="1261268" y="2238930"/>
+                  </a:lnTo>
+                  <a:lnTo>
+                    <a:pt x="1187508" y="2238251"/>
+                  </a:lnTo>
+                  <a:lnTo>
+                    <a:pt x="1113747" y="2237571"/>
+                  </a:lnTo>
+                  <a:lnTo>
+                    <a:pt x="1039987" y="2236891"/>
+                  </a:lnTo>
+                  <a:lnTo>
+                    <a:pt x="966227" y="2236210"/>
+                  </a:lnTo>
+                  <a:lnTo>
+                    <a:pt x="892467" y="2235529"/>
+                  </a:lnTo>
+                  <a:lnTo>
+                    <a:pt x="818707" y="2234847"/>
+                  </a:lnTo>
+                  <a:lnTo>
+                    <a:pt x="744947" y="2234165"/>
+                  </a:lnTo>
+                  <a:lnTo>
+                    <a:pt x="671187" y="2233482"/>
+                  </a:lnTo>
+                  <a:lnTo>
+                    <a:pt x="597427" y="2232799"/>
+                  </a:lnTo>
+                  <a:lnTo>
+                    <a:pt x="523667" y="2232115"/>
+                  </a:lnTo>
+                  <a:lnTo>
+                    <a:pt x="449907" y="2231430"/>
+                  </a:lnTo>
+                  <a:lnTo>
+                    <a:pt x="376147" y="2230745"/>
+                  </a:lnTo>
+                  <a:lnTo>
+                    <a:pt x="302387" y="2230059"/>
+                  </a:lnTo>
+                  <a:lnTo>
+                    <a:pt x="228627" y="2229373"/>
+                  </a:lnTo>
+                  <a:lnTo>
+                    <a:pt x="154867" y="2228686"/>
+                  </a:lnTo>
+                  <a:lnTo>
+                    <a:pt x="81107" y="2227999"/>
+                  </a:lnTo>
+                  <a:lnTo>
+                    <a:pt x="7347" y="2227311"/>
+                  </a:lnTo>
+                  <a:lnTo>
+                    <a:pt x="0" y="2227243"/>
                   </a:lnTo>
                   <a:close/>
                 </a:path>
@@ -3633,312 +3633,312 @@
           </p:nvSpPr>
           <p:spPr>
             <a:xfrm>
-              <a:off x="817517" y="2311165"/>
-              <a:ext cx="7235830" cy="2403302"/>
+              <a:off x="817517" y="2468934"/>
+              <a:ext cx="7235830" cy="2292175"/>
             </a:xfrm>
             <a:custGeom>
               <a:avLst/>
               <a:pathLst>
-                <a:path w="7235830" h="2403302">
+                <a:path w="7235830" h="2292175">
                   <a:moveTo>
                     <a:pt x="0" y="0"/>
                   </a:moveTo>
                   <a:lnTo>
-                    <a:pt x="7347" y="9163"/>
-                  </a:lnTo>
-                  <a:lnTo>
-                    <a:pt x="81107" y="98606"/>
-                  </a:lnTo>
-                  <a:lnTo>
-                    <a:pt x="154867" y="185571"/>
-                  </a:lnTo>
-                  <a:lnTo>
-                    <a:pt x="228627" y="270126"/>
-                  </a:lnTo>
-                  <a:lnTo>
-                    <a:pt x="302387" y="352340"/>
-                  </a:lnTo>
-                  <a:lnTo>
-                    <a:pt x="376147" y="432276"/>
-                  </a:lnTo>
-                  <a:lnTo>
-                    <a:pt x="449907" y="509998"/>
-                  </a:lnTo>
-                  <a:lnTo>
-                    <a:pt x="523667" y="585567"/>
-                  </a:lnTo>
-                  <a:lnTo>
-                    <a:pt x="597427" y="659043"/>
-                  </a:lnTo>
-                  <a:lnTo>
-                    <a:pt x="671187" y="730483"/>
-                  </a:lnTo>
-                  <a:lnTo>
-                    <a:pt x="744947" y="799945"/>
-                  </a:lnTo>
-                  <a:lnTo>
-                    <a:pt x="818707" y="867482"/>
-                  </a:lnTo>
-                  <a:lnTo>
-                    <a:pt x="892467" y="933148"/>
-                  </a:lnTo>
-                  <a:lnTo>
-                    <a:pt x="966227" y="996996"/>
-                  </a:lnTo>
-                  <a:lnTo>
-                    <a:pt x="1039987" y="1059074"/>
-                  </a:lnTo>
-                  <a:lnTo>
-                    <a:pt x="1113747" y="1119433"/>
-                  </a:lnTo>
-                  <a:lnTo>
-                    <a:pt x="1187508" y="1178121"/>
-                  </a:lnTo>
-                  <a:lnTo>
-                    <a:pt x="1261268" y="1235182"/>
-                  </a:lnTo>
-                  <a:lnTo>
-                    <a:pt x="1335028" y="1290663"/>
-                  </a:lnTo>
-                  <a:lnTo>
-                    <a:pt x="1408788" y="1344607"/>
-                  </a:lnTo>
-                  <a:lnTo>
-                    <a:pt x="1482548" y="1397056"/>
-                  </a:lnTo>
-                  <a:lnTo>
-                    <a:pt x="1556308" y="1448053"/>
-                  </a:lnTo>
-                  <a:lnTo>
-                    <a:pt x="1630068" y="1497637"/>
-                  </a:lnTo>
-                  <a:lnTo>
-                    <a:pt x="1703828" y="1545848"/>
-                  </a:lnTo>
-                  <a:lnTo>
-                    <a:pt x="1777588" y="1592723"/>
-                  </a:lnTo>
-                  <a:lnTo>
-                    <a:pt x="1851348" y="1638300"/>
-                  </a:lnTo>
-                  <a:lnTo>
-                    <a:pt x="1925108" y="1682614"/>
-                  </a:lnTo>
-                  <a:lnTo>
-                    <a:pt x="1998868" y="1725700"/>
-                  </a:lnTo>
-                  <a:lnTo>
-                    <a:pt x="2072628" y="1767593"/>
-                  </a:lnTo>
-                  <a:lnTo>
-                    <a:pt x="2146388" y="1808326"/>
-                  </a:lnTo>
-                  <a:lnTo>
-                    <a:pt x="2220148" y="1847930"/>
-                  </a:lnTo>
-                  <a:lnTo>
-                    <a:pt x="2293908" y="1886437"/>
-                  </a:lnTo>
-                  <a:lnTo>
-                    <a:pt x="2367668" y="1923878"/>
-                  </a:lnTo>
-                  <a:lnTo>
-                    <a:pt x="2441428" y="1960281"/>
-                  </a:lnTo>
-                  <a:lnTo>
-                    <a:pt x="2515188" y="1995676"/>
-                  </a:lnTo>
-                  <a:lnTo>
-                    <a:pt x="2588948" y="2030091"/>
-                  </a:lnTo>
-                  <a:lnTo>
-                    <a:pt x="2662708" y="2063552"/>
-                  </a:lnTo>
-                  <a:lnTo>
-                    <a:pt x="2736468" y="2096086"/>
-                  </a:lnTo>
-                  <a:lnTo>
-                    <a:pt x="2810228" y="2127719"/>
-                  </a:lnTo>
-                  <a:lnTo>
-                    <a:pt x="2883988" y="2158476"/>
-                  </a:lnTo>
-                  <a:lnTo>
-                    <a:pt x="2957748" y="2188381"/>
-                  </a:lnTo>
-                  <a:lnTo>
-                    <a:pt x="3031508" y="2217457"/>
-                  </a:lnTo>
-                  <a:lnTo>
-                    <a:pt x="3105268" y="2245728"/>
-                  </a:lnTo>
-                  <a:lnTo>
-                    <a:pt x="3179028" y="2273216"/>
-                  </a:lnTo>
-                  <a:lnTo>
-                    <a:pt x="3252788" y="2299943"/>
-                  </a:lnTo>
-                  <a:lnTo>
-                    <a:pt x="3326548" y="2325929"/>
-                  </a:lnTo>
-                  <a:lnTo>
-                    <a:pt x="3400308" y="2351195"/>
-                  </a:lnTo>
-                  <a:lnTo>
-                    <a:pt x="3474068" y="2368575"/>
-                  </a:lnTo>
-                  <a:lnTo>
-                    <a:pt x="3547828" y="2369270"/>
-                  </a:lnTo>
-                  <a:lnTo>
-                    <a:pt x="3621588" y="2369964"/>
-                  </a:lnTo>
-                  <a:lnTo>
-                    <a:pt x="3695348" y="2370658"/>
-                  </a:lnTo>
-                  <a:lnTo>
-                    <a:pt x="3769108" y="2371351"/>
-                  </a:lnTo>
-                  <a:lnTo>
-                    <a:pt x="3842868" y="2372043"/>
-                  </a:lnTo>
-                  <a:lnTo>
-                    <a:pt x="3916628" y="2372735"/>
-                  </a:lnTo>
-                  <a:lnTo>
-                    <a:pt x="3990388" y="2373426"/>
-                  </a:lnTo>
-                  <a:lnTo>
-                    <a:pt x="4064149" y="2374117"/>
-                  </a:lnTo>
-                  <a:lnTo>
-                    <a:pt x="4137909" y="2374807"/>
-                  </a:lnTo>
-                  <a:lnTo>
-                    <a:pt x="4211669" y="2375497"/>
-                  </a:lnTo>
-                  <a:lnTo>
-                    <a:pt x="4285429" y="2376186"/>
-                  </a:lnTo>
-                  <a:lnTo>
-                    <a:pt x="4359189" y="2376874"/>
-                  </a:lnTo>
-                  <a:lnTo>
-                    <a:pt x="4432949" y="2377562"/>
-                  </a:lnTo>
-                  <a:lnTo>
-                    <a:pt x="4506709" y="2378250"/>
-                  </a:lnTo>
-                  <a:lnTo>
-                    <a:pt x="4580469" y="2378937"/>
-                  </a:lnTo>
-                  <a:lnTo>
-                    <a:pt x="4654229" y="2379623"/>
-                  </a:lnTo>
-                  <a:lnTo>
-                    <a:pt x="4727989" y="2380309"/>
-                  </a:lnTo>
-                  <a:lnTo>
-                    <a:pt x="4801749" y="2380994"/>
-                  </a:lnTo>
-                  <a:lnTo>
-                    <a:pt x="4875509" y="2381679"/>
-                  </a:lnTo>
-                  <a:lnTo>
-                    <a:pt x="4949269" y="2382363"/>
-                  </a:lnTo>
-                  <a:lnTo>
-                    <a:pt x="5023029" y="2383046"/>
-                  </a:lnTo>
-                  <a:lnTo>
-                    <a:pt x="5096789" y="2383729"/>
-                  </a:lnTo>
-                  <a:lnTo>
-                    <a:pt x="5170549" y="2384412"/>
-                  </a:lnTo>
-                  <a:lnTo>
-                    <a:pt x="5244309" y="2385094"/>
-                  </a:lnTo>
-                  <a:lnTo>
-                    <a:pt x="5318069" y="2385775"/>
-                  </a:lnTo>
-                  <a:lnTo>
-                    <a:pt x="5391829" y="2386456"/>
-                  </a:lnTo>
-                  <a:lnTo>
-                    <a:pt x="5465589" y="2387137"/>
-                  </a:lnTo>
-                  <a:lnTo>
-                    <a:pt x="5539349" y="2387816"/>
-                  </a:lnTo>
-                  <a:lnTo>
-                    <a:pt x="5613109" y="2388496"/>
-                  </a:lnTo>
-                  <a:lnTo>
-                    <a:pt x="5686869" y="2389174"/>
-                  </a:lnTo>
-                  <a:lnTo>
-                    <a:pt x="5760629" y="2389852"/>
-                  </a:lnTo>
-                  <a:lnTo>
-                    <a:pt x="5834389" y="2390530"/>
-                  </a:lnTo>
-                  <a:lnTo>
-                    <a:pt x="5908149" y="2391207"/>
-                  </a:lnTo>
-                  <a:lnTo>
-                    <a:pt x="5981909" y="2391884"/>
-                  </a:lnTo>
-                  <a:lnTo>
-                    <a:pt x="6055669" y="2392560"/>
-                  </a:lnTo>
-                  <a:lnTo>
-                    <a:pt x="6129429" y="2393235"/>
-                  </a:lnTo>
-                  <a:lnTo>
-                    <a:pt x="6203189" y="2393910"/>
-                  </a:lnTo>
-                  <a:lnTo>
-                    <a:pt x="6276949" y="2394584"/>
-                  </a:lnTo>
-                  <a:lnTo>
-                    <a:pt x="6350709" y="2395258"/>
-                  </a:lnTo>
-                  <a:lnTo>
-                    <a:pt x="6424469" y="2395932"/>
-                  </a:lnTo>
-                  <a:lnTo>
-                    <a:pt x="6498229" y="2396604"/>
-                  </a:lnTo>
-                  <a:lnTo>
-                    <a:pt x="6571989" y="2397277"/>
-                  </a:lnTo>
-                  <a:lnTo>
-                    <a:pt x="6645749" y="2397948"/>
-                  </a:lnTo>
-                  <a:lnTo>
-                    <a:pt x="6719509" y="2398619"/>
-                  </a:lnTo>
-                  <a:lnTo>
-                    <a:pt x="6793269" y="2399290"/>
-                  </a:lnTo>
-                  <a:lnTo>
-                    <a:pt x="6867029" y="2399960"/>
-                  </a:lnTo>
-                  <a:lnTo>
-                    <a:pt x="6940789" y="2400630"/>
-                  </a:lnTo>
-                  <a:lnTo>
-                    <a:pt x="7014550" y="2401299"/>
-                  </a:lnTo>
-                  <a:lnTo>
-                    <a:pt x="7088310" y="2401967"/>
-                  </a:lnTo>
-                  <a:lnTo>
-                    <a:pt x="7162070" y="2402635"/>
-                  </a:lnTo>
-                  <a:lnTo>
-                    <a:pt x="7235830" y="2403302"/>
+                    <a:pt x="7347" y="8739"/>
+                  </a:lnTo>
+                  <a:lnTo>
+                    <a:pt x="81107" y="94046"/>
+                  </a:lnTo>
+                  <a:lnTo>
+                    <a:pt x="154867" y="176990"/>
+                  </a:lnTo>
+                  <a:lnTo>
+                    <a:pt x="228627" y="257636"/>
+                  </a:lnTo>
+                  <a:lnTo>
+                    <a:pt x="302387" y="336048"/>
+                  </a:lnTo>
+                  <a:lnTo>
+                    <a:pt x="376147" y="412288"/>
+                  </a:lnTo>
+                  <a:lnTo>
+                    <a:pt x="449907" y="486416"/>
+                  </a:lnTo>
+                  <a:lnTo>
+                    <a:pt x="523667" y="558491"/>
+                  </a:lnTo>
+                  <a:lnTo>
+                    <a:pt x="597427" y="628569"/>
+                  </a:lnTo>
+                  <a:lnTo>
+                    <a:pt x="671187" y="696706"/>
+                  </a:lnTo>
+                  <a:lnTo>
+                    <a:pt x="744947" y="762955"/>
+                  </a:lnTo>
+                  <a:lnTo>
+                    <a:pt x="818707" y="827370"/>
+                  </a:lnTo>
+                  <a:lnTo>
+                    <a:pt x="892467" y="890000"/>
+                  </a:lnTo>
+                  <a:lnTo>
+                    <a:pt x="966227" y="950895"/>
+                  </a:lnTo>
+                  <a:lnTo>
+                    <a:pt x="1039987" y="1010103"/>
+                  </a:lnTo>
+                  <a:lnTo>
+                    <a:pt x="1113747" y="1067671"/>
+                  </a:lnTo>
+                  <a:lnTo>
+                    <a:pt x="1187508" y="1123645"/>
+                  </a:lnTo>
+                  <a:lnTo>
+                    <a:pt x="1261268" y="1178068"/>
+                  </a:lnTo>
+                  <a:lnTo>
+                    <a:pt x="1335028" y="1230983"/>
+                  </a:lnTo>
+                  <a:lnTo>
+                    <a:pt x="1408788" y="1282433"/>
+                  </a:lnTo>
+                  <a:lnTo>
+                    <a:pt x="1482548" y="1332457"/>
+                  </a:lnTo>
+                  <a:lnTo>
+                    <a:pt x="1556308" y="1381096"/>
+                  </a:lnTo>
+                  <a:lnTo>
+                    <a:pt x="1630068" y="1428387"/>
+                  </a:lnTo>
+                  <a:lnTo>
+                    <a:pt x="1703828" y="1474368"/>
+                  </a:lnTo>
+                  <a:lnTo>
+                    <a:pt x="1777588" y="1519076"/>
+                  </a:lnTo>
+                  <a:lnTo>
+                    <a:pt x="1851348" y="1562545"/>
+                  </a:lnTo>
+                  <a:lnTo>
+                    <a:pt x="1925108" y="1604810"/>
+                  </a:lnTo>
+                  <a:lnTo>
+                    <a:pt x="1998868" y="1645905"/>
+                  </a:lnTo>
+                  <a:lnTo>
+                    <a:pt x="2072628" y="1685861"/>
+                  </a:lnTo>
+                  <a:lnTo>
+                    <a:pt x="2146388" y="1724710"/>
+                  </a:lnTo>
+                  <a:lnTo>
+                    <a:pt x="2220148" y="1762483"/>
+                  </a:lnTo>
+                  <a:lnTo>
+                    <a:pt x="2293908" y="1799209"/>
+                  </a:lnTo>
+                  <a:lnTo>
+                    <a:pt x="2367668" y="1834919"/>
+                  </a:lnTo>
+                  <a:lnTo>
+                    <a:pt x="2441428" y="1869639"/>
+                  </a:lnTo>
+                  <a:lnTo>
+                    <a:pt x="2515188" y="1903397"/>
+                  </a:lnTo>
+                  <a:lnTo>
+                    <a:pt x="2588948" y="1936220"/>
+                  </a:lnTo>
+                  <a:lnTo>
+                    <a:pt x="2662708" y="1968134"/>
+                  </a:lnTo>
+                  <a:lnTo>
+                    <a:pt x="2736468" y="1999164"/>
+                  </a:lnTo>
+                  <a:lnTo>
+                    <a:pt x="2810228" y="2029334"/>
+                  </a:lnTo>
+                  <a:lnTo>
+                    <a:pt x="2883988" y="2058669"/>
+                  </a:lnTo>
+                  <a:lnTo>
+                    <a:pt x="2957748" y="2087191"/>
+                  </a:lnTo>
+                  <a:lnTo>
+                    <a:pt x="3031508" y="2114923"/>
+                  </a:lnTo>
+                  <a:lnTo>
+                    <a:pt x="3105268" y="2141887"/>
+                  </a:lnTo>
+                  <a:lnTo>
+                    <a:pt x="3179028" y="2168104"/>
+                  </a:lnTo>
+                  <a:lnTo>
+                    <a:pt x="3252788" y="2193594"/>
+                  </a:lnTo>
+                  <a:lnTo>
+                    <a:pt x="3326548" y="2218379"/>
+                  </a:lnTo>
+                  <a:lnTo>
+                    <a:pt x="3400308" y="2242477"/>
+                  </a:lnTo>
+                  <a:lnTo>
+                    <a:pt x="3474068" y="2259053"/>
+                  </a:lnTo>
+                  <a:lnTo>
+                    <a:pt x="3547828" y="2259716"/>
+                  </a:lnTo>
+                  <a:lnTo>
+                    <a:pt x="3621588" y="2260378"/>
+                  </a:lnTo>
+                  <a:lnTo>
+                    <a:pt x="3695348" y="2261039"/>
+                  </a:lnTo>
+                  <a:lnTo>
+                    <a:pt x="3769108" y="2261700"/>
+                  </a:lnTo>
+                  <a:lnTo>
+                    <a:pt x="3842868" y="2262361"/>
+                  </a:lnTo>
+                  <a:lnTo>
+                    <a:pt x="3916628" y="2263020"/>
+                  </a:lnTo>
+                  <a:lnTo>
+                    <a:pt x="3990388" y="2263680"/>
+                  </a:lnTo>
+                  <a:lnTo>
+                    <a:pt x="4064149" y="2264339"/>
+                  </a:lnTo>
+                  <a:lnTo>
+                    <a:pt x="4137909" y="2264997"/>
+                  </a:lnTo>
+                  <a:lnTo>
+                    <a:pt x="4211669" y="2265655"/>
+                  </a:lnTo>
+                  <a:lnTo>
+                    <a:pt x="4285429" y="2266312"/>
+                  </a:lnTo>
+                  <a:lnTo>
+                    <a:pt x="4359189" y="2266968"/>
+                  </a:lnTo>
+                  <a:lnTo>
+                    <a:pt x="4432949" y="2267625"/>
+                  </a:lnTo>
+                  <a:lnTo>
+                    <a:pt x="4506709" y="2268280"/>
+                  </a:lnTo>
+                  <a:lnTo>
+                    <a:pt x="4580469" y="2268935"/>
+                  </a:lnTo>
+                  <a:lnTo>
+                    <a:pt x="4654229" y="2269590"/>
+                  </a:lnTo>
+                  <a:lnTo>
+                    <a:pt x="4727989" y="2270244"/>
+                  </a:lnTo>
+                  <a:lnTo>
+                    <a:pt x="4801749" y="2270898"/>
+                  </a:lnTo>
+                  <a:lnTo>
+                    <a:pt x="4875509" y="2271551"/>
+                  </a:lnTo>
+                  <a:lnTo>
+                    <a:pt x="4949269" y="2272203"/>
+                  </a:lnTo>
+                  <a:lnTo>
+                    <a:pt x="5023029" y="2272855"/>
+                  </a:lnTo>
+                  <a:lnTo>
+                    <a:pt x="5096789" y="2273507"/>
+                  </a:lnTo>
+                  <a:lnTo>
+                    <a:pt x="5170549" y="2274158"/>
+                  </a:lnTo>
+                  <a:lnTo>
+                    <a:pt x="5244309" y="2274808"/>
+                  </a:lnTo>
+                  <a:lnTo>
+                    <a:pt x="5318069" y="2275458"/>
+                  </a:lnTo>
+                  <a:lnTo>
+                    <a:pt x="5391829" y="2276107"/>
+                  </a:lnTo>
+                  <a:lnTo>
+                    <a:pt x="5465589" y="2276756"/>
+                  </a:lnTo>
+                  <a:lnTo>
+                    <a:pt x="5539349" y="2277405"/>
+                  </a:lnTo>
+                  <a:lnTo>
+                    <a:pt x="5613109" y="2278052"/>
+                  </a:lnTo>
+                  <a:lnTo>
+                    <a:pt x="5686869" y="2278700"/>
+                  </a:lnTo>
+                  <a:lnTo>
+                    <a:pt x="5760629" y="2279347"/>
+                  </a:lnTo>
+                  <a:lnTo>
+                    <a:pt x="5834389" y="2279993"/>
+                  </a:lnTo>
+                  <a:lnTo>
+                    <a:pt x="5908149" y="2280639"/>
+                  </a:lnTo>
+                  <a:lnTo>
+                    <a:pt x="5981909" y="2281284"/>
+                  </a:lnTo>
+                  <a:lnTo>
+                    <a:pt x="6055669" y="2281929"/>
+                  </a:lnTo>
+                  <a:lnTo>
+                    <a:pt x="6129429" y="2282573"/>
+                  </a:lnTo>
+                  <a:lnTo>
+                    <a:pt x="6203189" y="2283217"/>
+                  </a:lnTo>
+                  <a:lnTo>
+                    <a:pt x="6276949" y="2283860"/>
+                  </a:lnTo>
+                  <a:lnTo>
+                    <a:pt x="6350709" y="2284502"/>
+                  </a:lnTo>
+                  <a:lnTo>
+                    <a:pt x="6424469" y="2285145"/>
+                  </a:lnTo>
+                  <a:lnTo>
+                    <a:pt x="6498229" y="2285786"/>
+                  </a:lnTo>
+                  <a:lnTo>
+                    <a:pt x="6571989" y="2286427"/>
+                  </a:lnTo>
+                  <a:lnTo>
+                    <a:pt x="6645749" y="2287068"/>
+                  </a:lnTo>
+                  <a:lnTo>
+                    <a:pt x="6719509" y="2287708"/>
+                  </a:lnTo>
+                  <a:lnTo>
+                    <a:pt x="6793269" y="2288348"/>
+                  </a:lnTo>
+                  <a:lnTo>
+                    <a:pt x="6867029" y="2288987"/>
+                  </a:lnTo>
+                  <a:lnTo>
+                    <a:pt x="6940789" y="2289625"/>
+                  </a:lnTo>
+                  <a:lnTo>
+                    <a:pt x="7014550" y="2290263"/>
+                  </a:lnTo>
+                  <a:lnTo>
+                    <a:pt x="7088310" y="2290901"/>
+                  </a:lnTo>
+                  <a:lnTo>
+                    <a:pt x="7162070" y="2291538"/>
+                  </a:lnTo>
+                  <a:lnTo>
+                    <a:pt x="7235830" y="2292175"/>
                   </a:lnTo>
                 </a:path>
               </a:pathLst>
@@ -3958,309 +3958,309 @@
           </p:nvSpPr>
           <p:spPr>
             <a:xfrm>
-              <a:off x="817517" y="4646388"/>
-              <a:ext cx="7235830" cy="697019"/>
+              <a:off x="817517" y="4696177"/>
+              <a:ext cx="7235830" cy="664789"/>
             </a:xfrm>
             <a:custGeom>
               <a:avLst/>
               <a:pathLst>
-                <a:path w="7235830" h="697019">
+                <a:path w="7235830" h="664789">
                   <a:moveTo>
-                    <a:pt x="7235830" y="697019"/>
+                    <a:pt x="7235830" y="664789"/>
                   </a:moveTo>
                   <a:lnTo>
-                    <a:pt x="7162070" y="691155"/>
-                  </a:lnTo>
-                  <a:lnTo>
-                    <a:pt x="7088310" y="685125"/>
-                  </a:lnTo>
-                  <a:lnTo>
-                    <a:pt x="7014550" y="678923"/>
-                  </a:lnTo>
-                  <a:lnTo>
-                    <a:pt x="6940789" y="672544"/>
-                  </a:lnTo>
-                  <a:lnTo>
-                    <a:pt x="6867029" y="665984"/>
-                  </a:lnTo>
-                  <a:lnTo>
-                    <a:pt x="6793269" y="659236"/>
-                  </a:lnTo>
-                  <a:lnTo>
-                    <a:pt x="6719509" y="652297"/>
-                  </a:lnTo>
-                  <a:lnTo>
-                    <a:pt x="6645749" y="645159"/>
-                  </a:lnTo>
-                  <a:lnTo>
-                    <a:pt x="6571989" y="637819"/>
-                  </a:lnTo>
-                  <a:lnTo>
-                    <a:pt x="6498229" y="630269"/>
-                  </a:lnTo>
-                  <a:lnTo>
-                    <a:pt x="6424469" y="622504"/>
-                  </a:lnTo>
-                  <a:lnTo>
-                    <a:pt x="6350709" y="614518"/>
-                  </a:lnTo>
-                  <a:lnTo>
-                    <a:pt x="6276949" y="606304"/>
-                  </a:lnTo>
-                  <a:lnTo>
-                    <a:pt x="6203189" y="597856"/>
-                  </a:lnTo>
-                  <a:lnTo>
-                    <a:pt x="6129429" y="589168"/>
-                  </a:lnTo>
-                  <a:lnTo>
-                    <a:pt x="6055669" y="580232"/>
-                  </a:lnTo>
-                  <a:lnTo>
-                    <a:pt x="5981909" y="571042"/>
-                  </a:lnTo>
-                  <a:lnTo>
-                    <a:pt x="5908149" y="561589"/>
-                  </a:lnTo>
-                  <a:lnTo>
-                    <a:pt x="5834389" y="551868"/>
-                  </a:lnTo>
-                  <a:lnTo>
-                    <a:pt x="5760629" y="541869"/>
-                  </a:lnTo>
-                  <a:lnTo>
-                    <a:pt x="5686869" y="531586"/>
-                  </a:lnTo>
-                  <a:lnTo>
-                    <a:pt x="5613109" y="521009"/>
-                  </a:lnTo>
-                  <a:lnTo>
-                    <a:pt x="5539349" y="510132"/>
-                  </a:lnTo>
-                  <a:lnTo>
-                    <a:pt x="5465589" y="498944"/>
-                  </a:lnTo>
-                  <a:lnTo>
-                    <a:pt x="5391829" y="487438"/>
-                  </a:lnTo>
-                  <a:lnTo>
-                    <a:pt x="5318069" y="475603"/>
-                  </a:lnTo>
-                  <a:lnTo>
-                    <a:pt x="5244309" y="463432"/>
-                  </a:lnTo>
-                  <a:lnTo>
-                    <a:pt x="5170549" y="450914"/>
-                  </a:lnTo>
-                  <a:lnTo>
-                    <a:pt x="5096789" y="438039"/>
-                  </a:lnTo>
-                  <a:lnTo>
-                    <a:pt x="5023029" y="424798"/>
-                  </a:lnTo>
-                  <a:lnTo>
-                    <a:pt x="4949269" y="411179"/>
-                  </a:lnTo>
-                  <a:lnTo>
-                    <a:pt x="4875509" y="397172"/>
-                  </a:lnTo>
-                  <a:lnTo>
-                    <a:pt x="4801749" y="382766"/>
-                  </a:lnTo>
-                  <a:lnTo>
-                    <a:pt x="4727989" y="367950"/>
-                  </a:lnTo>
-                  <a:lnTo>
-                    <a:pt x="4654229" y="352711"/>
-                  </a:lnTo>
-                  <a:lnTo>
-                    <a:pt x="4580469" y="337039"/>
-                  </a:lnTo>
-                  <a:lnTo>
-                    <a:pt x="4506709" y="320920"/>
-                  </a:lnTo>
-                  <a:lnTo>
-                    <a:pt x="4432949" y="304342"/>
-                  </a:lnTo>
-                  <a:lnTo>
-                    <a:pt x="4359189" y="287291"/>
-                  </a:lnTo>
-                  <a:lnTo>
-                    <a:pt x="4285429" y="269755"/>
-                  </a:lnTo>
-                  <a:lnTo>
-                    <a:pt x="4211669" y="251719"/>
-                  </a:lnTo>
-                  <a:lnTo>
-                    <a:pt x="4137909" y="233169"/>
-                  </a:lnTo>
-                  <a:lnTo>
-                    <a:pt x="4064149" y="214090"/>
-                  </a:lnTo>
-                  <a:lnTo>
-                    <a:pt x="3990388" y="194469"/>
-                  </a:lnTo>
-                  <a:lnTo>
-                    <a:pt x="3916628" y="174288"/>
-                  </a:lnTo>
-                  <a:lnTo>
-                    <a:pt x="3842868" y="153532"/>
-                  </a:lnTo>
-                  <a:lnTo>
-                    <a:pt x="3769108" y="132185"/>
-                  </a:lnTo>
-                  <a:lnTo>
-                    <a:pt x="3695348" y="110229"/>
-                  </a:lnTo>
-                  <a:lnTo>
-                    <a:pt x="3621588" y="87649"/>
-                  </a:lnTo>
-                  <a:lnTo>
-                    <a:pt x="3547828" y="64424"/>
-                  </a:lnTo>
-                  <a:lnTo>
-                    <a:pt x="3474068" y="40538"/>
-                  </a:lnTo>
-                  <a:lnTo>
-                    <a:pt x="3400308" y="32657"/>
-                  </a:lnTo>
-                  <a:lnTo>
-                    <a:pt x="3326548" y="31962"/>
-                  </a:lnTo>
-                  <a:lnTo>
-                    <a:pt x="3252788" y="31265"/>
-                  </a:lnTo>
-                  <a:lnTo>
-                    <a:pt x="3179028" y="30569"/>
-                  </a:lnTo>
-                  <a:lnTo>
-                    <a:pt x="3105268" y="29871"/>
-                  </a:lnTo>
-                  <a:lnTo>
-                    <a:pt x="3031508" y="29173"/>
-                  </a:lnTo>
-                  <a:lnTo>
-                    <a:pt x="2957748" y="28475"/>
-                  </a:lnTo>
-                  <a:lnTo>
-                    <a:pt x="2883988" y="27776"/>
-                  </a:lnTo>
-                  <a:lnTo>
-                    <a:pt x="2810228" y="27076"/>
-                  </a:lnTo>
-                  <a:lnTo>
-                    <a:pt x="2736468" y="26376"/>
-                  </a:lnTo>
-                  <a:lnTo>
-                    <a:pt x="2662708" y="25675"/>
-                  </a:lnTo>
-                  <a:lnTo>
-                    <a:pt x="2588948" y="24974"/>
-                  </a:lnTo>
-                  <a:lnTo>
-                    <a:pt x="2515188" y="24272"/>
-                  </a:lnTo>
-                  <a:lnTo>
-                    <a:pt x="2441428" y="23569"/>
-                  </a:lnTo>
-                  <a:lnTo>
-                    <a:pt x="2367668" y="22866"/>
-                  </a:lnTo>
-                  <a:lnTo>
-                    <a:pt x="2293908" y="22163"/>
-                  </a:lnTo>
-                  <a:lnTo>
-                    <a:pt x="2220148" y="21459"/>
-                  </a:lnTo>
-                  <a:lnTo>
-                    <a:pt x="2146388" y="20754"/>
-                  </a:lnTo>
-                  <a:lnTo>
-                    <a:pt x="2072628" y="20049"/>
-                  </a:lnTo>
-                  <a:lnTo>
-                    <a:pt x="1998868" y="19343"/>
-                  </a:lnTo>
-                  <a:lnTo>
-                    <a:pt x="1925108" y="18637"/>
-                  </a:lnTo>
-                  <a:lnTo>
-                    <a:pt x="1851348" y="17930"/>
-                  </a:lnTo>
-                  <a:lnTo>
-                    <a:pt x="1777588" y="17222"/>
-                  </a:lnTo>
-                  <a:lnTo>
-                    <a:pt x="1703828" y="16514"/>
-                  </a:lnTo>
-                  <a:lnTo>
-                    <a:pt x="1630068" y="15806"/>
-                  </a:lnTo>
-                  <a:lnTo>
-                    <a:pt x="1556308" y="15096"/>
-                  </a:lnTo>
-                  <a:lnTo>
-                    <a:pt x="1482548" y="14387"/>
-                  </a:lnTo>
-                  <a:lnTo>
-                    <a:pt x="1408788" y="13676"/>
-                  </a:lnTo>
-                  <a:lnTo>
-                    <a:pt x="1335028" y="12965"/>
-                  </a:lnTo>
-                  <a:lnTo>
-                    <a:pt x="1261268" y="12254"/>
-                  </a:lnTo>
-                  <a:lnTo>
-                    <a:pt x="1187508" y="11542"/>
-                  </a:lnTo>
-                  <a:lnTo>
-                    <a:pt x="1113747" y="10829"/>
-                  </a:lnTo>
-                  <a:lnTo>
-                    <a:pt x="1039987" y="10116"/>
-                  </a:lnTo>
-                  <a:lnTo>
-                    <a:pt x="966227" y="9402"/>
-                  </a:lnTo>
-                  <a:lnTo>
-                    <a:pt x="892467" y="8688"/>
-                  </a:lnTo>
-                  <a:lnTo>
-                    <a:pt x="818707" y="7973"/>
-                  </a:lnTo>
-                  <a:lnTo>
-                    <a:pt x="744947" y="7258"/>
-                  </a:lnTo>
-                  <a:lnTo>
-                    <a:pt x="671187" y="6542"/>
-                  </a:lnTo>
-                  <a:lnTo>
-                    <a:pt x="597427" y="5825"/>
-                  </a:lnTo>
-                  <a:lnTo>
-                    <a:pt x="523667" y="5108"/>
-                  </a:lnTo>
-                  <a:lnTo>
-                    <a:pt x="449907" y="4390"/>
-                  </a:lnTo>
-                  <a:lnTo>
-                    <a:pt x="376147" y="3672"/>
-                  </a:lnTo>
-                  <a:lnTo>
-                    <a:pt x="302387" y="2953"/>
-                  </a:lnTo>
-                  <a:lnTo>
-                    <a:pt x="228627" y="2233"/>
-                  </a:lnTo>
-                  <a:lnTo>
-                    <a:pt x="154867" y="1513"/>
-                  </a:lnTo>
-                  <a:lnTo>
-                    <a:pt x="81107" y="793"/>
-                  </a:lnTo>
-                  <a:lnTo>
-                    <a:pt x="7347" y="71"/>
+                    <a:pt x="7162070" y="659197"/>
+                  </a:lnTo>
+                  <a:lnTo>
+                    <a:pt x="7088310" y="653445"/>
+                  </a:lnTo>
+                  <a:lnTo>
+                    <a:pt x="7014550" y="647530"/>
+                  </a:lnTo>
+                  <a:lnTo>
+                    <a:pt x="6940789" y="641446"/>
+                  </a:lnTo>
+                  <a:lnTo>
+                    <a:pt x="6867029" y="635189"/>
+                  </a:lnTo>
+                  <a:lnTo>
+                    <a:pt x="6793269" y="628754"/>
+                  </a:lnTo>
+                  <a:lnTo>
+                    <a:pt x="6719509" y="622135"/>
+                  </a:lnTo>
+                  <a:lnTo>
+                    <a:pt x="6645749" y="615327"/>
+                  </a:lnTo>
+                  <a:lnTo>
+                    <a:pt x="6571989" y="608326"/>
+                  </a:lnTo>
+                  <a:lnTo>
+                    <a:pt x="6498229" y="601125"/>
+                  </a:lnTo>
+                  <a:lnTo>
+                    <a:pt x="6424469" y="593720"/>
+                  </a:lnTo>
+                  <a:lnTo>
+                    <a:pt x="6350709" y="586103"/>
+                  </a:lnTo>
+                  <a:lnTo>
+                    <a:pt x="6276949" y="578269"/>
+                  </a:lnTo>
+                  <a:lnTo>
+                    <a:pt x="6203189" y="570212"/>
+                  </a:lnTo>
+                  <a:lnTo>
+                    <a:pt x="6129429" y="561925"/>
+                  </a:lnTo>
+                  <a:lnTo>
+                    <a:pt x="6055669" y="553402"/>
+                  </a:lnTo>
+                  <a:lnTo>
+                    <a:pt x="5981909" y="544637"/>
+                  </a:lnTo>
+                  <a:lnTo>
+                    <a:pt x="5908149" y="535622"/>
+                  </a:lnTo>
+                  <a:lnTo>
+                    <a:pt x="5834389" y="526350"/>
+                  </a:lnTo>
+                  <a:lnTo>
+                    <a:pt x="5760629" y="516813"/>
+                  </a:lnTo>
+                  <a:lnTo>
+                    <a:pt x="5686869" y="507005"/>
+                  </a:lnTo>
+                  <a:lnTo>
+                    <a:pt x="5613109" y="496918"/>
+                  </a:lnTo>
+                  <a:lnTo>
+                    <a:pt x="5539349" y="486543"/>
+                  </a:lnTo>
+                  <a:lnTo>
+                    <a:pt x="5465589" y="475873"/>
+                  </a:lnTo>
+                  <a:lnTo>
+                    <a:pt x="5391829" y="464899"/>
+                  </a:lnTo>
+                  <a:lnTo>
+                    <a:pt x="5318069" y="453612"/>
+                  </a:lnTo>
+                  <a:lnTo>
+                    <a:pt x="5244309" y="442003"/>
+                  </a:lnTo>
+                  <a:lnTo>
+                    <a:pt x="5170549" y="430064"/>
+                  </a:lnTo>
+                  <a:lnTo>
+                    <a:pt x="5096789" y="417784"/>
+                  </a:lnTo>
+                  <a:lnTo>
+                    <a:pt x="5023029" y="405155"/>
+                  </a:lnTo>
+                  <a:lnTo>
+                    <a:pt x="4949269" y="392166"/>
+                  </a:lnTo>
+                  <a:lnTo>
+                    <a:pt x="4875509" y="378807"/>
+                  </a:lnTo>
+                  <a:lnTo>
+                    <a:pt x="4801749" y="365067"/>
+                  </a:lnTo>
+                  <a:lnTo>
+                    <a:pt x="4727989" y="350936"/>
+                  </a:lnTo>
+                  <a:lnTo>
+                    <a:pt x="4654229" y="336402"/>
+                  </a:lnTo>
+                  <a:lnTo>
+                    <a:pt x="4580469" y="321454"/>
+                  </a:lnTo>
+                  <a:lnTo>
+                    <a:pt x="4506709" y="306081"/>
+                  </a:lnTo>
+                  <a:lnTo>
+                    <a:pt x="4432949" y="290269"/>
+                  </a:lnTo>
+                  <a:lnTo>
+                    <a:pt x="4359189" y="274007"/>
+                  </a:lnTo>
+                  <a:lnTo>
+                    <a:pt x="4285429" y="257281"/>
+                  </a:lnTo>
+                  <a:lnTo>
+                    <a:pt x="4211669" y="240079"/>
+                  </a:lnTo>
+                  <a:lnTo>
+                    <a:pt x="4137909" y="222387"/>
+                  </a:lnTo>
+                  <a:lnTo>
+                    <a:pt x="4064149" y="204191"/>
+                  </a:lnTo>
+                  <a:lnTo>
+                    <a:pt x="3990388" y="185476"/>
+                  </a:lnTo>
+                  <a:lnTo>
+                    <a:pt x="3916628" y="166229"/>
+                  </a:lnTo>
+                  <a:lnTo>
+                    <a:pt x="3842868" y="146433"/>
+                  </a:lnTo>
+                  <a:lnTo>
+                    <a:pt x="3769108" y="126073"/>
+                  </a:lnTo>
+                  <a:lnTo>
+                    <a:pt x="3695348" y="105132"/>
+                  </a:lnTo>
+                  <a:lnTo>
+                    <a:pt x="3621588" y="83596"/>
+                  </a:lnTo>
+                  <a:lnTo>
+                    <a:pt x="3547828" y="61445"/>
+                  </a:lnTo>
+                  <a:lnTo>
+                    <a:pt x="3474068" y="38664"/>
+                  </a:lnTo>
+                  <a:lnTo>
+                    <a:pt x="3400308" y="31147"/>
+                  </a:lnTo>
+                  <a:lnTo>
+                    <a:pt x="3326548" y="30484"/>
+                  </a:lnTo>
+                  <a:lnTo>
+                    <a:pt x="3252788" y="29820"/>
+                  </a:lnTo>
+                  <a:lnTo>
+                    <a:pt x="3179028" y="29155"/>
+                  </a:lnTo>
+                  <a:lnTo>
+                    <a:pt x="3105268" y="28490"/>
+                  </a:lnTo>
+                  <a:lnTo>
+                    <a:pt x="3031508" y="27824"/>
+                  </a:lnTo>
+                  <a:lnTo>
+                    <a:pt x="2957748" y="27158"/>
+                  </a:lnTo>
+                  <a:lnTo>
+                    <a:pt x="2883988" y="26491"/>
+                  </a:lnTo>
+                  <a:lnTo>
+                    <a:pt x="2810228" y="25824"/>
+                  </a:lnTo>
+                  <a:lnTo>
+                    <a:pt x="2736468" y="25156"/>
+                  </a:lnTo>
+                  <a:lnTo>
+                    <a:pt x="2662708" y="24488"/>
+                  </a:lnTo>
+                  <a:lnTo>
+                    <a:pt x="2588948" y="23819"/>
+                  </a:lnTo>
+                  <a:lnTo>
+                    <a:pt x="2515188" y="23150"/>
+                  </a:lnTo>
+                  <a:lnTo>
+                    <a:pt x="2441428" y="22480"/>
+                  </a:lnTo>
+                  <a:lnTo>
+                    <a:pt x="2367668" y="21809"/>
+                  </a:lnTo>
+                  <a:lnTo>
+                    <a:pt x="2293908" y="21138"/>
+                  </a:lnTo>
+                  <a:lnTo>
+                    <a:pt x="2220148" y="20466"/>
+                  </a:lnTo>
+                  <a:lnTo>
+                    <a:pt x="2146388" y="19794"/>
+                  </a:lnTo>
+                  <a:lnTo>
+                    <a:pt x="2072628" y="19122"/>
+                  </a:lnTo>
+                  <a:lnTo>
+                    <a:pt x="1998868" y="18449"/>
+                  </a:lnTo>
+                  <a:lnTo>
+                    <a:pt x="1925108" y="17775"/>
+                  </a:lnTo>
+                  <a:lnTo>
+                    <a:pt x="1851348" y="17101"/>
+                  </a:lnTo>
+                  <a:lnTo>
+                    <a:pt x="1777588" y="16426"/>
+                  </a:lnTo>
+                  <a:lnTo>
+                    <a:pt x="1703828" y="15751"/>
+                  </a:lnTo>
+                  <a:lnTo>
+                    <a:pt x="1630068" y="15075"/>
+                  </a:lnTo>
+                  <a:lnTo>
+                    <a:pt x="1556308" y="14398"/>
+                  </a:lnTo>
+                  <a:lnTo>
+                    <a:pt x="1482548" y="13721"/>
+                  </a:lnTo>
+                  <a:lnTo>
+                    <a:pt x="1408788" y="13044"/>
+                  </a:lnTo>
+                  <a:lnTo>
+                    <a:pt x="1335028" y="12366"/>
+                  </a:lnTo>
+                  <a:lnTo>
+                    <a:pt x="1261268" y="11687"/>
+                  </a:lnTo>
+                  <a:lnTo>
+                    <a:pt x="1187508" y="11008"/>
+                  </a:lnTo>
+                  <a:lnTo>
+                    <a:pt x="1113747" y="10328"/>
+                  </a:lnTo>
+                  <a:lnTo>
+                    <a:pt x="1039987" y="9648"/>
+                  </a:lnTo>
+                  <a:lnTo>
+                    <a:pt x="966227" y="8967"/>
+                  </a:lnTo>
+                  <a:lnTo>
+                    <a:pt x="892467" y="8286"/>
+                  </a:lnTo>
+                  <a:lnTo>
+                    <a:pt x="818707" y="7604"/>
+                  </a:lnTo>
+                  <a:lnTo>
+                    <a:pt x="744947" y="6922"/>
+                  </a:lnTo>
+                  <a:lnTo>
+                    <a:pt x="671187" y="6239"/>
+                  </a:lnTo>
+                  <a:lnTo>
+                    <a:pt x="597427" y="5556"/>
+                  </a:lnTo>
+                  <a:lnTo>
+                    <a:pt x="523667" y="4872"/>
+                  </a:lnTo>
+                  <a:lnTo>
+                    <a:pt x="449907" y="4187"/>
+                  </a:lnTo>
+                  <a:lnTo>
+                    <a:pt x="376147" y="3502"/>
+                  </a:lnTo>
+                  <a:lnTo>
+                    <a:pt x="302387" y="2816"/>
+                  </a:lnTo>
+                  <a:lnTo>
+                    <a:pt x="228627" y="2130"/>
+                  </a:lnTo>
+                  <a:lnTo>
+                    <a:pt x="154867" y="1443"/>
+                  </a:lnTo>
+                  <a:lnTo>
+                    <a:pt x="81107" y="756"/>
+                  </a:lnTo>
+                  <a:lnTo>
+                    <a:pt x="7347" y="68"/>
                   </a:lnTo>
                   <a:lnTo>
                     <a:pt x="0" y="0"/>
@@ -4283,312 +4283,312 @@
           </p:nvSpPr>
           <p:spPr>
             <a:xfrm>
-              <a:off x="817517" y="3839436"/>
-              <a:ext cx="7235830" cy="1295296"/>
+              <a:off x="817517" y="3926538"/>
+              <a:ext cx="7235830" cy="1235402"/>
             </a:xfrm>
             <a:custGeom>
               <a:avLst/>
               <a:pathLst>
-                <a:path w="7235830" h="1295296">
+                <a:path w="7235830" h="1235402">
                   <a:moveTo>
                     <a:pt x="0" y="0"/>
                   </a:moveTo>
                   <a:lnTo>
-                    <a:pt x="7347" y="2474"/>
-                  </a:lnTo>
-                  <a:lnTo>
-                    <a:pt x="81107" y="26960"/>
-                  </a:lnTo>
-                  <a:lnTo>
-                    <a:pt x="154867" y="51094"/>
-                  </a:lnTo>
-                  <a:lnTo>
-                    <a:pt x="228627" y="74882"/>
-                  </a:lnTo>
-                  <a:lnTo>
-                    <a:pt x="302387" y="98329"/>
-                  </a:lnTo>
-                  <a:lnTo>
-                    <a:pt x="376147" y="121440"/>
-                  </a:lnTo>
-                  <a:lnTo>
-                    <a:pt x="449907" y="144219"/>
-                  </a:lnTo>
-                  <a:lnTo>
-                    <a:pt x="523667" y="166671"/>
-                  </a:lnTo>
-                  <a:lnTo>
-                    <a:pt x="597427" y="188802"/>
-                  </a:lnTo>
-                  <a:lnTo>
-                    <a:pt x="671187" y="210615"/>
-                  </a:lnTo>
-                  <a:lnTo>
-                    <a:pt x="744947" y="232115"/>
-                  </a:lnTo>
-                  <a:lnTo>
-                    <a:pt x="818707" y="253307"/>
-                  </a:lnTo>
-                  <a:lnTo>
-                    <a:pt x="892467" y="274195"/>
-                  </a:lnTo>
-                  <a:lnTo>
-                    <a:pt x="966227" y="294784"/>
-                  </a:lnTo>
-                  <a:lnTo>
-                    <a:pt x="1039987" y="315077"/>
-                  </a:lnTo>
-                  <a:lnTo>
-                    <a:pt x="1113747" y="335079"/>
-                  </a:lnTo>
-                  <a:lnTo>
-                    <a:pt x="1187508" y="354795"/>
-                  </a:lnTo>
-                  <a:lnTo>
-                    <a:pt x="1261268" y="374227"/>
-                  </a:lnTo>
-                  <a:lnTo>
-                    <a:pt x="1335028" y="393381"/>
-                  </a:lnTo>
-                  <a:lnTo>
-                    <a:pt x="1408788" y="412260"/>
-                  </a:lnTo>
-                  <a:lnTo>
-                    <a:pt x="1482548" y="430868"/>
-                  </a:lnTo>
-                  <a:lnTo>
-                    <a:pt x="1556308" y="449210"/>
-                  </a:lnTo>
-                  <a:lnTo>
-                    <a:pt x="1630068" y="467289"/>
-                  </a:lnTo>
-                  <a:lnTo>
-                    <a:pt x="1703828" y="485108"/>
-                  </a:lnTo>
-                  <a:lnTo>
-                    <a:pt x="1777588" y="502671"/>
-                  </a:lnTo>
-                  <a:lnTo>
-                    <a:pt x="1851348" y="519983"/>
-                  </a:lnTo>
-                  <a:lnTo>
-                    <a:pt x="1925108" y="537047"/>
-                  </a:lnTo>
-                  <a:lnTo>
-                    <a:pt x="1998868" y="553865"/>
-                  </a:lnTo>
-                  <a:lnTo>
-                    <a:pt x="2072628" y="570443"/>
-                  </a:lnTo>
-                  <a:lnTo>
-                    <a:pt x="2146388" y="586783"/>
-                  </a:lnTo>
-                  <a:lnTo>
-                    <a:pt x="2220148" y="602888"/>
-                  </a:lnTo>
-                  <a:lnTo>
-                    <a:pt x="2293908" y="618763"/>
-                  </a:lnTo>
-                  <a:lnTo>
-                    <a:pt x="2367668" y="634410"/>
-                  </a:lnTo>
-                  <a:lnTo>
-                    <a:pt x="2441428" y="649832"/>
-                  </a:lnTo>
-                  <a:lnTo>
-                    <a:pt x="2515188" y="665033"/>
-                  </a:lnTo>
-                  <a:lnTo>
-                    <a:pt x="2588948" y="680016"/>
-                  </a:lnTo>
-                  <a:lnTo>
-                    <a:pt x="2662708" y="694785"/>
-                  </a:lnTo>
-                  <a:lnTo>
-                    <a:pt x="2736468" y="709341"/>
-                  </a:lnTo>
-                  <a:lnTo>
-                    <a:pt x="2810228" y="723689"/>
-                  </a:lnTo>
-                  <a:lnTo>
-                    <a:pt x="2883988" y="737831"/>
-                  </a:lnTo>
-                  <a:lnTo>
-                    <a:pt x="2957748" y="751770"/>
-                  </a:lnTo>
-                  <a:lnTo>
-                    <a:pt x="3031508" y="765510"/>
-                  </a:lnTo>
-                  <a:lnTo>
-                    <a:pt x="3105268" y="779052"/>
-                  </a:lnTo>
-                  <a:lnTo>
-                    <a:pt x="3179028" y="792400"/>
-                  </a:lnTo>
-                  <a:lnTo>
-                    <a:pt x="3252788" y="805556"/>
-                  </a:lnTo>
-                  <a:lnTo>
-                    <a:pt x="3326548" y="818524"/>
-                  </a:lnTo>
-                  <a:lnTo>
-                    <a:pt x="3400308" y="831306"/>
-                  </a:lnTo>
-                  <a:lnTo>
-                    <a:pt x="3474068" y="843905"/>
-                  </a:lnTo>
-                  <a:lnTo>
-                    <a:pt x="3547828" y="856323"/>
-                  </a:lnTo>
-                  <a:lnTo>
-                    <a:pt x="3621588" y="868563"/>
-                  </a:lnTo>
-                  <a:lnTo>
-                    <a:pt x="3695348" y="880627"/>
-                  </a:lnTo>
-                  <a:lnTo>
-                    <a:pt x="3769108" y="892518"/>
-                  </a:lnTo>
-                  <a:lnTo>
-                    <a:pt x="3842868" y="904239"/>
-                  </a:lnTo>
-                  <a:lnTo>
-                    <a:pt x="3916628" y="915791"/>
-                  </a:lnTo>
-                  <a:lnTo>
-                    <a:pt x="3990388" y="927178"/>
-                  </a:lnTo>
-                  <a:lnTo>
-                    <a:pt x="4064149" y="938402"/>
-                  </a:lnTo>
-                  <a:lnTo>
-                    <a:pt x="4137909" y="949465"/>
-                  </a:lnTo>
-                  <a:lnTo>
-                    <a:pt x="4211669" y="960369"/>
-                  </a:lnTo>
-                  <a:lnTo>
-                    <a:pt x="4285429" y="971116"/>
-                  </a:lnTo>
-                  <a:lnTo>
-                    <a:pt x="4359189" y="981710"/>
-                  </a:lnTo>
-                  <a:lnTo>
-                    <a:pt x="4432949" y="992151"/>
-                  </a:lnTo>
-                  <a:lnTo>
-                    <a:pt x="4506709" y="1002443"/>
-                  </a:lnTo>
-                  <a:lnTo>
-                    <a:pt x="4580469" y="1012587"/>
-                  </a:lnTo>
-                  <a:lnTo>
-                    <a:pt x="4654229" y="1022586"/>
-                  </a:lnTo>
-                  <a:lnTo>
-                    <a:pt x="4727989" y="1032442"/>
-                  </a:lnTo>
-                  <a:lnTo>
-                    <a:pt x="4801749" y="1042155"/>
-                  </a:lnTo>
-                  <a:lnTo>
-                    <a:pt x="4875509" y="1051730"/>
-                  </a:lnTo>
-                  <a:lnTo>
-                    <a:pt x="4949269" y="1061168"/>
-                  </a:lnTo>
-                  <a:lnTo>
-                    <a:pt x="5023029" y="1070470"/>
-                  </a:lnTo>
-                  <a:lnTo>
-                    <a:pt x="5096789" y="1079638"/>
-                  </a:lnTo>
-                  <a:lnTo>
-                    <a:pt x="5170549" y="1088675"/>
-                  </a:lnTo>
-                  <a:lnTo>
-                    <a:pt x="5244309" y="1097583"/>
-                  </a:lnTo>
-                  <a:lnTo>
-                    <a:pt x="5318069" y="1106363"/>
-                  </a:lnTo>
-                  <a:lnTo>
-                    <a:pt x="5391829" y="1115016"/>
-                  </a:lnTo>
-                  <a:lnTo>
-                    <a:pt x="5465589" y="1123546"/>
-                  </a:lnTo>
-                  <a:lnTo>
-                    <a:pt x="5539349" y="1131954"/>
-                  </a:lnTo>
-                  <a:lnTo>
-                    <a:pt x="5613109" y="1140240"/>
-                  </a:lnTo>
-                  <a:lnTo>
-                    <a:pt x="5686869" y="1148408"/>
-                  </a:lnTo>
-                  <a:lnTo>
-                    <a:pt x="5760629" y="1156459"/>
-                  </a:lnTo>
-                  <a:lnTo>
-                    <a:pt x="5834389" y="1164395"/>
-                  </a:lnTo>
-                  <a:lnTo>
-                    <a:pt x="5908149" y="1172216"/>
-                  </a:lnTo>
-                  <a:lnTo>
-                    <a:pt x="5981909" y="1179926"/>
-                  </a:lnTo>
-                  <a:lnTo>
-                    <a:pt x="6055669" y="1187524"/>
-                  </a:lnTo>
-                  <a:lnTo>
-                    <a:pt x="6129429" y="1195014"/>
-                  </a:lnTo>
-                  <a:lnTo>
-                    <a:pt x="6203189" y="1202397"/>
-                  </a:lnTo>
-                  <a:lnTo>
-                    <a:pt x="6276949" y="1209673"/>
-                  </a:lnTo>
-                  <a:lnTo>
-                    <a:pt x="6350709" y="1216845"/>
-                  </a:lnTo>
-                  <a:lnTo>
-                    <a:pt x="6424469" y="1223915"/>
-                  </a:lnTo>
-                  <a:lnTo>
-                    <a:pt x="6498229" y="1230883"/>
-                  </a:lnTo>
-                  <a:lnTo>
-                    <a:pt x="6571989" y="1237751"/>
-                  </a:lnTo>
-                  <a:lnTo>
-                    <a:pt x="6645749" y="1244520"/>
-                  </a:lnTo>
-                  <a:lnTo>
-                    <a:pt x="6719509" y="1251193"/>
-                  </a:lnTo>
-                  <a:lnTo>
-                    <a:pt x="6793269" y="1257769"/>
-                  </a:lnTo>
-                  <a:lnTo>
-                    <a:pt x="6867029" y="1264252"/>
-                  </a:lnTo>
-                  <a:lnTo>
-                    <a:pt x="6940789" y="1270641"/>
-                  </a:lnTo>
-                  <a:lnTo>
-                    <a:pt x="7014550" y="1276939"/>
-                  </a:lnTo>
-                  <a:lnTo>
-                    <a:pt x="7088310" y="1283147"/>
-                  </a:lnTo>
-                  <a:lnTo>
-                    <a:pt x="7162070" y="1289265"/>
-                  </a:lnTo>
-                  <a:lnTo>
-                    <a:pt x="7235830" y="1295296"/>
+                    <a:pt x="7347" y="2360"/>
+                  </a:lnTo>
+                  <a:lnTo>
+                    <a:pt x="81107" y="25713"/>
+                  </a:lnTo>
+                  <a:lnTo>
+                    <a:pt x="154867" y="48731"/>
+                  </a:lnTo>
+                  <a:lnTo>
+                    <a:pt x="228627" y="71419"/>
+                  </a:lnTo>
+                  <a:lnTo>
+                    <a:pt x="302387" y="93782"/>
+                  </a:lnTo>
+                  <a:lnTo>
+                    <a:pt x="376147" y="115824"/>
+                  </a:lnTo>
+                  <a:lnTo>
+                    <a:pt x="449907" y="137550"/>
+                  </a:lnTo>
+                  <a:lnTo>
+                    <a:pt x="523667" y="158964"/>
+                  </a:lnTo>
+                  <a:lnTo>
+                    <a:pt x="597427" y="180072"/>
+                  </a:lnTo>
+                  <a:lnTo>
+                    <a:pt x="671187" y="200876"/>
+                  </a:lnTo>
+                  <a:lnTo>
+                    <a:pt x="744947" y="221382"/>
+                  </a:lnTo>
+                  <a:lnTo>
+                    <a:pt x="818707" y="241594"/>
+                  </a:lnTo>
+                  <a:lnTo>
+                    <a:pt x="892467" y="261517"/>
+                  </a:lnTo>
+                  <a:lnTo>
+                    <a:pt x="966227" y="281153"/>
+                  </a:lnTo>
+                  <a:lnTo>
+                    <a:pt x="1039987" y="300508"/>
+                  </a:lnTo>
+                  <a:lnTo>
+                    <a:pt x="1113747" y="319585"/>
+                  </a:lnTo>
+                  <a:lnTo>
+                    <a:pt x="1187508" y="338389"/>
+                  </a:lnTo>
+                  <a:lnTo>
+                    <a:pt x="1261268" y="356923"/>
+                  </a:lnTo>
+                  <a:lnTo>
+                    <a:pt x="1335028" y="375191"/>
+                  </a:lnTo>
+                  <a:lnTo>
+                    <a:pt x="1408788" y="393197"/>
+                  </a:lnTo>
+                  <a:lnTo>
+                    <a:pt x="1482548" y="410945"/>
+                  </a:lnTo>
+                  <a:lnTo>
+                    <a:pt x="1556308" y="428439"/>
+                  </a:lnTo>
+                  <a:lnTo>
+                    <a:pt x="1630068" y="445681"/>
+                  </a:lnTo>
+                  <a:lnTo>
+                    <a:pt x="1703828" y="462676"/>
+                  </a:lnTo>
+                  <a:lnTo>
+                    <a:pt x="1777588" y="479428"/>
+                  </a:lnTo>
+                  <a:lnTo>
+                    <a:pt x="1851348" y="495939"/>
+                  </a:lnTo>
+                  <a:lnTo>
+                    <a:pt x="1925108" y="512214"/>
+                  </a:lnTo>
+                  <a:lnTo>
+                    <a:pt x="1998868" y="528255"/>
+                  </a:lnTo>
+                  <a:lnTo>
+                    <a:pt x="2072628" y="544066"/>
+                  </a:lnTo>
+                  <a:lnTo>
+                    <a:pt x="2146388" y="559650"/>
+                  </a:lnTo>
+                  <a:lnTo>
+                    <a:pt x="2220148" y="575011"/>
+                  </a:lnTo>
+                  <a:lnTo>
+                    <a:pt x="2293908" y="590151"/>
+                  </a:lnTo>
+                  <a:lnTo>
+                    <a:pt x="2367668" y="605075"/>
+                  </a:lnTo>
+                  <a:lnTo>
+                    <a:pt x="2441428" y="619784"/>
+                  </a:lnTo>
+                  <a:lnTo>
+                    <a:pt x="2515188" y="634282"/>
+                  </a:lnTo>
+                  <a:lnTo>
+                    <a:pt x="2588948" y="648573"/>
+                  </a:lnTo>
+                  <a:lnTo>
+                    <a:pt x="2662708" y="662658"/>
+                  </a:lnTo>
+                  <a:lnTo>
+                    <a:pt x="2736468" y="676542"/>
+                  </a:lnTo>
+                  <a:lnTo>
+                    <a:pt x="2810228" y="690226"/>
+                  </a:lnTo>
+                  <a:lnTo>
+                    <a:pt x="2883988" y="703714"/>
+                  </a:lnTo>
+                  <a:lnTo>
+                    <a:pt x="2957748" y="717009"/>
+                  </a:lnTo>
+                  <a:lnTo>
+                    <a:pt x="3031508" y="730113"/>
+                  </a:lnTo>
+                  <a:lnTo>
+                    <a:pt x="3105268" y="743029"/>
+                  </a:lnTo>
+                  <a:lnTo>
+                    <a:pt x="3179028" y="755759"/>
+                  </a:lnTo>
+                  <a:lnTo>
+                    <a:pt x="3252788" y="768308"/>
+                  </a:lnTo>
+                  <a:lnTo>
+                    <a:pt x="3326548" y="780676"/>
+                  </a:lnTo>
+                  <a:lnTo>
+                    <a:pt x="3400308" y="792867"/>
+                  </a:lnTo>
+                  <a:lnTo>
+                    <a:pt x="3474068" y="804883"/>
+                  </a:lnTo>
+                  <a:lnTo>
+                    <a:pt x="3547828" y="816727"/>
+                  </a:lnTo>
+                  <a:lnTo>
+                    <a:pt x="3621588" y="828400"/>
+                  </a:lnTo>
+                  <a:lnTo>
+                    <a:pt x="3695348" y="839907"/>
+                  </a:lnTo>
+                  <a:lnTo>
+                    <a:pt x="3769108" y="851248"/>
+                  </a:lnTo>
+                  <a:lnTo>
+                    <a:pt x="3842868" y="862427"/>
+                  </a:lnTo>
+                  <a:lnTo>
+                    <a:pt x="3916628" y="873446"/>
+                  </a:lnTo>
+                  <a:lnTo>
+                    <a:pt x="3990388" y="884306"/>
+                  </a:lnTo>
+                  <a:lnTo>
+                    <a:pt x="4064149" y="895011"/>
+                  </a:lnTo>
+                  <a:lnTo>
+                    <a:pt x="4137909" y="905562"/>
+                  </a:lnTo>
+                  <a:lnTo>
+                    <a:pt x="4211669" y="915962"/>
+                  </a:lnTo>
+                  <a:lnTo>
+                    <a:pt x="4285429" y="926212"/>
+                  </a:lnTo>
+                  <a:lnTo>
+                    <a:pt x="4359189" y="936316"/>
+                  </a:lnTo>
+                  <a:lnTo>
+                    <a:pt x="4432949" y="946275"/>
+                  </a:lnTo>
+                  <a:lnTo>
+                    <a:pt x="4506709" y="956091"/>
+                  </a:lnTo>
+                  <a:lnTo>
+                    <a:pt x="4580469" y="965766"/>
+                  </a:lnTo>
+                  <a:lnTo>
+                    <a:pt x="4654229" y="975302"/>
+                  </a:lnTo>
+                  <a:lnTo>
+                    <a:pt x="4727989" y="984702"/>
+                  </a:lnTo>
+                  <a:lnTo>
+                    <a:pt x="4801749" y="993967"/>
+                  </a:lnTo>
+                  <a:lnTo>
+                    <a:pt x="4875509" y="1003099"/>
+                  </a:lnTo>
+                  <a:lnTo>
+                    <a:pt x="4949269" y="1012100"/>
+                  </a:lnTo>
+                  <a:lnTo>
+                    <a:pt x="5023029" y="1020971"/>
+                  </a:lnTo>
+                  <a:lnTo>
+                    <a:pt x="5096789" y="1029716"/>
+                  </a:lnTo>
+                  <a:lnTo>
+                    <a:pt x="5170549" y="1038335"/>
+                  </a:lnTo>
+                  <a:lnTo>
+                    <a:pt x="5244309" y="1046831"/>
+                  </a:lnTo>
+                  <a:lnTo>
+                    <a:pt x="5318069" y="1055205"/>
+                  </a:lnTo>
+                  <a:lnTo>
+                    <a:pt x="5391829" y="1063458"/>
+                  </a:lnTo>
+                  <a:lnTo>
+                    <a:pt x="5465589" y="1071594"/>
+                  </a:lnTo>
+                  <a:lnTo>
+                    <a:pt x="5539349" y="1079612"/>
+                  </a:lnTo>
+                  <a:lnTo>
+                    <a:pt x="5613109" y="1087516"/>
+                  </a:lnTo>
+                  <a:lnTo>
+                    <a:pt x="5686869" y="1095306"/>
+                  </a:lnTo>
+                  <a:lnTo>
+                    <a:pt x="5760629" y="1102985"/>
+                  </a:lnTo>
+                  <a:lnTo>
+                    <a:pt x="5834389" y="1110553"/>
+                  </a:lnTo>
+                  <a:lnTo>
+                    <a:pt x="5908149" y="1118013"/>
+                  </a:lnTo>
+                  <a:lnTo>
+                    <a:pt x="5981909" y="1125366"/>
+                  </a:lnTo>
+                  <a:lnTo>
+                    <a:pt x="6055669" y="1132614"/>
+                  </a:lnTo>
+                  <a:lnTo>
+                    <a:pt x="6129429" y="1139757"/>
+                  </a:lnTo>
+                  <a:lnTo>
+                    <a:pt x="6203189" y="1146798"/>
+                  </a:lnTo>
+                  <a:lnTo>
+                    <a:pt x="6276949" y="1153738"/>
+                  </a:lnTo>
+                  <a:lnTo>
+                    <a:pt x="6350709" y="1160579"/>
+                  </a:lnTo>
+                  <a:lnTo>
+                    <a:pt x="6424469" y="1167321"/>
+                  </a:lnTo>
+                  <a:lnTo>
+                    <a:pt x="6498229" y="1173967"/>
+                  </a:lnTo>
+                  <a:lnTo>
+                    <a:pt x="6571989" y="1180518"/>
+                  </a:lnTo>
+                  <a:lnTo>
+                    <a:pt x="6645749" y="1186974"/>
+                  </a:lnTo>
+                  <a:lnTo>
+                    <a:pt x="6719509" y="1193338"/>
+                  </a:lnTo>
+                  <a:lnTo>
+                    <a:pt x="6793269" y="1199611"/>
+                  </a:lnTo>
+                  <a:lnTo>
+                    <a:pt x="6867029" y="1205793"/>
+                  </a:lnTo>
+                  <a:lnTo>
+                    <a:pt x="6940789" y="1211887"/>
+                  </a:lnTo>
+                  <a:lnTo>
+                    <a:pt x="7014550" y="1217894"/>
+                  </a:lnTo>
+                  <a:lnTo>
+                    <a:pt x="7088310" y="1223814"/>
+                  </a:lnTo>
+                  <a:lnTo>
+                    <a:pt x="7162070" y="1229650"/>
+                  </a:lnTo>
+                  <a:lnTo>
+                    <a:pt x="7235830" y="1235402"/>
                   </a:lnTo>
                 </a:path>
               </a:pathLst>
@@ -4617,7 +4617,7 @@
           </p:nvSpPr>
           <p:spPr>
             <a:xfrm>
-              <a:off x="817517" y="4679530"/>
+              <a:off x="817517" y="4727786"/>
               <a:ext cx="7799693" cy="0"/>
             </a:xfrm>
             <a:custGeom>
@@ -4660,15 +4660,15 @@
           </p:nvSpPr>
           <p:spPr>
             <a:xfrm>
-              <a:off x="4269157" y="1896563"/>
-              <a:ext cx="0" cy="3826579"/>
+              <a:off x="4269157" y="2073503"/>
+              <a:ext cx="0" cy="3649639"/>
             </a:xfrm>
             <a:custGeom>
               <a:avLst/>
               <a:pathLst>
-                <a:path w="0" h="3826579">
+                <a:path w="0" h="3649639">
                   <a:moveTo>
-                    <a:pt x="0" y="3826579"/>
+                    <a:pt x="0" y="3649639"/>
                   </a:moveTo>
                   <a:lnTo>
                     <a:pt x="0" y="0"/>
@@ -4703,7 +4703,7 @@
           </p:nvSpPr>
           <p:spPr>
             <a:xfrm>
-              <a:off x="692708" y="5509156"/>
+              <a:off x="692708" y="5517199"/>
               <a:ext cx="62179" cy="80101"/>
             </a:xfrm>
             <a:prstGeom prst="rect">
@@ -4749,7 +4749,7 @@
           </p:nvSpPr>
           <p:spPr>
             <a:xfrm>
-              <a:off x="692708" y="4639479"/>
+              <a:off x="692708" y="4687735"/>
               <a:ext cx="62179" cy="80101"/>
             </a:xfrm>
             <a:prstGeom prst="rect">
@@ -4795,7 +4795,7 @@
           </p:nvSpPr>
           <p:spPr>
             <a:xfrm>
-              <a:off x="692708" y="3769802"/>
+              <a:off x="692708" y="3858272"/>
               <a:ext cx="62179" cy="80101"/>
             </a:xfrm>
             <a:prstGeom prst="rect">
@@ -4841,7 +4841,7 @@
           </p:nvSpPr>
           <p:spPr>
             <a:xfrm>
-              <a:off x="692708" y="2900125"/>
+              <a:off x="692708" y="3028808"/>
               <a:ext cx="62179" cy="80101"/>
             </a:xfrm>
             <a:prstGeom prst="rect">
@@ -4887,7 +4887,7 @@
           </p:nvSpPr>
           <p:spPr>
             <a:xfrm>
-              <a:off x="692708" y="2030448"/>
+              <a:off x="692708" y="2199345"/>
               <a:ext cx="62179" cy="80101"/>
             </a:xfrm>
             <a:prstGeom prst="rect">
@@ -5163,7 +5163,7 @@
           </p:nvSpPr>
           <p:spPr>
             <a:xfrm rot="-5400000">
-              <a:off x="68446" y="3759743"/>
+              <a:off x="68446" y="3848213"/>
               <a:ext cx="1016904" cy="100218"/>
             </a:xfrm>
             <a:prstGeom prst="rect">
@@ -5204,6 +5204,52 @@
         <p:sp>
           <p:nvSpPr>
             <p:cNvPr id="38" name="tx38"/>
+            <p:cNvSpPr/>
+            <p:nvPr/>
+          </p:nvSpPr>
+          <p:spPr>
+            <a:xfrm>
+              <a:off x="817517" y="1896563"/>
+              <a:ext cx="5626211" cy="82021"/>
+            </a:xfrm>
+            <a:prstGeom prst="rect">
+              <a:avLst/>
+            </a:prstGeom>
+            <a:noFill/>
+          </p:spPr>
+          <p:txBody>
+            <a:bodyPr lIns="0" rIns="0" tIns="0" bIns="0" anchorCtr="1" anchor="ctr" wrap="none"/>
+            <a:lstStyle/>
+            <a:p>
+              <a:pPr algn="l" marL="0" marR="0" indent="0">
+                <a:lnSpc>
+                  <a:spcPts val="900"/>
+                </a:lnSpc>
+                <a:spcBef>
+                  <a:spcPts val="0"/>
+                </a:spcBef>
+                <a:spcAft>
+                  <a:spcPts val="0"/>
+                </a:spcAft>
+              </a:pPr>
+              <a:r>
+                <a:rPr sz="900">
+                  <a:solidFill>
+                    <a:srgbClr val="404040">
+                      <a:alpha val="100000"/>
+                    </a:srgbClr>
+                  </a:solidFill>
+                  <a:latin typeface="Helvetica"/>
+                  <a:cs typeface="Helvetica"/>
+                </a:rPr>
+                <a:t>subHR per 0.1 ratio decline: 1.19 (1.01-1.40)  |  per IQR decline (Δ = 0.29): 1.66 (1.03-2.69)  |  IQR: [0.85, 1.15]</a:t>
+              </a:r>
+            </a:p>
+          </p:txBody>
+        </p:sp>
+        <p:sp>
+          <p:nvSpPr>
+            <p:cNvPr id="39" name="tx39"/>
             <p:cNvSpPr/>
             <p:nvPr/>
           </p:nvSpPr>

--- a/docs/pptx/whole/jx-linsubhr-ratio-hosp8.pptx
+++ b/docs/pptx/whole/jx-linsubhr-ratio-hosp8.pptx
@@ -5210,7 +5210,7 @@
           <p:spPr>
             <a:xfrm>
               <a:off x="817517" y="1896563"/>
-              <a:ext cx="5626211" cy="82021"/>
+              <a:ext cx="6169365" cy="82021"/>
             </a:xfrm>
             <a:prstGeom prst="rect">
               <a:avLst/>
@@ -5242,7 +5242,7 @@
                   <a:latin typeface="Helvetica"/>
                   <a:cs typeface="Helvetica"/>
                 </a:rPr>
-                <a:t>subHR per 0.1 ratio decline: 1.19 (1.01-1.40)  |  per IQR decline (Δ = 0.29): 1.66 (1.03-2.69)  |  IQR: [0.85, 1.15]</a:t>
+                <a:t>subHR per 0.1 ratio decline: 1.19 (1.01-1.40), p = 0.038  |  per IQR decline (Δ = 0.29): 1.66 (1.03-2.69)  |  IQR: [0.85, 1.15]</a:t>
               </a:r>
             </a:p>
           </p:txBody>

--- a/docs/pptx/whole/jx-linsubhr-ratio-hosp8.pptx
+++ b/docs/pptx/whole/jx-linsubhr-ratio-hosp8.pptx
@@ -2443,7 +2443,7 @@
           </p:nvSpPr>
           <p:spPr>
             <a:xfrm>
-              <a:off x="1615213" y="2073503"/>
+              <a:off x="1365633" y="2073503"/>
               <a:ext cx="0" cy="3649639"/>
             </a:xfrm>
             <a:custGeom>
@@ -2486,7 +2486,7 @@
           </p:nvSpPr>
           <p:spPr>
             <a:xfrm>
-              <a:off x="3387871" y="2073503"/>
+              <a:off x="3517243" y="2073503"/>
               <a:ext cx="0" cy="3649639"/>
             </a:xfrm>
             <a:custGeom>
@@ -2529,7 +2529,7 @@
           </p:nvSpPr>
           <p:spPr>
             <a:xfrm>
-              <a:off x="5160528" y="2073503"/>
+              <a:off x="5668852" y="2073503"/>
               <a:ext cx="0" cy="3649639"/>
             </a:xfrm>
             <a:custGeom>
@@ -2572,7 +2572,7 @@
           </p:nvSpPr>
           <p:spPr>
             <a:xfrm>
-              <a:off x="6933186" y="2073503"/>
+              <a:off x="7820461" y="2073503"/>
               <a:ext cx="0" cy="3649639"/>
             </a:xfrm>
             <a:custGeom>
@@ -2830,7 +2830,7 @@
           </p:nvSpPr>
           <p:spPr>
             <a:xfrm>
-              <a:off x="2501542" y="2073503"/>
+              <a:off x="2441438" y="2073503"/>
               <a:ext cx="0" cy="3649639"/>
             </a:xfrm>
             <a:custGeom>
@@ -2873,7 +2873,7 @@
           </p:nvSpPr>
           <p:spPr>
             <a:xfrm>
-              <a:off x="4274200" y="2073503"/>
+              <a:off x="4593047" y="2073503"/>
               <a:ext cx="0" cy="3649639"/>
             </a:xfrm>
             <a:custGeom>
@@ -2916,7 +2916,7 @@
           </p:nvSpPr>
           <p:spPr>
             <a:xfrm>
-              <a:off x="6046857" y="2073503"/>
+              <a:off x="6744657" y="2073503"/>
               <a:ext cx="0" cy="3649639"/>
             </a:xfrm>
             <a:custGeom>
@@ -2953,661 +2953,618 @@
         </p:sp>
         <p:sp>
           <p:nvSpPr>
-            <p:cNvPr id="20" name="pl20"/>
+            <p:cNvPr id="20" name="pg20"/>
             <p:cNvSpPr/>
             <p:nvPr/>
           </p:nvSpPr>
           <p:spPr>
             <a:xfrm>
-              <a:off x="7819515" y="2073503"/>
-              <a:ext cx="0" cy="3649639"/>
+              <a:off x="1172049" y="2389936"/>
+              <a:ext cx="7090630" cy="2971029"/>
             </a:xfrm>
             <a:custGeom>
               <a:avLst/>
               <a:pathLst>
-                <a:path w="0" h="3649639">
-                  <a:moveTo>
-                    <a:pt x="0" y="3649639"/>
-                  </a:moveTo>
-                  <a:lnTo>
-                    <a:pt x="0" y="0"/>
-                  </a:lnTo>
-                  <a:lnTo>
-                    <a:pt x="0" y="0"/>
-                  </a:lnTo>
-                </a:path>
-              </a:pathLst>
-            </a:custGeom>
-            <a:ln w="13550" cap="flat">
-              <a:solidFill>
-                <a:srgbClr val="EBEBEB">
-                  <a:alpha val="100000"/>
-                </a:srgbClr>
-              </a:solidFill>
-              <a:prstDash val="solid"/>
-              <a:round/>
-            </a:ln>
-          </p:spPr>
-          <p:txBody>
-            <a:bodyPr/>
-            <a:lstStyle/>
-            <a:p/>
-          </p:txBody>
-        </p:sp>
-        <p:sp>
-          <p:nvSpPr>
-            <p:cNvPr id="21" name="pg21"/>
-            <p:cNvSpPr/>
-            <p:nvPr/>
-          </p:nvSpPr>
-          <p:spPr>
-            <a:xfrm>
-              <a:off x="817517" y="2468934"/>
-              <a:ext cx="7235830" cy="2892032"/>
-            </a:xfrm>
-            <a:custGeom>
-              <a:avLst/>
-              <a:pathLst>
-                <a:path w="7235830" h="2892032">
+                <a:path w="7090630" h="2971029">
                   <a:moveTo>
                     <a:pt x="0" y="0"/>
                   </a:moveTo>
                   <a:lnTo>
-                    <a:pt x="7347" y="8739"/>
-                  </a:lnTo>
-                  <a:lnTo>
-                    <a:pt x="81107" y="94046"/>
-                  </a:lnTo>
-                  <a:lnTo>
-                    <a:pt x="154867" y="176990"/>
-                  </a:lnTo>
-                  <a:lnTo>
-                    <a:pt x="228627" y="257636"/>
-                  </a:lnTo>
-                  <a:lnTo>
-                    <a:pt x="302387" y="336048"/>
-                  </a:lnTo>
-                  <a:lnTo>
-                    <a:pt x="376147" y="412288"/>
-                  </a:lnTo>
-                  <a:lnTo>
-                    <a:pt x="449907" y="486416"/>
-                  </a:lnTo>
-                  <a:lnTo>
-                    <a:pt x="523667" y="558491"/>
-                  </a:lnTo>
-                  <a:lnTo>
-                    <a:pt x="597427" y="628569"/>
-                  </a:lnTo>
-                  <a:lnTo>
-                    <a:pt x="671187" y="696706"/>
-                  </a:lnTo>
-                  <a:lnTo>
-                    <a:pt x="744947" y="762955"/>
-                  </a:lnTo>
-                  <a:lnTo>
-                    <a:pt x="818707" y="827370"/>
-                  </a:lnTo>
-                  <a:lnTo>
-                    <a:pt x="892467" y="890000"/>
-                  </a:lnTo>
-                  <a:lnTo>
-                    <a:pt x="966227" y="950895"/>
-                  </a:lnTo>
-                  <a:lnTo>
-                    <a:pt x="1039987" y="1010103"/>
-                  </a:lnTo>
-                  <a:lnTo>
-                    <a:pt x="1113747" y="1067671"/>
-                  </a:lnTo>
-                  <a:lnTo>
-                    <a:pt x="1187508" y="1123645"/>
-                  </a:lnTo>
-                  <a:lnTo>
-                    <a:pt x="1261268" y="1178068"/>
-                  </a:lnTo>
-                  <a:lnTo>
-                    <a:pt x="1335028" y="1230983"/>
-                  </a:lnTo>
-                  <a:lnTo>
-                    <a:pt x="1408788" y="1282433"/>
-                  </a:lnTo>
-                  <a:lnTo>
-                    <a:pt x="1482548" y="1332457"/>
-                  </a:lnTo>
-                  <a:lnTo>
-                    <a:pt x="1556308" y="1381096"/>
-                  </a:lnTo>
-                  <a:lnTo>
-                    <a:pt x="1630068" y="1428387"/>
-                  </a:lnTo>
-                  <a:lnTo>
-                    <a:pt x="1703828" y="1474368"/>
-                  </a:lnTo>
-                  <a:lnTo>
-                    <a:pt x="1777588" y="1519076"/>
-                  </a:lnTo>
-                  <a:lnTo>
-                    <a:pt x="1851348" y="1562545"/>
-                  </a:lnTo>
-                  <a:lnTo>
-                    <a:pt x="1925108" y="1604810"/>
-                  </a:lnTo>
-                  <a:lnTo>
-                    <a:pt x="1998868" y="1645905"/>
-                  </a:lnTo>
-                  <a:lnTo>
-                    <a:pt x="2072628" y="1685861"/>
-                  </a:lnTo>
-                  <a:lnTo>
-                    <a:pt x="2146388" y="1724710"/>
-                  </a:lnTo>
-                  <a:lnTo>
-                    <a:pt x="2220148" y="1762483"/>
-                  </a:lnTo>
-                  <a:lnTo>
-                    <a:pt x="2293908" y="1799209"/>
-                  </a:lnTo>
-                  <a:lnTo>
-                    <a:pt x="2367668" y="1834919"/>
-                  </a:lnTo>
-                  <a:lnTo>
-                    <a:pt x="2441428" y="1869639"/>
-                  </a:lnTo>
-                  <a:lnTo>
-                    <a:pt x="2515188" y="1903397"/>
-                  </a:lnTo>
-                  <a:lnTo>
-                    <a:pt x="2588948" y="1936220"/>
-                  </a:lnTo>
-                  <a:lnTo>
-                    <a:pt x="2662708" y="1968134"/>
-                  </a:lnTo>
-                  <a:lnTo>
-                    <a:pt x="2736468" y="1999164"/>
-                  </a:lnTo>
-                  <a:lnTo>
-                    <a:pt x="2810228" y="2029334"/>
-                  </a:lnTo>
-                  <a:lnTo>
-                    <a:pt x="2883988" y="2058669"/>
-                  </a:lnTo>
-                  <a:lnTo>
-                    <a:pt x="2957748" y="2087191"/>
-                  </a:lnTo>
-                  <a:lnTo>
-                    <a:pt x="3031508" y="2114923"/>
-                  </a:lnTo>
-                  <a:lnTo>
-                    <a:pt x="3105268" y="2141887"/>
-                  </a:lnTo>
-                  <a:lnTo>
-                    <a:pt x="3179028" y="2168104"/>
-                  </a:lnTo>
-                  <a:lnTo>
-                    <a:pt x="3252788" y="2193594"/>
-                  </a:lnTo>
-                  <a:lnTo>
-                    <a:pt x="3326548" y="2218379"/>
-                  </a:lnTo>
-                  <a:lnTo>
-                    <a:pt x="3400308" y="2242477"/>
-                  </a:lnTo>
-                  <a:lnTo>
-                    <a:pt x="3474068" y="2259053"/>
-                  </a:lnTo>
-                  <a:lnTo>
-                    <a:pt x="3547828" y="2259716"/>
-                  </a:lnTo>
-                  <a:lnTo>
-                    <a:pt x="3621588" y="2260378"/>
-                  </a:lnTo>
-                  <a:lnTo>
-                    <a:pt x="3695348" y="2261039"/>
-                  </a:lnTo>
-                  <a:lnTo>
-                    <a:pt x="3769108" y="2261700"/>
-                  </a:lnTo>
-                  <a:lnTo>
-                    <a:pt x="3842868" y="2262361"/>
-                  </a:lnTo>
-                  <a:lnTo>
-                    <a:pt x="3916628" y="2263020"/>
-                  </a:lnTo>
-                  <a:lnTo>
-                    <a:pt x="3990388" y="2263680"/>
-                  </a:lnTo>
-                  <a:lnTo>
-                    <a:pt x="4064149" y="2264339"/>
-                  </a:lnTo>
-                  <a:lnTo>
-                    <a:pt x="4137909" y="2264997"/>
-                  </a:lnTo>
-                  <a:lnTo>
-                    <a:pt x="4211669" y="2265655"/>
-                  </a:lnTo>
-                  <a:lnTo>
-                    <a:pt x="4285429" y="2266312"/>
-                  </a:lnTo>
-                  <a:lnTo>
-                    <a:pt x="4359189" y="2266968"/>
-                  </a:lnTo>
-                  <a:lnTo>
-                    <a:pt x="4432949" y="2267625"/>
-                  </a:lnTo>
-                  <a:lnTo>
-                    <a:pt x="4506709" y="2268280"/>
-                  </a:lnTo>
-                  <a:lnTo>
-                    <a:pt x="4580469" y="2268935"/>
-                  </a:lnTo>
-                  <a:lnTo>
-                    <a:pt x="4654229" y="2269590"/>
-                  </a:lnTo>
-                  <a:lnTo>
-                    <a:pt x="4727989" y="2270244"/>
-                  </a:lnTo>
-                  <a:lnTo>
-                    <a:pt x="4801749" y="2270898"/>
-                  </a:lnTo>
-                  <a:lnTo>
-                    <a:pt x="4875509" y="2271551"/>
-                  </a:lnTo>
-                  <a:lnTo>
-                    <a:pt x="4949269" y="2272203"/>
-                  </a:lnTo>
-                  <a:lnTo>
-                    <a:pt x="5023029" y="2272855"/>
-                  </a:lnTo>
-                  <a:lnTo>
-                    <a:pt x="5096789" y="2273507"/>
-                  </a:lnTo>
-                  <a:lnTo>
-                    <a:pt x="5170549" y="2274158"/>
-                  </a:lnTo>
-                  <a:lnTo>
-                    <a:pt x="5244309" y="2274808"/>
-                  </a:lnTo>
-                  <a:lnTo>
-                    <a:pt x="5318069" y="2275458"/>
-                  </a:lnTo>
-                  <a:lnTo>
-                    <a:pt x="5391829" y="2276107"/>
-                  </a:lnTo>
-                  <a:lnTo>
-                    <a:pt x="5465589" y="2276756"/>
-                  </a:lnTo>
-                  <a:lnTo>
-                    <a:pt x="5539349" y="2277405"/>
-                  </a:lnTo>
-                  <a:lnTo>
-                    <a:pt x="5613109" y="2278052"/>
-                  </a:lnTo>
-                  <a:lnTo>
-                    <a:pt x="5686869" y="2278700"/>
-                  </a:lnTo>
-                  <a:lnTo>
-                    <a:pt x="5760629" y="2279347"/>
-                  </a:lnTo>
-                  <a:lnTo>
-                    <a:pt x="5834389" y="2279993"/>
-                  </a:lnTo>
-                  <a:lnTo>
-                    <a:pt x="5908149" y="2280639"/>
-                  </a:lnTo>
-                  <a:lnTo>
-                    <a:pt x="5981909" y="2281284"/>
-                  </a:lnTo>
-                  <a:lnTo>
-                    <a:pt x="6055669" y="2281929"/>
-                  </a:lnTo>
-                  <a:lnTo>
-                    <a:pt x="6129429" y="2282573"/>
-                  </a:lnTo>
-                  <a:lnTo>
-                    <a:pt x="6203189" y="2283217"/>
-                  </a:lnTo>
-                  <a:lnTo>
-                    <a:pt x="6276949" y="2283860"/>
-                  </a:lnTo>
-                  <a:lnTo>
-                    <a:pt x="6350709" y="2284502"/>
-                  </a:lnTo>
-                  <a:lnTo>
-                    <a:pt x="6424469" y="2285145"/>
-                  </a:lnTo>
-                  <a:lnTo>
-                    <a:pt x="6498229" y="2285786"/>
-                  </a:lnTo>
-                  <a:lnTo>
-                    <a:pt x="6571989" y="2286427"/>
-                  </a:lnTo>
-                  <a:lnTo>
-                    <a:pt x="6645749" y="2287068"/>
-                  </a:lnTo>
-                  <a:lnTo>
-                    <a:pt x="6719509" y="2287708"/>
-                  </a:lnTo>
-                  <a:lnTo>
-                    <a:pt x="6793269" y="2288348"/>
-                  </a:lnTo>
-                  <a:lnTo>
-                    <a:pt x="6867029" y="2288987"/>
-                  </a:lnTo>
-                  <a:lnTo>
-                    <a:pt x="6940789" y="2289625"/>
-                  </a:lnTo>
-                  <a:lnTo>
-                    <a:pt x="7014550" y="2290263"/>
-                  </a:lnTo>
-                  <a:lnTo>
-                    <a:pt x="7088310" y="2290901"/>
-                  </a:lnTo>
-                  <a:lnTo>
-                    <a:pt x="7162070" y="2291538"/>
-                  </a:lnTo>
-                  <a:lnTo>
-                    <a:pt x="7235830" y="2292175"/>
-                  </a:lnTo>
-                  <a:lnTo>
-                    <a:pt x="7235830" y="2892032"/>
-                  </a:lnTo>
-                  <a:lnTo>
-                    <a:pt x="7162070" y="2886440"/>
-                  </a:lnTo>
-                  <a:lnTo>
-                    <a:pt x="7088310" y="2880688"/>
-                  </a:lnTo>
-                  <a:lnTo>
-                    <a:pt x="7014550" y="2874773"/>
-                  </a:lnTo>
-                  <a:lnTo>
-                    <a:pt x="6940789" y="2868689"/>
-                  </a:lnTo>
-                  <a:lnTo>
-                    <a:pt x="6867029" y="2862432"/>
-                  </a:lnTo>
-                  <a:lnTo>
-                    <a:pt x="6793269" y="2855997"/>
-                  </a:lnTo>
-                  <a:lnTo>
-                    <a:pt x="6719509" y="2849378"/>
-                  </a:lnTo>
-                  <a:lnTo>
-                    <a:pt x="6645749" y="2842571"/>
-                  </a:lnTo>
-                  <a:lnTo>
-                    <a:pt x="6571989" y="2835569"/>
-                  </a:lnTo>
-                  <a:lnTo>
-                    <a:pt x="6498229" y="2828369"/>
-                  </a:lnTo>
-                  <a:lnTo>
-                    <a:pt x="6424469" y="2820963"/>
-                  </a:lnTo>
-                  <a:lnTo>
-                    <a:pt x="6350709" y="2813346"/>
-                  </a:lnTo>
-                  <a:lnTo>
-                    <a:pt x="6276949" y="2805512"/>
-                  </a:lnTo>
-                  <a:lnTo>
-                    <a:pt x="6203189" y="2797455"/>
-                  </a:lnTo>
-                  <a:lnTo>
-                    <a:pt x="6129429" y="2789168"/>
-                  </a:lnTo>
-                  <a:lnTo>
-                    <a:pt x="6055669" y="2780645"/>
-                  </a:lnTo>
-                  <a:lnTo>
-                    <a:pt x="5981909" y="2771880"/>
-                  </a:lnTo>
-                  <a:lnTo>
-                    <a:pt x="5908149" y="2762865"/>
-                  </a:lnTo>
-                  <a:lnTo>
-                    <a:pt x="5834389" y="2753593"/>
-                  </a:lnTo>
-                  <a:lnTo>
-                    <a:pt x="5760629" y="2744056"/>
-                  </a:lnTo>
-                  <a:lnTo>
-                    <a:pt x="5686869" y="2734248"/>
-                  </a:lnTo>
-                  <a:lnTo>
-                    <a:pt x="5613109" y="2724161"/>
-                  </a:lnTo>
-                  <a:lnTo>
-                    <a:pt x="5539349" y="2713786"/>
-                  </a:lnTo>
-                  <a:lnTo>
-                    <a:pt x="5465589" y="2703116"/>
-                  </a:lnTo>
-                  <a:lnTo>
-                    <a:pt x="5391829" y="2692142"/>
-                  </a:lnTo>
-                  <a:lnTo>
-                    <a:pt x="5318069" y="2680855"/>
-                  </a:lnTo>
-                  <a:lnTo>
-                    <a:pt x="5244309" y="2669246"/>
-                  </a:lnTo>
-                  <a:lnTo>
-                    <a:pt x="5170549" y="2657307"/>
-                  </a:lnTo>
-                  <a:lnTo>
-                    <a:pt x="5096789" y="2645027"/>
-                  </a:lnTo>
-                  <a:lnTo>
-                    <a:pt x="5023029" y="2632398"/>
-                  </a:lnTo>
-                  <a:lnTo>
-                    <a:pt x="4949269" y="2619409"/>
-                  </a:lnTo>
-                  <a:lnTo>
-                    <a:pt x="4875509" y="2606050"/>
-                  </a:lnTo>
-                  <a:lnTo>
-                    <a:pt x="4801749" y="2592310"/>
-                  </a:lnTo>
-                  <a:lnTo>
-                    <a:pt x="4727989" y="2578179"/>
-                  </a:lnTo>
-                  <a:lnTo>
-                    <a:pt x="4654229" y="2563645"/>
-                  </a:lnTo>
-                  <a:lnTo>
-                    <a:pt x="4580469" y="2548697"/>
-                  </a:lnTo>
-                  <a:lnTo>
-                    <a:pt x="4506709" y="2533324"/>
-                  </a:lnTo>
-                  <a:lnTo>
-                    <a:pt x="4432949" y="2517512"/>
-                  </a:lnTo>
-                  <a:lnTo>
-                    <a:pt x="4359189" y="2501250"/>
-                  </a:lnTo>
-                  <a:lnTo>
-                    <a:pt x="4285429" y="2484524"/>
-                  </a:lnTo>
-                  <a:lnTo>
-                    <a:pt x="4211669" y="2467322"/>
-                  </a:lnTo>
-                  <a:lnTo>
-                    <a:pt x="4137909" y="2449630"/>
-                  </a:lnTo>
-                  <a:lnTo>
-                    <a:pt x="4064149" y="2431434"/>
-                  </a:lnTo>
-                  <a:lnTo>
-                    <a:pt x="3990388" y="2412719"/>
-                  </a:lnTo>
-                  <a:lnTo>
-                    <a:pt x="3916628" y="2393472"/>
-                  </a:lnTo>
-                  <a:lnTo>
-                    <a:pt x="3842868" y="2373676"/>
-                  </a:lnTo>
-                  <a:lnTo>
-                    <a:pt x="3769108" y="2353316"/>
-                  </a:lnTo>
-                  <a:lnTo>
-                    <a:pt x="3695348" y="2332375"/>
-                  </a:lnTo>
-                  <a:lnTo>
-                    <a:pt x="3621588" y="2310839"/>
-                  </a:lnTo>
-                  <a:lnTo>
-                    <a:pt x="3547828" y="2288688"/>
-                  </a:lnTo>
-                  <a:lnTo>
-                    <a:pt x="3474068" y="2265907"/>
-                  </a:lnTo>
-                  <a:lnTo>
-                    <a:pt x="3400308" y="2258390"/>
-                  </a:lnTo>
-                  <a:lnTo>
-                    <a:pt x="3326548" y="2257727"/>
-                  </a:lnTo>
-                  <a:lnTo>
-                    <a:pt x="3252788" y="2257063"/>
-                  </a:lnTo>
-                  <a:lnTo>
-                    <a:pt x="3179028" y="2256398"/>
-                  </a:lnTo>
-                  <a:lnTo>
-                    <a:pt x="3105268" y="2255733"/>
-                  </a:lnTo>
-                  <a:lnTo>
-                    <a:pt x="3031508" y="2255067"/>
-                  </a:lnTo>
-                  <a:lnTo>
-                    <a:pt x="2957748" y="2254401"/>
-                  </a:lnTo>
-                  <a:lnTo>
-                    <a:pt x="2883988" y="2253734"/>
-                  </a:lnTo>
-                  <a:lnTo>
-                    <a:pt x="2810228" y="2253067"/>
-                  </a:lnTo>
-                  <a:lnTo>
-                    <a:pt x="2736468" y="2252399"/>
-                  </a:lnTo>
-                  <a:lnTo>
-                    <a:pt x="2662708" y="2251731"/>
-                  </a:lnTo>
-                  <a:lnTo>
-                    <a:pt x="2588948" y="2251062"/>
-                  </a:lnTo>
-                  <a:lnTo>
-                    <a:pt x="2515188" y="2250393"/>
-                  </a:lnTo>
-                  <a:lnTo>
-                    <a:pt x="2441428" y="2249723"/>
-                  </a:lnTo>
-                  <a:lnTo>
-                    <a:pt x="2367668" y="2249052"/>
-                  </a:lnTo>
-                  <a:lnTo>
-                    <a:pt x="2293908" y="2248381"/>
-                  </a:lnTo>
-                  <a:lnTo>
-                    <a:pt x="2220148" y="2247710"/>
-                  </a:lnTo>
-                  <a:lnTo>
-                    <a:pt x="2146388" y="2247037"/>
-                  </a:lnTo>
-                  <a:lnTo>
-                    <a:pt x="2072628" y="2246365"/>
-                  </a:lnTo>
-                  <a:lnTo>
-                    <a:pt x="1998868" y="2245692"/>
-                  </a:lnTo>
-                  <a:lnTo>
-                    <a:pt x="1925108" y="2245018"/>
-                  </a:lnTo>
-                  <a:lnTo>
-                    <a:pt x="1851348" y="2244344"/>
-                  </a:lnTo>
-                  <a:lnTo>
-                    <a:pt x="1777588" y="2243669"/>
-                  </a:lnTo>
-                  <a:lnTo>
-                    <a:pt x="1703828" y="2242994"/>
-                  </a:lnTo>
-                  <a:lnTo>
-                    <a:pt x="1630068" y="2242318"/>
-                  </a:lnTo>
-                  <a:lnTo>
-                    <a:pt x="1556308" y="2241641"/>
-                  </a:lnTo>
-                  <a:lnTo>
-                    <a:pt x="1482548" y="2240964"/>
-                  </a:lnTo>
-                  <a:lnTo>
-                    <a:pt x="1408788" y="2240287"/>
-                  </a:lnTo>
-                  <a:lnTo>
-                    <a:pt x="1335028" y="2239609"/>
-                  </a:lnTo>
-                  <a:lnTo>
-                    <a:pt x="1261268" y="2238930"/>
-                  </a:lnTo>
-                  <a:lnTo>
-                    <a:pt x="1187508" y="2238251"/>
-                  </a:lnTo>
-                  <a:lnTo>
-                    <a:pt x="1113747" y="2237571"/>
-                  </a:lnTo>
-                  <a:lnTo>
-                    <a:pt x="1039987" y="2236891"/>
-                  </a:lnTo>
-                  <a:lnTo>
-                    <a:pt x="966227" y="2236210"/>
-                  </a:lnTo>
-                  <a:lnTo>
-                    <a:pt x="892467" y="2235529"/>
-                  </a:lnTo>
-                  <a:lnTo>
-                    <a:pt x="818707" y="2234847"/>
-                  </a:lnTo>
-                  <a:lnTo>
-                    <a:pt x="744947" y="2234165"/>
-                  </a:lnTo>
-                  <a:lnTo>
-                    <a:pt x="671187" y="2233482"/>
-                  </a:lnTo>
-                  <a:lnTo>
-                    <a:pt x="597427" y="2232799"/>
-                  </a:lnTo>
-                  <a:lnTo>
-                    <a:pt x="523667" y="2232115"/>
-                  </a:lnTo>
-                  <a:lnTo>
-                    <a:pt x="449907" y="2231430"/>
-                  </a:lnTo>
-                  <a:lnTo>
-                    <a:pt x="376147" y="2230745"/>
-                  </a:lnTo>
-                  <a:lnTo>
-                    <a:pt x="302387" y="2230059"/>
-                  </a:lnTo>
-                  <a:lnTo>
-                    <a:pt x="228627" y="2229373"/>
-                  </a:lnTo>
-                  <a:lnTo>
-                    <a:pt x="154867" y="2228686"/>
-                  </a:lnTo>
-                  <a:lnTo>
-                    <a:pt x="81107" y="2227999"/>
-                  </a:lnTo>
-                  <a:lnTo>
-                    <a:pt x="7347" y="2227311"/>
-                  </a:lnTo>
-                  <a:lnTo>
-                    <a:pt x="0" y="2227243"/>
+                    <a:pt x="71622" y="87737"/>
+                  </a:lnTo>
+                  <a:lnTo>
+                    <a:pt x="143245" y="173043"/>
+                  </a:lnTo>
+                  <a:lnTo>
+                    <a:pt x="214867" y="255987"/>
+                  </a:lnTo>
+                  <a:lnTo>
+                    <a:pt x="286490" y="336633"/>
+                  </a:lnTo>
+                  <a:lnTo>
+                    <a:pt x="358112" y="415045"/>
+                  </a:lnTo>
+                  <a:lnTo>
+                    <a:pt x="429735" y="491285"/>
+                  </a:lnTo>
+                  <a:lnTo>
+                    <a:pt x="501357" y="565413"/>
+                  </a:lnTo>
+                  <a:lnTo>
+                    <a:pt x="572980" y="637488"/>
+                  </a:lnTo>
+                  <a:lnTo>
+                    <a:pt x="644602" y="707566"/>
+                  </a:lnTo>
+                  <a:lnTo>
+                    <a:pt x="716225" y="775703"/>
+                  </a:lnTo>
+                  <a:lnTo>
+                    <a:pt x="787847" y="841953"/>
+                  </a:lnTo>
+                  <a:lnTo>
+                    <a:pt x="859470" y="906367"/>
+                  </a:lnTo>
+                  <a:lnTo>
+                    <a:pt x="931092" y="968997"/>
+                  </a:lnTo>
+                  <a:lnTo>
+                    <a:pt x="1002715" y="1029892"/>
+                  </a:lnTo>
+                  <a:lnTo>
+                    <a:pt x="1074337" y="1089100"/>
+                  </a:lnTo>
+                  <a:lnTo>
+                    <a:pt x="1145960" y="1146668"/>
+                  </a:lnTo>
+                  <a:lnTo>
+                    <a:pt x="1217582" y="1202642"/>
+                  </a:lnTo>
+                  <a:lnTo>
+                    <a:pt x="1289205" y="1257065"/>
+                  </a:lnTo>
+                  <a:lnTo>
+                    <a:pt x="1360827" y="1309980"/>
+                  </a:lnTo>
+                  <a:lnTo>
+                    <a:pt x="1432450" y="1361430"/>
+                  </a:lnTo>
+                  <a:lnTo>
+                    <a:pt x="1504073" y="1411454"/>
+                  </a:lnTo>
+                  <a:lnTo>
+                    <a:pt x="1575695" y="1460093"/>
+                  </a:lnTo>
+                  <a:lnTo>
+                    <a:pt x="1647318" y="1507384"/>
+                  </a:lnTo>
+                  <a:lnTo>
+                    <a:pt x="1718940" y="1553366"/>
+                  </a:lnTo>
+                  <a:lnTo>
+                    <a:pt x="1790563" y="1598073"/>
+                  </a:lnTo>
+                  <a:lnTo>
+                    <a:pt x="1862185" y="1641542"/>
+                  </a:lnTo>
+                  <a:lnTo>
+                    <a:pt x="1933808" y="1683807"/>
+                  </a:lnTo>
+                  <a:lnTo>
+                    <a:pt x="2005430" y="1724902"/>
+                  </a:lnTo>
+                  <a:lnTo>
+                    <a:pt x="2077053" y="1764858"/>
+                  </a:lnTo>
+                  <a:lnTo>
+                    <a:pt x="2148675" y="1803707"/>
+                  </a:lnTo>
+                  <a:lnTo>
+                    <a:pt x="2220298" y="1841480"/>
+                  </a:lnTo>
+                  <a:lnTo>
+                    <a:pt x="2291920" y="1878206"/>
+                  </a:lnTo>
+                  <a:lnTo>
+                    <a:pt x="2363543" y="1913916"/>
+                  </a:lnTo>
+                  <a:lnTo>
+                    <a:pt x="2435165" y="1948636"/>
+                  </a:lnTo>
+                  <a:lnTo>
+                    <a:pt x="2506788" y="1982394"/>
+                  </a:lnTo>
+                  <a:lnTo>
+                    <a:pt x="2578410" y="2015217"/>
+                  </a:lnTo>
+                  <a:lnTo>
+                    <a:pt x="2650033" y="2047131"/>
+                  </a:lnTo>
+                  <a:lnTo>
+                    <a:pt x="2721655" y="2078161"/>
+                  </a:lnTo>
+                  <a:lnTo>
+                    <a:pt x="2793278" y="2108332"/>
+                  </a:lnTo>
+                  <a:lnTo>
+                    <a:pt x="2864901" y="2137666"/>
+                  </a:lnTo>
+                  <a:lnTo>
+                    <a:pt x="2936523" y="2166188"/>
+                  </a:lnTo>
+                  <a:lnTo>
+                    <a:pt x="3008146" y="2193920"/>
+                  </a:lnTo>
+                  <a:lnTo>
+                    <a:pt x="3079768" y="2220884"/>
+                  </a:lnTo>
+                  <a:lnTo>
+                    <a:pt x="3151391" y="2247101"/>
+                  </a:lnTo>
+                  <a:lnTo>
+                    <a:pt x="3223013" y="2272591"/>
+                  </a:lnTo>
+                  <a:lnTo>
+                    <a:pt x="3294636" y="2297376"/>
+                  </a:lnTo>
+                  <a:lnTo>
+                    <a:pt x="3366258" y="2321474"/>
+                  </a:lnTo>
+                  <a:lnTo>
+                    <a:pt x="3437881" y="2338051"/>
+                  </a:lnTo>
+                  <a:lnTo>
+                    <a:pt x="3509503" y="2338713"/>
+                  </a:lnTo>
+                  <a:lnTo>
+                    <a:pt x="3581126" y="2339375"/>
+                  </a:lnTo>
+                  <a:lnTo>
+                    <a:pt x="3652748" y="2340036"/>
+                  </a:lnTo>
+                  <a:lnTo>
+                    <a:pt x="3724371" y="2340697"/>
+                  </a:lnTo>
+                  <a:lnTo>
+                    <a:pt x="3795993" y="2341358"/>
+                  </a:lnTo>
+                  <a:lnTo>
+                    <a:pt x="3867616" y="2342018"/>
+                  </a:lnTo>
+                  <a:lnTo>
+                    <a:pt x="3939238" y="2342677"/>
+                  </a:lnTo>
+                  <a:lnTo>
+                    <a:pt x="4010861" y="2343336"/>
+                  </a:lnTo>
+                  <a:lnTo>
+                    <a:pt x="4082483" y="2343994"/>
+                  </a:lnTo>
+                  <a:lnTo>
+                    <a:pt x="4154106" y="2344652"/>
+                  </a:lnTo>
+                  <a:lnTo>
+                    <a:pt x="4225729" y="2345309"/>
+                  </a:lnTo>
+                  <a:lnTo>
+                    <a:pt x="4297351" y="2345966"/>
+                  </a:lnTo>
+                  <a:lnTo>
+                    <a:pt x="4368974" y="2346622"/>
+                  </a:lnTo>
+                  <a:lnTo>
+                    <a:pt x="4440596" y="2347277"/>
+                  </a:lnTo>
+                  <a:lnTo>
+                    <a:pt x="4512219" y="2347933"/>
+                  </a:lnTo>
+                  <a:lnTo>
+                    <a:pt x="4583841" y="2348587"/>
+                  </a:lnTo>
+                  <a:lnTo>
+                    <a:pt x="4655464" y="2349241"/>
+                  </a:lnTo>
+                  <a:lnTo>
+                    <a:pt x="4727086" y="2349895"/>
+                  </a:lnTo>
+                  <a:lnTo>
+                    <a:pt x="4798709" y="2350548"/>
+                  </a:lnTo>
+                  <a:lnTo>
+                    <a:pt x="4870331" y="2351200"/>
+                  </a:lnTo>
+                  <a:lnTo>
+                    <a:pt x="4941954" y="2351852"/>
+                  </a:lnTo>
+                  <a:lnTo>
+                    <a:pt x="5013576" y="2352504"/>
+                  </a:lnTo>
+                  <a:lnTo>
+                    <a:pt x="5085199" y="2353155"/>
+                  </a:lnTo>
+                  <a:lnTo>
+                    <a:pt x="5156821" y="2353805"/>
+                  </a:lnTo>
+                  <a:lnTo>
+                    <a:pt x="5228444" y="2354455"/>
+                  </a:lnTo>
+                  <a:lnTo>
+                    <a:pt x="5300066" y="2355105"/>
+                  </a:lnTo>
+                  <a:lnTo>
+                    <a:pt x="5371689" y="2355753"/>
+                  </a:lnTo>
+                  <a:lnTo>
+                    <a:pt x="5443311" y="2356402"/>
+                  </a:lnTo>
+                  <a:lnTo>
+                    <a:pt x="5514934" y="2357050"/>
+                  </a:lnTo>
+                  <a:lnTo>
+                    <a:pt x="5586557" y="2357697"/>
+                  </a:lnTo>
+                  <a:lnTo>
+                    <a:pt x="5658179" y="2358344"/>
+                  </a:lnTo>
+                  <a:lnTo>
+                    <a:pt x="5729802" y="2358990"/>
+                  </a:lnTo>
+                  <a:lnTo>
+                    <a:pt x="5801424" y="2359636"/>
+                  </a:lnTo>
+                  <a:lnTo>
+                    <a:pt x="5873047" y="2360281"/>
+                  </a:lnTo>
+                  <a:lnTo>
+                    <a:pt x="5944669" y="2360926"/>
+                  </a:lnTo>
+                  <a:lnTo>
+                    <a:pt x="6016292" y="2361570"/>
+                  </a:lnTo>
+                  <a:lnTo>
+                    <a:pt x="6087914" y="2362214"/>
+                  </a:lnTo>
+                  <a:lnTo>
+                    <a:pt x="6159537" y="2362857"/>
+                  </a:lnTo>
+                  <a:lnTo>
+                    <a:pt x="6231159" y="2363500"/>
+                  </a:lnTo>
+                  <a:lnTo>
+                    <a:pt x="6302782" y="2364142"/>
+                  </a:lnTo>
+                  <a:lnTo>
+                    <a:pt x="6374404" y="2364783"/>
+                  </a:lnTo>
+                  <a:lnTo>
+                    <a:pt x="6446027" y="2365425"/>
+                  </a:lnTo>
+                  <a:lnTo>
+                    <a:pt x="6517649" y="2366065"/>
+                  </a:lnTo>
+                  <a:lnTo>
+                    <a:pt x="6589272" y="2366705"/>
+                  </a:lnTo>
+                  <a:lnTo>
+                    <a:pt x="6660894" y="2367345"/>
+                  </a:lnTo>
+                  <a:lnTo>
+                    <a:pt x="6732517" y="2367984"/>
+                  </a:lnTo>
+                  <a:lnTo>
+                    <a:pt x="6804139" y="2368623"/>
+                  </a:lnTo>
+                  <a:lnTo>
+                    <a:pt x="6875762" y="2369261"/>
+                  </a:lnTo>
+                  <a:lnTo>
+                    <a:pt x="6947385" y="2369898"/>
+                  </a:lnTo>
+                  <a:lnTo>
+                    <a:pt x="7019007" y="2370535"/>
+                  </a:lnTo>
+                  <a:lnTo>
+                    <a:pt x="7090630" y="2371172"/>
+                  </a:lnTo>
+                  <a:lnTo>
+                    <a:pt x="7090630" y="2971029"/>
+                  </a:lnTo>
+                  <a:lnTo>
+                    <a:pt x="7019007" y="2965437"/>
+                  </a:lnTo>
+                  <a:lnTo>
+                    <a:pt x="6947385" y="2959685"/>
+                  </a:lnTo>
+                  <a:lnTo>
+                    <a:pt x="6875762" y="2953770"/>
+                  </a:lnTo>
+                  <a:lnTo>
+                    <a:pt x="6804139" y="2947686"/>
+                  </a:lnTo>
+                  <a:lnTo>
+                    <a:pt x="6732517" y="2941429"/>
+                  </a:lnTo>
+                  <a:lnTo>
+                    <a:pt x="6660894" y="2934994"/>
+                  </a:lnTo>
+                  <a:lnTo>
+                    <a:pt x="6589272" y="2928375"/>
+                  </a:lnTo>
+                  <a:lnTo>
+                    <a:pt x="6517649" y="2921568"/>
+                  </a:lnTo>
+                  <a:lnTo>
+                    <a:pt x="6446027" y="2914566"/>
+                  </a:lnTo>
+                  <a:lnTo>
+                    <a:pt x="6374404" y="2907366"/>
+                  </a:lnTo>
+                  <a:lnTo>
+                    <a:pt x="6302782" y="2899960"/>
+                  </a:lnTo>
+                  <a:lnTo>
+                    <a:pt x="6231159" y="2892343"/>
+                  </a:lnTo>
+                  <a:lnTo>
+                    <a:pt x="6159537" y="2884509"/>
+                  </a:lnTo>
+                  <a:lnTo>
+                    <a:pt x="6087914" y="2876452"/>
+                  </a:lnTo>
+                  <a:lnTo>
+                    <a:pt x="6016292" y="2868165"/>
+                  </a:lnTo>
+                  <a:lnTo>
+                    <a:pt x="5944669" y="2859643"/>
+                  </a:lnTo>
+                  <a:lnTo>
+                    <a:pt x="5873047" y="2850877"/>
+                  </a:lnTo>
+                  <a:lnTo>
+                    <a:pt x="5801424" y="2841862"/>
+                  </a:lnTo>
+                  <a:lnTo>
+                    <a:pt x="5729802" y="2832590"/>
+                  </a:lnTo>
+                  <a:lnTo>
+                    <a:pt x="5658179" y="2823054"/>
+                  </a:lnTo>
+                  <a:lnTo>
+                    <a:pt x="5586557" y="2813246"/>
+                  </a:lnTo>
+                  <a:lnTo>
+                    <a:pt x="5514934" y="2803158"/>
+                  </a:lnTo>
+                  <a:lnTo>
+                    <a:pt x="5443311" y="2792783"/>
+                  </a:lnTo>
+                  <a:lnTo>
+                    <a:pt x="5371689" y="2782113"/>
+                  </a:lnTo>
+                  <a:lnTo>
+                    <a:pt x="5300066" y="2771139"/>
+                  </a:lnTo>
+                  <a:lnTo>
+                    <a:pt x="5228444" y="2759852"/>
+                  </a:lnTo>
+                  <a:lnTo>
+                    <a:pt x="5156821" y="2748243"/>
+                  </a:lnTo>
+                  <a:lnTo>
+                    <a:pt x="5085199" y="2736304"/>
+                  </a:lnTo>
+                  <a:lnTo>
+                    <a:pt x="5013576" y="2724025"/>
+                  </a:lnTo>
+                  <a:lnTo>
+                    <a:pt x="4941954" y="2711395"/>
+                  </a:lnTo>
+                  <a:lnTo>
+                    <a:pt x="4870331" y="2698406"/>
+                  </a:lnTo>
+                  <a:lnTo>
+                    <a:pt x="4798709" y="2685047"/>
+                  </a:lnTo>
+                  <a:lnTo>
+                    <a:pt x="4727086" y="2671307"/>
+                  </a:lnTo>
+                  <a:lnTo>
+                    <a:pt x="4655464" y="2657176"/>
+                  </a:lnTo>
+                  <a:lnTo>
+                    <a:pt x="4583841" y="2642642"/>
+                  </a:lnTo>
+                  <a:lnTo>
+                    <a:pt x="4512219" y="2627695"/>
+                  </a:lnTo>
+                  <a:lnTo>
+                    <a:pt x="4440596" y="2612321"/>
+                  </a:lnTo>
+                  <a:lnTo>
+                    <a:pt x="4368974" y="2596509"/>
+                  </a:lnTo>
+                  <a:lnTo>
+                    <a:pt x="4297351" y="2580247"/>
+                  </a:lnTo>
+                  <a:lnTo>
+                    <a:pt x="4225729" y="2563521"/>
+                  </a:lnTo>
+                  <a:lnTo>
+                    <a:pt x="4154106" y="2546319"/>
+                  </a:lnTo>
+                  <a:lnTo>
+                    <a:pt x="4082483" y="2528627"/>
+                  </a:lnTo>
+                  <a:lnTo>
+                    <a:pt x="4010861" y="2510431"/>
+                  </a:lnTo>
+                  <a:lnTo>
+                    <a:pt x="3939238" y="2491717"/>
+                  </a:lnTo>
+                  <a:lnTo>
+                    <a:pt x="3867616" y="2472469"/>
+                  </a:lnTo>
+                  <a:lnTo>
+                    <a:pt x="3795993" y="2452673"/>
+                  </a:lnTo>
+                  <a:lnTo>
+                    <a:pt x="3724371" y="2432313"/>
+                  </a:lnTo>
+                  <a:lnTo>
+                    <a:pt x="3652748" y="2411373"/>
+                  </a:lnTo>
+                  <a:lnTo>
+                    <a:pt x="3581126" y="2389836"/>
+                  </a:lnTo>
+                  <a:lnTo>
+                    <a:pt x="3509503" y="2367686"/>
+                  </a:lnTo>
+                  <a:lnTo>
+                    <a:pt x="3437881" y="2344904"/>
+                  </a:lnTo>
+                  <a:lnTo>
+                    <a:pt x="3366258" y="2337387"/>
+                  </a:lnTo>
+                  <a:lnTo>
+                    <a:pt x="3294636" y="2336724"/>
+                  </a:lnTo>
+                  <a:lnTo>
+                    <a:pt x="3223013" y="2336060"/>
+                  </a:lnTo>
+                  <a:lnTo>
+                    <a:pt x="3151391" y="2335395"/>
+                  </a:lnTo>
+                  <a:lnTo>
+                    <a:pt x="3079768" y="2334730"/>
+                  </a:lnTo>
+                  <a:lnTo>
+                    <a:pt x="3008146" y="2334064"/>
+                  </a:lnTo>
+                  <a:lnTo>
+                    <a:pt x="2936523" y="2333398"/>
+                  </a:lnTo>
+                  <a:lnTo>
+                    <a:pt x="2864901" y="2332731"/>
+                  </a:lnTo>
+                  <a:lnTo>
+                    <a:pt x="2793278" y="2332064"/>
+                  </a:lnTo>
+                  <a:lnTo>
+                    <a:pt x="2721655" y="2331396"/>
+                  </a:lnTo>
+                  <a:lnTo>
+                    <a:pt x="2650033" y="2330728"/>
+                  </a:lnTo>
+                  <a:lnTo>
+                    <a:pt x="2578410" y="2330059"/>
+                  </a:lnTo>
+                  <a:lnTo>
+                    <a:pt x="2506788" y="2329390"/>
+                  </a:lnTo>
+                  <a:lnTo>
+                    <a:pt x="2435165" y="2328720"/>
+                  </a:lnTo>
+                  <a:lnTo>
+                    <a:pt x="2363543" y="2328049"/>
+                  </a:lnTo>
+                  <a:lnTo>
+                    <a:pt x="2291920" y="2327378"/>
+                  </a:lnTo>
+                  <a:lnTo>
+                    <a:pt x="2220298" y="2326707"/>
+                  </a:lnTo>
+                  <a:lnTo>
+                    <a:pt x="2148675" y="2326035"/>
+                  </a:lnTo>
+                  <a:lnTo>
+                    <a:pt x="2077053" y="2325362"/>
+                  </a:lnTo>
+                  <a:lnTo>
+                    <a:pt x="2005430" y="2324689"/>
+                  </a:lnTo>
+                  <a:lnTo>
+                    <a:pt x="1933808" y="2324015"/>
+                  </a:lnTo>
+                  <a:lnTo>
+                    <a:pt x="1862185" y="2323341"/>
+                  </a:lnTo>
+                  <a:lnTo>
+                    <a:pt x="1790563" y="2322666"/>
+                  </a:lnTo>
+                  <a:lnTo>
+                    <a:pt x="1718940" y="2321991"/>
+                  </a:lnTo>
+                  <a:lnTo>
+                    <a:pt x="1647318" y="2321315"/>
+                  </a:lnTo>
+                  <a:lnTo>
+                    <a:pt x="1575695" y="2320638"/>
+                  </a:lnTo>
+                  <a:lnTo>
+                    <a:pt x="1504073" y="2319961"/>
+                  </a:lnTo>
+                  <a:lnTo>
+                    <a:pt x="1432450" y="2319284"/>
+                  </a:lnTo>
+                  <a:lnTo>
+                    <a:pt x="1360827" y="2318606"/>
+                  </a:lnTo>
+                  <a:lnTo>
+                    <a:pt x="1289205" y="2317927"/>
+                  </a:lnTo>
+                  <a:lnTo>
+                    <a:pt x="1217582" y="2317248"/>
+                  </a:lnTo>
+                  <a:lnTo>
+                    <a:pt x="1145960" y="2316569"/>
+                  </a:lnTo>
+                  <a:lnTo>
+                    <a:pt x="1074337" y="2315888"/>
+                  </a:lnTo>
+                  <a:lnTo>
+                    <a:pt x="1002715" y="2315208"/>
+                  </a:lnTo>
+                  <a:lnTo>
+                    <a:pt x="931092" y="2314526"/>
+                  </a:lnTo>
+                  <a:lnTo>
+                    <a:pt x="859470" y="2313845"/>
+                  </a:lnTo>
+                  <a:lnTo>
+                    <a:pt x="787847" y="2313162"/>
+                  </a:lnTo>
+                  <a:lnTo>
+                    <a:pt x="716225" y="2312479"/>
+                  </a:lnTo>
+                  <a:lnTo>
+                    <a:pt x="644602" y="2311796"/>
+                  </a:lnTo>
+                  <a:lnTo>
+                    <a:pt x="572980" y="2311112"/>
+                  </a:lnTo>
+                  <a:lnTo>
+                    <a:pt x="501357" y="2310427"/>
+                  </a:lnTo>
+                  <a:lnTo>
+                    <a:pt x="429735" y="2309742"/>
+                  </a:lnTo>
+                  <a:lnTo>
+                    <a:pt x="358112" y="2309056"/>
+                  </a:lnTo>
+                  <a:lnTo>
+                    <a:pt x="286490" y="2308370"/>
+                  </a:lnTo>
+                  <a:lnTo>
+                    <a:pt x="214867" y="2307683"/>
+                  </a:lnTo>
+                  <a:lnTo>
+                    <a:pt x="143245" y="2306996"/>
+                  </a:lnTo>
+                  <a:lnTo>
+                    <a:pt x="71622" y="2306308"/>
+                  </a:lnTo>
+                  <a:lnTo>
+                    <a:pt x="0" y="2305620"/>
                   </a:lnTo>
                   <a:close/>
                 </a:path>
@@ -3627,318 +3584,643 @@
         </p:sp>
         <p:sp>
           <p:nvSpPr>
+            <p:cNvPr id="21" name="pl21"/>
+            <p:cNvSpPr/>
+            <p:nvPr/>
+          </p:nvSpPr>
+          <p:spPr>
+            <a:xfrm>
+              <a:off x="1172049" y="2389936"/>
+              <a:ext cx="7090630" cy="2371172"/>
+            </a:xfrm>
+            <a:custGeom>
+              <a:avLst/>
+              <a:pathLst>
+                <a:path w="7090630" h="2371172">
+                  <a:moveTo>
+                    <a:pt x="0" y="0"/>
+                  </a:moveTo>
+                  <a:lnTo>
+                    <a:pt x="71622" y="87737"/>
+                  </a:lnTo>
+                  <a:lnTo>
+                    <a:pt x="143245" y="173043"/>
+                  </a:lnTo>
+                  <a:lnTo>
+                    <a:pt x="214867" y="255987"/>
+                  </a:lnTo>
+                  <a:lnTo>
+                    <a:pt x="286490" y="336633"/>
+                  </a:lnTo>
+                  <a:lnTo>
+                    <a:pt x="358112" y="415045"/>
+                  </a:lnTo>
+                  <a:lnTo>
+                    <a:pt x="429735" y="491285"/>
+                  </a:lnTo>
+                  <a:lnTo>
+                    <a:pt x="501357" y="565413"/>
+                  </a:lnTo>
+                  <a:lnTo>
+                    <a:pt x="572980" y="637488"/>
+                  </a:lnTo>
+                  <a:lnTo>
+                    <a:pt x="644602" y="707566"/>
+                  </a:lnTo>
+                  <a:lnTo>
+                    <a:pt x="716225" y="775703"/>
+                  </a:lnTo>
+                  <a:lnTo>
+                    <a:pt x="787847" y="841953"/>
+                  </a:lnTo>
+                  <a:lnTo>
+                    <a:pt x="859470" y="906367"/>
+                  </a:lnTo>
+                  <a:lnTo>
+                    <a:pt x="931092" y="968997"/>
+                  </a:lnTo>
+                  <a:lnTo>
+                    <a:pt x="1002715" y="1029892"/>
+                  </a:lnTo>
+                  <a:lnTo>
+                    <a:pt x="1074337" y="1089100"/>
+                  </a:lnTo>
+                  <a:lnTo>
+                    <a:pt x="1145960" y="1146668"/>
+                  </a:lnTo>
+                  <a:lnTo>
+                    <a:pt x="1217582" y="1202642"/>
+                  </a:lnTo>
+                  <a:lnTo>
+                    <a:pt x="1289205" y="1257065"/>
+                  </a:lnTo>
+                  <a:lnTo>
+                    <a:pt x="1360827" y="1309980"/>
+                  </a:lnTo>
+                  <a:lnTo>
+                    <a:pt x="1432450" y="1361430"/>
+                  </a:lnTo>
+                  <a:lnTo>
+                    <a:pt x="1504073" y="1411454"/>
+                  </a:lnTo>
+                  <a:lnTo>
+                    <a:pt x="1575695" y="1460093"/>
+                  </a:lnTo>
+                  <a:lnTo>
+                    <a:pt x="1647318" y="1507384"/>
+                  </a:lnTo>
+                  <a:lnTo>
+                    <a:pt x="1718940" y="1553366"/>
+                  </a:lnTo>
+                  <a:lnTo>
+                    <a:pt x="1790563" y="1598073"/>
+                  </a:lnTo>
+                  <a:lnTo>
+                    <a:pt x="1862185" y="1641542"/>
+                  </a:lnTo>
+                  <a:lnTo>
+                    <a:pt x="1933808" y="1683807"/>
+                  </a:lnTo>
+                  <a:lnTo>
+                    <a:pt x="2005430" y="1724902"/>
+                  </a:lnTo>
+                  <a:lnTo>
+                    <a:pt x="2077053" y="1764858"/>
+                  </a:lnTo>
+                  <a:lnTo>
+                    <a:pt x="2148675" y="1803707"/>
+                  </a:lnTo>
+                  <a:lnTo>
+                    <a:pt x="2220298" y="1841480"/>
+                  </a:lnTo>
+                  <a:lnTo>
+                    <a:pt x="2291920" y="1878206"/>
+                  </a:lnTo>
+                  <a:lnTo>
+                    <a:pt x="2363543" y="1913916"/>
+                  </a:lnTo>
+                  <a:lnTo>
+                    <a:pt x="2435165" y="1948636"/>
+                  </a:lnTo>
+                  <a:lnTo>
+                    <a:pt x="2506788" y="1982394"/>
+                  </a:lnTo>
+                  <a:lnTo>
+                    <a:pt x="2578410" y="2015217"/>
+                  </a:lnTo>
+                  <a:lnTo>
+                    <a:pt x="2650033" y="2047131"/>
+                  </a:lnTo>
+                  <a:lnTo>
+                    <a:pt x="2721655" y="2078161"/>
+                  </a:lnTo>
+                  <a:lnTo>
+                    <a:pt x="2793278" y="2108332"/>
+                  </a:lnTo>
+                  <a:lnTo>
+                    <a:pt x="2864901" y="2137666"/>
+                  </a:lnTo>
+                  <a:lnTo>
+                    <a:pt x="2936523" y="2166188"/>
+                  </a:lnTo>
+                  <a:lnTo>
+                    <a:pt x="3008146" y="2193920"/>
+                  </a:lnTo>
+                  <a:lnTo>
+                    <a:pt x="3079768" y="2220884"/>
+                  </a:lnTo>
+                  <a:lnTo>
+                    <a:pt x="3151391" y="2247101"/>
+                  </a:lnTo>
+                  <a:lnTo>
+                    <a:pt x="3223013" y="2272591"/>
+                  </a:lnTo>
+                  <a:lnTo>
+                    <a:pt x="3294636" y="2297376"/>
+                  </a:lnTo>
+                  <a:lnTo>
+                    <a:pt x="3366258" y="2321474"/>
+                  </a:lnTo>
+                  <a:lnTo>
+                    <a:pt x="3437881" y="2338051"/>
+                  </a:lnTo>
+                  <a:lnTo>
+                    <a:pt x="3509503" y="2338713"/>
+                  </a:lnTo>
+                  <a:lnTo>
+                    <a:pt x="3581126" y="2339375"/>
+                  </a:lnTo>
+                  <a:lnTo>
+                    <a:pt x="3652748" y="2340036"/>
+                  </a:lnTo>
+                  <a:lnTo>
+                    <a:pt x="3724371" y="2340697"/>
+                  </a:lnTo>
+                  <a:lnTo>
+                    <a:pt x="3795993" y="2341358"/>
+                  </a:lnTo>
+                  <a:lnTo>
+                    <a:pt x="3867616" y="2342018"/>
+                  </a:lnTo>
+                  <a:lnTo>
+                    <a:pt x="3939238" y="2342677"/>
+                  </a:lnTo>
+                  <a:lnTo>
+                    <a:pt x="4010861" y="2343336"/>
+                  </a:lnTo>
+                  <a:lnTo>
+                    <a:pt x="4082483" y="2343994"/>
+                  </a:lnTo>
+                  <a:lnTo>
+                    <a:pt x="4154106" y="2344652"/>
+                  </a:lnTo>
+                  <a:lnTo>
+                    <a:pt x="4225729" y="2345309"/>
+                  </a:lnTo>
+                  <a:lnTo>
+                    <a:pt x="4297351" y="2345966"/>
+                  </a:lnTo>
+                  <a:lnTo>
+                    <a:pt x="4368974" y="2346622"/>
+                  </a:lnTo>
+                  <a:lnTo>
+                    <a:pt x="4440596" y="2347277"/>
+                  </a:lnTo>
+                  <a:lnTo>
+                    <a:pt x="4512219" y="2347933"/>
+                  </a:lnTo>
+                  <a:lnTo>
+                    <a:pt x="4583841" y="2348587"/>
+                  </a:lnTo>
+                  <a:lnTo>
+                    <a:pt x="4655464" y="2349241"/>
+                  </a:lnTo>
+                  <a:lnTo>
+                    <a:pt x="4727086" y="2349895"/>
+                  </a:lnTo>
+                  <a:lnTo>
+                    <a:pt x="4798709" y="2350548"/>
+                  </a:lnTo>
+                  <a:lnTo>
+                    <a:pt x="4870331" y="2351200"/>
+                  </a:lnTo>
+                  <a:lnTo>
+                    <a:pt x="4941954" y="2351852"/>
+                  </a:lnTo>
+                  <a:lnTo>
+                    <a:pt x="5013576" y="2352504"/>
+                  </a:lnTo>
+                  <a:lnTo>
+                    <a:pt x="5085199" y="2353155"/>
+                  </a:lnTo>
+                  <a:lnTo>
+                    <a:pt x="5156821" y="2353805"/>
+                  </a:lnTo>
+                  <a:lnTo>
+                    <a:pt x="5228444" y="2354455"/>
+                  </a:lnTo>
+                  <a:lnTo>
+                    <a:pt x="5300066" y="2355105"/>
+                  </a:lnTo>
+                  <a:lnTo>
+                    <a:pt x="5371689" y="2355753"/>
+                  </a:lnTo>
+                  <a:lnTo>
+                    <a:pt x="5443311" y="2356402"/>
+                  </a:lnTo>
+                  <a:lnTo>
+                    <a:pt x="5514934" y="2357050"/>
+                  </a:lnTo>
+                  <a:lnTo>
+                    <a:pt x="5586557" y="2357697"/>
+                  </a:lnTo>
+                  <a:lnTo>
+                    <a:pt x="5658179" y="2358344"/>
+                  </a:lnTo>
+                  <a:lnTo>
+                    <a:pt x="5729802" y="2358990"/>
+                  </a:lnTo>
+                  <a:lnTo>
+                    <a:pt x="5801424" y="2359636"/>
+                  </a:lnTo>
+                  <a:lnTo>
+                    <a:pt x="5873047" y="2360281"/>
+                  </a:lnTo>
+                  <a:lnTo>
+                    <a:pt x="5944669" y="2360926"/>
+                  </a:lnTo>
+                  <a:lnTo>
+                    <a:pt x="6016292" y="2361570"/>
+                  </a:lnTo>
+                  <a:lnTo>
+                    <a:pt x="6087914" y="2362214"/>
+                  </a:lnTo>
+                  <a:lnTo>
+                    <a:pt x="6159537" y="2362857"/>
+                  </a:lnTo>
+                  <a:lnTo>
+                    <a:pt x="6231159" y="2363500"/>
+                  </a:lnTo>
+                  <a:lnTo>
+                    <a:pt x="6302782" y="2364142"/>
+                  </a:lnTo>
+                  <a:lnTo>
+                    <a:pt x="6374404" y="2364783"/>
+                  </a:lnTo>
+                  <a:lnTo>
+                    <a:pt x="6446027" y="2365425"/>
+                  </a:lnTo>
+                  <a:lnTo>
+                    <a:pt x="6517649" y="2366065"/>
+                  </a:lnTo>
+                  <a:lnTo>
+                    <a:pt x="6589272" y="2366705"/>
+                  </a:lnTo>
+                  <a:lnTo>
+                    <a:pt x="6660894" y="2367345"/>
+                  </a:lnTo>
+                  <a:lnTo>
+                    <a:pt x="6732517" y="2367984"/>
+                  </a:lnTo>
+                  <a:lnTo>
+                    <a:pt x="6804139" y="2368623"/>
+                  </a:lnTo>
+                  <a:lnTo>
+                    <a:pt x="6875762" y="2369261"/>
+                  </a:lnTo>
+                  <a:lnTo>
+                    <a:pt x="6947385" y="2369898"/>
+                  </a:lnTo>
+                  <a:lnTo>
+                    <a:pt x="7019007" y="2370535"/>
+                  </a:lnTo>
+                  <a:lnTo>
+                    <a:pt x="7090630" y="2371172"/>
+                  </a:lnTo>
+                </a:path>
+              </a:pathLst>
+            </a:custGeom>
+          </p:spPr>
+          <p:txBody>
+            <a:bodyPr/>
+            <a:lstStyle/>
+            <a:p/>
+          </p:txBody>
+        </p:sp>
+        <p:sp>
+          <p:nvSpPr>
             <p:cNvPr id="22" name="pl22"/>
             <p:cNvSpPr/>
             <p:nvPr/>
           </p:nvSpPr>
           <p:spPr>
             <a:xfrm>
-              <a:off x="817517" y="2468934"/>
-              <a:ext cx="7235830" cy="2292175"/>
+              <a:off x="1172049" y="4695557"/>
+              <a:ext cx="7090630" cy="665409"/>
             </a:xfrm>
             <a:custGeom>
               <a:avLst/>
               <a:pathLst>
-                <a:path w="7235830" h="2292175">
+                <a:path w="7090630" h="665409">
                   <a:moveTo>
+                    <a:pt x="7090630" y="665409"/>
+                  </a:moveTo>
+                  <a:lnTo>
+                    <a:pt x="7019007" y="659817"/>
+                  </a:lnTo>
+                  <a:lnTo>
+                    <a:pt x="6947385" y="654065"/>
+                  </a:lnTo>
+                  <a:lnTo>
+                    <a:pt x="6875762" y="648150"/>
+                  </a:lnTo>
+                  <a:lnTo>
+                    <a:pt x="6804139" y="642066"/>
+                  </a:lnTo>
+                  <a:lnTo>
+                    <a:pt x="6732517" y="635809"/>
+                  </a:lnTo>
+                  <a:lnTo>
+                    <a:pt x="6660894" y="629373"/>
+                  </a:lnTo>
+                  <a:lnTo>
+                    <a:pt x="6589272" y="622755"/>
+                  </a:lnTo>
+                  <a:lnTo>
+                    <a:pt x="6517649" y="615947"/>
+                  </a:lnTo>
+                  <a:lnTo>
+                    <a:pt x="6446027" y="608946"/>
+                  </a:lnTo>
+                  <a:lnTo>
+                    <a:pt x="6374404" y="601745"/>
+                  </a:lnTo>
+                  <a:lnTo>
+                    <a:pt x="6302782" y="594339"/>
+                  </a:lnTo>
+                  <a:lnTo>
+                    <a:pt x="6231159" y="586723"/>
+                  </a:lnTo>
+                  <a:lnTo>
+                    <a:pt x="6159537" y="578889"/>
+                  </a:lnTo>
+                  <a:lnTo>
+                    <a:pt x="6087914" y="570832"/>
+                  </a:lnTo>
+                  <a:lnTo>
+                    <a:pt x="6016292" y="562545"/>
+                  </a:lnTo>
+                  <a:lnTo>
+                    <a:pt x="5944669" y="554022"/>
+                  </a:lnTo>
+                  <a:lnTo>
+                    <a:pt x="5873047" y="545257"/>
+                  </a:lnTo>
+                  <a:lnTo>
+                    <a:pt x="5801424" y="536242"/>
+                  </a:lnTo>
+                  <a:lnTo>
+                    <a:pt x="5729802" y="526969"/>
+                  </a:lnTo>
+                  <a:lnTo>
+                    <a:pt x="5658179" y="517433"/>
+                  </a:lnTo>
+                  <a:lnTo>
+                    <a:pt x="5586557" y="507625"/>
+                  </a:lnTo>
+                  <a:lnTo>
+                    <a:pt x="5514934" y="497538"/>
+                  </a:lnTo>
+                  <a:lnTo>
+                    <a:pt x="5443311" y="487163"/>
+                  </a:lnTo>
+                  <a:lnTo>
+                    <a:pt x="5371689" y="476493"/>
+                  </a:lnTo>
+                  <a:lnTo>
+                    <a:pt x="5300066" y="465518"/>
+                  </a:lnTo>
+                  <a:lnTo>
+                    <a:pt x="5228444" y="454231"/>
+                  </a:lnTo>
+                  <a:lnTo>
+                    <a:pt x="5156821" y="442623"/>
+                  </a:lnTo>
+                  <a:lnTo>
+                    <a:pt x="5085199" y="430684"/>
+                  </a:lnTo>
+                  <a:lnTo>
+                    <a:pt x="5013576" y="418404"/>
+                  </a:lnTo>
+                  <a:lnTo>
+                    <a:pt x="4941954" y="405775"/>
+                  </a:lnTo>
+                  <a:lnTo>
+                    <a:pt x="4870331" y="392786"/>
+                  </a:lnTo>
+                  <a:lnTo>
+                    <a:pt x="4798709" y="379427"/>
+                  </a:lnTo>
+                  <a:lnTo>
+                    <a:pt x="4727086" y="365687"/>
+                  </a:lnTo>
+                  <a:lnTo>
+                    <a:pt x="4655464" y="351556"/>
+                  </a:lnTo>
+                  <a:lnTo>
+                    <a:pt x="4583841" y="337022"/>
+                  </a:lnTo>
+                  <a:lnTo>
+                    <a:pt x="4512219" y="322074"/>
+                  </a:lnTo>
+                  <a:lnTo>
+                    <a:pt x="4440596" y="306700"/>
+                  </a:lnTo>
+                  <a:lnTo>
+                    <a:pt x="4368974" y="290889"/>
+                  </a:lnTo>
+                  <a:lnTo>
+                    <a:pt x="4297351" y="274627"/>
+                  </a:lnTo>
+                  <a:lnTo>
+                    <a:pt x="4225729" y="257901"/>
+                  </a:lnTo>
+                  <a:lnTo>
+                    <a:pt x="4154106" y="240699"/>
+                  </a:lnTo>
+                  <a:lnTo>
+                    <a:pt x="4082483" y="223007"/>
+                  </a:lnTo>
+                  <a:lnTo>
+                    <a:pt x="4010861" y="204811"/>
+                  </a:lnTo>
+                  <a:lnTo>
+                    <a:pt x="3939238" y="186096"/>
+                  </a:lnTo>
+                  <a:lnTo>
+                    <a:pt x="3867616" y="166849"/>
+                  </a:lnTo>
+                  <a:lnTo>
+                    <a:pt x="3795993" y="147052"/>
+                  </a:lnTo>
+                  <a:lnTo>
+                    <a:pt x="3724371" y="126692"/>
+                  </a:lnTo>
+                  <a:lnTo>
+                    <a:pt x="3652748" y="105752"/>
+                  </a:lnTo>
+                  <a:lnTo>
+                    <a:pt x="3581126" y="84215"/>
+                  </a:lnTo>
+                  <a:lnTo>
+                    <a:pt x="3509503" y="62065"/>
+                  </a:lnTo>
+                  <a:lnTo>
+                    <a:pt x="3437881" y="39284"/>
+                  </a:lnTo>
+                  <a:lnTo>
+                    <a:pt x="3366258" y="31767"/>
+                  </a:lnTo>
+                  <a:lnTo>
+                    <a:pt x="3294636" y="31104"/>
+                  </a:lnTo>
+                  <a:lnTo>
+                    <a:pt x="3223013" y="30439"/>
+                  </a:lnTo>
+                  <a:lnTo>
+                    <a:pt x="3151391" y="29775"/>
+                  </a:lnTo>
+                  <a:lnTo>
+                    <a:pt x="3079768" y="29110"/>
+                  </a:lnTo>
+                  <a:lnTo>
+                    <a:pt x="3008146" y="28444"/>
+                  </a:lnTo>
+                  <a:lnTo>
+                    <a:pt x="2936523" y="27778"/>
+                  </a:lnTo>
+                  <a:lnTo>
+                    <a:pt x="2864901" y="27111"/>
+                  </a:lnTo>
+                  <a:lnTo>
+                    <a:pt x="2793278" y="26444"/>
+                  </a:lnTo>
+                  <a:lnTo>
+                    <a:pt x="2721655" y="25776"/>
+                  </a:lnTo>
+                  <a:lnTo>
+                    <a:pt x="2650033" y="25108"/>
+                  </a:lnTo>
+                  <a:lnTo>
+                    <a:pt x="2578410" y="24439"/>
+                  </a:lnTo>
+                  <a:lnTo>
+                    <a:pt x="2506788" y="23769"/>
+                  </a:lnTo>
+                  <a:lnTo>
+                    <a:pt x="2435165" y="23099"/>
+                  </a:lnTo>
+                  <a:lnTo>
+                    <a:pt x="2363543" y="22429"/>
+                  </a:lnTo>
+                  <a:lnTo>
+                    <a:pt x="2291920" y="21758"/>
+                  </a:lnTo>
+                  <a:lnTo>
+                    <a:pt x="2220298" y="21086"/>
+                  </a:lnTo>
+                  <a:lnTo>
+                    <a:pt x="2148675" y="20414"/>
+                  </a:lnTo>
+                  <a:lnTo>
+                    <a:pt x="2077053" y="19742"/>
+                  </a:lnTo>
+                  <a:lnTo>
+                    <a:pt x="2005430" y="19068"/>
+                  </a:lnTo>
+                  <a:lnTo>
+                    <a:pt x="1933808" y="18395"/>
+                  </a:lnTo>
+                  <a:lnTo>
+                    <a:pt x="1862185" y="17720"/>
+                  </a:lnTo>
+                  <a:lnTo>
+                    <a:pt x="1790563" y="17046"/>
+                  </a:lnTo>
+                  <a:lnTo>
+                    <a:pt x="1718940" y="16370"/>
+                  </a:lnTo>
+                  <a:lnTo>
+                    <a:pt x="1647318" y="15694"/>
+                  </a:lnTo>
+                  <a:lnTo>
+                    <a:pt x="1575695" y="15018"/>
+                  </a:lnTo>
+                  <a:lnTo>
+                    <a:pt x="1504073" y="14341"/>
+                  </a:lnTo>
+                  <a:lnTo>
+                    <a:pt x="1432450" y="13664"/>
+                  </a:lnTo>
+                  <a:lnTo>
+                    <a:pt x="1360827" y="12986"/>
+                  </a:lnTo>
+                  <a:lnTo>
+                    <a:pt x="1289205" y="12307"/>
+                  </a:lnTo>
+                  <a:lnTo>
+                    <a:pt x="1217582" y="11628"/>
+                  </a:lnTo>
+                  <a:lnTo>
+                    <a:pt x="1145960" y="10948"/>
+                  </a:lnTo>
+                  <a:lnTo>
+                    <a:pt x="1074337" y="10268"/>
+                  </a:lnTo>
+                  <a:lnTo>
+                    <a:pt x="1002715" y="9587"/>
+                  </a:lnTo>
+                  <a:lnTo>
+                    <a:pt x="931092" y="8906"/>
+                  </a:lnTo>
+                  <a:lnTo>
+                    <a:pt x="859470" y="8224"/>
+                  </a:lnTo>
+                  <a:lnTo>
+                    <a:pt x="787847" y="7542"/>
+                  </a:lnTo>
+                  <a:lnTo>
+                    <a:pt x="716225" y="6859"/>
+                  </a:lnTo>
+                  <a:lnTo>
+                    <a:pt x="644602" y="6175"/>
+                  </a:lnTo>
+                  <a:lnTo>
+                    <a:pt x="572980" y="5491"/>
+                  </a:lnTo>
+                  <a:lnTo>
+                    <a:pt x="501357" y="4807"/>
+                  </a:lnTo>
+                  <a:lnTo>
+                    <a:pt x="429735" y="4122"/>
+                  </a:lnTo>
+                  <a:lnTo>
+                    <a:pt x="358112" y="3436"/>
+                  </a:lnTo>
+                  <a:lnTo>
+                    <a:pt x="286490" y="2750"/>
+                  </a:lnTo>
+                  <a:lnTo>
+                    <a:pt x="214867" y="2063"/>
+                  </a:lnTo>
+                  <a:lnTo>
+                    <a:pt x="143245" y="1376"/>
+                  </a:lnTo>
+                  <a:lnTo>
+                    <a:pt x="71622" y="688"/>
+                  </a:lnTo>
+                  <a:lnTo>
                     <a:pt x="0" y="0"/>
-                  </a:moveTo>
-                  <a:lnTo>
-                    <a:pt x="7347" y="8739"/>
-                  </a:lnTo>
-                  <a:lnTo>
-                    <a:pt x="81107" y="94046"/>
-                  </a:lnTo>
-                  <a:lnTo>
-                    <a:pt x="154867" y="176990"/>
-                  </a:lnTo>
-                  <a:lnTo>
-                    <a:pt x="228627" y="257636"/>
-                  </a:lnTo>
-                  <a:lnTo>
-                    <a:pt x="302387" y="336048"/>
-                  </a:lnTo>
-                  <a:lnTo>
-                    <a:pt x="376147" y="412288"/>
-                  </a:lnTo>
-                  <a:lnTo>
-                    <a:pt x="449907" y="486416"/>
-                  </a:lnTo>
-                  <a:lnTo>
-                    <a:pt x="523667" y="558491"/>
-                  </a:lnTo>
-                  <a:lnTo>
-                    <a:pt x="597427" y="628569"/>
-                  </a:lnTo>
-                  <a:lnTo>
-                    <a:pt x="671187" y="696706"/>
-                  </a:lnTo>
-                  <a:lnTo>
-                    <a:pt x="744947" y="762955"/>
-                  </a:lnTo>
-                  <a:lnTo>
-                    <a:pt x="818707" y="827370"/>
-                  </a:lnTo>
-                  <a:lnTo>
-                    <a:pt x="892467" y="890000"/>
-                  </a:lnTo>
-                  <a:lnTo>
-                    <a:pt x="966227" y="950895"/>
-                  </a:lnTo>
-                  <a:lnTo>
-                    <a:pt x="1039987" y="1010103"/>
-                  </a:lnTo>
-                  <a:lnTo>
-                    <a:pt x="1113747" y="1067671"/>
-                  </a:lnTo>
-                  <a:lnTo>
-                    <a:pt x="1187508" y="1123645"/>
-                  </a:lnTo>
-                  <a:lnTo>
-                    <a:pt x="1261268" y="1178068"/>
-                  </a:lnTo>
-                  <a:lnTo>
-                    <a:pt x="1335028" y="1230983"/>
-                  </a:lnTo>
-                  <a:lnTo>
-                    <a:pt x="1408788" y="1282433"/>
-                  </a:lnTo>
-                  <a:lnTo>
-                    <a:pt x="1482548" y="1332457"/>
-                  </a:lnTo>
-                  <a:lnTo>
-                    <a:pt x="1556308" y="1381096"/>
-                  </a:lnTo>
-                  <a:lnTo>
-                    <a:pt x="1630068" y="1428387"/>
-                  </a:lnTo>
-                  <a:lnTo>
-                    <a:pt x="1703828" y="1474368"/>
-                  </a:lnTo>
-                  <a:lnTo>
-                    <a:pt x="1777588" y="1519076"/>
-                  </a:lnTo>
-                  <a:lnTo>
-                    <a:pt x="1851348" y="1562545"/>
-                  </a:lnTo>
-                  <a:lnTo>
-                    <a:pt x="1925108" y="1604810"/>
-                  </a:lnTo>
-                  <a:lnTo>
-                    <a:pt x="1998868" y="1645905"/>
-                  </a:lnTo>
-                  <a:lnTo>
-                    <a:pt x="2072628" y="1685861"/>
-                  </a:lnTo>
-                  <a:lnTo>
-                    <a:pt x="2146388" y="1724710"/>
-                  </a:lnTo>
-                  <a:lnTo>
-                    <a:pt x="2220148" y="1762483"/>
-                  </a:lnTo>
-                  <a:lnTo>
-                    <a:pt x="2293908" y="1799209"/>
-                  </a:lnTo>
-                  <a:lnTo>
-                    <a:pt x="2367668" y="1834919"/>
-                  </a:lnTo>
-                  <a:lnTo>
-                    <a:pt x="2441428" y="1869639"/>
-                  </a:lnTo>
-                  <a:lnTo>
-                    <a:pt x="2515188" y="1903397"/>
-                  </a:lnTo>
-                  <a:lnTo>
-                    <a:pt x="2588948" y="1936220"/>
-                  </a:lnTo>
-                  <a:lnTo>
-                    <a:pt x="2662708" y="1968134"/>
-                  </a:lnTo>
-                  <a:lnTo>
-                    <a:pt x="2736468" y="1999164"/>
-                  </a:lnTo>
-                  <a:lnTo>
-                    <a:pt x="2810228" y="2029334"/>
-                  </a:lnTo>
-                  <a:lnTo>
-                    <a:pt x="2883988" y="2058669"/>
-                  </a:lnTo>
-                  <a:lnTo>
-                    <a:pt x="2957748" y="2087191"/>
-                  </a:lnTo>
-                  <a:lnTo>
-                    <a:pt x="3031508" y="2114923"/>
-                  </a:lnTo>
-                  <a:lnTo>
-                    <a:pt x="3105268" y="2141887"/>
-                  </a:lnTo>
-                  <a:lnTo>
-                    <a:pt x="3179028" y="2168104"/>
-                  </a:lnTo>
-                  <a:lnTo>
-                    <a:pt x="3252788" y="2193594"/>
-                  </a:lnTo>
-                  <a:lnTo>
-                    <a:pt x="3326548" y="2218379"/>
-                  </a:lnTo>
-                  <a:lnTo>
-                    <a:pt x="3400308" y="2242477"/>
-                  </a:lnTo>
-                  <a:lnTo>
-                    <a:pt x="3474068" y="2259053"/>
-                  </a:lnTo>
-                  <a:lnTo>
-                    <a:pt x="3547828" y="2259716"/>
-                  </a:lnTo>
-                  <a:lnTo>
-                    <a:pt x="3621588" y="2260378"/>
-                  </a:lnTo>
-                  <a:lnTo>
-                    <a:pt x="3695348" y="2261039"/>
-                  </a:lnTo>
-                  <a:lnTo>
-                    <a:pt x="3769108" y="2261700"/>
-                  </a:lnTo>
-                  <a:lnTo>
-                    <a:pt x="3842868" y="2262361"/>
-                  </a:lnTo>
-                  <a:lnTo>
-                    <a:pt x="3916628" y="2263020"/>
-                  </a:lnTo>
-                  <a:lnTo>
-                    <a:pt x="3990388" y="2263680"/>
-                  </a:lnTo>
-                  <a:lnTo>
-                    <a:pt x="4064149" y="2264339"/>
-                  </a:lnTo>
-                  <a:lnTo>
-                    <a:pt x="4137909" y="2264997"/>
-                  </a:lnTo>
-                  <a:lnTo>
-                    <a:pt x="4211669" y="2265655"/>
-                  </a:lnTo>
-                  <a:lnTo>
-                    <a:pt x="4285429" y="2266312"/>
-                  </a:lnTo>
-                  <a:lnTo>
-                    <a:pt x="4359189" y="2266968"/>
-                  </a:lnTo>
-                  <a:lnTo>
-                    <a:pt x="4432949" y="2267625"/>
-                  </a:lnTo>
-                  <a:lnTo>
-                    <a:pt x="4506709" y="2268280"/>
-                  </a:lnTo>
-                  <a:lnTo>
-                    <a:pt x="4580469" y="2268935"/>
-                  </a:lnTo>
-                  <a:lnTo>
-                    <a:pt x="4654229" y="2269590"/>
-                  </a:lnTo>
-                  <a:lnTo>
-                    <a:pt x="4727989" y="2270244"/>
-                  </a:lnTo>
-                  <a:lnTo>
-                    <a:pt x="4801749" y="2270898"/>
-                  </a:lnTo>
-                  <a:lnTo>
-                    <a:pt x="4875509" y="2271551"/>
-                  </a:lnTo>
-                  <a:lnTo>
-                    <a:pt x="4949269" y="2272203"/>
-                  </a:lnTo>
-                  <a:lnTo>
-                    <a:pt x="5023029" y="2272855"/>
-                  </a:lnTo>
-                  <a:lnTo>
-                    <a:pt x="5096789" y="2273507"/>
-                  </a:lnTo>
-                  <a:lnTo>
-                    <a:pt x="5170549" y="2274158"/>
-                  </a:lnTo>
-                  <a:lnTo>
-                    <a:pt x="5244309" y="2274808"/>
-                  </a:lnTo>
-                  <a:lnTo>
-                    <a:pt x="5318069" y="2275458"/>
-                  </a:lnTo>
-                  <a:lnTo>
-                    <a:pt x="5391829" y="2276107"/>
-                  </a:lnTo>
-                  <a:lnTo>
-                    <a:pt x="5465589" y="2276756"/>
-                  </a:lnTo>
-                  <a:lnTo>
-                    <a:pt x="5539349" y="2277405"/>
-                  </a:lnTo>
-                  <a:lnTo>
-                    <a:pt x="5613109" y="2278052"/>
-                  </a:lnTo>
-                  <a:lnTo>
-                    <a:pt x="5686869" y="2278700"/>
-                  </a:lnTo>
-                  <a:lnTo>
-                    <a:pt x="5760629" y="2279347"/>
-                  </a:lnTo>
-                  <a:lnTo>
-                    <a:pt x="5834389" y="2279993"/>
-                  </a:lnTo>
-                  <a:lnTo>
-                    <a:pt x="5908149" y="2280639"/>
-                  </a:lnTo>
-                  <a:lnTo>
-                    <a:pt x="5981909" y="2281284"/>
-                  </a:lnTo>
-                  <a:lnTo>
-                    <a:pt x="6055669" y="2281929"/>
-                  </a:lnTo>
-                  <a:lnTo>
-                    <a:pt x="6129429" y="2282573"/>
-                  </a:lnTo>
-                  <a:lnTo>
-                    <a:pt x="6203189" y="2283217"/>
-                  </a:lnTo>
-                  <a:lnTo>
-                    <a:pt x="6276949" y="2283860"/>
-                  </a:lnTo>
-                  <a:lnTo>
-                    <a:pt x="6350709" y="2284502"/>
-                  </a:lnTo>
-                  <a:lnTo>
-                    <a:pt x="6424469" y="2285145"/>
-                  </a:lnTo>
-                  <a:lnTo>
-                    <a:pt x="6498229" y="2285786"/>
-                  </a:lnTo>
-                  <a:lnTo>
-                    <a:pt x="6571989" y="2286427"/>
-                  </a:lnTo>
-                  <a:lnTo>
-                    <a:pt x="6645749" y="2287068"/>
-                  </a:lnTo>
-                  <a:lnTo>
-                    <a:pt x="6719509" y="2287708"/>
-                  </a:lnTo>
-                  <a:lnTo>
-                    <a:pt x="6793269" y="2288348"/>
-                  </a:lnTo>
-                  <a:lnTo>
-                    <a:pt x="6867029" y="2288987"/>
-                  </a:lnTo>
-                  <a:lnTo>
-                    <a:pt x="6940789" y="2289625"/>
-                  </a:lnTo>
-                  <a:lnTo>
-                    <a:pt x="7014550" y="2290263"/>
-                  </a:lnTo>
-                  <a:lnTo>
-                    <a:pt x="7088310" y="2290901"/>
-                  </a:lnTo>
-                  <a:lnTo>
-                    <a:pt x="7162070" y="2291538"/>
-                  </a:lnTo>
-                  <a:lnTo>
-                    <a:pt x="7235830" y="2292175"/>
                   </a:lnTo>
                 </a:path>
               </a:pathLst>
@@ -3958,637 +4240,312 @@
           </p:nvSpPr>
           <p:spPr>
             <a:xfrm>
-              <a:off x="817517" y="4696177"/>
-              <a:ext cx="7235830" cy="664789"/>
+              <a:off x="1172049" y="3905205"/>
+              <a:ext cx="7090630" cy="1256735"/>
             </a:xfrm>
             <a:custGeom>
               <a:avLst/>
               <a:pathLst>
-                <a:path w="7235830" h="664789">
-                  <a:moveTo>
-                    <a:pt x="7235830" y="664789"/>
-                  </a:moveTo>
-                  <a:lnTo>
-                    <a:pt x="7162070" y="659197"/>
-                  </a:lnTo>
-                  <a:lnTo>
-                    <a:pt x="7088310" y="653445"/>
-                  </a:lnTo>
-                  <a:lnTo>
-                    <a:pt x="7014550" y="647530"/>
-                  </a:lnTo>
-                  <a:lnTo>
-                    <a:pt x="6940789" y="641446"/>
-                  </a:lnTo>
-                  <a:lnTo>
-                    <a:pt x="6867029" y="635189"/>
-                  </a:lnTo>
-                  <a:lnTo>
-                    <a:pt x="6793269" y="628754"/>
-                  </a:lnTo>
-                  <a:lnTo>
-                    <a:pt x="6719509" y="622135"/>
-                  </a:lnTo>
-                  <a:lnTo>
-                    <a:pt x="6645749" y="615327"/>
-                  </a:lnTo>
-                  <a:lnTo>
-                    <a:pt x="6571989" y="608326"/>
-                  </a:lnTo>
-                  <a:lnTo>
-                    <a:pt x="6498229" y="601125"/>
-                  </a:lnTo>
-                  <a:lnTo>
-                    <a:pt x="6424469" y="593720"/>
-                  </a:lnTo>
-                  <a:lnTo>
-                    <a:pt x="6350709" y="586103"/>
-                  </a:lnTo>
-                  <a:lnTo>
-                    <a:pt x="6276949" y="578269"/>
-                  </a:lnTo>
-                  <a:lnTo>
-                    <a:pt x="6203189" y="570212"/>
-                  </a:lnTo>
-                  <a:lnTo>
-                    <a:pt x="6129429" y="561925"/>
-                  </a:lnTo>
-                  <a:lnTo>
-                    <a:pt x="6055669" y="553402"/>
-                  </a:lnTo>
-                  <a:lnTo>
-                    <a:pt x="5981909" y="544637"/>
-                  </a:lnTo>
-                  <a:lnTo>
-                    <a:pt x="5908149" y="535622"/>
-                  </a:lnTo>
-                  <a:lnTo>
-                    <a:pt x="5834389" y="526350"/>
-                  </a:lnTo>
-                  <a:lnTo>
-                    <a:pt x="5760629" y="516813"/>
-                  </a:lnTo>
-                  <a:lnTo>
-                    <a:pt x="5686869" y="507005"/>
-                  </a:lnTo>
-                  <a:lnTo>
-                    <a:pt x="5613109" y="496918"/>
-                  </a:lnTo>
-                  <a:lnTo>
-                    <a:pt x="5539349" y="486543"/>
-                  </a:lnTo>
-                  <a:lnTo>
-                    <a:pt x="5465589" y="475873"/>
-                  </a:lnTo>
-                  <a:lnTo>
-                    <a:pt x="5391829" y="464899"/>
-                  </a:lnTo>
-                  <a:lnTo>
-                    <a:pt x="5318069" y="453612"/>
-                  </a:lnTo>
-                  <a:lnTo>
-                    <a:pt x="5244309" y="442003"/>
-                  </a:lnTo>
-                  <a:lnTo>
-                    <a:pt x="5170549" y="430064"/>
-                  </a:lnTo>
-                  <a:lnTo>
-                    <a:pt x="5096789" y="417784"/>
-                  </a:lnTo>
-                  <a:lnTo>
-                    <a:pt x="5023029" y="405155"/>
-                  </a:lnTo>
-                  <a:lnTo>
-                    <a:pt x="4949269" y="392166"/>
-                  </a:lnTo>
-                  <a:lnTo>
-                    <a:pt x="4875509" y="378807"/>
-                  </a:lnTo>
-                  <a:lnTo>
-                    <a:pt x="4801749" y="365067"/>
-                  </a:lnTo>
-                  <a:lnTo>
-                    <a:pt x="4727989" y="350936"/>
-                  </a:lnTo>
-                  <a:lnTo>
-                    <a:pt x="4654229" y="336402"/>
-                  </a:lnTo>
-                  <a:lnTo>
-                    <a:pt x="4580469" y="321454"/>
-                  </a:lnTo>
-                  <a:lnTo>
-                    <a:pt x="4506709" y="306081"/>
-                  </a:lnTo>
-                  <a:lnTo>
-                    <a:pt x="4432949" y="290269"/>
-                  </a:lnTo>
-                  <a:lnTo>
-                    <a:pt x="4359189" y="274007"/>
-                  </a:lnTo>
-                  <a:lnTo>
-                    <a:pt x="4285429" y="257281"/>
-                  </a:lnTo>
-                  <a:lnTo>
-                    <a:pt x="4211669" y="240079"/>
-                  </a:lnTo>
-                  <a:lnTo>
-                    <a:pt x="4137909" y="222387"/>
-                  </a:lnTo>
-                  <a:lnTo>
-                    <a:pt x="4064149" y="204191"/>
-                  </a:lnTo>
-                  <a:lnTo>
-                    <a:pt x="3990388" y="185476"/>
-                  </a:lnTo>
-                  <a:lnTo>
-                    <a:pt x="3916628" y="166229"/>
-                  </a:lnTo>
-                  <a:lnTo>
-                    <a:pt x="3842868" y="146433"/>
-                  </a:lnTo>
-                  <a:lnTo>
-                    <a:pt x="3769108" y="126073"/>
-                  </a:lnTo>
-                  <a:lnTo>
-                    <a:pt x="3695348" y="105132"/>
-                  </a:lnTo>
-                  <a:lnTo>
-                    <a:pt x="3621588" y="83596"/>
-                  </a:lnTo>
-                  <a:lnTo>
-                    <a:pt x="3547828" y="61445"/>
-                  </a:lnTo>
-                  <a:lnTo>
-                    <a:pt x="3474068" y="38664"/>
-                  </a:lnTo>
-                  <a:lnTo>
-                    <a:pt x="3400308" y="31147"/>
-                  </a:lnTo>
-                  <a:lnTo>
-                    <a:pt x="3326548" y="30484"/>
-                  </a:lnTo>
-                  <a:lnTo>
-                    <a:pt x="3252788" y="29820"/>
-                  </a:lnTo>
-                  <a:lnTo>
-                    <a:pt x="3179028" y="29155"/>
-                  </a:lnTo>
-                  <a:lnTo>
-                    <a:pt x="3105268" y="28490"/>
-                  </a:lnTo>
-                  <a:lnTo>
-                    <a:pt x="3031508" y="27824"/>
-                  </a:lnTo>
-                  <a:lnTo>
-                    <a:pt x="2957748" y="27158"/>
-                  </a:lnTo>
-                  <a:lnTo>
-                    <a:pt x="2883988" y="26491"/>
-                  </a:lnTo>
-                  <a:lnTo>
-                    <a:pt x="2810228" y="25824"/>
-                  </a:lnTo>
-                  <a:lnTo>
-                    <a:pt x="2736468" y="25156"/>
-                  </a:lnTo>
-                  <a:lnTo>
-                    <a:pt x="2662708" y="24488"/>
-                  </a:lnTo>
-                  <a:lnTo>
-                    <a:pt x="2588948" y="23819"/>
-                  </a:lnTo>
-                  <a:lnTo>
-                    <a:pt x="2515188" y="23150"/>
-                  </a:lnTo>
-                  <a:lnTo>
-                    <a:pt x="2441428" y="22480"/>
-                  </a:lnTo>
-                  <a:lnTo>
-                    <a:pt x="2367668" y="21809"/>
-                  </a:lnTo>
-                  <a:lnTo>
-                    <a:pt x="2293908" y="21138"/>
-                  </a:lnTo>
-                  <a:lnTo>
-                    <a:pt x="2220148" y="20466"/>
-                  </a:lnTo>
-                  <a:lnTo>
-                    <a:pt x="2146388" y="19794"/>
-                  </a:lnTo>
-                  <a:lnTo>
-                    <a:pt x="2072628" y="19122"/>
-                  </a:lnTo>
-                  <a:lnTo>
-                    <a:pt x="1998868" y="18449"/>
-                  </a:lnTo>
-                  <a:lnTo>
-                    <a:pt x="1925108" y="17775"/>
-                  </a:lnTo>
-                  <a:lnTo>
-                    <a:pt x="1851348" y="17101"/>
-                  </a:lnTo>
-                  <a:lnTo>
-                    <a:pt x="1777588" y="16426"/>
-                  </a:lnTo>
-                  <a:lnTo>
-                    <a:pt x="1703828" y="15751"/>
-                  </a:lnTo>
-                  <a:lnTo>
-                    <a:pt x="1630068" y="15075"/>
-                  </a:lnTo>
-                  <a:lnTo>
-                    <a:pt x="1556308" y="14398"/>
-                  </a:lnTo>
-                  <a:lnTo>
-                    <a:pt x="1482548" y="13721"/>
-                  </a:lnTo>
-                  <a:lnTo>
-                    <a:pt x="1408788" y="13044"/>
-                  </a:lnTo>
-                  <a:lnTo>
-                    <a:pt x="1335028" y="12366"/>
-                  </a:lnTo>
-                  <a:lnTo>
-                    <a:pt x="1261268" y="11687"/>
-                  </a:lnTo>
-                  <a:lnTo>
-                    <a:pt x="1187508" y="11008"/>
-                  </a:lnTo>
-                  <a:lnTo>
-                    <a:pt x="1113747" y="10328"/>
-                  </a:lnTo>
-                  <a:lnTo>
-                    <a:pt x="1039987" y="9648"/>
-                  </a:lnTo>
-                  <a:lnTo>
-                    <a:pt x="966227" y="8967"/>
-                  </a:lnTo>
-                  <a:lnTo>
-                    <a:pt x="892467" y="8286"/>
-                  </a:lnTo>
-                  <a:lnTo>
-                    <a:pt x="818707" y="7604"/>
-                  </a:lnTo>
-                  <a:lnTo>
-                    <a:pt x="744947" y="6922"/>
-                  </a:lnTo>
-                  <a:lnTo>
-                    <a:pt x="671187" y="6239"/>
-                  </a:lnTo>
-                  <a:lnTo>
-                    <a:pt x="597427" y="5556"/>
-                  </a:lnTo>
-                  <a:lnTo>
-                    <a:pt x="523667" y="4872"/>
-                  </a:lnTo>
-                  <a:lnTo>
-                    <a:pt x="449907" y="4187"/>
-                  </a:lnTo>
-                  <a:lnTo>
-                    <a:pt x="376147" y="3502"/>
-                  </a:lnTo>
-                  <a:lnTo>
-                    <a:pt x="302387" y="2816"/>
-                  </a:lnTo>
-                  <a:lnTo>
-                    <a:pt x="228627" y="2130"/>
-                  </a:lnTo>
-                  <a:lnTo>
-                    <a:pt x="154867" y="1443"/>
-                  </a:lnTo>
-                  <a:lnTo>
-                    <a:pt x="81107" y="756"/>
-                  </a:lnTo>
-                  <a:lnTo>
-                    <a:pt x="7347" y="68"/>
-                  </a:lnTo>
-                  <a:lnTo>
-                    <a:pt x="0" y="0"/>
-                  </a:lnTo>
-                </a:path>
-              </a:pathLst>
-            </a:custGeom>
-          </p:spPr>
-          <p:txBody>
-            <a:bodyPr/>
-            <a:lstStyle/>
-            <a:p/>
-          </p:txBody>
-        </p:sp>
-        <p:sp>
-          <p:nvSpPr>
-            <p:cNvPr id="24" name="pl24"/>
-            <p:cNvSpPr/>
-            <p:nvPr/>
-          </p:nvSpPr>
-          <p:spPr>
-            <a:xfrm>
-              <a:off x="817517" y="3926538"/>
-              <a:ext cx="7235830" cy="1235402"/>
-            </a:xfrm>
-            <a:custGeom>
-              <a:avLst/>
-              <a:pathLst>
-                <a:path w="7235830" h="1235402">
+                <a:path w="7090630" h="1256735">
                   <a:moveTo>
                     <a:pt x="0" y="0"/>
                   </a:moveTo>
                   <a:lnTo>
-                    <a:pt x="7347" y="2360"/>
-                  </a:lnTo>
-                  <a:lnTo>
-                    <a:pt x="81107" y="25713"/>
-                  </a:lnTo>
-                  <a:lnTo>
-                    <a:pt x="154867" y="48731"/>
-                  </a:lnTo>
-                  <a:lnTo>
-                    <a:pt x="228627" y="71419"/>
-                  </a:lnTo>
-                  <a:lnTo>
-                    <a:pt x="302387" y="93782"/>
-                  </a:lnTo>
-                  <a:lnTo>
-                    <a:pt x="376147" y="115824"/>
-                  </a:lnTo>
-                  <a:lnTo>
-                    <a:pt x="449907" y="137550"/>
-                  </a:lnTo>
-                  <a:lnTo>
-                    <a:pt x="523667" y="158964"/>
-                  </a:lnTo>
-                  <a:lnTo>
-                    <a:pt x="597427" y="180072"/>
-                  </a:lnTo>
-                  <a:lnTo>
-                    <a:pt x="671187" y="200876"/>
-                  </a:lnTo>
-                  <a:lnTo>
-                    <a:pt x="744947" y="221382"/>
-                  </a:lnTo>
-                  <a:lnTo>
-                    <a:pt x="818707" y="241594"/>
-                  </a:lnTo>
-                  <a:lnTo>
-                    <a:pt x="892467" y="261517"/>
-                  </a:lnTo>
-                  <a:lnTo>
-                    <a:pt x="966227" y="281153"/>
-                  </a:lnTo>
-                  <a:lnTo>
-                    <a:pt x="1039987" y="300508"/>
-                  </a:lnTo>
-                  <a:lnTo>
-                    <a:pt x="1113747" y="319585"/>
-                  </a:lnTo>
-                  <a:lnTo>
-                    <a:pt x="1187508" y="338389"/>
-                  </a:lnTo>
-                  <a:lnTo>
-                    <a:pt x="1261268" y="356923"/>
-                  </a:lnTo>
-                  <a:lnTo>
-                    <a:pt x="1335028" y="375191"/>
-                  </a:lnTo>
-                  <a:lnTo>
-                    <a:pt x="1408788" y="393197"/>
-                  </a:lnTo>
-                  <a:lnTo>
-                    <a:pt x="1482548" y="410945"/>
-                  </a:lnTo>
-                  <a:lnTo>
-                    <a:pt x="1556308" y="428439"/>
-                  </a:lnTo>
-                  <a:lnTo>
-                    <a:pt x="1630068" y="445681"/>
-                  </a:lnTo>
-                  <a:lnTo>
-                    <a:pt x="1703828" y="462676"/>
-                  </a:lnTo>
-                  <a:lnTo>
-                    <a:pt x="1777588" y="479428"/>
-                  </a:lnTo>
-                  <a:lnTo>
-                    <a:pt x="1851348" y="495939"/>
-                  </a:lnTo>
-                  <a:lnTo>
-                    <a:pt x="1925108" y="512214"/>
-                  </a:lnTo>
-                  <a:lnTo>
-                    <a:pt x="1998868" y="528255"/>
-                  </a:lnTo>
-                  <a:lnTo>
-                    <a:pt x="2072628" y="544066"/>
-                  </a:lnTo>
-                  <a:lnTo>
-                    <a:pt x="2146388" y="559650"/>
-                  </a:lnTo>
-                  <a:lnTo>
-                    <a:pt x="2220148" y="575011"/>
-                  </a:lnTo>
-                  <a:lnTo>
-                    <a:pt x="2293908" y="590151"/>
-                  </a:lnTo>
-                  <a:lnTo>
-                    <a:pt x="2367668" y="605075"/>
-                  </a:lnTo>
-                  <a:lnTo>
-                    <a:pt x="2441428" y="619784"/>
-                  </a:lnTo>
-                  <a:lnTo>
-                    <a:pt x="2515188" y="634282"/>
-                  </a:lnTo>
-                  <a:lnTo>
-                    <a:pt x="2588948" y="648573"/>
-                  </a:lnTo>
-                  <a:lnTo>
-                    <a:pt x="2662708" y="662658"/>
-                  </a:lnTo>
-                  <a:lnTo>
-                    <a:pt x="2736468" y="676542"/>
-                  </a:lnTo>
-                  <a:lnTo>
-                    <a:pt x="2810228" y="690226"/>
-                  </a:lnTo>
-                  <a:lnTo>
-                    <a:pt x="2883988" y="703714"/>
-                  </a:lnTo>
-                  <a:lnTo>
-                    <a:pt x="2957748" y="717009"/>
-                  </a:lnTo>
-                  <a:lnTo>
-                    <a:pt x="3031508" y="730113"/>
-                  </a:lnTo>
-                  <a:lnTo>
-                    <a:pt x="3105268" y="743029"/>
-                  </a:lnTo>
-                  <a:lnTo>
-                    <a:pt x="3179028" y="755759"/>
-                  </a:lnTo>
-                  <a:lnTo>
-                    <a:pt x="3252788" y="768308"/>
-                  </a:lnTo>
-                  <a:lnTo>
-                    <a:pt x="3326548" y="780676"/>
-                  </a:lnTo>
-                  <a:lnTo>
-                    <a:pt x="3400308" y="792867"/>
-                  </a:lnTo>
-                  <a:lnTo>
-                    <a:pt x="3474068" y="804883"/>
-                  </a:lnTo>
-                  <a:lnTo>
-                    <a:pt x="3547828" y="816727"/>
-                  </a:lnTo>
-                  <a:lnTo>
-                    <a:pt x="3621588" y="828400"/>
-                  </a:lnTo>
-                  <a:lnTo>
-                    <a:pt x="3695348" y="839907"/>
-                  </a:lnTo>
-                  <a:lnTo>
-                    <a:pt x="3769108" y="851248"/>
-                  </a:lnTo>
-                  <a:lnTo>
-                    <a:pt x="3842868" y="862427"/>
-                  </a:lnTo>
-                  <a:lnTo>
-                    <a:pt x="3916628" y="873446"/>
-                  </a:lnTo>
-                  <a:lnTo>
-                    <a:pt x="3990388" y="884306"/>
-                  </a:lnTo>
-                  <a:lnTo>
-                    <a:pt x="4064149" y="895011"/>
-                  </a:lnTo>
-                  <a:lnTo>
-                    <a:pt x="4137909" y="905562"/>
-                  </a:lnTo>
-                  <a:lnTo>
-                    <a:pt x="4211669" y="915962"/>
-                  </a:lnTo>
-                  <a:lnTo>
-                    <a:pt x="4285429" y="926212"/>
-                  </a:lnTo>
-                  <a:lnTo>
-                    <a:pt x="4359189" y="936316"/>
-                  </a:lnTo>
-                  <a:lnTo>
-                    <a:pt x="4432949" y="946275"/>
-                  </a:lnTo>
-                  <a:lnTo>
-                    <a:pt x="4506709" y="956091"/>
-                  </a:lnTo>
-                  <a:lnTo>
-                    <a:pt x="4580469" y="965766"/>
-                  </a:lnTo>
-                  <a:lnTo>
-                    <a:pt x="4654229" y="975302"/>
-                  </a:lnTo>
-                  <a:lnTo>
-                    <a:pt x="4727989" y="984702"/>
-                  </a:lnTo>
-                  <a:lnTo>
-                    <a:pt x="4801749" y="993967"/>
-                  </a:lnTo>
-                  <a:lnTo>
-                    <a:pt x="4875509" y="1003099"/>
-                  </a:lnTo>
-                  <a:lnTo>
-                    <a:pt x="4949269" y="1012100"/>
-                  </a:lnTo>
-                  <a:lnTo>
-                    <a:pt x="5023029" y="1020971"/>
-                  </a:lnTo>
-                  <a:lnTo>
-                    <a:pt x="5096789" y="1029716"/>
-                  </a:lnTo>
-                  <a:lnTo>
-                    <a:pt x="5170549" y="1038335"/>
-                  </a:lnTo>
-                  <a:lnTo>
-                    <a:pt x="5244309" y="1046831"/>
-                  </a:lnTo>
-                  <a:lnTo>
-                    <a:pt x="5318069" y="1055205"/>
-                  </a:lnTo>
-                  <a:lnTo>
-                    <a:pt x="5391829" y="1063458"/>
-                  </a:lnTo>
-                  <a:lnTo>
-                    <a:pt x="5465589" y="1071594"/>
-                  </a:lnTo>
-                  <a:lnTo>
-                    <a:pt x="5539349" y="1079612"/>
-                  </a:lnTo>
-                  <a:lnTo>
-                    <a:pt x="5613109" y="1087516"/>
-                  </a:lnTo>
-                  <a:lnTo>
-                    <a:pt x="5686869" y="1095306"/>
-                  </a:lnTo>
-                  <a:lnTo>
-                    <a:pt x="5760629" y="1102985"/>
-                  </a:lnTo>
-                  <a:lnTo>
-                    <a:pt x="5834389" y="1110553"/>
-                  </a:lnTo>
-                  <a:lnTo>
-                    <a:pt x="5908149" y="1118013"/>
-                  </a:lnTo>
-                  <a:lnTo>
-                    <a:pt x="5981909" y="1125366"/>
-                  </a:lnTo>
-                  <a:lnTo>
-                    <a:pt x="6055669" y="1132614"/>
-                  </a:lnTo>
-                  <a:lnTo>
-                    <a:pt x="6129429" y="1139757"/>
-                  </a:lnTo>
-                  <a:lnTo>
-                    <a:pt x="6203189" y="1146798"/>
-                  </a:lnTo>
-                  <a:lnTo>
-                    <a:pt x="6276949" y="1153738"/>
-                  </a:lnTo>
-                  <a:lnTo>
-                    <a:pt x="6350709" y="1160579"/>
-                  </a:lnTo>
-                  <a:lnTo>
-                    <a:pt x="6424469" y="1167321"/>
-                  </a:lnTo>
-                  <a:lnTo>
-                    <a:pt x="6498229" y="1173967"/>
-                  </a:lnTo>
-                  <a:lnTo>
-                    <a:pt x="6571989" y="1180518"/>
-                  </a:lnTo>
-                  <a:lnTo>
-                    <a:pt x="6645749" y="1186974"/>
-                  </a:lnTo>
-                  <a:lnTo>
-                    <a:pt x="6719509" y="1193338"/>
-                  </a:lnTo>
-                  <a:lnTo>
-                    <a:pt x="6793269" y="1199611"/>
-                  </a:lnTo>
-                  <a:lnTo>
-                    <a:pt x="6867029" y="1205793"/>
-                  </a:lnTo>
-                  <a:lnTo>
-                    <a:pt x="6940789" y="1211887"/>
-                  </a:lnTo>
-                  <a:lnTo>
-                    <a:pt x="7014550" y="1217894"/>
-                  </a:lnTo>
-                  <a:lnTo>
-                    <a:pt x="7088310" y="1223814"/>
-                  </a:lnTo>
-                  <a:lnTo>
-                    <a:pt x="7162070" y="1229650"/>
-                  </a:lnTo>
-                  <a:lnTo>
-                    <a:pt x="7235830" y="1235402"/>
+                    <a:pt x="71622" y="23693"/>
+                  </a:lnTo>
+                  <a:lnTo>
+                    <a:pt x="143245" y="47046"/>
+                  </a:lnTo>
+                  <a:lnTo>
+                    <a:pt x="214867" y="70064"/>
+                  </a:lnTo>
+                  <a:lnTo>
+                    <a:pt x="286490" y="92752"/>
+                  </a:lnTo>
+                  <a:lnTo>
+                    <a:pt x="358112" y="115115"/>
+                  </a:lnTo>
+                  <a:lnTo>
+                    <a:pt x="429735" y="137157"/>
+                  </a:lnTo>
+                  <a:lnTo>
+                    <a:pt x="501357" y="158883"/>
+                  </a:lnTo>
+                  <a:lnTo>
+                    <a:pt x="572980" y="180297"/>
+                  </a:lnTo>
+                  <a:lnTo>
+                    <a:pt x="644602" y="201405"/>
+                  </a:lnTo>
+                  <a:lnTo>
+                    <a:pt x="716225" y="222209"/>
+                  </a:lnTo>
+                  <a:lnTo>
+                    <a:pt x="787847" y="242715"/>
+                  </a:lnTo>
+                  <a:lnTo>
+                    <a:pt x="859470" y="262927"/>
+                  </a:lnTo>
+                  <a:lnTo>
+                    <a:pt x="931092" y="282849"/>
+                  </a:lnTo>
+                  <a:lnTo>
+                    <a:pt x="1002715" y="302486"/>
+                  </a:lnTo>
+                  <a:lnTo>
+                    <a:pt x="1074337" y="321841"/>
+                  </a:lnTo>
+                  <a:lnTo>
+                    <a:pt x="1145960" y="340918"/>
+                  </a:lnTo>
+                  <a:lnTo>
+                    <a:pt x="1217582" y="359722"/>
+                  </a:lnTo>
+                  <a:lnTo>
+                    <a:pt x="1289205" y="378256"/>
+                  </a:lnTo>
+                  <a:lnTo>
+                    <a:pt x="1360827" y="396524"/>
+                  </a:lnTo>
+                  <a:lnTo>
+                    <a:pt x="1432450" y="414530"/>
+                  </a:lnTo>
+                  <a:lnTo>
+                    <a:pt x="1504073" y="432278"/>
+                  </a:lnTo>
+                  <a:lnTo>
+                    <a:pt x="1575695" y="449772"/>
+                  </a:lnTo>
+                  <a:lnTo>
+                    <a:pt x="1647318" y="467014"/>
+                  </a:lnTo>
+                  <a:lnTo>
+                    <a:pt x="1718940" y="484009"/>
+                  </a:lnTo>
+                  <a:lnTo>
+                    <a:pt x="1790563" y="500761"/>
+                  </a:lnTo>
+                  <a:lnTo>
+                    <a:pt x="1862185" y="517272"/>
+                  </a:lnTo>
+                  <a:lnTo>
+                    <a:pt x="1933808" y="533547"/>
+                  </a:lnTo>
+                  <a:lnTo>
+                    <a:pt x="2005430" y="549588"/>
+                  </a:lnTo>
+                  <a:lnTo>
+                    <a:pt x="2077053" y="565399"/>
+                  </a:lnTo>
+                  <a:lnTo>
+                    <a:pt x="2148675" y="580983"/>
+                  </a:lnTo>
+                  <a:lnTo>
+                    <a:pt x="2220298" y="596344"/>
+                  </a:lnTo>
+                  <a:lnTo>
+                    <a:pt x="2291920" y="611484"/>
+                  </a:lnTo>
+                  <a:lnTo>
+                    <a:pt x="2363543" y="626407"/>
+                  </a:lnTo>
+                  <a:lnTo>
+                    <a:pt x="2435165" y="641117"/>
+                  </a:lnTo>
+                  <a:lnTo>
+                    <a:pt x="2506788" y="655615"/>
+                  </a:lnTo>
+                  <a:lnTo>
+                    <a:pt x="2578410" y="669905"/>
+                  </a:lnTo>
+                  <a:lnTo>
+                    <a:pt x="2650033" y="683991"/>
+                  </a:lnTo>
+                  <a:lnTo>
+                    <a:pt x="2721655" y="697874"/>
+                  </a:lnTo>
+                  <a:lnTo>
+                    <a:pt x="2793278" y="711559"/>
+                  </a:lnTo>
+                  <a:lnTo>
+                    <a:pt x="2864901" y="725047"/>
+                  </a:lnTo>
+                  <a:lnTo>
+                    <a:pt x="2936523" y="738341"/>
+                  </a:lnTo>
+                  <a:lnTo>
+                    <a:pt x="3008146" y="751445"/>
+                  </a:lnTo>
+                  <a:lnTo>
+                    <a:pt x="3079768" y="764361"/>
+                  </a:lnTo>
+                  <a:lnTo>
+                    <a:pt x="3151391" y="777092"/>
+                  </a:lnTo>
+                  <a:lnTo>
+                    <a:pt x="3223013" y="789641"/>
+                  </a:lnTo>
+                  <a:lnTo>
+                    <a:pt x="3294636" y="802009"/>
+                  </a:lnTo>
+                  <a:lnTo>
+                    <a:pt x="3366258" y="814200"/>
+                  </a:lnTo>
+                  <a:lnTo>
+                    <a:pt x="3437881" y="826216"/>
+                  </a:lnTo>
+                  <a:lnTo>
+                    <a:pt x="3509503" y="838059"/>
+                  </a:lnTo>
+                  <a:lnTo>
+                    <a:pt x="3581126" y="849733"/>
+                  </a:lnTo>
+                  <a:lnTo>
+                    <a:pt x="3652748" y="861240"/>
+                  </a:lnTo>
+                  <a:lnTo>
+                    <a:pt x="3724371" y="872581"/>
+                  </a:lnTo>
+                  <a:lnTo>
+                    <a:pt x="3795993" y="883760"/>
+                  </a:lnTo>
+                  <a:lnTo>
+                    <a:pt x="3867616" y="894778"/>
+                  </a:lnTo>
+                  <a:lnTo>
+                    <a:pt x="3939238" y="905639"/>
+                  </a:lnTo>
+                  <a:lnTo>
+                    <a:pt x="4010861" y="916343"/>
+                  </a:lnTo>
+                  <a:lnTo>
+                    <a:pt x="4082483" y="926895"/>
+                  </a:lnTo>
+                  <a:lnTo>
+                    <a:pt x="4154106" y="937294"/>
+                  </a:lnTo>
+                  <a:lnTo>
+                    <a:pt x="4225729" y="947545"/>
+                  </a:lnTo>
+                  <a:lnTo>
+                    <a:pt x="4297351" y="957649"/>
+                  </a:lnTo>
+                  <a:lnTo>
+                    <a:pt x="4368974" y="967607"/>
+                  </a:lnTo>
+                  <a:lnTo>
+                    <a:pt x="4440596" y="977423"/>
+                  </a:lnTo>
+                  <a:lnTo>
+                    <a:pt x="4512219" y="987099"/>
+                  </a:lnTo>
+                  <a:lnTo>
+                    <a:pt x="4583841" y="996635"/>
+                  </a:lnTo>
+                  <a:lnTo>
+                    <a:pt x="4655464" y="1006035"/>
+                  </a:lnTo>
+                  <a:lnTo>
+                    <a:pt x="4727086" y="1015299"/>
+                  </a:lnTo>
+                  <a:lnTo>
+                    <a:pt x="4798709" y="1024431"/>
+                  </a:lnTo>
+                  <a:lnTo>
+                    <a:pt x="4870331" y="1033432"/>
+                  </a:lnTo>
+                  <a:lnTo>
+                    <a:pt x="4941954" y="1042304"/>
+                  </a:lnTo>
+                  <a:lnTo>
+                    <a:pt x="5013576" y="1051049"/>
+                  </a:lnTo>
+                  <a:lnTo>
+                    <a:pt x="5085199" y="1059668"/>
+                  </a:lnTo>
+                  <a:lnTo>
+                    <a:pt x="5156821" y="1068164"/>
+                  </a:lnTo>
+                  <a:lnTo>
+                    <a:pt x="5228444" y="1076538"/>
+                  </a:lnTo>
+                  <a:lnTo>
+                    <a:pt x="5300066" y="1084791"/>
+                  </a:lnTo>
+                  <a:lnTo>
+                    <a:pt x="5371689" y="1092927"/>
+                  </a:lnTo>
+                  <a:lnTo>
+                    <a:pt x="5443311" y="1100945"/>
+                  </a:lnTo>
+                  <a:lnTo>
+                    <a:pt x="5514934" y="1108849"/>
+                  </a:lnTo>
+                  <a:lnTo>
+                    <a:pt x="5586557" y="1116639"/>
+                  </a:lnTo>
+                  <a:lnTo>
+                    <a:pt x="5658179" y="1124318"/>
+                  </a:lnTo>
+                  <a:lnTo>
+                    <a:pt x="5729802" y="1131886"/>
+                  </a:lnTo>
+                  <a:lnTo>
+                    <a:pt x="5801424" y="1139346"/>
+                  </a:lnTo>
+                  <a:lnTo>
+                    <a:pt x="5873047" y="1146699"/>
+                  </a:lnTo>
+                  <a:lnTo>
+                    <a:pt x="5944669" y="1153946"/>
+                  </a:lnTo>
+                  <a:lnTo>
+                    <a:pt x="6016292" y="1161090"/>
+                  </a:lnTo>
+                  <a:lnTo>
+                    <a:pt x="6087914" y="1168131"/>
+                  </a:lnTo>
+                  <a:lnTo>
+                    <a:pt x="6159537" y="1175071"/>
+                  </a:lnTo>
+                  <a:lnTo>
+                    <a:pt x="6231159" y="1181912"/>
+                  </a:lnTo>
+                  <a:lnTo>
+                    <a:pt x="6302782" y="1188654"/>
+                  </a:lnTo>
+                  <a:lnTo>
+                    <a:pt x="6374404" y="1195300"/>
+                  </a:lnTo>
+                  <a:lnTo>
+                    <a:pt x="6446027" y="1201850"/>
+                  </a:lnTo>
+                  <a:lnTo>
+                    <a:pt x="6517649" y="1208307"/>
+                  </a:lnTo>
+                  <a:lnTo>
+                    <a:pt x="6589272" y="1214671"/>
+                  </a:lnTo>
+                  <a:lnTo>
+                    <a:pt x="6660894" y="1220943"/>
+                  </a:lnTo>
+                  <a:lnTo>
+                    <a:pt x="6732517" y="1227126"/>
+                  </a:lnTo>
+                  <a:lnTo>
+                    <a:pt x="6804139" y="1233220"/>
+                  </a:lnTo>
+                  <a:lnTo>
+                    <a:pt x="6875762" y="1239227"/>
+                  </a:lnTo>
+                  <a:lnTo>
+                    <a:pt x="6947385" y="1245147"/>
+                  </a:lnTo>
+                  <a:lnTo>
+                    <a:pt x="7019007" y="1250983"/>
+                  </a:lnTo>
+                  <a:lnTo>
+                    <a:pt x="7090630" y="1256735"/>
                   </a:lnTo>
                 </a:path>
               </a:pathLst>
@@ -4611,7 +4568,7 @@
         </p:sp>
         <p:sp>
           <p:nvSpPr>
-            <p:cNvPr id="25" name="pl25"/>
+            <p:cNvPr id="24" name="pl24"/>
             <p:cNvSpPr/>
             <p:nvPr/>
           </p:nvSpPr>
@@ -4654,13 +4611,13 @@
         </p:sp>
         <p:sp>
           <p:nvSpPr>
-            <p:cNvPr id="26" name="pl26"/>
+            <p:cNvPr id="25" name="pl25"/>
             <p:cNvSpPr/>
             <p:nvPr/>
           </p:nvSpPr>
           <p:spPr>
             <a:xfrm>
-              <a:off x="4269157" y="2073503"/>
+              <a:off x="4588151" y="2073503"/>
               <a:ext cx="0" cy="3649639"/>
             </a:xfrm>
             <a:custGeom>
@@ -4697,7 +4654,7 @@
         </p:sp>
         <p:sp>
           <p:nvSpPr>
-            <p:cNvPr id="27" name="tx27"/>
+            <p:cNvPr id="26" name="tx26"/>
             <p:cNvSpPr/>
             <p:nvPr/>
           </p:nvSpPr>
@@ -4743,7 +4700,7 @@
         </p:sp>
         <p:sp>
           <p:nvSpPr>
-            <p:cNvPr id="28" name="tx28"/>
+            <p:cNvPr id="27" name="tx27"/>
             <p:cNvSpPr/>
             <p:nvPr/>
           </p:nvSpPr>
@@ -4789,7 +4746,7 @@
         </p:sp>
         <p:sp>
           <p:nvSpPr>
-            <p:cNvPr id="29" name="tx29"/>
+            <p:cNvPr id="28" name="tx28"/>
             <p:cNvSpPr/>
             <p:nvPr/>
           </p:nvSpPr>
@@ -4835,7 +4792,7 @@
         </p:sp>
         <p:sp>
           <p:nvSpPr>
-            <p:cNvPr id="30" name="tx30"/>
+            <p:cNvPr id="29" name="tx29"/>
             <p:cNvSpPr/>
             <p:nvPr/>
           </p:nvSpPr>
@@ -4881,7 +4838,7 @@
         </p:sp>
         <p:sp>
           <p:nvSpPr>
-            <p:cNvPr id="31" name="tx31"/>
+            <p:cNvPr id="30" name="tx30"/>
             <p:cNvSpPr/>
             <p:nvPr/>
           </p:nvSpPr>
@@ -4927,14 +4884,14 @@
         </p:sp>
         <p:sp>
           <p:nvSpPr>
-            <p:cNvPr id="32" name="tx32"/>
+            <p:cNvPr id="31" name="tx31"/>
             <p:cNvSpPr/>
             <p:nvPr/>
           </p:nvSpPr>
           <p:spPr>
             <a:xfrm>
-              <a:off x="2423864" y="5785772"/>
-              <a:ext cx="155356" cy="80101"/>
+              <a:off x="2360651" y="5785772"/>
+              <a:ext cx="161574" cy="80101"/>
             </a:xfrm>
             <a:prstGeom prst="rect">
               <a:avLst/>
@@ -4966,21 +4923,21 @@
                   <a:latin typeface="Helvetica"/>
                   <a:cs typeface="Helvetica"/>
                 </a:rPr>
-                <a:t>0.8</a:t>
+                <a:t>-25</a:t>
               </a:r>
             </a:p>
           </p:txBody>
         </p:sp>
         <p:sp>
           <p:nvSpPr>
-            <p:cNvPr id="33" name="tx33"/>
+            <p:cNvPr id="32" name="tx32"/>
             <p:cNvSpPr/>
             <p:nvPr/>
           </p:nvSpPr>
           <p:spPr>
             <a:xfrm>
-              <a:off x="4196521" y="5785772"/>
-              <a:ext cx="155356" cy="80101"/>
+              <a:off x="4561958" y="5785772"/>
+              <a:ext cx="62179" cy="80101"/>
             </a:xfrm>
             <a:prstGeom prst="rect">
               <a:avLst/>
@@ -5012,21 +4969,21 @@
                   <a:latin typeface="Helvetica"/>
                   <a:cs typeface="Helvetica"/>
                 </a:rPr>
-                <a:t>1.0</a:t>
+                <a:t>0</a:t>
               </a:r>
             </a:p>
           </p:txBody>
         </p:sp>
         <p:sp>
           <p:nvSpPr>
-            <p:cNvPr id="34" name="tx34"/>
+            <p:cNvPr id="33" name="tx33"/>
             <p:cNvSpPr/>
             <p:nvPr/>
           </p:nvSpPr>
           <p:spPr>
             <a:xfrm>
-              <a:off x="5969179" y="5785772"/>
-              <a:ext cx="155356" cy="80101"/>
+              <a:off x="6682478" y="5785772"/>
+              <a:ext cx="124358" cy="80101"/>
             </a:xfrm>
             <a:prstGeom prst="rect">
               <a:avLst/>
@@ -5058,67 +5015,21 @@
                   <a:latin typeface="Helvetica"/>
                   <a:cs typeface="Helvetica"/>
                 </a:rPr>
-                <a:t>1.2</a:t>
+                <a:t>25</a:t>
               </a:r>
             </a:p>
           </p:txBody>
         </p:sp>
         <p:sp>
           <p:nvSpPr>
-            <p:cNvPr id="35" name="tx35"/>
+            <p:cNvPr id="34" name="tx34"/>
             <p:cNvSpPr/>
             <p:nvPr/>
           </p:nvSpPr>
           <p:spPr>
             <a:xfrm>
-              <a:off x="7741836" y="5785772"/>
-              <a:ext cx="155356" cy="80101"/>
-            </a:xfrm>
-            <a:prstGeom prst="rect">
-              <a:avLst/>
-            </a:prstGeom>
-            <a:noFill/>
-          </p:spPr>
-          <p:txBody>
-            <a:bodyPr lIns="0" rIns="0" tIns="0" bIns="0" anchorCtr="1" anchor="ctr" wrap="none"/>
-            <a:lstStyle/>
-            <a:p>
-              <a:pPr algn="l" marL="0" marR="0" indent="0">
-                <a:lnSpc>
-                  <a:spcPts val="880"/>
-                </a:lnSpc>
-                <a:spcBef>
-                  <a:spcPts val="0"/>
-                </a:spcBef>
-                <a:spcAft>
-                  <a:spcPts val="0"/>
-                </a:spcAft>
-              </a:pPr>
-              <a:r>
-                <a:rPr sz="880">
-                  <a:solidFill>
-                    <a:srgbClr val="4D4D4D">
-                      <a:alpha val="100000"/>
-                    </a:srgbClr>
-                  </a:solidFill>
-                  <a:latin typeface="Helvetica"/>
-                  <a:cs typeface="Helvetica"/>
-                </a:rPr>
-                <a:t>1.4</a:t>
-              </a:r>
-            </a:p>
-          </p:txBody>
-        </p:sp>
-        <p:sp>
-          <p:nvSpPr>
-            <p:cNvPr id="36" name="tx36"/>
-            <p:cNvSpPr/>
-            <p:nvPr/>
-          </p:nvSpPr>
-          <p:spPr>
-            <a:xfrm>
-              <a:off x="3879271" y="5925448"/>
-              <a:ext cx="1676186" cy="100218"/>
+              <a:off x="2928340" y="5925448"/>
+              <a:ext cx="3578047" cy="100218"/>
             </a:xfrm>
             <a:prstGeom prst="rect">
               <a:avLst/>
@@ -5150,14 +5061,14 @@
                   <a:latin typeface="Helvetica"/>
                   <a:cs typeface="Helvetica"/>
                 </a:rPr>
-                <a:t>CKD-EPI Cr-Cys / CG ratio</a:t>
+                <a:t>eGFR difference (%): 100 × (CKD-EPI Cr-Cys − CG) / CG</a:t>
               </a:r>
             </a:p>
           </p:txBody>
         </p:sp>
         <p:sp>
           <p:nvSpPr>
-            <p:cNvPr id="37" name="tx37"/>
+            <p:cNvPr id="35" name="tx35"/>
             <p:cNvSpPr/>
             <p:nvPr/>
           </p:nvSpPr>
@@ -5203,14 +5114,14 @@
         </p:sp>
         <p:sp>
           <p:nvSpPr>
-            <p:cNvPr id="38" name="tx38"/>
+            <p:cNvPr id="36" name="tx36"/>
             <p:cNvSpPr/>
             <p:nvPr/>
           </p:nvSpPr>
           <p:spPr>
             <a:xfrm>
               <a:off x="817517" y="1896563"/>
-              <a:ext cx="6169365" cy="82021"/>
+              <a:ext cx="6321612" cy="82021"/>
             </a:xfrm>
             <a:prstGeom prst="rect">
               <a:avLst/>
@@ -5242,14 +5153,14 @@
                   <a:latin typeface="Helvetica"/>
                   <a:cs typeface="Helvetica"/>
                 </a:rPr>
-                <a:t>subHR per 0.1 ratio decline: 1.19 (1.01-1.40), p = 0.038  |  per IQR decline (Δ = 0.29): 1.66 (1.03-2.69)  |  IQR: [0.85, 1.15]</a:t>
+                <a:t>subHR per 10 % decline: 1.19 (1.01-1.40), p = 0.038  |  per IQR decline (Δ = 29.3 %): 1.66 (1.03-2.69)  |  IQR: [-14.6, 14.7] %</a:t>
               </a:r>
             </a:p>
           </p:txBody>
         </p:sp>
         <p:sp>
           <p:nvSpPr>
-            <p:cNvPr id="39" name="tx39"/>
+            <p:cNvPr id="37" name="tx37"/>
             <p:cNvSpPr/>
             <p:nvPr/>
           </p:nvSpPr>

--- a/docs/pptx/whole/jx-linsubhr-ratio-hosp8.pptx
+++ b/docs/pptx/whole/jx-linsubhr-ratio-hosp8.pptx
@@ -2265,34 +2265,26 @@
         </p:sp>
         <p:sp>
           <p:nvSpPr>
-            <p:cNvPr id="4" name="pl4"/>
+            <p:cNvPr id="4" name="rc4"/>
             <p:cNvSpPr/>
             <p:nvPr/>
           </p:nvSpPr>
           <p:spPr>
             <a:xfrm>
-              <a:off x="817517" y="5142518"/>
-              <a:ext cx="7799693" cy="0"/>
+              <a:off x="457200" y="1600200"/>
+              <a:ext cx="8229600" cy="4525962"/>
             </a:xfrm>
-            <a:custGeom>
+            <a:prstGeom prst="rect">
               <a:avLst/>
-              <a:pathLst>
-                <a:path w="7799693" h="0">
-                  <a:moveTo>
-                    <a:pt x="0" y="0"/>
-                  </a:moveTo>
-                  <a:lnTo>
-                    <a:pt x="7799693" y="0"/>
-                  </a:lnTo>
-                  <a:lnTo>
-                    <a:pt x="7799693" y="0"/>
-                  </a:lnTo>
-                </a:path>
-              </a:pathLst>
-            </a:custGeom>
-            <a:ln w="6775" cap="flat">
+            </a:prstGeom>
+            <a:solidFill>
+              <a:srgbClr val="FFFFFF">
+                <a:alpha val="100000"/>
+              </a:srgbClr>
+            </a:solidFill>
+            <a:ln w="13550" cap="rnd">
               <a:solidFill>
-                <a:srgbClr val="EBEBEB">
+                <a:srgbClr val="FFFFFF">
                   <a:alpha val="100000"/>
                 </a:srgbClr>
               </a:solidFill>
@@ -2314,21 +2306,21 @@
           </p:nvSpPr>
           <p:spPr>
             <a:xfrm>
-              <a:off x="817517" y="4313054"/>
-              <a:ext cx="7799693" cy="0"/>
+              <a:off x="887106" y="3250627"/>
+              <a:ext cx="7660515" cy="0"/>
             </a:xfrm>
             <a:custGeom>
               <a:avLst/>
               <a:pathLst>
-                <a:path w="7799693" h="0">
+                <a:path w="7660515" h="0">
                   <a:moveTo>
                     <a:pt x="0" y="0"/>
                   </a:moveTo>
                   <a:lnTo>
-                    <a:pt x="7799693" y="0"/>
-                  </a:lnTo>
-                  <a:lnTo>
-                    <a:pt x="7799693" y="0"/>
+                    <a:pt x="7660515" y="0"/>
+                  </a:lnTo>
+                  <a:lnTo>
+                    <a:pt x="7660515" y="0"/>
                   </a:lnTo>
                 </a:path>
               </a:pathLst>
@@ -2357,21 +2349,21 @@
           </p:nvSpPr>
           <p:spPr>
             <a:xfrm>
-              <a:off x="817517" y="3483591"/>
-              <a:ext cx="7799693" cy="0"/>
+              <a:off x="887106" y="2951293"/>
+              <a:ext cx="7660515" cy="0"/>
             </a:xfrm>
             <a:custGeom>
               <a:avLst/>
               <a:pathLst>
-                <a:path w="7799693" h="0">
+                <a:path w="7660515" h="0">
                   <a:moveTo>
                     <a:pt x="0" y="0"/>
                   </a:moveTo>
                   <a:lnTo>
-                    <a:pt x="7799693" y="0"/>
-                  </a:lnTo>
-                  <a:lnTo>
-                    <a:pt x="7799693" y="0"/>
+                    <a:pt x="7660515" y="0"/>
+                  </a:lnTo>
+                  <a:lnTo>
+                    <a:pt x="7660515" y="0"/>
                   </a:lnTo>
                 </a:path>
               </a:pathLst>
@@ -2400,21 +2392,21 @@
           </p:nvSpPr>
           <p:spPr>
             <a:xfrm>
-              <a:off x="817517" y="2654127"/>
-              <a:ext cx="7799693" cy="0"/>
+              <a:off x="887106" y="2651959"/>
+              <a:ext cx="7660515" cy="0"/>
             </a:xfrm>
             <a:custGeom>
               <a:avLst/>
               <a:pathLst>
-                <a:path w="7799693" h="0">
+                <a:path w="7660515" h="0">
                   <a:moveTo>
                     <a:pt x="0" y="0"/>
                   </a:moveTo>
                   <a:lnTo>
-                    <a:pt x="7799693" y="0"/>
-                  </a:lnTo>
-                  <a:lnTo>
-                    <a:pt x="7799693" y="0"/>
+                    <a:pt x="7660515" y="0"/>
+                  </a:lnTo>
+                  <a:lnTo>
+                    <a:pt x="7660515" y="0"/>
                   </a:lnTo>
                 </a:path>
               </a:pathLst>
@@ -2443,21 +2435,21 @@
           </p:nvSpPr>
           <p:spPr>
             <a:xfrm>
-              <a:off x="1365633" y="2073503"/>
-              <a:ext cx="0" cy="3649639"/>
+              <a:off x="887106" y="2352625"/>
+              <a:ext cx="7660515" cy="0"/>
             </a:xfrm>
             <a:custGeom>
               <a:avLst/>
               <a:pathLst>
-                <a:path w="0" h="3649639">
+                <a:path w="7660515" h="0">
                   <a:moveTo>
-                    <a:pt x="0" y="3649639"/>
+                    <a:pt x="0" y="0"/>
                   </a:moveTo>
                   <a:lnTo>
-                    <a:pt x="0" y="0"/>
-                  </a:lnTo>
-                  <a:lnTo>
-                    <a:pt x="0" y="0"/>
+                    <a:pt x="7660515" y="0"/>
+                  </a:lnTo>
+                  <a:lnTo>
+                    <a:pt x="7660515" y="0"/>
                   </a:lnTo>
                 </a:path>
               </a:pathLst>
@@ -2486,15 +2478,15 @@
           </p:nvSpPr>
           <p:spPr>
             <a:xfrm>
-              <a:off x="3517243" y="2073503"/>
-              <a:ext cx="0" cy="3649639"/>
+              <a:off x="1425442" y="2143092"/>
+              <a:ext cx="0" cy="1317069"/>
             </a:xfrm>
             <a:custGeom>
               <a:avLst/>
               <a:pathLst>
-                <a:path w="0" h="3649639">
+                <a:path w="0" h="1317069">
                   <a:moveTo>
-                    <a:pt x="0" y="3649639"/>
+                    <a:pt x="0" y="1317069"/>
                   </a:moveTo>
                   <a:lnTo>
                     <a:pt x="0" y="0"/>
@@ -2529,15 +2521,15 @@
           </p:nvSpPr>
           <p:spPr>
             <a:xfrm>
-              <a:off x="5668852" y="2073503"/>
-              <a:ext cx="0" cy="3649639"/>
+              <a:off x="3538658" y="2143092"/>
+              <a:ext cx="0" cy="1317069"/>
             </a:xfrm>
             <a:custGeom>
               <a:avLst/>
               <a:pathLst>
-                <a:path w="0" h="3649639">
+                <a:path w="0" h="1317069">
                   <a:moveTo>
-                    <a:pt x="0" y="3649639"/>
+                    <a:pt x="0" y="1317069"/>
                   </a:moveTo>
                   <a:lnTo>
                     <a:pt x="0" y="0"/>
@@ -2572,15 +2564,15 @@
           </p:nvSpPr>
           <p:spPr>
             <a:xfrm>
-              <a:off x="7820461" y="2073503"/>
-              <a:ext cx="0" cy="3649639"/>
+              <a:off x="5651874" y="2143092"/>
+              <a:ext cx="0" cy="1317069"/>
             </a:xfrm>
             <a:custGeom>
               <a:avLst/>
               <a:pathLst>
-                <a:path w="0" h="3649639">
+                <a:path w="0" h="1317069">
                   <a:moveTo>
-                    <a:pt x="0" y="3649639"/>
+                    <a:pt x="0" y="1317069"/>
                   </a:moveTo>
                   <a:lnTo>
                     <a:pt x="0" y="0"/>
@@ -2615,26 +2607,26 @@
           </p:nvSpPr>
           <p:spPr>
             <a:xfrm>
-              <a:off x="817517" y="5557249"/>
-              <a:ext cx="7799693" cy="0"/>
+              <a:off x="7765090" y="2143092"/>
+              <a:ext cx="0" cy="1317069"/>
             </a:xfrm>
             <a:custGeom>
               <a:avLst/>
               <a:pathLst>
-                <a:path w="7799693" h="0">
+                <a:path w="0" h="1317069">
                   <a:moveTo>
+                    <a:pt x="0" y="1317069"/>
+                  </a:moveTo>
+                  <a:lnTo>
                     <a:pt x="0" y="0"/>
-                  </a:moveTo>
-                  <a:lnTo>
-                    <a:pt x="7799693" y="0"/>
-                  </a:lnTo>
-                  <a:lnTo>
-                    <a:pt x="7799693" y="0"/>
+                  </a:lnTo>
+                  <a:lnTo>
+                    <a:pt x="0" y="0"/>
                   </a:lnTo>
                 </a:path>
               </a:pathLst>
             </a:custGeom>
-            <a:ln w="13550" cap="flat">
+            <a:ln w="6775" cap="flat">
               <a:solidFill>
                 <a:srgbClr val="EBEBEB">
                   <a:alpha val="100000"/>
@@ -2658,21 +2650,21 @@
           </p:nvSpPr>
           <p:spPr>
             <a:xfrm>
-              <a:off x="817517" y="4727786"/>
-              <a:ext cx="7799693" cy="0"/>
+              <a:off x="887106" y="3400294"/>
+              <a:ext cx="7660515" cy="0"/>
             </a:xfrm>
             <a:custGeom>
               <a:avLst/>
               <a:pathLst>
-                <a:path w="7799693" h="0">
+                <a:path w="7660515" h="0">
                   <a:moveTo>
                     <a:pt x="0" y="0"/>
                   </a:moveTo>
                   <a:lnTo>
-                    <a:pt x="7799693" y="0"/>
-                  </a:lnTo>
-                  <a:lnTo>
-                    <a:pt x="7799693" y="0"/>
+                    <a:pt x="7660515" y="0"/>
+                  </a:lnTo>
+                  <a:lnTo>
+                    <a:pt x="7660515" y="0"/>
                   </a:lnTo>
                 </a:path>
               </a:pathLst>
@@ -2701,21 +2693,21 @@
           </p:nvSpPr>
           <p:spPr>
             <a:xfrm>
-              <a:off x="817517" y="3898322"/>
-              <a:ext cx="7799693" cy="0"/>
+              <a:off x="887106" y="3100960"/>
+              <a:ext cx="7660515" cy="0"/>
             </a:xfrm>
             <a:custGeom>
               <a:avLst/>
               <a:pathLst>
-                <a:path w="7799693" h="0">
+                <a:path w="7660515" h="0">
                   <a:moveTo>
                     <a:pt x="0" y="0"/>
                   </a:moveTo>
                   <a:lnTo>
-                    <a:pt x="7799693" y="0"/>
-                  </a:lnTo>
-                  <a:lnTo>
-                    <a:pt x="7799693" y="0"/>
+                    <a:pt x="7660515" y="0"/>
+                  </a:lnTo>
+                  <a:lnTo>
+                    <a:pt x="7660515" y="0"/>
                   </a:lnTo>
                 </a:path>
               </a:pathLst>
@@ -2744,21 +2736,21 @@
           </p:nvSpPr>
           <p:spPr>
             <a:xfrm>
-              <a:off x="817517" y="3068859"/>
-              <a:ext cx="7799693" cy="0"/>
+              <a:off x="887106" y="2801626"/>
+              <a:ext cx="7660515" cy="0"/>
             </a:xfrm>
             <a:custGeom>
               <a:avLst/>
               <a:pathLst>
-                <a:path w="7799693" h="0">
+                <a:path w="7660515" h="0">
                   <a:moveTo>
                     <a:pt x="0" y="0"/>
                   </a:moveTo>
                   <a:lnTo>
-                    <a:pt x="7799693" y="0"/>
-                  </a:lnTo>
-                  <a:lnTo>
-                    <a:pt x="7799693" y="0"/>
+                    <a:pt x="7660515" y="0"/>
+                  </a:lnTo>
+                  <a:lnTo>
+                    <a:pt x="7660515" y="0"/>
                   </a:lnTo>
                 </a:path>
               </a:pathLst>
@@ -2787,21 +2779,21 @@
           </p:nvSpPr>
           <p:spPr>
             <a:xfrm>
-              <a:off x="817517" y="2239395"/>
-              <a:ext cx="7799693" cy="0"/>
+              <a:off x="887106" y="2502292"/>
+              <a:ext cx="7660515" cy="0"/>
             </a:xfrm>
             <a:custGeom>
               <a:avLst/>
               <a:pathLst>
-                <a:path w="7799693" h="0">
+                <a:path w="7660515" h="0">
                   <a:moveTo>
                     <a:pt x="0" y="0"/>
                   </a:moveTo>
                   <a:lnTo>
-                    <a:pt x="7799693" y="0"/>
-                  </a:lnTo>
-                  <a:lnTo>
-                    <a:pt x="7799693" y="0"/>
+                    <a:pt x="7660515" y="0"/>
+                  </a:lnTo>
+                  <a:lnTo>
+                    <a:pt x="7660515" y="0"/>
                   </a:lnTo>
                 </a:path>
               </a:pathLst>
@@ -2830,21 +2822,21 @@
           </p:nvSpPr>
           <p:spPr>
             <a:xfrm>
-              <a:off x="2441438" y="2073503"/>
-              <a:ext cx="0" cy="3649639"/>
+              <a:off x="887106" y="2202958"/>
+              <a:ext cx="7660515" cy="0"/>
             </a:xfrm>
             <a:custGeom>
               <a:avLst/>
               <a:pathLst>
-                <a:path w="0" h="3649639">
+                <a:path w="7660515" h="0">
                   <a:moveTo>
-                    <a:pt x="0" y="3649639"/>
+                    <a:pt x="0" y="0"/>
                   </a:moveTo>
                   <a:lnTo>
-                    <a:pt x="0" y="0"/>
-                  </a:lnTo>
-                  <a:lnTo>
-                    <a:pt x="0" y="0"/>
+                    <a:pt x="7660515" y="0"/>
+                  </a:lnTo>
+                  <a:lnTo>
+                    <a:pt x="7660515" y="0"/>
                   </a:lnTo>
                 </a:path>
               </a:pathLst>
@@ -2873,15 +2865,15 @@
           </p:nvSpPr>
           <p:spPr>
             <a:xfrm>
-              <a:off x="4593047" y="2073503"/>
-              <a:ext cx="0" cy="3649639"/>
+              <a:off x="2482050" y="2143092"/>
+              <a:ext cx="0" cy="1317069"/>
             </a:xfrm>
             <a:custGeom>
               <a:avLst/>
               <a:pathLst>
-                <a:path w="0" h="3649639">
+                <a:path w="0" h="1317069">
                   <a:moveTo>
-                    <a:pt x="0" y="3649639"/>
+                    <a:pt x="0" y="1317069"/>
                   </a:moveTo>
                   <a:lnTo>
                     <a:pt x="0" y="0"/>
@@ -2916,15 +2908,15 @@
           </p:nvSpPr>
           <p:spPr>
             <a:xfrm>
-              <a:off x="6744657" y="2073503"/>
-              <a:ext cx="0" cy="3649639"/>
+              <a:off x="4595266" y="2143092"/>
+              <a:ext cx="0" cy="1317069"/>
             </a:xfrm>
             <a:custGeom>
               <a:avLst/>
               <a:pathLst>
-                <a:path w="0" h="3649639">
+                <a:path w="0" h="1317069">
                   <a:moveTo>
-                    <a:pt x="0" y="3649639"/>
+                    <a:pt x="0" y="1317069"/>
                   </a:moveTo>
                   <a:lnTo>
                     <a:pt x="0" y="0"/>
@@ -2953,618 +2945,661 @@
         </p:sp>
         <p:sp>
           <p:nvSpPr>
-            <p:cNvPr id="20" name="pg20"/>
+            <p:cNvPr id="20" name="pl20"/>
             <p:cNvSpPr/>
             <p:nvPr/>
           </p:nvSpPr>
           <p:spPr>
             <a:xfrm>
-              <a:off x="1172049" y="2389936"/>
-              <a:ext cx="7090630" cy="2971029"/>
+              <a:off x="6708482" y="2143092"/>
+              <a:ext cx="0" cy="1317069"/>
             </a:xfrm>
             <a:custGeom>
               <a:avLst/>
               <a:pathLst>
-                <a:path w="7090630" h="2971029">
+                <a:path w="0" h="1317069">
+                  <a:moveTo>
+                    <a:pt x="0" y="1317069"/>
+                  </a:moveTo>
+                  <a:lnTo>
+                    <a:pt x="0" y="0"/>
+                  </a:lnTo>
+                  <a:lnTo>
+                    <a:pt x="0" y="0"/>
+                  </a:lnTo>
+                </a:path>
+              </a:pathLst>
+            </a:custGeom>
+            <a:ln w="13550" cap="flat">
+              <a:solidFill>
+                <a:srgbClr val="EBEBEB">
+                  <a:alpha val="100000"/>
+                </a:srgbClr>
+              </a:solidFill>
+              <a:prstDash val="solid"/>
+              <a:round/>
+            </a:ln>
+          </p:spPr>
+          <p:txBody>
+            <a:bodyPr/>
+            <a:lstStyle/>
+            <a:p/>
+          </p:txBody>
+        </p:sp>
+        <p:sp>
+          <p:nvSpPr>
+            <p:cNvPr id="21" name="pg21"/>
+            <p:cNvSpPr/>
+            <p:nvPr/>
+          </p:nvSpPr>
+          <p:spPr>
+            <a:xfrm>
+              <a:off x="1235312" y="2257285"/>
+              <a:ext cx="6964104" cy="1072174"/>
+            </a:xfrm>
+            <a:custGeom>
+              <a:avLst/>
+              <a:pathLst>
+                <a:path w="6964104" h="1072174">
                   <a:moveTo>
                     <a:pt x="0" y="0"/>
                   </a:moveTo>
                   <a:lnTo>
-                    <a:pt x="71622" y="87737"/>
-                  </a:lnTo>
-                  <a:lnTo>
-                    <a:pt x="143245" y="173043"/>
-                  </a:lnTo>
-                  <a:lnTo>
-                    <a:pt x="214867" y="255987"/>
-                  </a:lnTo>
-                  <a:lnTo>
-                    <a:pt x="286490" y="336633"/>
-                  </a:lnTo>
-                  <a:lnTo>
-                    <a:pt x="358112" y="415045"/>
-                  </a:lnTo>
-                  <a:lnTo>
-                    <a:pt x="429735" y="491285"/>
-                  </a:lnTo>
-                  <a:lnTo>
-                    <a:pt x="501357" y="565413"/>
-                  </a:lnTo>
-                  <a:lnTo>
-                    <a:pt x="572980" y="637488"/>
-                  </a:lnTo>
-                  <a:lnTo>
-                    <a:pt x="644602" y="707566"/>
-                  </a:lnTo>
-                  <a:lnTo>
-                    <a:pt x="716225" y="775703"/>
-                  </a:lnTo>
-                  <a:lnTo>
-                    <a:pt x="787847" y="841953"/>
-                  </a:lnTo>
-                  <a:lnTo>
-                    <a:pt x="859470" y="906367"/>
-                  </a:lnTo>
-                  <a:lnTo>
-                    <a:pt x="931092" y="968997"/>
-                  </a:lnTo>
-                  <a:lnTo>
-                    <a:pt x="1002715" y="1029892"/>
-                  </a:lnTo>
-                  <a:lnTo>
-                    <a:pt x="1074337" y="1089100"/>
-                  </a:lnTo>
-                  <a:lnTo>
-                    <a:pt x="1145960" y="1146668"/>
-                  </a:lnTo>
-                  <a:lnTo>
-                    <a:pt x="1217582" y="1202642"/>
-                  </a:lnTo>
-                  <a:lnTo>
-                    <a:pt x="1289205" y="1257065"/>
-                  </a:lnTo>
-                  <a:lnTo>
-                    <a:pt x="1360827" y="1309980"/>
-                  </a:lnTo>
-                  <a:lnTo>
-                    <a:pt x="1432450" y="1361430"/>
-                  </a:lnTo>
-                  <a:lnTo>
-                    <a:pt x="1504073" y="1411454"/>
-                  </a:lnTo>
-                  <a:lnTo>
-                    <a:pt x="1575695" y="1460093"/>
-                  </a:lnTo>
-                  <a:lnTo>
-                    <a:pt x="1647318" y="1507384"/>
-                  </a:lnTo>
-                  <a:lnTo>
-                    <a:pt x="1718940" y="1553366"/>
-                  </a:lnTo>
-                  <a:lnTo>
-                    <a:pt x="1790563" y="1598073"/>
-                  </a:lnTo>
-                  <a:lnTo>
-                    <a:pt x="1862185" y="1641542"/>
-                  </a:lnTo>
-                  <a:lnTo>
-                    <a:pt x="1933808" y="1683807"/>
-                  </a:lnTo>
-                  <a:lnTo>
-                    <a:pt x="2005430" y="1724902"/>
-                  </a:lnTo>
-                  <a:lnTo>
-                    <a:pt x="2077053" y="1764858"/>
-                  </a:lnTo>
-                  <a:lnTo>
-                    <a:pt x="2148675" y="1803707"/>
-                  </a:lnTo>
-                  <a:lnTo>
-                    <a:pt x="2220298" y="1841480"/>
-                  </a:lnTo>
-                  <a:lnTo>
-                    <a:pt x="2291920" y="1878206"/>
-                  </a:lnTo>
-                  <a:lnTo>
-                    <a:pt x="2363543" y="1913916"/>
-                  </a:lnTo>
-                  <a:lnTo>
-                    <a:pt x="2435165" y="1948636"/>
-                  </a:lnTo>
-                  <a:lnTo>
-                    <a:pt x="2506788" y="1982394"/>
-                  </a:lnTo>
-                  <a:lnTo>
-                    <a:pt x="2578410" y="2015217"/>
-                  </a:lnTo>
-                  <a:lnTo>
-                    <a:pt x="2650033" y="2047131"/>
-                  </a:lnTo>
-                  <a:lnTo>
-                    <a:pt x="2721655" y="2078161"/>
-                  </a:lnTo>
-                  <a:lnTo>
-                    <a:pt x="2793278" y="2108332"/>
-                  </a:lnTo>
-                  <a:lnTo>
-                    <a:pt x="2864901" y="2137666"/>
-                  </a:lnTo>
-                  <a:lnTo>
-                    <a:pt x="2936523" y="2166188"/>
-                  </a:lnTo>
-                  <a:lnTo>
-                    <a:pt x="3008146" y="2193920"/>
-                  </a:lnTo>
-                  <a:lnTo>
-                    <a:pt x="3079768" y="2220884"/>
-                  </a:lnTo>
-                  <a:lnTo>
-                    <a:pt x="3151391" y="2247101"/>
-                  </a:lnTo>
-                  <a:lnTo>
-                    <a:pt x="3223013" y="2272591"/>
-                  </a:lnTo>
-                  <a:lnTo>
-                    <a:pt x="3294636" y="2297376"/>
-                  </a:lnTo>
-                  <a:lnTo>
-                    <a:pt x="3366258" y="2321474"/>
-                  </a:lnTo>
-                  <a:lnTo>
-                    <a:pt x="3437881" y="2338051"/>
-                  </a:lnTo>
-                  <a:lnTo>
-                    <a:pt x="3509503" y="2338713"/>
-                  </a:lnTo>
-                  <a:lnTo>
-                    <a:pt x="3581126" y="2339375"/>
-                  </a:lnTo>
-                  <a:lnTo>
-                    <a:pt x="3652748" y="2340036"/>
-                  </a:lnTo>
-                  <a:lnTo>
-                    <a:pt x="3724371" y="2340697"/>
-                  </a:lnTo>
-                  <a:lnTo>
-                    <a:pt x="3795993" y="2341358"/>
-                  </a:lnTo>
-                  <a:lnTo>
-                    <a:pt x="3867616" y="2342018"/>
-                  </a:lnTo>
-                  <a:lnTo>
-                    <a:pt x="3939238" y="2342677"/>
-                  </a:lnTo>
-                  <a:lnTo>
-                    <a:pt x="4010861" y="2343336"/>
-                  </a:lnTo>
-                  <a:lnTo>
-                    <a:pt x="4082483" y="2343994"/>
-                  </a:lnTo>
-                  <a:lnTo>
-                    <a:pt x="4154106" y="2344652"/>
-                  </a:lnTo>
-                  <a:lnTo>
-                    <a:pt x="4225729" y="2345309"/>
-                  </a:lnTo>
-                  <a:lnTo>
-                    <a:pt x="4297351" y="2345966"/>
-                  </a:lnTo>
-                  <a:lnTo>
-                    <a:pt x="4368974" y="2346622"/>
-                  </a:lnTo>
-                  <a:lnTo>
-                    <a:pt x="4440596" y="2347277"/>
-                  </a:lnTo>
-                  <a:lnTo>
-                    <a:pt x="4512219" y="2347933"/>
-                  </a:lnTo>
-                  <a:lnTo>
-                    <a:pt x="4583841" y="2348587"/>
-                  </a:lnTo>
-                  <a:lnTo>
-                    <a:pt x="4655464" y="2349241"/>
-                  </a:lnTo>
-                  <a:lnTo>
-                    <a:pt x="4727086" y="2349895"/>
-                  </a:lnTo>
-                  <a:lnTo>
-                    <a:pt x="4798709" y="2350548"/>
-                  </a:lnTo>
-                  <a:lnTo>
-                    <a:pt x="4870331" y="2351200"/>
-                  </a:lnTo>
-                  <a:lnTo>
-                    <a:pt x="4941954" y="2351852"/>
-                  </a:lnTo>
-                  <a:lnTo>
-                    <a:pt x="5013576" y="2352504"/>
-                  </a:lnTo>
-                  <a:lnTo>
-                    <a:pt x="5085199" y="2353155"/>
-                  </a:lnTo>
-                  <a:lnTo>
-                    <a:pt x="5156821" y="2353805"/>
-                  </a:lnTo>
-                  <a:lnTo>
-                    <a:pt x="5228444" y="2354455"/>
-                  </a:lnTo>
-                  <a:lnTo>
-                    <a:pt x="5300066" y="2355105"/>
-                  </a:lnTo>
-                  <a:lnTo>
-                    <a:pt x="5371689" y="2355753"/>
-                  </a:lnTo>
-                  <a:lnTo>
-                    <a:pt x="5443311" y="2356402"/>
-                  </a:lnTo>
-                  <a:lnTo>
-                    <a:pt x="5514934" y="2357050"/>
-                  </a:lnTo>
-                  <a:lnTo>
-                    <a:pt x="5586557" y="2357697"/>
-                  </a:lnTo>
-                  <a:lnTo>
-                    <a:pt x="5658179" y="2358344"/>
-                  </a:lnTo>
-                  <a:lnTo>
-                    <a:pt x="5729802" y="2358990"/>
-                  </a:lnTo>
-                  <a:lnTo>
-                    <a:pt x="5801424" y="2359636"/>
-                  </a:lnTo>
-                  <a:lnTo>
-                    <a:pt x="5873047" y="2360281"/>
-                  </a:lnTo>
-                  <a:lnTo>
-                    <a:pt x="5944669" y="2360926"/>
-                  </a:lnTo>
-                  <a:lnTo>
-                    <a:pt x="6016292" y="2361570"/>
-                  </a:lnTo>
-                  <a:lnTo>
-                    <a:pt x="6087914" y="2362214"/>
-                  </a:lnTo>
-                  <a:lnTo>
-                    <a:pt x="6159537" y="2362857"/>
-                  </a:lnTo>
-                  <a:lnTo>
-                    <a:pt x="6231159" y="2363500"/>
-                  </a:lnTo>
-                  <a:lnTo>
-                    <a:pt x="6302782" y="2364142"/>
-                  </a:lnTo>
-                  <a:lnTo>
-                    <a:pt x="6374404" y="2364783"/>
-                  </a:lnTo>
-                  <a:lnTo>
-                    <a:pt x="6446027" y="2365425"/>
-                  </a:lnTo>
-                  <a:lnTo>
-                    <a:pt x="6517649" y="2366065"/>
-                  </a:lnTo>
-                  <a:lnTo>
-                    <a:pt x="6589272" y="2366705"/>
-                  </a:lnTo>
-                  <a:lnTo>
-                    <a:pt x="6660894" y="2367345"/>
-                  </a:lnTo>
-                  <a:lnTo>
-                    <a:pt x="6732517" y="2367984"/>
-                  </a:lnTo>
-                  <a:lnTo>
-                    <a:pt x="6804139" y="2368623"/>
-                  </a:lnTo>
-                  <a:lnTo>
-                    <a:pt x="6875762" y="2369261"/>
-                  </a:lnTo>
-                  <a:lnTo>
-                    <a:pt x="6947385" y="2369898"/>
-                  </a:lnTo>
-                  <a:lnTo>
-                    <a:pt x="7019007" y="2370535"/>
-                  </a:lnTo>
-                  <a:lnTo>
-                    <a:pt x="7090630" y="2371172"/>
-                  </a:lnTo>
-                  <a:lnTo>
-                    <a:pt x="7090630" y="2971029"/>
-                  </a:lnTo>
-                  <a:lnTo>
-                    <a:pt x="7019007" y="2965437"/>
-                  </a:lnTo>
-                  <a:lnTo>
-                    <a:pt x="6947385" y="2959685"/>
-                  </a:lnTo>
-                  <a:lnTo>
-                    <a:pt x="6875762" y="2953770"/>
-                  </a:lnTo>
-                  <a:lnTo>
-                    <a:pt x="6804139" y="2947686"/>
-                  </a:lnTo>
-                  <a:lnTo>
-                    <a:pt x="6732517" y="2941429"/>
-                  </a:lnTo>
-                  <a:lnTo>
-                    <a:pt x="6660894" y="2934994"/>
-                  </a:lnTo>
-                  <a:lnTo>
-                    <a:pt x="6589272" y="2928375"/>
-                  </a:lnTo>
-                  <a:lnTo>
-                    <a:pt x="6517649" y="2921568"/>
-                  </a:lnTo>
-                  <a:lnTo>
-                    <a:pt x="6446027" y="2914566"/>
-                  </a:lnTo>
-                  <a:lnTo>
-                    <a:pt x="6374404" y="2907366"/>
-                  </a:lnTo>
-                  <a:lnTo>
-                    <a:pt x="6302782" y="2899960"/>
-                  </a:lnTo>
-                  <a:lnTo>
-                    <a:pt x="6231159" y="2892343"/>
-                  </a:lnTo>
-                  <a:lnTo>
-                    <a:pt x="6159537" y="2884509"/>
-                  </a:lnTo>
-                  <a:lnTo>
-                    <a:pt x="6087914" y="2876452"/>
-                  </a:lnTo>
-                  <a:lnTo>
-                    <a:pt x="6016292" y="2868165"/>
-                  </a:lnTo>
-                  <a:lnTo>
-                    <a:pt x="5944669" y="2859643"/>
-                  </a:lnTo>
-                  <a:lnTo>
-                    <a:pt x="5873047" y="2850877"/>
-                  </a:lnTo>
-                  <a:lnTo>
-                    <a:pt x="5801424" y="2841862"/>
-                  </a:lnTo>
-                  <a:lnTo>
-                    <a:pt x="5729802" y="2832590"/>
-                  </a:lnTo>
-                  <a:lnTo>
-                    <a:pt x="5658179" y="2823054"/>
-                  </a:lnTo>
-                  <a:lnTo>
-                    <a:pt x="5586557" y="2813246"/>
-                  </a:lnTo>
-                  <a:lnTo>
-                    <a:pt x="5514934" y="2803158"/>
-                  </a:lnTo>
-                  <a:lnTo>
-                    <a:pt x="5443311" y="2792783"/>
-                  </a:lnTo>
-                  <a:lnTo>
-                    <a:pt x="5371689" y="2782113"/>
-                  </a:lnTo>
-                  <a:lnTo>
-                    <a:pt x="5300066" y="2771139"/>
-                  </a:lnTo>
-                  <a:lnTo>
-                    <a:pt x="5228444" y="2759852"/>
-                  </a:lnTo>
-                  <a:lnTo>
-                    <a:pt x="5156821" y="2748243"/>
-                  </a:lnTo>
-                  <a:lnTo>
-                    <a:pt x="5085199" y="2736304"/>
-                  </a:lnTo>
-                  <a:lnTo>
-                    <a:pt x="5013576" y="2724025"/>
-                  </a:lnTo>
-                  <a:lnTo>
-                    <a:pt x="4941954" y="2711395"/>
-                  </a:lnTo>
-                  <a:lnTo>
-                    <a:pt x="4870331" y="2698406"/>
-                  </a:lnTo>
-                  <a:lnTo>
-                    <a:pt x="4798709" y="2685047"/>
-                  </a:lnTo>
-                  <a:lnTo>
-                    <a:pt x="4727086" y="2671307"/>
-                  </a:lnTo>
-                  <a:lnTo>
-                    <a:pt x="4655464" y="2657176"/>
-                  </a:lnTo>
-                  <a:lnTo>
-                    <a:pt x="4583841" y="2642642"/>
-                  </a:lnTo>
-                  <a:lnTo>
-                    <a:pt x="4512219" y="2627695"/>
-                  </a:lnTo>
-                  <a:lnTo>
-                    <a:pt x="4440596" y="2612321"/>
-                  </a:lnTo>
-                  <a:lnTo>
-                    <a:pt x="4368974" y="2596509"/>
-                  </a:lnTo>
-                  <a:lnTo>
-                    <a:pt x="4297351" y="2580247"/>
-                  </a:lnTo>
-                  <a:lnTo>
-                    <a:pt x="4225729" y="2563521"/>
-                  </a:lnTo>
-                  <a:lnTo>
-                    <a:pt x="4154106" y="2546319"/>
-                  </a:lnTo>
-                  <a:lnTo>
-                    <a:pt x="4082483" y="2528627"/>
-                  </a:lnTo>
-                  <a:lnTo>
-                    <a:pt x="4010861" y="2510431"/>
-                  </a:lnTo>
-                  <a:lnTo>
-                    <a:pt x="3939238" y="2491717"/>
-                  </a:lnTo>
-                  <a:lnTo>
-                    <a:pt x="3867616" y="2472469"/>
-                  </a:lnTo>
-                  <a:lnTo>
-                    <a:pt x="3795993" y="2452673"/>
-                  </a:lnTo>
-                  <a:lnTo>
-                    <a:pt x="3724371" y="2432313"/>
-                  </a:lnTo>
-                  <a:lnTo>
-                    <a:pt x="3652748" y="2411373"/>
-                  </a:lnTo>
-                  <a:lnTo>
-                    <a:pt x="3581126" y="2389836"/>
-                  </a:lnTo>
-                  <a:lnTo>
-                    <a:pt x="3509503" y="2367686"/>
-                  </a:lnTo>
-                  <a:lnTo>
-                    <a:pt x="3437881" y="2344904"/>
-                  </a:lnTo>
-                  <a:lnTo>
-                    <a:pt x="3366258" y="2337387"/>
-                  </a:lnTo>
-                  <a:lnTo>
-                    <a:pt x="3294636" y="2336724"/>
-                  </a:lnTo>
-                  <a:lnTo>
-                    <a:pt x="3223013" y="2336060"/>
-                  </a:lnTo>
-                  <a:lnTo>
-                    <a:pt x="3151391" y="2335395"/>
-                  </a:lnTo>
-                  <a:lnTo>
-                    <a:pt x="3079768" y="2334730"/>
-                  </a:lnTo>
-                  <a:lnTo>
-                    <a:pt x="3008146" y="2334064"/>
-                  </a:lnTo>
-                  <a:lnTo>
-                    <a:pt x="2936523" y="2333398"/>
-                  </a:lnTo>
-                  <a:lnTo>
-                    <a:pt x="2864901" y="2332731"/>
-                  </a:lnTo>
-                  <a:lnTo>
-                    <a:pt x="2793278" y="2332064"/>
-                  </a:lnTo>
-                  <a:lnTo>
-                    <a:pt x="2721655" y="2331396"/>
-                  </a:lnTo>
-                  <a:lnTo>
-                    <a:pt x="2650033" y="2330728"/>
-                  </a:lnTo>
-                  <a:lnTo>
-                    <a:pt x="2578410" y="2330059"/>
-                  </a:lnTo>
-                  <a:lnTo>
-                    <a:pt x="2506788" y="2329390"/>
-                  </a:lnTo>
-                  <a:lnTo>
-                    <a:pt x="2435165" y="2328720"/>
-                  </a:lnTo>
-                  <a:lnTo>
-                    <a:pt x="2363543" y="2328049"/>
-                  </a:lnTo>
-                  <a:lnTo>
-                    <a:pt x="2291920" y="2327378"/>
-                  </a:lnTo>
-                  <a:lnTo>
-                    <a:pt x="2220298" y="2326707"/>
-                  </a:lnTo>
-                  <a:lnTo>
-                    <a:pt x="2148675" y="2326035"/>
-                  </a:lnTo>
-                  <a:lnTo>
-                    <a:pt x="2077053" y="2325362"/>
-                  </a:lnTo>
-                  <a:lnTo>
-                    <a:pt x="2005430" y="2324689"/>
-                  </a:lnTo>
-                  <a:lnTo>
-                    <a:pt x="1933808" y="2324015"/>
-                  </a:lnTo>
-                  <a:lnTo>
-                    <a:pt x="1862185" y="2323341"/>
-                  </a:lnTo>
-                  <a:lnTo>
-                    <a:pt x="1790563" y="2322666"/>
-                  </a:lnTo>
-                  <a:lnTo>
-                    <a:pt x="1718940" y="2321991"/>
-                  </a:lnTo>
-                  <a:lnTo>
-                    <a:pt x="1647318" y="2321315"/>
-                  </a:lnTo>
-                  <a:lnTo>
-                    <a:pt x="1575695" y="2320638"/>
-                  </a:lnTo>
-                  <a:lnTo>
-                    <a:pt x="1504073" y="2319961"/>
-                  </a:lnTo>
-                  <a:lnTo>
-                    <a:pt x="1432450" y="2319284"/>
-                  </a:lnTo>
-                  <a:lnTo>
-                    <a:pt x="1360827" y="2318606"/>
-                  </a:lnTo>
-                  <a:lnTo>
-                    <a:pt x="1289205" y="2317927"/>
-                  </a:lnTo>
-                  <a:lnTo>
-                    <a:pt x="1217582" y="2317248"/>
-                  </a:lnTo>
-                  <a:lnTo>
-                    <a:pt x="1145960" y="2316569"/>
-                  </a:lnTo>
-                  <a:lnTo>
-                    <a:pt x="1074337" y="2315888"/>
-                  </a:lnTo>
-                  <a:lnTo>
-                    <a:pt x="1002715" y="2315208"/>
-                  </a:lnTo>
-                  <a:lnTo>
-                    <a:pt x="931092" y="2314526"/>
-                  </a:lnTo>
-                  <a:lnTo>
-                    <a:pt x="859470" y="2313845"/>
-                  </a:lnTo>
-                  <a:lnTo>
-                    <a:pt x="787847" y="2313162"/>
-                  </a:lnTo>
-                  <a:lnTo>
-                    <a:pt x="716225" y="2312479"/>
-                  </a:lnTo>
-                  <a:lnTo>
-                    <a:pt x="644602" y="2311796"/>
-                  </a:lnTo>
-                  <a:lnTo>
-                    <a:pt x="572980" y="2311112"/>
-                  </a:lnTo>
-                  <a:lnTo>
-                    <a:pt x="501357" y="2310427"/>
-                  </a:lnTo>
-                  <a:lnTo>
-                    <a:pt x="429735" y="2309742"/>
-                  </a:lnTo>
-                  <a:lnTo>
-                    <a:pt x="358112" y="2309056"/>
-                  </a:lnTo>
-                  <a:lnTo>
-                    <a:pt x="286490" y="2308370"/>
-                  </a:lnTo>
-                  <a:lnTo>
-                    <a:pt x="214867" y="2307683"/>
-                  </a:lnTo>
-                  <a:lnTo>
-                    <a:pt x="143245" y="2306996"/>
-                  </a:lnTo>
-                  <a:lnTo>
-                    <a:pt x="71622" y="2306308"/>
-                  </a:lnTo>
-                  <a:lnTo>
-                    <a:pt x="0" y="2305620"/>
+                    <a:pt x="70344" y="31662"/>
+                  </a:lnTo>
+                  <a:lnTo>
+                    <a:pt x="140688" y="62447"/>
+                  </a:lnTo>
+                  <a:lnTo>
+                    <a:pt x="211033" y="92379"/>
+                  </a:lnTo>
+                  <a:lnTo>
+                    <a:pt x="281377" y="121483"/>
+                  </a:lnTo>
+                  <a:lnTo>
+                    <a:pt x="351722" y="149780"/>
+                  </a:lnTo>
+                  <a:lnTo>
+                    <a:pt x="422066" y="177293"/>
+                  </a:lnTo>
+                  <a:lnTo>
+                    <a:pt x="492411" y="204044"/>
+                  </a:lnTo>
+                  <a:lnTo>
+                    <a:pt x="562755" y="230054"/>
+                  </a:lnTo>
+                  <a:lnTo>
+                    <a:pt x="633100" y="255344"/>
+                  </a:lnTo>
+                  <a:lnTo>
+                    <a:pt x="703444" y="279933"/>
+                  </a:lnTo>
+                  <a:lnTo>
+                    <a:pt x="773789" y="303841"/>
+                  </a:lnTo>
+                  <a:lnTo>
+                    <a:pt x="844133" y="327086"/>
+                  </a:lnTo>
+                  <a:lnTo>
+                    <a:pt x="914478" y="349688"/>
+                  </a:lnTo>
+                  <a:lnTo>
+                    <a:pt x="984822" y="371663"/>
+                  </a:lnTo>
+                  <a:lnTo>
+                    <a:pt x="1055167" y="393030"/>
+                  </a:lnTo>
+                  <a:lnTo>
+                    <a:pt x="1125511" y="413805"/>
+                  </a:lnTo>
+                  <a:lnTo>
+                    <a:pt x="1195856" y="434005"/>
+                  </a:lnTo>
+                  <a:lnTo>
+                    <a:pt x="1266200" y="453645"/>
+                  </a:lnTo>
+                  <a:lnTo>
+                    <a:pt x="1336545" y="472741"/>
+                  </a:lnTo>
+                  <a:lnTo>
+                    <a:pt x="1406889" y="491308"/>
+                  </a:lnTo>
+                  <a:lnTo>
+                    <a:pt x="1477234" y="509360"/>
+                  </a:lnTo>
+                  <a:lnTo>
+                    <a:pt x="1547578" y="526913"/>
+                  </a:lnTo>
+                  <a:lnTo>
+                    <a:pt x="1617923" y="543979"/>
+                  </a:lnTo>
+                  <a:lnTo>
+                    <a:pt x="1688267" y="560573"/>
+                  </a:lnTo>
+                  <a:lnTo>
+                    <a:pt x="1758612" y="576707"/>
+                  </a:lnTo>
+                  <a:lnTo>
+                    <a:pt x="1828956" y="592394"/>
+                  </a:lnTo>
+                  <a:lnTo>
+                    <a:pt x="1899301" y="607646"/>
+                  </a:lnTo>
+                  <a:lnTo>
+                    <a:pt x="1969645" y="622476"/>
+                  </a:lnTo>
+                  <a:lnTo>
+                    <a:pt x="2039990" y="636895"/>
+                  </a:lnTo>
+                  <a:lnTo>
+                    <a:pt x="2110334" y="650915"/>
+                  </a:lnTo>
+                  <a:lnTo>
+                    <a:pt x="2180679" y="664546"/>
+                  </a:lnTo>
+                  <a:lnTo>
+                    <a:pt x="2251023" y="677800"/>
+                  </a:lnTo>
+                  <a:lnTo>
+                    <a:pt x="2321368" y="690687"/>
+                  </a:lnTo>
+                  <a:lnTo>
+                    <a:pt x="2391712" y="703216"/>
+                  </a:lnTo>
+                  <a:lnTo>
+                    <a:pt x="2462057" y="715399"/>
+                  </a:lnTo>
+                  <a:lnTo>
+                    <a:pt x="2532401" y="727244"/>
+                  </a:lnTo>
+                  <a:lnTo>
+                    <a:pt x="2602746" y="738761"/>
+                  </a:lnTo>
+                  <a:lnTo>
+                    <a:pt x="2673090" y="749959"/>
+                  </a:lnTo>
+                  <a:lnTo>
+                    <a:pt x="2743435" y="760847"/>
+                  </a:lnTo>
+                  <a:lnTo>
+                    <a:pt x="2813779" y="771433"/>
+                  </a:lnTo>
+                  <a:lnTo>
+                    <a:pt x="2884124" y="781726"/>
+                  </a:lnTo>
+                  <a:lnTo>
+                    <a:pt x="2954468" y="791734"/>
+                  </a:lnTo>
+                  <a:lnTo>
+                    <a:pt x="3024813" y="801464"/>
+                  </a:lnTo>
+                  <a:lnTo>
+                    <a:pt x="3095157" y="810925"/>
+                  </a:lnTo>
+                  <a:lnTo>
+                    <a:pt x="3165502" y="820124"/>
+                  </a:lnTo>
+                  <a:lnTo>
+                    <a:pt x="3235846" y="829069"/>
+                  </a:lnTo>
+                  <a:lnTo>
+                    <a:pt x="3306191" y="837765"/>
+                  </a:lnTo>
+                  <a:lnTo>
+                    <a:pt x="3376535" y="843747"/>
+                  </a:lnTo>
+                  <a:lnTo>
+                    <a:pt x="3446880" y="843986"/>
+                  </a:lnTo>
+                  <a:lnTo>
+                    <a:pt x="3517224" y="844225"/>
+                  </a:lnTo>
+                  <a:lnTo>
+                    <a:pt x="3587569" y="844464"/>
+                  </a:lnTo>
+                  <a:lnTo>
+                    <a:pt x="3657913" y="844702"/>
+                  </a:lnTo>
+                  <a:lnTo>
+                    <a:pt x="3728257" y="844941"/>
+                  </a:lnTo>
+                  <a:lnTo>
+                    <a:pt x="3798602" y="845179"/>
+                  </a:lnTo>
+                  <a:lnTo>
+                    <a:pt x="3868946" y="845417"/>
+                  </a:lnTo>
+                  <a:lnTo>
+                    <a:pt x="3939291" y="845654"/>
+                  </a:lnTo>
+                  <a:lnTo>
+                    <a:pt x="4009635" y="845892"/>
+                  </a:lnTo>
+                  <a:lnTo>
+                    <a:pt x="4079980" y="846129"/>
+                  </a:lnTo>
+                  <a:lnTo>
+                    <a:pt x="4150324" y="846367"/>
+                  </a:lnTo>
+                  <a:lnTo>
+                    <a:pt x="4220669" y="846603"/>
+                  </a:lnTo>
+                  <a:lnTo>
+                    <a:pt x="4291013" y="846840"/>
+                  </a:lnTo>
+                  <a:lnTo>
+                    <a:pt x="4361358" y="847077"/>
+                  </a:lnTo>
+                  <a:lnTo>
+                    <a:pt x="4431702" y="847313"/>
+                  </a:lnTo>
+                  <a:lnTo>
+                    <a:pt x="4502047" y="847550"/>
+                  </a:lnTo>
+                  <a:lnTo>
+                    <a:pt x="4572391" y="847786"/>
+                  </a:lnTo>
+                  <a:lnTo>
+                    <a:pt x="4642736" y="848021"/>
+                  </a:lnTo>
+                  <a:lnTo>
+                    <a:pt x="4713080" y="848257"/>
+                  </a:lnTo>
+                  <a:lnTo>
+                    <a:pt x="4783425" y="848493"/>
+                  </a:lnTo>
+                  <a:lnTo>
+                    <a:pt x="4853769" y="848728"/>
+                  </a:lnTo>
+                  <a:lnTo>
+                    <a:pt x="4924114" y="848963"/>
+                  </a:lnTo>
+                  <a:lnTo>
+                    <a:pt x="4994458" y="849198"/>
+                  </a:lnTo>
+                  <a:lnTo>
+                    <a:pt x="5064803" y="849433"/>
+                  </a:lnTo>
+                  <a:lnTo>
+                    <a:pt x="5135147" y="849667"/>
+                  </a:lnTo>
+                  <a:lnTo>
+                    <a:pt x="5205492" y="849901"/>
+                  </a:lnTo>
+                  <a:lnTo>
+                    <a:pt x="5275836" y="850136"/>
+                  </a:lnTo>
+                  <a:lnTo>
+                    <a:pt x="5346181" y="850370"/>
+                  </a:lnTo>
+                  <a:lnTo>
+                    <a:pt x="5416525" y="850603"/>
+                  </a:lnTo>
+                  <a:lnTo>
+                    <a:pt x="5486870" y="850837"/>
+                  </a:lnTo>
+                  <a:lnTo>
+                    <a:pt x="5557214" y="851070"/>
+                  </a:lnTo>
+                  <a:lnTo>
+                    <a:pt x="5627559" y="851304"/>
+                  </a:lnTo>
+                  <a:lnTo>
+                    <a:pt x="5697903" y="851537"/>
+                  </a:lnTo>
+                  <a:lnTo>
+                    <a:pt x="5768248" y="851770"/>
+                  </a:lnTo>
+                  <a:lnTo>
+                    <a:pt x="5838592" y="852002"/>
+                  </a:lnTo>
+                  <a:lnTo>
+                    <a:pt x="5908937" y="852235"/>
+                  </a:lnTo>
+                  <a:lnTo>
+                    <a:pt x="5979281" y="852467"/>
+                  </a:lnTo>
+                  <a:lnTo>
+                    <a:pt x="6049626" y="852699"/>
+                  </a:lnTo>
+                  <a:lnTo>
+                    <a:pt x="6119970" y="852931"/>
+                  </a:lnTo>
+                  <a:lnTo>
+                    <a:pt x="6190315" y="853163"/>
+                  </a:lnTo>
+                  <a:lnTo>
+                    <a:pt x="6260659" y="853394"/>
+                  </a:lnTo>
+                  <a:lnTo>
+                    <a:pt x="6331004" y="853626"/>
+                  </a:lnTo>
+                  <a:lnTo>
+                    <a:pt x="6401348" y="853857"/>
+                  </a:lnTo>
+                  <a:lnTo>
+                    <a:pt x="6471693" y="854088"/>
+                  </a:lnTo>
+                  <a:lnTo>
+                    <a:pt x="6542037" y="854319"/>
+                  </a:lnTo>
+                  <a:lnTo>
+                    <a:pt x="6612382" y="854549"/>
+                  </a:lnTo>
+                  <a:lnTo>
+                    <a:pt x="6682726" y="854780"/>
+                  </a:lnTo>
+                  <a:lnTo>
+                    <a:pt x="6753071" y="855010"/>
+                  </a:lnTo>
+                  <a:lnTo>
+                    <a:pt x="6823415" y="855240"/>
+                  </a:lnTo>
+                  <a:lnTo>
+                    <a:pt x="6893760" y="855470"/>
+                  </a:lnTo>
+                  <a:lnTo>
+                    <a:pt x="6964104" y="855700"/>
+                  </a:lnTo>
+                  <a:lnTo>
+                    <a:pt x="6964104" y="1072174"/>
+                  </a:lnTo>
+                  <a:lnTo>
+                    <a:pt x="6893760" y="1070156"/>
+                  </a:lnTo>
+                  <a:lnTo>
+                    <a:pt x="6823415" y="1068081"/>
+                  </a:lnTo>
+                  <a:lnTo>
+                    <a:pt x="6753071" y="1065946"/>
+                  </a:lnTo>
+                  <a:lnTo>
+                    <a:pt x="6682726" y="1063750"/>
+                  </a:lnTo>
+                  <a:lnTo>
+                    <a:pt x="6612382" y="1061492"/>
+                  </a:lnTo>
+                  <a:lnTo>
+                    <a:pt x="6542037" y="1059170"/>
+                  </a:lnTo>
+                  <a:lnTo>
+                    <a:pt x="6471693" y="1056781"/>
+                  </a:lnTo>
+                  <a:lnTo>
+                    <a:pt x="6401348" y="1054325"/>
+                  </a:lnTo>
+                  <a:lnTo>
+                    <a:pt x="6331004" y="1051798"/>
+                  </a:lnTo>
+                  <a:lnTo>
+                    <a:pt x="6260659" y="1049200"/>
+                  </a:lnTo>
+                  <a:lnTo>
+                    <a:pt x="6190315" y="1046527"/>
+                  </a:lnTo>
+                  <a:lnTo>
+                    <a:pt x="6119970" y="1043778"/>
+                  </a:lnTo>
+                  <a:lnTo>
+                    <a:pt x="6049626" y="1040951"/>
+                  </a:lnTo>
+                  <a:lnTo>
+                    <a:pt x="5979281" y="1038044"/>
+                  </a:lnTo>
+                  <a:lnTo>
+                    <a:pt x="5908937" y="1035053"/>
+                  </a:lnTo>
+                  <a:lnTo>
+                    <a:pt x="5838592" y="1031977"/>
+                  </a:lnTo>
+                  <a:lnTo>
+                    <a:pt x="5768248" y="1028814"/>
+                  </a:lnTo>
+                  <a:lnTo>
+                    <a:pt x="5697903" y="1025561"/>
+                  </a:lnTo>
+                  <a:lnTo>
+                    <a:pt x="5627559" y="1022215"/>
+                  </a:lnTo>
+                  <a:lnTo>
+                    <a:pt x="5557214" y="1018773"/>
+                  </a:lnTo>
+                  <a:lnTo>
+                    <a:pt x="5486870" y="1015234"/>
+                  </a:lnTo>
+                  <a:lnTo>
+                    <a:pt x="5416525" y="1011594"/>
+                  </a:lnTo>
+                  <a:lnTo>
+                    <a:pt x="5346181" y="1007850"/>
+                  </a:lnTo>
+                  <a:lnTo>
+                    <a:pt x="5275836" y="1003999"/>
+                  </a:lnTo>
+                  <a:lnTo>
+                    <a:pt x="5205492" y="1000038"/>
+                  </a:lnTo>
+                  <a:lnTo>
+                    <a:pt x="5135147" y="995965"/>
+                  </a:lnTo>
+                  <a:lnTo>
+                    <a:pt x="5064803" y="991776"/>
+                  </a:lnTo>
+                  <a:lnTo>
+                    <a:pt x="4994458" y="987467"/>
+                  </a:lnTo>
+                  <a:lnTo>
+                    <a:pt x="4924114" y="983036"/>
+                  </a:lnTo>
+                  <a:lnTo>
+                    <a:pt x="4853769" y="978478"/>
+                  </a:lnTo>
+                  <a:lnTo>
+                    <a:pt x="4783425" y="973791"/>
+                  </a:lnTo>
+                  <a:lnTo>
+                    <a:pt x="4713080" y="968970"/>
+                  </a:lnTo>
+                  <a:lnTo>
+                    <a:pt x="4642736" y="964012"/>
+                  </a:lnTo>
+                  <a:lnTo>
+                    <a:pt x="4572391" y="958912"/>
+                  </a:lnTo>
+                  <a:lnTo>
+                    <a:pt x="4502047" y="953667"/>
+                  </a:lnTo>
+                  <a:lnTo>
+                    <a:pt x="4431702" y="948273"/>
+                  </a:lnTo>
+                  <a:lnTo>
+                    <a:pt x="4361358" y="942725"/>
+                  </a:lnTo>
+                  <a:lnTo>
+                    <a:pt x="4291013" y="937019"/>
+                  </a:lnTo>
+                  <a:lnTo>
+                    <a:pt x="4220669" y="931150"/>
+                  </a:lnTo>
+                  <a:lnTo>
+                    <a:pt x="4150324" y="925114"/>
+                  </a:lnTo>
+                  <a:lnTo>
+                    <a:pt x="4079980" y="918906"/>
+                  </a:lnTo>
+                  <a:lnTo>
+                    <a:pt x="4009635" y="912522"/>
+                  </a:lnTo>
+                  <a:lnTo>
+                    <a:pt x="3939291" y="905955"/>
+                  </a:lnTo>
+                  <a:lnTo>
+                    <a:pt x="3868946" y="899202"/>
+                  </a:lnTo>
+                  <a:lnTo>
+                    <a:pt x="3798602" y="892256"/>
+                  </a:lnTo>
+                  <a:lnTo>
+                    <a:pt x="3728257" y="885112"/>
+                  </a:lnTo>
+                  <a:lnTo>
+                    <a:pt x="3657913" y="877764"/>
+                  </a:lnTo>
+                  <a:lnTo>
+                    <a:pt x="3587569" y="870207"/>
+                  </a:lnTo>
+                  <a:lnTo>
+                    <a:pt x="3517224" y="862435"/>
+                  </a:lnTo>
+                  <a:lnTo>
+                    <a:pt x="3446880" y="854442"/>
+                  </a:lnTo>
+                  <a:lnTo>
+                    <a:pt x="3376535" y="846220"/>
+                  </a:lnTo>
+                  <a:lnTo>
+                    <a:pt x="3306191" y="843508"/>
+                  </a:lnTo>
+                  <a:lnTo>
+                    <a:pt x="3235846" y="843268"/>
+                  </a:lnTo>
+                  <a:lnTo>
+                    <a:pt x="3165502" y="843029"/>
+                  </a:lnTo>
+                  <a:lnTo>
+                    <a:pt x="3095157" y="842789"/>
+                  </a:lnTo>
+                  <a:lnTo>
+                    <a:pt x="3024813" y="842549"/>
+                  </a:lnTo>
+                  <a:lnTo>
+                    <a:pt x="2954468" y="842309"/>
+                  </a:lnTo>
+                  <a:lnTo>
+                    <a:pt x="2884124" y="842068"/>
+                  </a:lnTo>
+                  <a:lnTo>
+                    <a:pt x="2813779" y="841828"/>
+                  </a:lnTo>
+                  <a:lnTo>
+                    <a:pt x="2743435" y="841587"/>
+                  </a:lnTo>
+                  <a:lnTo>
+                    <a:pt x="2673090" y="841346"/>
+                  </a:lnTo>
+                  <a:lnTo>
+                    <a:pt x="2602746" y="841105"/>
+                  </a:lnTo>
+                  <a:lnTo>
+                    <a:pt x="2532401" y="840863"/>
+                  </a:lnTo>
+                  <a:lnTo>
+                    <a:pt x="2462057" y="840622"/>
+                  </a:lnTo>
+                  <a:lnTo>
+                    <a:pt x="2391712" y="840380"/>
+                  </a:lnTo>
+                  <a:lnTo>
+                    <a:pt x="2321368" y="840138"/>
+                  </a:lnTo>
+                  <a:lnTo>
+                    <a:pt x="2251023" y="839896"/>
+                  </a:lnTo>
+                  <a:lnTo>
+                    <a:pt x="2180679" y="839653"/>
+                  </a:lnTo>
+                  <a:lnTo>
+                    <a:pt x="2110334" y="839411"/>
+                  </a:lnTo>
+                  <a:lnTo>
+                    <a:pt x="2039990" y="839168"/>
+                  </a:lnTo>
+                  <a:lnTo>
+                    <a:pt x="1969645" y="838925"/>
+                  </a:lnTo>
+                  <a:lnTo>
+                    <a:pt x="1899301" y="838682"/>
+                  </a:lnTo>
+                  <a:lnTo>
+                    <a:pt x="1828956" y="838439"/>
+                  </a:lnTo>
+                  <a:lnTo>
+                    <a:pt x="1758612" y="838195"/>
+                  </a:lnTo>
+                  <a:lnTo>
+                    <a:pt x="1688267" y="837951"/>
+                  </a:lnTo>
+                  <a:lnTo>
+                    <a:pt x="1617923" y="837708"/>
+                  </a:lnTo>
+                  <a:lnTo>
+                    <a:pt x="1547578" y="837463"/>
+                  </a:lnTo>
+                  <a:lnTo>
+                    <a:pt x="1477234" y="837219"/>
+                  </a:lnTo>
+                  <a:lnTo>
+                    <a:pt x="1406889" y="836975"/>
+                  </a:lnTo>
+                  <a:lnTo>
+                    <a:pt x="1336545" y="836730"/>
+                  </a:lnTo>
+                  <a:lnTo>
+                    <a:pt x="1266200" y="836485"/>
+                  </a:lnTo>
+                  <a:lnTo>
+                    <a:pt x="1195856" y="836240"/>
+                  </a:lnTo>
+                  <a:lnTo>
+                    <a:pt x="1125511" y="835995"/>
+                  </a:lnTo>
+                  <a:lnTo>
+                    <a:pt x="1055167" y="835749"/>
+                  </a:lnTo>
+                  <a:lnTo>
+                    <a:pt x="984822" y="835504"/>
+                  </a:lnTo>
+                  <a:lnTo>
+                    <a:pt x="914478" y="835258"/>
+                  </a:lnTo>
+                  <a:lnTo>
+                    <a:pt x="844133" y="835012"/>
+                  </a:lnTo>
+                  <a:lnTo>
+                    <a:pt x="773789" y="834765"/>
+                  </a:lnTo>
+                  <a:lnTo>
+                    <a:pt x="703444" y="834519"/>
+                  </a:lnTo>
+                  <a:lnTo>
+                    <a:pt x="633100" y="834272"/>
+                  </a:lnTo>
+                  <a:lnTo>
+                    <a:pt x="562755" y="834026"/>
+                  </a:lnTo>
+                  <a:lnTo>
+                    <a:pt x="492411" y="833778"/>
+                  </a:lnTo>
+                  <a:lnTo>
+                    <a:pt x="422066" y="833531"/>
+                  </a:lnTo>
+                  <a:lnTo>
+                    <a:pt x="351722" y="833284"/>
+                  </a:lnTo>
+                  <a:lnTo>
+                    <a:pt x="281377" y="833036"/>
+                  </a:lnTo>
+                  <a:lnTo>
+                    <a:pt x="211033" y="832788"/>
+                  </a:lnTo>
+                  <a:lnTo>
+                    <a:pt x="140688" y="832540"/>
+                  </a:lnTo>
+                  <a:lnTo>
+                    <a:pt x="70344" y="832292"/>
+                  </a:lnTo>
+                  <a:lnTo>
+                    <a:pt x="0" y="832044"/>
                   </a:lnTo>
                   <a:close/>
                 </a:path>
@@ -3584,643 +3619,318 @@
         </p:sp>
         <p:sp>
           <p:nvSpPr>
-            <p:cNvPr id="21" name="pl21"/>
-            <p:cNvSpPr/>
-            <p:nvPr/>
-          </p:nvSpPr>
-          <p:spPr>
-            <a:xfrm>
-              <a:off x="1172049" y="2389936"/>
-              <a:ext cx="7090630" cy="2371172"/>
-            </a:xfrm>
-            <a:custGeom>
-              <a:avLst/>
-              <a:pathLst>
-                <a:path w="7090630" h="2371172">
-                  <a:moveTo>
-                    <a:pt x="0" y="0"/>
-                  </a:moveTo>
-                  <a:lnTo>
-                    <a:pt x="71622" y="87737"/>
-                  </a:lnTo>
-                  <a:lnTo>
-                    <a:pt x="143245" y="173043"/>
-                  </a:lnTo>
-                  <a:lnTo>
-                    <a:pt x="214867" y="255987"/>
-                  </a:lnTo>
-                  <a:lnTo>
-                    <a:pt x="286490" y="336633"/>
-                  </a:lnTo>
-                  <a:lnTo>
-                    <a:pt x="358112" y="415045"/>
-                  </a:lnTo>
-                  <a:lnTo>
-                    <a:pt x="429735" y="491285"/>
-                  </a:lnTo>
-                  <a:lnTo>
-                    <a:pt x="501357" y="565413"/>
-                  </a:lnTo>
-                  <a:lnTo>
-                    <a:pt x="572980" y="637488"/>
-                  </a:lnTo>
-                  <a:lnTo>
-                    <a:pt x="644602" y="707566"/>
-                  </a:lnTo>
-                  <a:lnTo>
-                    <a:pt x="716225" y="775703"/>
-                  </a:lnTo>
-                  <a:lnTo>
-                    <a:pt x="787847" y="841953"/>
-                  </a:lnTo>
-                  <a:lnTo>
-                    <a:pt x="859470" y="906367"/>
-                  </a:lnTo>
-                  <a:lnTo>
-                    <a:pt x="931092" y="968997"/>
-                  </a:lnTo>
-                  <a:lnTo>
-                    <a:pt x="1002715" y="1029892"/>
-                  </a:lnTo>
-                  <a:lnTo>
-                    <a:pt x="1074337" y="1089100"/>
-                  </a:lnTo>
-                  <a:lnTo>
-                    <a:pt x="1145960" y="1146668"/>
-                  </a:lnTo>
-                  <a:lnTo>
-                    <a:pt x="1217582" y="1202642"/>
-                  </a:lnTo>
-                  <a:lnTo>
-                    <a:pt x="1289205" y="1257065"/>
-                  </a:lnTo>
-                  <a:lnTo>
-                    <a:pt x="1360827" y="1309980"/>
-                  </a:lnTo>
-                  <a:lnTo>
-                    <a:pt x="1432450" y="1361430"/>
-                  </a:lnTo>
-                  <a:lnTo>
-                    <a:pt x="1504073" y="1411454"/>
-                  </a:lnTo>
-                  <a:lnTo>
-                    <a:pt x="1575695" y="1460093"/>
-                  </a:lnTo>
-                  <a:lnTo>
-                    <a:pt x="1647318" y="1507384"/>
-                  </a:lnTo>
-                  <a:lnTo>
-                    <a:pt x="1718940" y="1553366"/>
-                  </a:lnTo>
-                  <a:lnTo>
-                    <a:pt x="1790563" y="1598073"/>
-                  </a:lnTo>
-                  <a:lnTo>
-                    <a:pt x="1862185" y="1641542"/>
-                  </a:lnTo>
-                  <a:lnTo>
-                    <a:pt x="1933808" y="1683807"/>
-                  </a:lnTo>
-                  <a:lnTo>
-                    <a:pt x="2005430" y="1724902"/>
-                  </a:lnTo>
-                  <a:lnTo>
-                    <a:pt x="2077053" y="1764858"/>
-                  </a:lnTo>
-                  <a:lnTo>
-                    <a:pt x="2148675" y="1803707"/>
-                  </a:lnTo>
-                  <a:lnTo>
-                    <a:pt x="2220298" y="1841480"/>
-                  </a:lnTo>
-                  <a:lnTo>
-                    <a:pt x="2291920" y="1878206"/>
-                  </a:lnTo>
-                  <a:lnTo>
-                    <a:pt x="2363543" y="1913916"/>
-                  </a:lnTo>
-                  <a:lnTo>
-                    <a:pt x="2435165" y="1948636"/>
-                  </a:lnTo>
-                  <a:lnTo>
-                    <a:pt x="2506788" y="1982394"/>
-                  </a:lnTo>
-                  <a:lnTo>
-                    <a:pt x="2578410" y="2015217"/>
-                  </a:lnTo>
-                  <a:lnTo>
-                    <a:pt x="2650033" y="2047131"/>
-                  </a:lnTo>
-                  <a:lnTo>
-                    <a:pt x="2721655" y="2078161"/>
-                  </a:lnTo>
-                  <a:lnTo>
-                    <a:pt x="2793278" y="2108332"/>
-                  </a:lnTo>
-                  <a:lnTo>
-                    <a:pt x="2864901" y="2137666"/>
-                  </a:lnTo>
-                  <a:lnTo>
-                    <a:pt x="2936523" y="2166188"/>
-                  </a:lnTo>
-                  <a:lnTo>
-                    <a:pt x="3008146" y="2193920"/>
-                  </a:lnTo>
-                  <a:lnTo>
-                    <a:pt x="3079768" y="2220884"/>
-                  </a:lnTo>
-                  <a:lnTo>
-                    <a:pt x="3151391" y="2247101"/>
-                  </a:lnTo>
-                  <a:lnTo>
-                    <a:pt x="3223013" y="2272591"/>
-                  </a:lnTo>
-                  <a:lnTo>
-                    <a:pt x="3294636" y="2297376"/>
-                  </a:lnTo>
-                  <a:lnTo>
-                    <a:pt x="3366258" y="2321474"/>
-                  </a:lnTo>
-                  <a:lnTo>
-                    <a:pt x="3437881" y="2338051"/>
-                  </a:lnTo>
-                  <a:lnTo>
-                    <a:pt x="3509503" y="2338713"/>
-                  </a:lnTo>
-                  <a:lnTo>
-                    <a:pt x="3581126" y="2339375"/>
-                  </a:lnTo>
-                  <a:lnTo>
-                    <a:pt x="3652748" y="2340036"/>
-                  </a:lnTo>
-                  <a:lnTo>
-                    <a:pt x="3724371" y="2340697"/>
-                  </a:lnTo>
-                  <a:lnTo>
-                    <a:pt x="3795993" y="2341358"/>
-                  </a:lnTo>
-                  <a:lnTo>
-                    <a:pt x="3867616" y="2342018"/>
-                  </a:lnTo>
-                  <a:lnTo>
-                    <a:pt x="3939238" y="2342677"/>
-                  </a:lnTo>
-                  <a:lnTo>
-                    <a:pt x="4010861" y="2343336"/>
-                  </a:lnTo>
-                  <a:lnTo>
-                    <a:pt x="4082483" y="2343994"/>
-                  </a:lnTo>
-                  <a:lnTo>
-                    <a:pt x="4154106" y="2344652"/>
-                  </a:lnTo>
-                  <a:lnTo>
-                    <a:pt x="4225729" y="2345309"/>
-                  </a:lnTo>
-                  <a:lnTo>
-                    <a:pt x="4297351" y="2345966"/>
-                  </a:lnTo>
-                  <a:lnTo>
-                    <a:pt x="4368974" y="2346622"/>
-                  </a:lnTo>
-                  <a:lnTo>
-                    <a:pt x="4440596" y="2347277"/>
-                  </a:lnTo>
-                  <a:lnTo>
-                    <a:pt x="4512219" y="2347933"/>
-                  </a:lnTo>
-                  <a:lnTo>
-                    <a:pt x="4583841" y="2348587"/>
-                  </a:lnTo>
-                  <a:lnTo>
-                    <a:pt x="4655464" y="2349241"/>
-                  </a:lnTo>
-                  <a:lnTo>
-                    <a:pt x="4727086" y="2349895"/>
-                  </a:lnTo>
-                  <a:lnTo>
-                    <a:pt x="4798709" y="2350548"/>
-                  </a:lnTo>
-                  <a:lnTo>
-                    <a:pt x="4870331" y="2351200"/>
-                  </a:lnTo>
-                  <a:lnTo>
-                    <a:pt x="4941954" y="2351852"/>
-                  </a:lnTo>
-                  <a:lnTo>
-                    <a:pt x="5013576" y="2352504"/>
-                  </a:lnTo>
-                  <a:lnTo>
-                    <a:pt x="5085199" y="2353155"/>
-                  </a:lnTo>
-                  <a:lnTo>
-                    <a:pt x="5156821" y="2353805"/>
-                  </a:lnTo>
-                  <a:lnTo>
-                    <a:pt x="5228444" y="2354455"/>
-                  </a:lnTo>
-                  <a:lnTo>
-                    <a:pt x="5300066" y="2355105"/>
-                  </a:lnTo>
-                  <a:lnTo>
-                    <a:pt x="5371689" y="2355753"/>
-                  </a:lnTo>
-                  <a:lnTo>
-                    <a:pt x="5443311" y="2356402"/>
-                  </a:lnTo>
-                  <a:lnTo>
-                    <a:pt x="5514934" y="2357050"/>
-                  </a:lnTo>
-                  <a:lnTo>
-                    <a:pt x="5586557" y="2357697"/>
-                  </a:lnTo>
-                  <a:lnTo>
-                    <a:pt x="5658179" y="2358344"/>
-                  </a:lnTo>
-                  <a:lnTo>
-                    <a:pt x="5729802" y="2358990"/>
-                  </a:lnTo>
-                  <a:lnTo>
-                    <a:pt x="5801424" y="2359636"/>
-                  </a:lnTo>
-                  <a:lnTo>
-                    <a:pt x="5873047" y="2360281"/>
-                  </a:lnTo>
-                  <a:lnTo>
-                    <a:pt x="5944669" y="2360926"/>
-                  </a:lnTo>
-                  <a:lnTo>
-                    <a:pt x="6016292" y="2361570"/>
-                  </a:lnTo>
-                  <a:lnTo>
-                    <a:pt x="6087914" y="2362214"/>
-                  </a:lnTo>
-                  <a:lnTo>
-                    <a:pt x="6159537" y="2362857"/>
-                  </a:lnTo>
-                  <a:lnTo>
-                    <a:pt x="6231159" y="2363500"/>
-                  </a:lnTo>
-                  <a:lnTo>
-                    <a:pt x="6302782" y="2364142"/>
-                  </a:lnTo>
-                  <a:lnTo>
-                    <a:pt x="6374404" y="2364783"/>
-                  </a:lnTo>
-                  <a:lnTo>
-                    <a:pt x="6446027" y="2365425"/>
-                  </a:lnTo>
-                  <a:lnTo>
-                    <a:pt x="6517649" y="2366065"/>
-                  </a:lnTo>
-                  <a:lnTo>
-                    <a:pt x="6589272" y="2366705"/>
-                  </a:lnTo>
-                  <a:lnTo>
-                    <a:pt x="6660894" y="2367345"/>
-                  </a:lnTo>
-                  <a:lnTo>
-                    <a:pt x="6732517" y="2367984"/>
-                  </a:lnTo>
-                  <a:lnTo>
-                    <a:pt x="6804139" y="2368623"/>
-                  </a:lnTo>
-                  <a:lnTo>
-                    <a:pt x="6875762" y="2369261"/>
-                  </a:lnTo>
-                  <a:lnTo>
-                    <a:pt x="6947385" y="2369898"/>
-                  </a:lnTo>
-                  <a:lnTo>
-                    <a:pt x="7019007" y="2370535"/>
-                  </a:lnTo>
-                  <a:lnTo>
-                    <a:pt x="7090630" y="2371172"/>
-                  </a:lnTo>
-                </a:path>
-              </a:pathLst>
-            </a:custGeom>
-          </p:spPr>
-          <p:txBody>
-            <a:bodyPr/>
-            <a:lstStyle/>
-            <a:p/>
-          </p:txBody>
-        </p:sp>
-        <p:sp>
-          <p:nvSpPr>
             <p:cNvPr id="22" name="pl22"/>
             <p:cNvSpPr/>
             <p:nvPr/>
           </p:nvSpPr>
           <p:spPr>
             <a:xfrm>
-              <a:off x="1172049" y="4695557"/>
-              <a:ext cx="7090630" cy="665409"/>
+              <a:off x="1235312" y="2257285"/>
+              <a:ext cx="6964104" cy="855700"/>
             </a:xfrm>
             <a:custGeom>
               <a:avLst/>
               <a:pathLst>
-                <a:path w="7090630" h="665409">
+                <a:path w="6964104" h="855700">
                   <a:moveTo>
-                    <a:pt x="7090630" y="665409"/>
+                    <a:pt x="0" y="0"/>
                   </a:moveTo>
                   <a:lnTo>
-                    <a:pt x="7019007" y="659817"/>
-                  </a:lnTo>
-                  <a:lnTo>
-                    <a:pt x="6947385" y="654065"/>
-                  </a:lnTo>
-                  <a:lnTo>
-                    <a:pt x="6875762" y="648150"/>
-                  </a:lnTo>
-                  <a:lnTo>
-                    <a:pt x="6804139" y="642066"/>
-                  </a:lnTo>
-                  <a:lnTo>
-                    <a:pt x="6732517" y="635809"/>
-                  </a:lnTo>
-                  <a:lnTo>
-                    <a:pt x="6660894" y="629373"/>
-                  </a:lnTo>
-                  <a:lnTo>
-                    <a:pt x="6589272" y="622755"/>
-                  </a:lnTo>
-                  <a:lnTo>
-                    <a:pt x="6517649" y="615947"/>
-                  </a:lnTo>
-                  <a:lnTo>
-                    <a:pt x="6446027" y="608946"/>
-                  </a:lnTo>
-                  <a:lnTo>
-                    <a:pt x="6374404" y="601745"/>
-                  </a:lnTo>
-                  <a:lnTo>
-                    <a:pt x="6302782" y="594339"/>
-                  </a:lnTo>
-                  <a:lnTo>
-                    <a:pt x="6231159" y="586723"/>
-                  </a:lnTo>
-                  <a:lnTo>
-                    <a:pt x="6159537" y="578889"/>
-                  </a:lnTo>
-                  <a:lnTo>
-                    <a:pt x="6087914" y="570832"/>
-                  </a:lnTo>
-                  <a:lnTo>
-                    <a:pt x="6016292" y="562545"/>
-                  </a:lnTo>
-                  <a:lnTo>
-                    <a:pt x="5944669" y="554022"/>
-                  </a:lnTo>
-                  <a:lnTo>
-                    <a:pt x="5873047" y="545257"/>
-                  </a:lnTo>
-                  <a:lnTo>
-                    <a:pt x="5801424" y="536242"/>
-                  </a:lnTo>
-                  <a:lnTo>
-                    <a:pt x="5729802" y="526969"/>
-                  </a:lnTo>
-                  <a:lnTo>
-                    <a:pt x="5658179" y="517433"/>
-                  </a:lnTo>
-                  <a:lnTo>
-                    <a:pt x="5586557" y="507625"/>
-                  </a:lnTo>
-                  <a:lnTo>
-                    <a:pt x="5514934" y="497538"/>
-                  </a:lnTo>
-                  <a:lnTo>
-                    <a:pt x="5443311" y="487163"/>
-                  </a:lnTo>
-                  <a:lnTo>
-                    <a:pt x="5371689" y="476493"/>
-                  </a:lnTo>
-                  <a:lnTo>
-                    <a:pt x="5300066" y="465518"/>
-                  </a:lnTo>
-                  <a:lnTo>
-                    <a:pt x="5228444" y="454231"/>
-                  </a:lnTo>
-                  <a:lnTo>
-                    <a:pt x="5156821" y="442623"/>
-                  </a:lnTo>
-                  <a:lnTo>
-                    <a:pt x="5085199" y="430684"/>
-                  </a:lnTo>
-                  <a:lnTo>
-                    <a:pt x="5013576" y="418404"/>
-                  </a:lnTo>
-                  <a:lnTo>
-                    <a:pt x="4941954" y="405775"/>
-                  </a:lnTo>
-                  <a:lnTo>
-                    <a:pt x="4870331" y="392786"/>
-                  </a:lnTo>
-                  <a:lnTo>
-                    <a:pt x="4798709" y="379427"/>
-                  </a:lnTo>
-                  <a:lnTo>
-                    <a:pt x="4727086" y="365687"/>
-                  </a:lnTo>
-                  <a:lnTo>
-                    <a:pt x="4655464" y="351556"/>
-                  </a:lnTo>
-                  <a:lnTo>
-                    <a:pt x="4583841" y="337022"/>
-                  </a:lnTo>
-                  <a:lnTo>
-                    <a:pt x="4512219" y="322074"/>
-                  </a:lnTo>
-                  <a:lnTo>
-                    <a:pt x="4440596" y="306700"/>
-                  </a:lnTo>
-                  <a:lnTo>
-                    <a:pt x="4368974" y="290889"/>
-                  </a:lnTo>
-                  <a:lnTo>
-                    <a:pt x="4297351" y="274627"/>
-                  </a:lnTo>
-                  <a:lnTo>
-                    <a:pt x="4225729" y="257901"/>
-                  </a:lnTo>
-                  <a:lnTo>
-                    <a:pt x="4154106" y="240699"/>
-                  </a:lnTo>
-                  <a:lnTo>
-                    <a:pt x="4082483" y="223007"/>
-                  </a:lnTo>
-                  <a:lnTo>
-                    <a:pt x="4010861" y="204811"/>
-                  </a:lnTo>
-                  <a:lnTo>
-                    <a:pt x="3939238" y="186096"/>
-                  </a:lnTo>
-                  <a:lnTo>
-                    <a:pt x="3867616" y="166849"/>
-                  </a:lnTo>
-                  <a:lnTo>
-                    <a:pt x="3795993" y="147052"/>
-                  </a:lnTo>
-                  <a:lnTo>
-                    <a:pt x="3724371" y="126692"/>
-                  </a:lnTo>
-                  <a:lnTo>
-                    <a:pt x="3652748" y="105752"/>
-                  </a:lnTo>
-                  <a:lnTo>
-                    <a:pt x="3581126" y="84215"/>
-                  </a:lnTo>
-                  <a:lnTo>
-                    <a:pt x="3509503" y="62065"/>
-                  </a:lnTo>
-                  <a:lnTo>
-                    <a:pt x="3437881" y="39284"/>
-                  </a:lnTo>
-                  <a:lnTo>
-                    <a:pt x="3366258" y="31767"/>
-                  </a:lnTo>
-                  <a:lnTo>
-                    <a:pt x="3294636" y="31104"/>
-                  </a:lnTo>
-                  <a:lnTo>
-                    <a:pt x="3223013" y="30439"/>
-                  </a:lnTo>
-                  <a:lnTo>
-                    <a:pt x="3151391" y="29775"/>
-                  </a:lnTo>
-                  <a:lnTo>
-                    <a:pt x="3079768" y="29110"/>
-                  </a:lnTo>
-                  <a:lnTo>
-                    <a:pt x="3008146" y="28444"/>
-                  </a:lnTo>
-                  <a:lnTo>
-                    <a:pt x="2936523" y="27778"/>
-                  </a:lnTo>
-                  <a:lnTo>
-                    <a:pt x="2864901" y="27111"/>
-                  </a:lnTo>
-                  <a:lnTo>
-                    <a:pt x="2793278" y="26444"/>
-                  </a:lnTo>
-                  <a:lnTo>
-                    <a:pt x="2721655" y="25776"/>
-                  </a:lnTo>
-                  <a:lnTo>
-                    <a:pt x="2650033" y="25108"/>
-                  </a:lnTo>
-                  <a:lnTo>
-                    <a:pt x="2578410" y="24439"/>
-                  </a:lnTo>
-                  <a:lnTo>
-                    <a:pt x="2506788" y="23769"/>
-                  </a:lnTo>
-                  <a:lnTo>
-                    <a:pt x="2435165" y="23099"/>
-                  </a:lnTo>
-                  <a:lnTo>
-                    <a:pt x="2363543" y="22429"/>
-                  </a:lnTo>
-                  <a:lnTo>
-                    <a:pt x="2291920" y="21758"/>
-                  </a:lnTo>
-                  <a:lnTo>
-                    <a:pt x="2220298" y="21086"/>
-                  </a:lnTo>
-                  <a:lnTo>
-                    <a:pt x="2148675" y="20414"/>
-                  </a:lnTo>
-                  <a:lnTo>
-                    <a:pt x="2077053" y="19742"/>
-                  </a:lnTo>
-                  <a:lnTo>
-                    <a:pt x="2005430" y="19068"/>
-                  </a:lnTo>
-                  <a:lnTo>
-                    <a:pt x="1933808" y="18395"/>
-                  </a:lnTo>
-                  <a:lnTo>
-                    <a:pt x="1862185" y="17720"/>
-                  </a:lnTo>
-                  <a:lnTo>
-                    <a:pt x="1790563" y="17046"/>
-                  </a:lnTo>
-                  <a:lnTo>
-                    <a:pt x="1718940" y="16370"/>
-                  </a:lnTo>
-                  <a:lnTo>
-                    <a:pt x="1647318" y="15694"/>
-                  </a:lnTo>
-                  <a:lnTo>
-                    <a:pt x="1575695" y="15018"/>
-                  </a:lnTo>
-                  <a:lnTo>
-                    <a:pt x="1504073" y="14341"/>
-                  </a:lnTo>
-                  <a:lnTo>
-                    <a:pt x="1432450" y="13664"/>
-                  </a:lnTo>
-                  <a:lnTo>
-                    <a:pt x="1360827" y="12986"/>
-                  </a:lnTo>
-                  <a:lnTo>
-                    <a:pt x="1289205" y="12307"/>
-                  </a:lnTo>
-                  <a:lnTo>
-                    <a:pt x="1217582" y="11628"/>
-                  </a:lnTo>
-                  <a:lnTo>
-                    <a:pt x="1145960" y="10948"/>
-                  </a:lnTo>
-                  <a:lnTo>
-                    <a:pt x="1074337" y="10268"/>
-                  </a:lnTo>
-                  <a:lnTo>
-                    <a:pt x="1002715" y="9587"/>
-                  </a:lnTo>
-                  <a:lnTo>
-                    <a:pt x="931092" y="8906"/>
-                  </a:lnTo>
-                  <a:lnTo>
-                    <a:pt x="859470" y="8224"/>
-                  </a:lnTo>
-                  <a:lnTo>
-                    <a:pt x="787847" y="7542"/>
-                  </a:lnTo>
-                  <a:lnTo>
-                    <a:pt x="716225" y="6859"/>
-                  </a:lnTo>
-                  <a:lnTo>
-                    <a:pt x="644602" y="6175"/>
-                  </a:lnTo>
-                  <a:lnTo>
-                    <a:pt x="572980" y="5491"/>
-                  </a:lnTo>
-                  <a:lnTo>
-                    <a:pt x="501357" y="4807"/>
-                  </a:lnTo>
-                  <a:lnTo>
-                    <a:pt x="429735" y="4122"/>
-                  </a:lnTo>
-                  <a:lnTo>
-                    <a:pt x="358112" y="3436"/>
-                  </a:lnTo>
-                  <a:lnTo>
-                    <a:pt x="286490" y="2750"/>
-                  </a:lnTo>
-                  <a:lnTo>
-                    <a:pt x="214867" y="2063"/>
-                  </a:lnTo>
-                  <a:lnTo>
-                    <a:pt x="143245" y="1376"/>
-                  </a:lnTo>
-                  <a:lnTo>
-                    <a:pt x="71622" y="688"/>
-                  </a:lnTo>
-                  <a:lnTo>
-                    <a:pt x="0" y="0"/>
+                    <a:pt x="70344" y="31662"/>
+                  </a:lnTo>
+                  <a:lnTo>
+                    <a:pt x="140688" y="62447"/>
+                  </a:lnTo>
+                  <a:lnTo>
+                    <a:pt x="211033" y="92379"/>
+                  </a:lnTo>
+                  <a:lnTo>
+                    <a:pt x="281377" y="121483"/>
+                  </a:lnTo>
+                  <a:lnTo>
+                    <a:pt x="351722" y="149780"/>
+                  </a:lnTo>
+                  <a:lnTo>
+                    <a:pt x="422066" y="177293"/>
+                  </a:lnTo>
+                  <a:lnTo>
+                    <a:pt x="492411" y="204044"/>
+                  </a:lnTo>
+                  <a:lnTo>
+                    <a:pt x="562755" y="230054"/>
+                  </a:lnTo>
+                  <a:lnTo>
+                    <a:pt x="633100" y="255344"/>
+                  </a:lnTo>
+                  <a:lnTo>
+                    <a:pt x="703444" y="279933"/>
+                  </a:lnTo>
+                  <a:lnTo>
+                    <a:pt x="773789" y="303841"/>
+                  </a:lnTo>
+                  <a:lnTo>
+                    <a:pt x="844133" y="327086"/>
+                  </a:lnTo>
+                  <a:lnTo>
+                    <a:pt x="914478" y="349688"/>
+                  </a:lnTo>
+                  <a:lnTo>
+                    <a:pt x="984822" y="371663"/>
+                  </a:lnTo>
+                  <a:lnTo>
+                    <a:pt x="1055167" y="393030"/>
+                  </a:lnTo>
+                  <a:lnTo>
+                    <a:pt x="1125511" y="413805"/>
+                  </a:lnTo>
+                  <a:lnTo>
+                    <a:pt x="1195856" y="434005"/>
+                  </a:lnTo>
+                  <a:lnTo>
+                    <a:pt x="1266200" y="453645"/>
+                  </a:lnTo>
+                  <a:lnTo>
+                    <a:pt x="1336545" y="472741"/>
+                  </a:lnTo>
+                  <a:lnTo>
+                    <a:pt x="1406889" y="491308"/>
+                  </a:lnTo>
+                  <a:lnTo>
+                    <a:pt x="1477234" y="509360"/>
+                  </a:lnTo>
+                  <a:lnTo>
+                    <a:pt x="1547578" y="526913"/>
+                  </a:lnTo>
+                  <a:lnTo>
+                    <a:pt x="1617923" y="543979"/>
+                  </a:lnTo>
+                  <a:lnTo>
+                    <a:pt x="1688267" y="560573"/>
+                  </a:lnTo>
+                  <a:lnTo>
+                    <a:pt x="1758612" y="576707"/>
+                  </a:lnTo>
+                  <a:lnTo>
+                    <a:pt x="1828956" y="592394"/>
+                  </a:lnTo>
+                  <a:lnTo>
+                    <a:pt x="1899301" y="607646"/>
+                  </a:lnTo>
+                  <a:lnTo>
+                    <a:pt x="1969645" y="622476"/>
+                  </a:lnTo>
+                  <a:lnTo>
+                    <a:pt x="2039990" y="636895"/>
+                  </a:lnTo>
+                  <a:lnTo>
+                    <a:pt x="2110334" y="650915"/>
+                  </a:lnTo>
+                  <a:lnTo>
+                    <a:pt x="2180679" y="664546"/>
+                  </a:lnTo>
+                  <a:lnTo>
+                    <a:pt x="2251023" y="677800"/>
+                  </a:lnTo>
+                  <a:lnTo>
+                    <a:pt x="2321368" y="690687"/>
+                  </a:lnTo>
+                  <a:lnTo>
+                    <a:pt x="2391712" y="703216"/>
+                  </a:lnTo>
+                  <a:lnTo>
+                    <a:pt x="2462057" y="715399"/>
+                  </a:lnTo>
+                  <a:lnTo>
+                    <a:pt x="2532401" y="727244"/>
+                  </a:lnTo>
+                  <a:lnTo>
+                    <a:pt x="2602746" y="738761"/>
+                  </a:lnTo>
+                  <a:lnTo>
+                    <a:pt x="2673090" y="749959"/>
+                  </a:lnTo>
+                  <a:lnTo>
+                    <a:pt x="2743435" y="760847"/>
+                  </a:lnTo>
+                  <a:lnTo>
+                    <a:pt x="2813779" y="771433"/>
+                  </a:lnTo>
+                  <a:lnTo>
+                    <a:pt x="2884124" y="781726"/>
+                  </a:lnTo>
+                  <a:lnTo>
+                    <a:pt x="2954468" y="791734"/>
+                  </a:lnTo>
+                  <a:lnTo>
+                    <a:pt x="3024813" y="801464"/>
+                  </a:lnTo>
+                  <a:lnTo>
+                    <a:pt x="3095157" y="810925"/>
+                  </a:lnTo>
+                  <a:lnTo>
+                    <a:pt x="3165502" y="820124"/>
+                  </a:lnTo>
+                  <a:lnTo>
+                    <a:pt x="3235846" y="829069"/>
+                  </a:lnTo>
+                  <a:lnTo>
+                    <a:pt x="3306191" y="837765"/>
+                  </a:lnTo>
+                  <a:lnTo>
+                    <a:pt x="3376535" y="843747"/>
+                  </a:lnTo>
+                  <a:lnTo>
+                    <a:pt x="3446880" y="843986"/>
+                  </a:lnTo>
+                  <a:lnTo>
+                    <a:pt x="3517224" y="844225"/>
+                  </a:lnTo>
+                  <a:lnTo>
+                    <a:pt x="3587569" y="844464"/>
+                  </a:lnTo>
+                  <a:lnTo>
+                    <a:pt x="3657913" y="844702"/>
+                  </a:lnTo>
+                  <a:lnTo>
+                    <a:pt x="3728257" y="844941"/>
+                  </a:lnTo>
+                  <a:lnTo>
+                    <a:pt x="3798602" y="845179"/>
+                  </a:lnTo>
+                  <a:lnTo>
+                    <a:pt x="3868946" y="845417"/>
+                  </a:lnTo>
+                  <a:lnTo>
+                    <a:pt x="3939291" y="845654"/>
+                  </a:lnTo>
+                  <a:lnTo>
+                    <a:pt x="4009635" y="845892"/>
+                  </a:lnTo>
+                  <a:lnTo>
+                    <a:pt x="4079980" y="846129"/>
+                  </a:lnTo>
+                  <a:lnTo>
+                    <a:pt x="4150324" y="846367"/>
+                  </a:lnTo>
+                  <a:lnTo>
+                    <a:pt x="4220669" y="846603"/>
+                  </a:lnTo>
+                  <a:lnTo>
+                    <a:pt x="4291013" y="846840"/>
+                  </a:lnTo>
+                  <a:lnTo>
+                    <a:pt x="4361358" y="847077"/>
+                  </a:lnTo>
+                  <a:lnTo>
+                    <a:pt x="4431702" y="847313"/>
+                  </a:lnTo>
+                  <a:lnTo>
+                    <a:pt x="4502047" y="847550"/>
+                  </a:lnTo>
+                  <a:lnTo>
+                    <a:pt x="4572391" y="847786"/>
+                  </a:lnTo>
+                  <a:lnTo>
+                    <a:pt x="4642736" y="848021"/>
+                  </a:lnTo>
+                  <a:lnTo>
+                    <a:pt x="4713080" y="848257"/>
+                  </a:lnTo>
+                  <a:lnTo>
+                    <a:pt x="4783425" y="848493"/>
+                  </a:lnTo>
+                  <a:lnTo>
+                    <a:pt x="4853769" y="848728"/>
+                  </a:lnTo>
+                  <a:lnTo>
+                    <a:pt x="4924114" y="848963"/>
+                  </a:lnTo>
+                  <a:lnTo>
+                    <a:pt x="4994458" y="849198"/>
+                  </a:lnTo>
+                  <a:lnTo>
+                    <a:pt x="5064803" y="849433"/>
+                  </a:lnTo>
+                  <a:lnTo>
+                    <a:pt x="5135147" y="849667"/>
+                  </a:lnTo>
+                  <a:lnTo>
+                    <a:pt x="5205492" y="849901"/>
+                  </a:lnTo>
+                  <a:lnTo>
+                    <a:pt x="5275836" y="850136"/>
+                  </a:lnTo>
+                  <a:lnTo>
+                    <a:pt x="5346181" y="850370"/>
+                  </a:lnTo>
+                  <a:lnTo>
+                    <a:pt x="5416525" y="850603"/>
+                  </a:lnTo>
+                  <a:lnTo>
+                    <a:pt x="5486870" y="850837"/>
+                  </a:lnTo>
+                  <a:lnTo>
+                    <a:pt x="5557214" y="851070"/>
+                  </a:lnTo>
+                  <a:lnTo>
+                    <a:pt x="5627559" y="851304"/>
+                  </a:lnTo>
+                  <a:lnTo>
+                    <a:pt x="5697903" y="851537"/>
+                  </a:lnTo>
+                  <a:lnTo>
+                    <a:pt x="5768248" y="851770"/>
+                  </a:lnTo>
+                  <a:lnTo>
+                    <a:pt x="5838592" y="852002"/>
+                  </a:lnTo>
+                  <a:lnTo>
+                    <a:pt x="5908937" y="852235"/>
+                  </a:lnTo>
+                  <a:lnTo>
+                    <a:pt x="5979281" y="852467"/>
+                  </a:lnTo>
+                  <a:lnTo>
+                    <a:pt x="6049626" y="852699"/>
+                  </a:lnTo>
+                  <a:lnTo>
+                    <a:pt x="6119970" y="852931"/>
+                  </a:lnTo>
+                  <a:lnTo>
+                    <a:pt x="6190315" y="853163"/>
+                  </a:lnTo>
+                  <a:lnTo>
+                    <a:pt x="6260659" y="853394"/>
+                  </a:lnTo>
+                  <a:lnTo>
+                    <a:pt x="6331004" y="853626"/>
+                  </a:lnTo>
+                  <a:lnTo>
+                    <a:pt x="6401348" y="853857"/>
+                  </a:lnTo>
+                  <a:lnTo>
+                    <a:pt x="6471693" y="854088"/>
+                  </a:lnTo>
+                  <a:lnTo>
+                    <a:pt x="6542037" y="854319"/>
+                  </a:lnTo>
+                  <a:lnTo>
+                    <a:pt x="6612382" y="854549"/>
+                  </a:lnTo>
+                  <a:lnTo>
+                    <a:pt x="6682726" y="854780"/>
+                  </a:lnTo>
+                  <a:lnTo>
+                    <a:pt x="6753071" y="855010"/>
+                  </a:lnTo>
+                  <a:lnTo>
+                    <a:pt x="6823415" y="855240"/>
+                  </a:lnTo>
+                  <a:lnTo>
+                    <a:pt x="6893760" y="855470"/>
+                  </a:lnTo>
+                  <a:lnTo>
+                    <a:pt x="6964104" y="855700"/>
                   </a:lnTo>
                 </a:path>
               </a:pathLst>
@@ -4240,312 +3950,637 @@
           </p:nvSpPr>
           <p:spPr>
             <a:xfrm>
-              <a:off x="1172049" y="3905205"/>
-              <a:ext cx="7090630" cy="1256735"/>
+              <a:off x="1235312" y="3089329"/>
+              <a:ext cx="6964104" cy="240130"/>
             </a:xfrm>
             <a:custGeom>
               <a:avLst/>
               <a:pathLst>
-                <a:path w="7090630" h="1256735">
+                <a:path w="6964104" h="240130">
+                  <a:moveTo>
+                    <a:pt x="6964104" y="240130"/>
+                  </a:moveTo>
+                  <a:lnTo>
+                    <a:pt x="6893760" y="238112"/>
+                  </a:lnTo>
+                  <a:lnTo>
+                    <a:pt x="6823415" y="236036"/>
+                  </a:lnTo>
+                  <a:lnTo>
+                    <a:pt x="6753071" y="233902"/>
+                  </a:lnTo>
+                  <a:lnTo>
+                    <a:pt x="6682726" y="231706"/>
+                  </a:lnTo>
+                  <a:lnTo>
+                    <a:pt x="6612382" y="229448"/>
+                  </a:lnTo>
+                  <a:lnTo>
+                    <a:pt x="6542037" y="227126"/>
+                  </a:lnTo>
+                  <a:lnTo>
+                    <a:pt x="6471693" y="224737"/>
+                  </a:lnTo>
+                  <a:lnTo>
+                    <a:pt x="6401348" y="222281"/>
+                  </a:lnTo>
+                  <a:lnTo>
+                    <a:pt x="6331004" y="219754"/>
+                  </a:lnTo>
+                  <a:lnTo>
+                    <a:pt x="6260659" y="217155"/>
+                  </a:lnTo>
+                  <a:lnTo>
+                    <a:pt x="6190315" y="214483"/>
+                  </a:lnTo>
+                  <a:lnTo>
+                    <a:pt x="6119970" y="211734"/>
+                  </a:lnTo>
+                  <a:lnTo>
+                    <a:pt x="6049626" y="208907"/>
+                  </a:lnTo>
+                  <a:lnTo>
+                    <a:pt x="5979281" y="205999"/>
+                  </a:lnTo>
+                  <a:lnTo>
+                    <a:pt x="5908937" y="203009"/>
+                  </a:lnTo>
+                  <a:lnTo>
+                    <a:pt x="5838592" y="199933"/>
+                  </a:lnTo>
+                  <a:lnTo>
+                    <a:pt x="5768248" y="196770"/>
+                  </a:lnTo>
+                  <a:lnTo>
+                    <a:pt x="5697903" y="193517"/>
+                  </a:lnTo>
+                  <a:lnTo>
+                    <a:pt x="5627559" y="190171"/>
+                  </a:lnTo>
+                  <a:lnTo>
+                    <a:pt x="5557214" y="186729"/>
+                  </a:lnTo>
+                  <a:lnTo>
+                    <a:pt x="5486870" y="183190"/>
+                  </a:lnTo>
+                  <a:lnTo>
+                    <a:pt x="5416525" y="179549"/>
+                  </a:lnTo>
+                  <a:lnTo>
+                    <a:pt x="5346181" y="175805"/>
+                  </a:lnTo>
+                  <a:lnTo>
+                    <a:pt x="5275836" y="171955"/>
+                  </a:lnTo>
+                  <a:lnTo>
+                    <a:pt x="5205492" y="167994"/>
+                  </a:lnTo>
+                  <a:lnTo>
+                    <a:pt x="5135147" y="163921"/>
+                  </a:lnTo>
+                  <a:lnTo>
+                    <a:pt x="5064803" y="159732"/>
+                  </a:lnTo>
+                  <a:lnTo>
+                    <a:pt x="4994458" y="155423"/>
+                  </a:lnTo>
+                  <a:lnTo>
+                    <a:pt x="4924114" y="150992"/>
+                  </a:lnTo>
+                  <a:lnTo>
+                    <a:pt x="4853769" y="146434"/>
+                  </a:lnTo>
+                  <a:lnTo>
+                    <a:pt x="4783425" y="141747"/>
+                  </a:lnTo>
+                  <a:lnTo>
+                    <a:pt x="4713080" y="136926"/>
+                  </a:lnTo>
+                  <a:lnTo>
+                    <a:pt x="4642736" y="131968"/>
+                  </a:lnTo>
+                  <a:lnTo>
+                    <a:pt x="4572391" y="126868"/>
+                  </a:lnTo>
+                  <a:lnTo>
+                    <a:pt x="4502047" y="121623"/>
+                  </a:lnTo>
+                  <a:lnTo>
+                    <a:pt x="4431702" y="116229"/>
+                  </a:lnTo>
+                  <a:lnTo>
+                    <a:pt x="4361358" y="110681"/>
+                  </a:lnTo>
+                  <a:lnTo>
+                    <a:pt x="4291013" y="104975"/>
+                  </a:lnTo>
+                  <a:lnTo>
+                    <a:pt x="4220669" y="99106"/>
+                  </a:lnTo>
+                  <a:lnTo>
+                    <a:pt x="4150324" y="93070"/>
+                  </a:lnTo>
+                  <a:lnTo>
+                    <a:pt x="4079980" y="86862"/>
+                  </a:lnTo>
+                  <a:lnTo>
+                    <a:pt x="4009635" y="80478"/>
+                  </a:lnTo>
+                  <a:lnTo>
+                    <a:pt x="3939291" y="73911"/>
+                  </a:lnTo>
+                  <a:lnTo>
+                    <a:pt x="3868946" y="67157"/>
+                  </a:lnTo>
+                  <a:lnTo>
+                    <a:pt x="3798602" y="60211"/>
+                  </a:lnTo>
+                  <a:lnTo>
+                    <a:pt x="3728257" y="53067"/>
+                  </a:lnTo>
+                  <a:lnTo>
+                    <a:pt x="3657913" y="45720"/>
+                  </a:lnTo>
+                  <a:lnTo>
+                    <a:pt x="3587569" y="38163"/>
+                  </a:lnTo>
+                  <a:lnTo>
+                    <a:pt x="3517224" y="30391"/>
+                  </a:lnTo>
+                  <a:lnTo>
+                    <a:pt x="3446880" y="22398"/>
+                  </a:lnTo>
+                  <a:lnTo>
+                    <a:pt x="3376535" y="14176"/>
+                  </a:lnTo>
+                  <a:lnTo>
+                    <a:pt x="3306191" y="11464"/>
+                  </a:lnTo>
+                  <a:lnTo>
+                    <a:pt x="3235846" y="11224"/>
+                  </a:lnTo>
+                  <a:lnTo>
+                    <a:pt x="3165502" y="10985"/>
+                  </a:lnTo>
+                  <a:lnTo>
+                    <a:pt x="3095157" y="10745"/>
+                  </a:lnTo>
+                  <a:lnTo>
+                    <a:pt x="3024813" y="10505"/>
+                  </a:lnTo>
+                  <a:lnTo>
+                    <a:pt x="2954468" y="10264"/>
+                  </a:lnTo>
+                  <a:lnTo>
+                    <a:pt x="2884124" y="10024"/>
+                  </a:lnTo>
+                  <a:lnTo>
+                    <a:pt x="2813779" y="9783"/>
+                  </a:lnTo>
+                  <a:lnTo>
+                    <a:pt x="2743435" y="9543"/>
+                  </a:lnTo>
+                  <a:lnTo>
+                    <a:pt x="2673090" y="9302"/>
+                  </a:lnTo>
+                  <a:lnTo>
+                    <a:pt x="2602746" y="9060"/>
+                  </a:lnTo>
+                  <a:lnTo>
+                    <a:pt x="2532401" y="8819"/>
+                  </a:lnTo>
+                  <a:lnTo>
+                    <a:pt x="2462057" y="8577"/>
+                  </a:lnTo>
+                  <a:lnTo>
+                    <a:pt x="2391712" y="8336"/>
+                  </a:lnTo>
+                  <a:lnTo>
+                    <a:pt x="2321368" y="8094"/>
+                  </a:lnTo>
+                  <a:lnTo>
+                    <a:pt x="2251023" y="7852"/>
+                  </a:lnTo>
+                  <a:lnTo>
+                    <a:pt x="2180679" y="7609"/>
+                  </a:lnTo>
+                  <a:lnTo>
+                    <a:pt x="2110334" y="7367"/>
+                  </a:lnTo>
+                  <a:lnTo>
+                    <a:pt x="2039990" y="7124"/>
+                  </a:lnTo>
+                  <a:lnTo>
+                    <a:pt x="1969645" y="6881"/>
+                  </a:lnTo>
+                  <a:lnTo>
+                    <a:pt x="1899301" y="6638"/>
+                  </a:lnTo>
+                  <a:lnTo>
+                    <a:pt x="1828956" y="6395"/>
+                  </a:lnTo>
+                  <a:lnTo>
+                    <a:pt x="1758612" y="6151"/>
+                  </a:lnTo>
+                  <a:lnTo>
+                    <a:pt x="1688267" y="5907"/>
+                  </a:lnTo>
+                  <a:lnTo>
+                    <a:pt x="1617923" y="5663"/>
+                  </a:lnTo>
+                  <a:lnTo>
+                    <a:pt x="1547578" y="5419"/>
+                  </a:lnTo>
+                  <a:lnTo>
+                    <a:pt x="1477234" y="5175"/>
+                  </a:lnTo>
+                  <a:lnTo>
+                    <a:pt x="1406889" y="4931"/>
+                  </a:lnTo>
+                  <a:lnTo>
+                    <a:pt x="1336545" y="4686"/>
+                  </a:lnTo>
+                  <a:lnTo>
+                    <a:pt x="1266200" y="4441"/>
+                  </a:lnTo>
+                  <a:lnTo>
+                    <a:pt x="1195856" y="4196"/>
+                  </a:lnTo>
+                  <a:lnTo>
+                    <a:pt x="1125511" y="3951"/>
+                  </a:lnTo>
+                  <a:lnTo>
+                    <a:pt x="1055167" y="3705"/>
+                  </a:lnTo>
+                  <a:lnTo>
+                    <a:pt x="984822" y="3460"/>
+                  </a:lnTo>
+                  <a:lnTo>
+                    <a:pt x="914478" y="3214"/>
+                  </a:lnTo>
+                  <a:lnTo>
+                    <a:pt x="844133" y="2968"/>
+                  </a:lnTo>
+                  <a:lnTo>
+                    <a:pt x="773789" y="2721"/>
+                  </a:lnTo>
+                  <a:lnTo>
+                    <a:pt x="703444" y="2475"/>
+                  </a:lnTo>
+                  <a:lnTo>
+                    <a:pt x="633100" y="2228"/>
+                  </a:lnTo>
+                  <a:lnTo>
+                    <a:pt x="562755" y="1981"/>
+                  </a:lnTo>
+                  <a:lnTo>
+                    <a:pt x="492411" y="1734"/>
+                  </a:lnTo>
+                  <a:lnTo>
+                    <a:pt x="422066" y="1487"/>
+                  </a:lnTo>
+                  <a:lnTo>
+                    <a:pt x="351722" y="1240"/>
+                  </a:lnTo>
+                  <a:lnTo>
+                    <a:pt x="281377" y="992"/>
+                  </a:lnTo>
+                  <a:lnTo>
+                    <a:pt x="211033" y="744"/>
+                  </a:lnTo>
+                  <a:lnTo>
+                    <a:pt x="140688" y="496"/>
+                  </a:lnTo>
+                  <a:lnTo>
+                    <a:pt x="70344" y="248"/>
+                  </a:lnTo>
+                  <a:lnTo>
+                    <a:pt x="0" y="0"/>
+                  </a:lnTo>
+                </a:path>
+              </a:pathLst>
+            </a:custGeom>
+          </p:spPr>
+          <p:txBody>
+            <a:bodyPr/>
+            <a:lstStyle/>
+            <a:p/>
+          </p:txBody>
+        </p:sp>
+        <p:sp>
+          <p:nvSpPr>
+            <p:cNvPr id="24" name="pl24"/>
+            <p:cNvSpPr/>
+            <p:nvPr/>
+          </p:nvSpPr>
+          <p:spPr>
+            <a:xfrm>
+              <a:off x="1235312" y="2804110"/>
+              <a:ext cx="6964104" cy="453526"/>
+            </a:xfrm>
+            <a:custGeom>
+              <a:avLst/>
+              <a:pathLst>
+                <a:path w="6964104" h="453526">
                   <a:moveTo>
                     <a:pt x="0" y="0"/>
                   </a:moveTo>
                   <a:lnTo>
-                    <a:pt x="71622" y="23693"/>
-                  </a:lnTo>
-                  <a:lnTo>
-                    <a:pt x="143245" y="47046"/>
-                  </a:lnTo>
-                  <a:lnTo>
-                    <a:pt x="214867" y="70064"/>
-                  </a:lnTo>
-                  <a:lnTo>
-                    <a:pt x="286490" y="92752"/>
-                  </a:lnTo>
-                  <a:lnTo>
-                    <a:pt x="358112" y="115115"/>
-                  </a:lnTo>
-                  <a:lnTo>
-                    <a:pt x="429735" y="137157"/>
-                  </a:lnTo>
-                  <a:lnTo>
-                    <a:pt x="501357" y="158883"/>
-                  </a:lnTo>
-                  <a:lnTo>
-                    <a:pt x="572980" y="180297"/>
-                  </a:lnTo>
-                  <a:lnTo>
-                    <a:pt x="644602" y="201405"/>
-                  </a:lnTo>
-                  <a:lnTo>
-                    <a:pt x="716225" y="222209"/>
-                  </a:lnTo>
-                  <a:lnTo>
-                    <a:pt x="787847" y="242715"/>
-                  </a:lnTo>
-                  <a:lnTo>
-                    <a:pt x="859470" y="262927"/>
-                  </a:lnTo>
-                  <a:lnTo>
-                    <a:pt x="931092" y="282849"/>
-                  </a:lnTo>
-                  <a:lnTo>
-                    <a:pt x="1002715" y="302486"/>
-                  </a:lnTo>
-                  <a:lnTo>
-                    <a:pt x="1074337" y="321841"/>
-                  </a:lnTo>
-                  <a:lnTo>
-                    <a:pt x="1145960" y="340918"/>
-                  </a:lnTo>
-                  <a:lnTo>
-                    <a:pt x="1217582" y="359722"/>
-                  </a:lnTo>
-                  <a:lnTo>
-                    <a:pt x="1289205" y="378256"/>
-                  </a:lnTo>
-                  <a:lnTo>
-                    <a:pt x="1360827" y="396524"/>
-                  </a:lnTo>
-                  <a:lnTo>
-                    <a:pt x="1432450" y="414530"/>
-                  </a:lnTo>
-                  <a:lnTo>
-                    <a:pt x="1504073" y="432278"/>
-                  </a:lnTo>
-                  <a:lnTo>
-                    <a:pt x="1575695" y="449772"/>
-                  </a:lnTo>
-                  <a:lnTo>
-                    <a:pt x="1647318" y="467014"/>
-                  </a:lnTo>
-                  <a:lnTo>
-                    <a:pt x="1718940" y="484009"/>
-                  </a:lnTo>
-                  <a:lnTo>
-                    <a:pt x="1790563" y="500761"/>
-                  </a:lnTo>
-                  <a:lnTo>
-                    <a:pt x="1862185" y="517272"/>
-                  </a:lnTo>
-                  <a:lnTo>
-                    <a:pt x="1933808" y="533547"/>
-                  </a:lnTo>
-                  <a:lnTo>
-                    <a:pt x="2005430" y="549588"/>
-                  </a:lnTo>
-                  <a:lnTo>
-                    <a:pt x="2077053" y="565399"/>
-                  </a:lnTo>
-                  <a:lnTo>
-                    <a:pt x="2148675" y="580983"/>
-                  </a:lnTo>
-                  <a:lnTo>
-                    <a:pt x="2220298" y="596344"/>
-                  </a:lnTo>
-                  <a:lnTo>
-                    <a:pt x="2291920" y="611484"/>
-                  </a:lnTo>
-                  <a:lnTo>
-                    <a:pt x="2363543" y="626407"/>
-                  </a:lnTo>
-                  <a:lnTo>
-                    <a:pt x="2435165" y="641117"/>
-                  </a:lnTo>
-                  <a:lnTo>
-                    <a:pt x="2506788" y="655615"/>
-                  </a:lnTo>
-                  <a:lnTo>
-                    <a:pt x="2578410" y="669905"/>
-                  </a:lnTo>
-                  <a:lnTo>
-                    <a:pt x="2650033" y="683991"/>
-                  </a:lnTo>
-                  <a:lnTo>
-                    <a:pt x="2721655" y="697874"/>
-                  </a:lnTo>
-                  <a:lnTo>
-                    <a:pt x="2793278" y="711559"/>
-                  </a:lnTo>
-                  <a:lnTo>
-                    <a:pt x="2864901" y="725047"/>
-                  </a:lnTo>
-                  <a:lnTo>
-                    <a:pt x="2936523" y="738341"/>
-                  </a:lnTo>
-                  <a:lnTo>
-                    <a:pt x="3008146" y="751445"/>
-                  </a:lnTo>
-                  <a:lnTo>
-                    <a:pt x="3079768" y="764361"/>
-                  </a:lnTo>
-                  <a:lnTo>
-                    <a:pt x="3151391" y="777092"/>
-                  </a:lnTo>
-                  <a:lnTo>
-                    <a:pt x="3223013" y="789641"/>
-                  </a:lnTo>
-                  <a:lnTo>
-                    <a:pt x="3294636" y="802009"/>
-                  </a:lnTo>
-                  <a:lnTo>
-                    <a:pt x="3366258" y="814200"/>
-                  </a:lnTo>
-                  <a:lnTo>
-                    <a:pt x="3437881" y="826216"/>
-                  </a:lnTo>
-                  <a:lnTo>
-                    <a:pt x="3509503" y="838059"/>
-                  </a:lnTo>
-                  <a:lnTo>
-                    <a:pt x="3581126" y="849733"/>
-                  </a:lnTo>
-                  <a:lnTo>
-                    <a:pt x="3652748" y="861240"/>
-                  </a:lnTo>
-                  <a:lnTo>
-                    <a:pt x="3724371" y="872581"/>
-                  </a:lnTo>
-                  <a:lnTo>
-                    <a:pt x="3795993" y="883760"/>
-                  </a:lnTo>
-                  <a:lnTo>
-                    <a:pt x="3867616" y="894778"/>
-                  </a:lnTo>
-                  <a:lnTo>
-                    <a:pt x="3939238" y="905639"/>
-                  </a:lnTo>
-                  <a:lnTo>
-                    <a:pt x="4010861" y="916343"/>
-                  </a:lnTo>
-                  <a:lnTo>
-                    <a:pt x="4082483" y="926895"/>
-                  </a:lnTo>
-                  <a:lnTo>
-                    <a:pt x="4154106" y="937294"/>
-                  </a:lnTo>
-                  <a:lnTo>
-                    <a:pt x="4225729" y="947545"/>
-                  </a:lnTo>
-                  <a:lnTo>
-                    <a:pt x="4297351" y="957649"/>
-                  </a:lnTo>
-                  <a:lnTo>
-                    <a:pt x="4368974" y="967607"/>
-                  </a:lnTo>
-                  <a:lnTo>
-                    <a:pt x="4440596" y="977423"/>
-                  </a:lnTo>
-                  <a:lnTo>
-                    <a:pt x="4512219" y="987099"/>
-                  </a:lnTo>
-                  <a:lnTo>
-                    <a:pt x="4583841" y="996635"/>
-                  </a:lnTo>
-                  <a:lnTo>
-                    <a:pt x="4655464" y="1006035"/>
-                  </a:lnTo>
-                  <a:lnTo>
-                    <a:pt x="4727086" y="1015299"/>
-                  </a:lnTo>
-                  <a:lnTo>
-                    <a:pt x="4798709" y="1024431"/>
-                  </a:lnTo>
-                  <a:lnTo>
-                    <a:pt x="4870331" y="1033432"/>
-                  </a:lnTo>
-                  <a:lnTo>
-                    <a:pt x="4941954" y="1042304"/>
-                  </a:lnTo>
-                  <a:lnTo>
-                    <a:pt x="5013576" y="1051049"/>
-                  </a:lnTo>
-                  <a:lnTo>
-                    <a:pt x="5085199" y="1059668"/>
-                  </a:lnTo>
-                  <a:lnTo>
-                    <a:pt x="5156821" y="1068164"/>
-                  </a:lnTo>
-                  <a:lnTo>
-                    <a:pt x="5228444" y="1076538"/>
-                  </a:lnTo>
-                  <a:lnTo>
-                    <a:pt x="5300066" y="1084791"/>
-                  </a:lnTo>
-                  <a:lnTo>
-                    <a:pt x="5371689" y="1092927"/>
-                  </a:lnTo>
-                  <a:lnTo>
-                    <a:pt x="5443311" y="1100945"/>
-                  </a:lnTo>
-                  <a:lnTo>
-                    <a:pt x="5514934" y="1108849"/>
-                  </a:lnTo>
-                  <a:lnTo>
-                    <a:pt x="5586557" y="1116639"/>
-                  </a:lnTo>
-                  <a:lnTo>
-                    <a:pt x="5658179" y="1124318"/>
-                  </a:lnTo>
-                  <a:lnTo>
-                    <a:pt x="5729802" y="1131886"/>
-                  </a:lnTo>
-                  <a:lnTo>
-                    <a:pt x="5801424" y="1139346"/>
-                  </a:lnTo>
-                  <a:lnTo>
-                    <a:pt x="5873047" y="1146699"/>
-                  </a:lnTo>
-                  <a:lnTo>
-                    <a:pt x="5944669" y="1153946"/>
-                  </a:lnTo>
-                  <a:lnTo>
-                    <a:pt x="6016292" y="1161090"/>
-                  </a:lnTo>
-                  <a:lnTo>
-                    <a:pt x="6087914" y="1168131"/>
-                  </a:lnTo>
-                  <a:lnTo>
-                    <a:pt x="6159537" y="1175071"/>
-                  </a:lnTo>
-                  <a:lnTo>
-                    <a:pt x="6231159" y="1181912"/>
-                  </a:lnTo>
-                  <a:lnTo>
-                    <a:pt x="6302782" y="1188654"/>
-                  </a:lnTo>
-                  <a:lnTo>
-                    <a:pt x="6374404" y="1195300"/>
-                  </a:lnTo>
-                  <a:lnTo>
-                    <a:pt x="6446027" y="1201850"/>
-                  </a:lnTo>
-                  <a:lnTo>
-                    <a:pt x="6517649" y="1208307"/>
-                  </a:lnTo>
-                  <a:lnTo>
-                    <a:pt x="6589272" y="1214671"/>
-                  </a:lnTo>
-                  <a:lnTo>
-                    <a:pt x="6660894" y="1220943"/>
-                  </a:lnTo>
-                  <a:lnTo>
-                    <a:pt x="6732517" y="1227126"/>
-                  </a:lnTo>
-                  <a:lnTo>
-                    <a:pt x="6804139" y="1233220"/>
-                  </a:lnTo>
-                  <a:lnTo>
-                    <a:pt x="6875762" y="1239227"/>
-                  </a:lnTo>
-                  <a:lnTo>
-                    <a:pt x="6947385" y="1245147"/>
-                  </a:lnTo>
-                  <a:lnTo>
-                    <a:pt x="7019007" y="1250983"/>
-                  </a:lnTo>
-                  <a:lnTo>
-                    <a:pt x="7090630" y="1256735"/>
+                    <a:pt x="70344" y="8550"/>
+                  </a:lnTo>
+                  <a:lnTo>
+                    <a:pt x="140688" y="16977"/>
+                  </a:lnTo>
+                  <a:lnTo>
+                    <a:pt x="211033" y="25284"/>
+                  </a:lnTo>
+                  <a:lnTo>
+                    <a:pt x="281377" y="33472"/>
+                  </a:lnTo>
+                  <a:lnTo>
+                    <a:pt x="351722" y="41542"/>
+                  </a:lnTo>
+                  <a:lnTo>
+                    <a:pt x="422066" y="49496"/>
+                  </a:lnTo>
+                  <a:lnTo>
+                    <a:pt x="492411" y="57337"/>
+                  </a:lnTo>
+                  <a:lnTo>
+                    <a:pt x="562755" y="65065"/>
+                  </a:lnTo>
+                  <a:lnTo>
+                    <a:pt x="633100" y="72682"/>
+                  </a:lnTo>
+                  <a:lnTo>
+                    <a:pt x="703444" y="80190"/>
+                  </a:lnTo>
+                  <a:lnTo>
+                    <a:pt x="773789" y="87590"/>
+                  </a:lnTo>
+                  <a:lnTo>
+                    <a:pt x="844133" y="94884"/>
+                  </a:lnTo>
+                  <a:lnTo>
+                    <a:pt x="914478" y="102073"/>
+                  </a:lnTo>
+                  <a:lnTo>
+                    <a:pt x="984822" y="109160"/>
+                  </a:lnTo>
+                  <a:lnTo>
+                    <a:pt x="1055167" y="116144"/>
+                  </a:lnTo>
+                  <a:lnTo>
+                    <a:pt x="1125511" y="123029"/>
+                  </a:lnTo>
+                  <a:lnTo>
+                    <a:pt x="1195856" y="129815"/>
+                  </a:lnTo>
+                  <a:lnTo>
+                    <a:pt x="1266200" y="136503"/>
+                  </a:lnTo>
+                  <a:lnTo>
+                    <a:pt x="1336545" y="143096"/>
+                  </a:lnTo>
+                  <a:lnTo>
+                    <a:pt x="1406889" y="149594"/>
+                  </a:lnTo>
+                  <a:lnTo>
+                    <a:pt x="1477234" y="155999"/>
+                  </a:lnTo>
+                  <a:lnTo>
+                    <a:pt x="1547578" y="162312"/>
+                  </a:lnTo>
+                  <a:lnTo>
+                    <a:pt x="1617923" y="168534"/>
+                  </a:lnTo>
+                  <a:lnTo>
+                    <a:pt x="1688267" y="174667"/>
+                  </a:lnTo>
+                  <a:lnTo>
+                    <a:pt x="1758612" y="180712"/>
+                  </a:lnTo>
+                  <a:lnTo>
+                    <a:pt x="1828956" y="186671"/>
+                  </a:lnTo>
+                  <a:lnTo>
+                    <a:pt x="1899301" y="192544"/>
+                  </a:lnTo>
+                  <a:lnTo>
+                    <a:pt x="1969645" y="198333"/>
+                  </a:lnTo>
+                  <a:lnTo>
+                    <a:pt x="2039990" y="204039"/>
+                  </a:lnTo>
+                  <a:lnTo>
+                    <a:pt x="2110334" y="209663"/>
+                  </a:lnTo>
+                  <a:lnTo>
+                    <a:pt x="2180679" y="215206"/>
+                  </a:lnTo>
+                  <a:lnTo>
+                    <a:pt x="2251023" y="220670"/>
+                  </a:lnTo>
+                  <a:lnTo>
+                    <a:pt x="2321368" y="226055"/>
+                  </a:lnTo>
+                  <a:lnTo>
+                    <a:pt x="2391712" y="231364"/>
+                  </a:lnTo>
+                  <a:lnTo>
+                    <a:pt x="2462057" y="236596"/>
+                  </a:lnTo>
+                  <a:lnTo>
+                    <a:pt x="2532401" y="241753"/>
+                  </a:lnTo>
+                  <a:lnTo>
+                    <a:pt x="2602746" y="246836"/>
+                  </a:lnTo>
+                  <a:lnTo>
+                    <a:pt x="2673090" y="251846"/>
+                  </a:lnTo>
+                  <a:lnTo>
+                    <a:pt x="2743435" y="256784"/>
+                  </a:lnTo>
+                  <a:lnTo>
+                    <a:pt x="2813779" y="261652"/>
+                  </a:lnTo>
+                  <a:lnTo>
+                    <a:pt x="2884124" y="266450"/>
+                  </a:lnTo>
+                  <a:lnTo>
+                    <a:pt x="2954468" y="271179"/>
+                  </a:lnTo>
+                  <a:lnTo>
+                    <a:pt x="3024813" y="275840"/>
+                  </a:lnTo>
+                  <a:lnTo>
+                    <a:pt x="3095157" y="280434"/>
+                  </a:lnTo>
+                  <a:lnTo>
+                    <a:pt x="3165502" y="284962"/>
+                  </a:lnTo>
+                  <a:lnTo>
+                    <a:pt x="3235846" y="289426"/>
+                  </a:lnTo>
+                  <a:lnTo>
+                    <a:pt x="3306191" y="293825"/>
+                  </a:lnTo>
+                  <a:lnTo>
+                    <a:pt x="3376535" y="298161"/>
+                  </a:lnTo>
+                  <a:lnTo>
+                    <a:pt x="3446880" y="302436"/>
+                  </a:lnTo>
+                  <a:lnTo>
+                    <a:pt x="3517224" y="306648"/>
+                  </a:lnTo>
+                  <a:lnTo>
+                    <a:pt x="3587569" y="310801"/>
+                  </a:lnTo>
+                  <a:lnTo>
+                    <a:pt x="3657913" y="314894"/>
+                  </a:lnTo>
+                  <a:lnTo>
+                    <a:pt x="3728257" y="318928"/>
+                  </a:lnTo>
+                  <a:lnTo>
+                    <a:pt x="3798602" y="322904"/>
+                  </a:lnTo>
+                  <a:lnTo>
+                    <a:pt x="3868946" y="326823"/>
+                  </a:lnTo>
+                  <a:lnTo>
+                    <a:pt x="3939291" y="330686"/>
+                  </a:lnTo>
+                  <a:lnTo>
+                    <a:pt x="4009635" y="334494"/>
+                  </a:lnTo>
+                  <a:lnTo>
+                    <a:pt x="4079980" y="338247"/>
+                  </a:lnTo>
+                  <a:lnTo>
+                    <a:pt x="4150324" y="341946"/>
+                  </a:lnTo>
+                  <a:lnTo>
+                    <a:pt x="4220669" y="345593"/>
+                  </a:lnTo>
+                  <a:lnTo>
+                    <a:pt x="4291013" y="349186"/>
+                  </a:lnTo>
+                  <a:lnTo>
+                    <a:pt x="4361358" y="352729"/>
+                  </a:lnTo>
+                  <a:lnTo>
+                    <a:pt x="4431702" y="356220"/>
+                  </a:lnTo>
+                  <a:lnTo>
+                    <a:pt x="4502047" y="359662"/>
+                  </a:lnTo>
+                  <a:lnTo>
+                    <a:pt x="4572391" y="363054"/>
+                  </a:lnTo>
+                  <a:lnTo>
+                    <a:pt x="4642736" y="366397"/>
+                  </a:lnTo>
+                  <a:lnTo>
+                    <a:pt x="4713080" y="369693"/>
+                  </a:lnTo>
+                  <a:lnTo>
+                    <a:pt x="4783425" y="372941"/>
+                  </a:lnTo>
+                  <a:lnTo>
+                    <a:pt x="4853769" y="376143"/>
+                  </a:lnTo>
+                  <a:lnTo>
+                    <a:pt x="4924114" y="379299"/>
+                  </a:lnTo>
+                  <a:lnTo>
+                    <a:pt x="4994458" y="382409"/>
+                  </a:lnTo>
+                  <a:lnTo>
+                    <a:pt x="5064803" y="385475"/>
+                  </a:lnTo>
+                  <a:lnTo>
+                    <a:pt x="5135147" y="388497"/>
+                  </a:lnTo>
+                  <a:lnTo>
+                    <a:pt x="5205492" y="391475"/>
+                  </a:lnTo>
+                  <a:lnTo>
+                    <a:pt x="5275836" y="394411"/>
+                  </a:lnTo>
+                  <a:lnTo>
+                    <a:pt x="5346181" y="397305"/>
+                  </a:lnTo>
+                  <a:lnTo>
+                    <a:pt x="5416525" y="400157"/>
+                  </a:lnTo>
+                  <a:lnTo>
+                    <a:pt x="5486870" y="402968"/>
+                  </a:lnTo>
+                  <a:lnTo>
+                    <a:pt x="5557214" y="405740"/>
+                  </a:lnTo>
+                  <a:lnTo>
+                    <a:pt x="5627559" y="408471"/>
+                  </a:lnTo>
+                  <a:lnTo>
+                    <a:pt x="5697903" y="411163"/>
+                  </a:lnTo>
+                  <a:lnTo>
+                    <a:pt x="5768248" y="413816"/>
+                  </a:lnTo>
+                  <a:lnTo>
+                    <a:pt x="5838592" y="416432"/>
+                  </a:lnTo>
+                  <a:lnTo>
+                    <a:pt x="5908937" y="419010"/>
+                  </a:lnTo>
+                  <a:lnTo>
+                    <a:pt x="5979281" y="421551"/>
+                  </a:lnTo>
+                  <a:lnTo>
+                    <a:pt x="6049626" y="424055"/>
+                  </a:lnTo>
+                  <a:lnTo>
+                    <a:pt x="6119970" y="426524"/>
+                  </a:lnTo>
+                  <a:lnTo>
+                    <a:pt x="6190315" y="428957"/>
+                  </a:lnTo>
+                  <a:lnTo>
+                    <a:pt x="6260659" y="431355"/>
+                  </a:lnTo>
+                  <a:lnTo>
+                    <a:pt x="6331004" y="433719"/>
+                  </a:lnTo>
+                  <a:lnTo>
+                    <a:pt x="6401348" y="436049"/>
+                  </a:lnTo>
+                  <a:lnTo>
+                    <a:pt x="6471693" y="438346"/>
+                  </a:lnTo>
+                  <a:lnTo>
+                    <a:pt x="6542037" y="440609"/>
+                  </a:lnTo>
+                  <a:lnTo>
+                    <a:pt x="6612382" y="442841"/>
+                  </a:lnTo>
+                  <a:lnTo>
+                    <a:pt x="6682726" y="445040"/>
+                  </a:lnTo>
+                  <a:lnTo>
+                    <a:pt x="6753071" y="447207"/>
+                  </a:lnTo>
+                  <a:lnTo>
+                    <a:pt x="6823415" y="449344"/>
+                  </a:lnTo>
+                  <a:lnTo>
+                    <a:pt x="6893760" y="451450"/>
+                  </a:lnTo>
+                  <a:lnTo>
+                    <a:pt x="6964104" y="453526"/>
                   </a:lnTo>
                 </a:path>
               </a:pathLst>
@@ -4568,27 +4603,27 @@
         </p:sp>
         <p:sp>
           <p:nvSpPr>
-            <p:cNvPr id="24" name="pl24"/>
+            <p:cNvPr id="25" name="pl25"/>
             <p:cNvSpPr/>
             <p:nvPr/>
           </p:nvSpPr>
           <p:spPr>
             <a:xfrm>
-              <a:off x="817517" y="4727786"/>
-              <a:ext cx="7799693" cy="0"/>
+              <a:off x="887106" y="3100960"/>
+              <a:ext cx="7660515" cy="0"/>
             </a:xfrm>
             <a:custGeom>
               <a:avLst/>
               <a:pathLst>
-                <a:path w="7799693" h="0">
+                <a:path w="7660515" h="0">
                   <a:moveTo>
                     <a:pt x="0" y="0"/>
                   </a:moveTo>
                   <a:lnTo>
-                    <a:pt x="7799693" y="0"/>
-                  </a:lnTo>
-                  <a:lnTo>
-                    <a:pt x="7799693" y="0"/>
+                    <a:pt x="7660515" y="0"/>
+                  </a:lnTo>
+                  <a:lnTo>
+                    <a:pt x="7660515" y="0"/>
                   </a:lnTo>
                 </a:path>
               </a:pathLst>
@@ -4611,21 +4646,21 @@
         </p:sp>
         <p:sp>
           <p:nvSpPr>
-            <p:cNvPr id="25" name="pl25"/>
+            <p:cNvPr id="26" name="pl26"/>
             <p:cNvSpPr/>
             <p:nvPr/>
           </p:nvSpPr>
           <p:spPr>
             <a:xfrm>
-              <a:off x="4588151" y="2073503"/>
-              <a:ext cx="0" cy="3649639"/>
+              <a:off x="4590457" y="2143092"/>
+              <a:ext cx="0" cy="1317069"/>
             </a:xfrm>
             <a:custGeom>
               <a:avLst/>
               <a:pathLst>
-                <a:path w="0" h="3649639">
+                <a:path w="0" h="1317069">
                   <a:moveTo>
-                    <a:pt x="0" y="3649639"/>
+                    <a:pt x="0" y="1317069"/>
                   </a:moveTo>
                   <a:lnTo>
                     <a:pt x="0" y="0"/>
@@ -4654,13 +4689,13 @@
         </p:sp>
         <p:sp>
           <p:nvSpPr>
-            <p:cNvPr id="26" name="tx26"/>
+            <p:cNvPr id="27" name="tx27"/>
             <p:cNvSpPr/>
             <p:nvPr/>
           </p:nvSpPr>
           <p:spPr>
             <a:xfrm>
-              <a:off x="692708" y="5517199"/>
+              <a:off x="762297" y="3360243"/>
               <a:ext cx="62179" cy="80101"/>
             </a:xfrm>
             <a:prstGeom prst="rect">
@@ -4700,13 +4735,13 @@
         </p:sp>
         <p:sp>
           <p:nvSpPr>
-            <p:cNvPr id="27" name="tx27"/>
+            <p:cNvPr id="28" name="tx28"/>
             <p:cNvSpPr/>
             <p:nvPr/>
           </p:nvSpPr>
           <p:spPr>
             <a:xfrm>
-              <a:off x="692708" y="4687735"/>
+              <a:off x="762297" y="3060909"/>
               <a:ext cx="62179" cy="80101"/>
             </a:xfrm>
             <a:prstGeom prst="rect">
@@ -4746,13 +4781,13 @@
         </p:sp>
         <p:sp>
           <p:nvSpPr>
-            <p:cNvPr id="28" name="tx28"/>
+            <p:cNvPr id="29" name="tx29"/>
             <p:cNvSpPr/>
             <p:nvPr/>
           </p:nvSpPr>
           <p:spPr>
             <a:xfrm>
-              <a:off x="692708" y="3858272"/>
+              <a:off x="762297" y="2761575"/>
               <a:ext cx="62179" cy="80101"/>
             </a:xfrm>
             <a:prstGeom prst="rect">
@@ -4792,13 +4827,13 @@
         </p:sp>
         <p:sp>
           <p:nvSpPr>
-            <p:cNvPr id="29" name="tx29"/>
+            <p:cNvPr id="30" name="tx30"/>
             <p:cNvSpPr/>
             <p:nvPr/>
           </p:nvSpPr>
           <p:spPr>
             <a:xfrm>
-              <a:off x="692708" y="3028808"/>
+              <a:off x="762297" y="2462242"/>
               <a:ext cx="62179" cy="80101"/>
             </a:xfrm>
             <a:prstGeom prst="rect">
@@ -4838,13 +4873,13 @@
         </p:sp>
         <p:sp>
           <p:nvSpPr>
-            <p:cNvPr id="30" name="tx30"/>
+            <p:cNvPr id="31" name="tx31"/>
             <p:cNvSpPr/>
             <p:nvPr/>
           </p:nvSpPr>
           <p:spPr>
             <a:xfrm>
-              <a:off x="692708" y="2199345"/>
+              <a:off x="762297" y="2162908"/>
               <a:ext cx="62179" cy="80101"/>
             </a:xfrm>
             <a:prstGeom prst="rect">
@@ -4884,13 +4919,13 @@
         </p:sp>
         <p:sp>
           <p:nvSpPr>
-            <p:cNvPr id="31" name="tx31"/>
+            <p:cNvPr id="32" name="tx32"/>
             <p:cNvSpPr/>
             <p:nvPr/>
           </p:nvSpPr>
           <p:spPr>
             <a:xfrm>
-              <a:off x="2360651" y="5785772"/>
+              <a:off x="2401262" y="3522791"/>
               <a:ext cx="161574" cy="80101"/>
             </a:xfrm>
             <a:prstGeom prst="rect">
@@ -4930,13 +4965,13 @@
         </p:sp>
         <p:sp>
           <p:nvSpPr>
-            <p:cNvPr id="32" name="tx32"/>
+            <p:cNvPr id="33" name="tx33"/>
             <p:cNvSpPr/>
             <p:nvPr/>
           </p:nvSpPr>
           <p:spPr>
             <a:xfrm>
-              <a:off x="4561958" y="5785772"/>
+              <a:off x="4564176" y="3522791"/>
               <a:ext cx="62179" cy="80101"/>
             </a:xfrm>
             <a:prstGeom prst="rect">
@@ -4976,13 +5011,13 @@
         </p:sp>
         <p:sp>
           <p:nvSpPr>
-            <p:cNvPr id="33" name="tx33"/>
+            <p:cNvPr id="34" name="tx34"/>
             <p:cNvSpPr/>
             <p:nvPr/>
           </p:nvSpPr>
           <p:spPr>
             <a:xfrm>
-              <a:off x="6682478" y="5785772"/>
+              <a:off x="6646302" y="3522791"/>
               <a:ext cx="124358" cy="80101"/>
             </a:xfrm>
             <a:prstGeom prst="rect">
@@ -5022,13 +5057,13 @@
         </p:sp>
         <p:sp>
           <p:nvSpPr>
-            <p:cNvPr id="34" name="tx34"/>
+            <p:cNvPr id="35" name="tx35"/>
             <p:cNvSpPr/>
             <p:nvPr/>
           </p:nvSpPr>
           <p:spPr>
             <a:xfrm>
-              <a:off x="2928340" y="5925448"/>
+              <a:off x="2928340" y="3662467"/>
               <a:ext cx="3578047" cy="100218"/>
             </a:xfrm>
             <a:prstGeom prst="rect">
@@ -5068,13 +5103,13 @@
         </p:sp>
         <p:sp>
           <p:nvSpPr>
-            <p:cNvPr id="35" name="tx35"/>
+            <p:cNvPr id="36" name="tx36"/>
             <p:cNvSpPr/>
             <p:nvPr/>
           </p:nvSpPr>
           <p:spPr>
             <a:xfrm rot="-5400000">
-              <a:off x="68446" y="3848213"/>
+              <a:off x="138035" y="2751517"/>
               <a:ext cx="1016904" cy="100218"/>
             </a:xfrm>
             <a:prstGeom prst="rect">
@@ -5114,13 +5149,13 @@
         </p:sp>
         <p:sp>
           <p:nvSpPr>
-            <p:cNvPr id="36" name="tx36"/>
+            <p:cNvPr id="37" name="tx37"/>
             <p:cNvSpPr/>
             <p:nvPr/>
           </p:nvSpPr>
           <p:spPr>
             <a:xfrm>
-              <a:off x="817517" y="1896563"/>
+              <a:off x="887106" y="1966152"/>
               <a:ext cx="6321612" cy="82021"/>
             </a:xfrm>
             <a:prstGeom prst="rect">
@@ -5160,13 +5195,3703 @@
         </p:sp>
         <p:sp>
           <p:nvSpPr>
-            <p:cNvPr id="37" name="tx37"/>
+            <p:cNvPr id="38" name="tx38"/>
             <p:cNvSpPr/>
             <p:nvPr/>
           </p:nvSpPr>
           <p:spPr>
             <a:xfrm>
-              <a:off x="817517" y="1669789"/>
+              <a:off x="887106" y="1739378"/>
+              <a:ext cx="1480505" cy="120152"/>
+            </a:xfrm>
+            <a:prstGeom prst="rect">
+              <a:avLst/>
+            </a:prstGeom>
+            <a:noFill/>
+          </p:spPr>
+          <p:txBody>
+            <a:bodyPr lIns="0" rIns="0" tIns="0" bIns="0" anchorCtr="1" anchor="ctr" wrap="none"/>
+            <a:lstStyle/>
+            <a:p>
+              <a:pPr algn="l" marL="0" marR="0" indent="0">
+                <a:lnSpc>
+                  <a:spcPts val="1320"/>
+                </a:lnSpc>
+                <a:spcBef>
+                  <a:spcPts val="0"/>
+                </a:spcBef>
+                <a:spcAft>
+                  <a:spcPts val="0"/>
+                </a:spcAft>
+              </a:pPr>
+              <a:r>
+                <a:rPr sz="1320">
+                  <a:solidFill>
+                    <a:srgbClr val="000000">
+                      <a:alpha val="100000"/>
+                    </a:srgbClr>
+                  </a:solidFill>
+                  <a:latin typeface="Helvetica"/>
+                  <a:cs typeface="Helvetica"/>
+                </a:rPr>
+                <a:t>Cancer Progression</a:t>
+              </a:r>
+            </a:p>
+          </p:txBody>
+        </p:sp>
+        <p:sp>
+          <p:nvSpPr>
+            <p:cNvPr id="39" name="pl39"/>
+            <p:cNvSpPr/>
+            <p:nvPr/>
+          </p:nvSpPr>
+          <p:spPr>
+            <a:xfrm>
+              <a:off x="887106" y="5444019"/>
+              <a:ext cx="7660515" cy="0"/>
+            </a:xfrm>
+            <a:custGeom>
+              <a:avLst/>
+              <a:pathLst>
+                <a:path w="7660515" h="0">
+                  <a:moveTo>
+                    <a:pt x="0" y="0"/>
+                  </a:moveTo>
+                  <a:lnTo>
+                    <a:pt x="7660515" y="0"/>
+                  </a:lnTo>
+                  <a:lnTo>
+                    <a:pt x="7660515" y="0"/>
+                  </a:lnTo>
+                </a:path>
+              </a:pathLst>
+            </a:custGeom>
+            <a:ln w="6775" cap="flat">
+              <a:solidFill>
+                <a:srgbClr val="EBEBEB">
+                  <a:alpha val="100000"/>
+                </a:srgbClr>
+              </a:solidFill>
+              <a:prstDash val="solid"/>
+              <a:round/>
+            </a:ln>
+          </p:spPr>
+          <p:txBody>
+            <a:bodyPr/>
+            <a:lstStyle/>
+            <a:p/>
+          </p:txBody>
+        </p:sp>
+        <p:sp>
+          <p:nvSpPr>
+            <p:cNvPr id="40" name="pl40"/>
+            <p:cNvSpPr/>
+            <p:nvPr/>
+          </p:nvSpPr>
+          <p:spPr>
+            <a:xfrm>
+              <a:off x="887106" y="5144686"/>
+              <a:ext cx="7660515" cy="0"/>
+            </a:xfrm>
+            <a:custGeom>
+              <a:avLst/>
+              <a:pathLst>
+                <a:path w="7660515" h="0">
+                  <a:moveTo>
+                    <a:pt x="0" y="0"/>
+                  </a:moveTo>
+                  <a:lnTo>
+                    <a:pt x="7660515" y="0"/>
+                  </a:lnTo>
+                  <a:lnTo>
+                    <a:pt x="7660515" y="0"/>
+                  </a:lnTo>
+                </a:path>
+              </a:pathLst>
+            </a:custGeom>
+            <a:ln w="6775" cap="flat">
+              <a:solidFill>
+                <a:srgbClr val="EBEBEB">
+                  <a:alpha val="100000"/>
+                </a:srgbClr>
+              </a:solidFill>
+              <a:prstDash val="solid"/>
+              <a:round/>
+            </a:ln>
+          </p:spPr>
+          <p:txBody>
+            <a:bodyPr/>
+            <a:lstStyle/>
+            <a:p/>
+          </p:txBody>
+        </p:sp>
+        <p:sp>
+          <p:nvSpPr>
+            <p:cNvPr id="41" name="pl41"/>
+            <p:cNvSpPr/>
+            <p:nvPr/>
+          </p:nvSpPr>
+          <p:spPr>
+            <a:xfrm>
+              <a:off x="887106" y="4845352"/>
+              <a:ext cx="7660515" cy="0"/>
+            </a:xfrm>
+            <a:custGeom>
+              <a:avLst/>
+              <a:pathLst>
+                <a:path w="7660515" h="0">
+                  <a:moveTo>
+                    <a:pt x="0" y="0"/>
+                  </a:moveTo>
+                  <a:lnTo>
+                    <a:pt x="7660515" y="0"/>
+                  </a:lnTo>
+                  <a:lnTo>
+                    <a:pt x="7660515" y="0"/>
+                  </a:lnTo>
+                </a:path>
+              </a:pathLst>
+            </a:custGeom>
+            <a:ln w="6775" cap="flat">
+              <a:solidFill>
+                <a:srgbClr val="EBEBEB">
+                  <a:alpha val="100000"/>
+                </a:srgbClr>
+              </a:solidFill>
+              <a:prstDash val="solid"/>
+              <a:round/>
+            </a:ln>
+          </p:spPr>
+          <p:txBody>
+            <a:bodyPr/>
+            <a:lstStyle/>
+            <a:p/>
+          </p:txBody>
+        </p:sp>
+        <p:sp>
+          <p:nvSpPr>
+            <p:cNvPr id="42" name="pl42"/>
+            <p:cNvSpPr/>
+            <p:nvPr/>
+          </p:nvSpPr>
+          <p:spPr>
+            <a:xfrm>
+              <a:off x="887106" y="4546018"/>
+              <a:ext cx="7660515" cy="0"/>
+            </a:xfrm>
+            <a:custGeom>
+              <a:avLst/>
+              <a:pathLst>
+                <a:path w="7660515" h="0">
+                  <a:moveTo>
+                    <a:pt x="0" y="0"/>
+                  </a:moveTo>
+                  <a:lnTo>
+                    <a:pt x="7660515" y="0"/>
+                  </a:lnTo>
+                  <a:lnTo>
+                    <a:pt x="7660515" y="0"/>
+                  </a:lnTo>
+                </a:path>
+              </a:pathLst>
+            </a:custGeom>
+            <a:ln w="6775" cap="flat">
+              <a:solidFill>
+                <a:srgbClr val="EBEBEB">
+                  <a:alpha val="100000"/>
+                </a:srgbClr>
+              </a:solidFill>
+              <a:prstDash val="solid"/>
+              <a:round/>
+            </a:ln>
+          </p:spPr>
+          <p:txBody>
+            <a:bodyPr/>
+            <a:lstStyle/>
+            <a:p/>
+          </p:txBody>
+        </p:sp>
+        <p:sp>
+          <p:nvSpPr>
+            <p:cNvPr id="43" name="pl43"/>
+            <p:cNvSpPr/>
+            <p:nvPr/>
+          </p:nvSpPr>
+          <p:spPr>
+            <a:xfrm>
+              <a:off x="1636763" y="4336484"/>
+              <a:ext cx="0" cy="1317069"/>
+            </a:xfrm>
+            <a:custGeom>
+              <a:avLst/>
+              <a:pathLst>
+                <a:path w="0" h="1317069">
+                  <a:moveTo>
+                    <a:pt x="0" y="1317069"/>
+                  </a:moveTo>
+                  <a:lnTo>
+                    <a:pt x="0" y="0"/>
+                  </a:lnTo>
+                  <a:lnTo>
+                    <a:pt x="0" y="0"/>
+                  </a:lnTo>
+                </a:path>
+              </a:pathLst>
+            </a:custGeom>
+            <a:ln w="6775" cap="flat">
+              <a:solidFill>
+                <a:srgbClr val="EBEBEB">
+                  <a:alpha val="100000"/>
+                </a:srgbClr>
+              </a:solidFill>
+              <a:prstDash val="solid"/>
+              <a:round/>
+            </a:ln>
+          </p:spPr>
+          <p:txBody>
+            <a:bodyPr/>
+            <a:lstStyle/>
+            <a:p/>
+          </p:txBody>
+        </p:sp>
+        <p:sp>
+          <p:nvSpPr>
+            <p:cNvPr id="44" name="pl44"/>
+            <p:cNvSpPr/>
+            <p:nvPr/>
+          </p:nvSpPr>
+          <p:spPr>
+            <a:xfrm>
+              <a:off x="2482050" y="4336484"/>
+              <a:ext cx="0" cy="1317069"/>
+            </a:xfrm>
+            <a:custGeom>
+              <a:avLst/>
+              <a:pathLst>
+                <a:path w="0" h="1317069">
+                  <a:moveTo>
+                    <a:pt x="0" y="1317069"/>
+                  </a:moveTo>
+                  <a:lnTo>
+                    <a:pt x="0" y="0"/>
+                  </a:lnTo>
+                  <a:lnTo>
+                    <a:pt x="0" y="0"/>
+                  </a:lnTo>
+                </a:path>
+              </a:pathLst>
+            </a:custGeom>
+            <a:ln w="6775" cap="flat">
+              <a:solidFill>
+                <a:srgbClr val="EBEBEB">
+                  <a:alpha val="100000"/>
+                </a:srgbClr>
+              </a:solidFill>
+              <a:prstDash val="solid"/>
+              <a:round/>
+            </a:ln>
+          </p:spPr>
+          <p:txBody>
+            <a:bodyPr/>
+            <a:lstStyle/>
+            <a:p/>
+          </p:txBody>
+        </p:sp>
+        <p:sp>
+          <p:nvSpPr>
+            <p:cNvPr id="45" name="pl45"/>
+            <p:cNvSpPr/>
+            <p:nvPr/>
+          </p:nvSpPr>
+          <p:spPr>
+            <a:xfrm>
+              <a:off x="3327336" y="4336484"/>
+              <a:ext cx="0" cy="1317069"/>
+            </a:xfrm>
+            <a:custGeom>
+              <a:avLst/>
+              <a:pathLst>
+                <a:path w="0" h="1317069">
+                  <a:moveTo>
+                    <a:pt x="0" y="1317069"/>
+                  </a:moveTo>
+                  <a:lnTo>
+                    <a:pt x="0" y="0"/>
+                  </a:lnTo>
+                  <a:lnTo>
+                    <a:pt x="0" y="0"/>
+                  </a:lnTo>
+                </a:path>
+              </a:pathLst>
+            </a:custGeom>
+            <a:ln w="6775" cap="flat">
+              <a:solidFill>
+                <a:srgbClr val="EBEBEB">
+                  <a:alpha val="100000"/>
+                </a:srgbClr>
+              </a:solidFill>
+              <a:prstDash val="solid"/>
+              <a:round/>
+            </a:ln>
+          </p:spPr>
+          <p:txBody>
+            <a:bodyPr/>
+            <a:lstStyle/>
+            <a:p/>
+          </p:txBody>
+        </p:sp>
+        <p:sp>
+          <p:nvSpPr>
+            <p:cNvPr id="46" name="pl46"/>
+            <p:cNvSpPr/>
+            <p:nvPr/>
+          </p:nvSpPr>
+          <p:spPr>
+            <a:xfrm>
+              <a:off x="4172622" y="4336484"/>
+              <a:ext cx="0" cy="1317069"/>
+            </a:xfrm>
+            <a:custGeom>
+              <a:avLst/>
+              <a:pathLst>
+                <a:path w="0" h="1317069">
+                  <a:moveTo>
+                    <a:pt x="0" y="1317069"/>
+                  </a:moveTo>
+                  <a:lnTo>
+                    <a:pt x="0" y="0"/>
+                  </a:lnTo>
+                  <a:lnTo>
+                    <a:pt x="0" y="0"/>
+                  </a:lnTo>
+                </a:path>
+              </a:pathLst>
+            </a:custGeom>
+            <a:ln w="6775" cap="flat">
+              <a:solidFill>
+                <a:srgbClr val="EBEBEB">
+                  <a:alpha val="100000"/>
+                </a:srgbClr>
+              </a:solidFill>
+              <a:prstDash val="solid"/>
+              <a:round/>
+            </a:ln>
+          </p:spPr>
+          <p:txBody>
+            <a:bodyPr/>
+            <a:lstStyle/>
+            <a:p/>
+          </p:txBody>
+        </p:sp>
+        <p:sp>
+          <p:nvSpPr>
+            <p:cNvPr id="47" name="pl47"/>
+            <p:cNvSpPr/>
+            <p:nvPr/>
+          </p:nvSpPr>
+          <p:spPr>
+            <a:xfrm>
+              <a:off x="5017909" y="4336484"/>
+              <a:ext cx="0" cy="1317069"/>
+            </a:xfrm>
+            <a:custGeom>
+              <a:avLst/>
+              <a:pathLst>
+                <a:path w="0" h="1317069">
+                  <a:moveTo>
+                    <a:pt x="0" y="1317069"/>
+                  </a:moveTo>
+                  <a:lnTo>
+                    <a:pt x="0" y="0"/>
+                  </a:lnTo>
+                  <a:lnTo>
+                    <a:pt x="0" y="0"/>
+                  </a:lnTo>
+                </a:path>
+              </a:pathLst>
+            </a:custGeom>
+            <a:ln w="6775" cap="flat">
+              <a:solidFill>
+                <a:srgbClr val="EBEBEB">
+                  <a:alpha val="100000"/>
+                </a:srgbClr>
+              </a:solidFill>
+              <a:prstDash val="solid"/>
+              <a:round/>
+            </a:ln>
+          </p:spPr>
+          <p:txBody>
+            <a:bodyPr/>
+            <a:lstStyle/>
+            <a:p/>
+          </p:txBody>
+        </p:sp>
+        <p:sp>
+          <p:nvSpPr>
+            <p:cNvPr id="48" name="pl48"/>
+            <p:cNvSpPr/>
+            <p:nvPr/>
+          </p:nvSpPr>
+          <p:spPr>
+            <a:xfrm>
+              <a:off x="5863195" y="4336484"/>
+              <a:ext cx="0" cy="1317069"/>
+            </a:xfrm>
+            <a:custGeom>
+              <a:avLst/>
+              <a:pathLst>
+                <a:path w="0" h="1317069">
+                  <a:moveTo>
+                    <a:pt x="0" y="1317069"/>
+                  </a:moveTo>
+                  <a:lnTo>
+                    <a:pt x="0" y="0"/>
+                  </a:lnTo>
+                  <a:lnTo>
+                    <a:pt x="0" y="0"/>
+                  </a:lnTo>
+                </a:path>
+              </a:pathLst>
+            </a:custGeom>
+            <a:ln w="6775" cap="flat">
+              <a:solidFill>
+                <a:srgbClr val="EBEBEB">
+                  <a:alpha val="100000"/>
+                </a:srgbClr>
+              </a:solidFill>
+              <a:prstDash val="solid"/>
+              <a:round/>
+            </a:ln>
+          </p:spPr>
+          <p:txBody>
+            <a:bodyPr/>
+            <a:lstStyle/>
+            <a:p/>
+          </p:txBody>
+        </p:sp>
+        <p:sp>
+          <p:nvSpPr>
+            <p:cNvPr id="49" name="pl49"/>
+            <p:cNvSpPr/>
+            <p:nvPr/>
+          </p:nvSpPr>
+          <p:spPr>
+            <a:xfrm>
+              <a:off x="6708482" y="4336484"/>
+              <a:ext cx="0" cy="1317069"/>
+            </a:xfrm>
+            <a:custGeom>
+              <a:avLst/>
+              <a:pathLst>
+                <a:path w="0" h="1317069">
+                  <a:moveTo>
+                    <a:pt x="0" y="1317069"/>
+                  </a:moveTo>
+                  <a:lnTo>
+                    <a:pt x="0" y="0"/>
+                  </a:lnTo>
+                  <a:lnTo>
+                    <a:pt x="0" y="0"/>
+                  </a:lnTo>
+                </a:path>
+              </a:pathLst>
+            </a:custGeom>
+            <a:ln w="6775" cap="flat">
+              <a:solidFill>
+                <a:srgbClr val="EBEBEB">
+                  <a:alpha val="100000"/>
+                </a:srgbClr>
+              </a:solidFill>
+              <a:prstDash val="solid"/>
+              <a:round/>
+            </a:ln>
+          </p:spPr>
+          <p:txBody>
+            <a:bodyPr/>
+            <a:lstStyle/>
+            <a:p/>
+          </p:txBody>
+        </p:sp>
+        <p:sp>
+          <p:nvSpPr>
+            <p:cNvPr id="50" name="pl50"/>
+            <p:cNvSpPr/>
+            <p:nvPr/>
+          </p:nvSpPr>
+          <p:spPr>
+            <a:xfrm>
+              <a:off x="7553768" y="4336484"/>
+              <a:ext cx="0" cy="1317069"/>
+            </a:xfrm>
+            <a:custGeom>
+              <a:avLst/>
+              <a:pathLst>
+                <a:path w="0" h="1317069">
+                  <a:moveTo>
+                    <a:pt x="0" y="1317069"/>
+                  </a:moveTo>
+                  <a:lnTo>
+                    <a:pt x="0" y="0"/>
+                  </a:lnTo>
+                  <a:lnTo>
+                    <a:pt x="0" y="0"/>
+                  </a:lnTo>
+                </a:path>
+              </a:pathLst>
+            </a:custGeom>
+            <a:ln w="6775" cap="flat">
+              <a:solidFill>
+                <a:srgbClr val="EBEBEB">
+                  <a:alpha val="100000"/>
+                </a:srgbClr>
+              </a:solidFill>
+              <a:prstDash val="solid"/>
+              <a:round/>
+            </a:ln>
+          </p:spPr>
+          <p:txBody>
+            <a:bodyPr/>
+            <a:lstStyle/>
+            <a:p/>
+          </p:txBody>
+        </p:sp>
+        <p:sp>
+          <p:nvSpPr>
+            <p:cNvPr id="51" name="pl51"/>
+            <p:cNvSpPr/>
+            <p:nvPr/>
+          </p:nvSpPr>
+          <p:spPr>
+            <a:xfrm>
+              <a:off x="8399054" y="4336484"/>
+              <a:ext cx="0" cy="1317069"/>
+            </a:xfrm>
+            <a:custGeom>
+              <a:avLst/>
+              <a:pathLst>
+                <a:path w="0" h="1317069">
+                  <a:moveTo>
+                    <a:pt x="0" y="1317069"/>
+                  </a:moveTo>
+                  <a:lnTo>
+                    <a:pt x="0" y="0"/>
+                  </a:lnTo>
+                  <a:lnTo>
+                    <a:pt x="0" y="0"/>
+                  </a:lnTo>
+                </a:path>
+              </a:pathLst>
+            </a:custGeom>
+            <a:ln w="6775" cap="flat">
+              <a:solidFill>
+                <a:srgbClr val="EBEBEB">
+                  <a:alpha val="100000"/>
+                </a:srgbClr>
+              </a:solidFill>
+              <a:prstDash val="solid"/>
+              <a:round/>
+            </a:ln>
+          </p:spPr>
+          <p:txBody>
+            <a:bodyPr/>
+            <a:lstStyle/>
+            <a:p/>
+          </p:txBody>
+        </p:sp>
+        <p:sp>
+          <p:nvSpPr>
+            <p:cNvPr id="52" name="pl52"/>
+            <p:cNvSpPr/>
+            <p:nvPr/>
+          </p:nvSpPr>
+          <p:spPr>
+            <a:xfrm>
+              <a:off x="887106" y="5593686"/>
+              <a:ext cx="7660515" cy="0"/>
+            </a:xfrm>
+            <a:custGeom>
+              <a:avLst/>
+              <a:pathLst>
+                <a:path w="7660515" h="0">
+                  <a:moveTo>
+                    <a:pt x="0" y="0"/>
+                  </a:moveTo>
+                  <a:lnTo>
+                    <a:pt x="7660515" y="0"/>
+                  </a:lnTo>
+                  <a:lnTo>
+                    <a:pt x="7660515" y="0"/>
+                  </a:lnTo>
+                </a:path>
+              </a:pathLst>
+            </a:custGeom>
+            <a:ln w="13550" cap="flat">
+              <a:solidFill>
+                <a:srgbClr val="EBEBEB">
+                  <a:alpha val="100000"/>
+                </a:srgbClr>
+              </a:solidFill>
+              <a:prstDash val="solid"/>
+              <a:round/>
+            </a:ln>
+          </p:spPr>
+          <p:txBody>
+            <a:bodyPr/>
+            <a:lstStyle/>
+            <a:p/>
+          </p:txBody>
+        </p:sp>
+        <p:sp>
+          <p:nvSpPr>
+            <p:cNvPr id="53" name="pl53"/>
+            <p:cNvSpPr/>
+            <p:nvPr/>
+          </p:nvSpPr>
+          <p:spPr>
+            <a:xfrm>
+              <a:off x="887106" y="5294352"/>
+              <a:ext cx="7660515" cy="0"/>
+            </a:xfrm>
+            <a:custGeom>
+              <a:avLst/>
+              <a:pathLst>
+                <a:path w="7660515" h="0">
+                  <a:moveTo>
+                    <a:pt x="0" y="0"/>
+                  </a:moveTo>
+                  <a:lnTo>
+                    <a:pt x="7660515" y="0"/>
+                  </a:lnTo>
+                  <a:lnTo>
+                    <a:pt x="7660515" y="0"/>
+                  </a:lnTo>
+                </a:path>
+              </a:pathLst>
+            </a:custGeom>
+            <a:ln w="13550" cap="flat">
+              <a:solidFill>
+                <a:srgbClr val="EBEBEB">
+                  <a:alpha val="100000"/>
+                </a:srgbClr>
+              </a:solidFill>
+              <a:prstDash val="solid"/>
+              <a:round/>
+            </a:ln>
+          </p:spPr>
+          <p:txBody>
+            <a:bodyPr/>
+            <a:lstStyle/>
+            <a:p/>
+          </p:txBody>
+        </p:sp>
+        <p:sp>
+          <p:nvSpPr>
+            <p:cNvPr id="54" name="pl54"/>
+            <p:cNvSpPr/>
+            <p:nvPr/>
+          </p:nvSpPr>
+          <p:spPr>
+            <a:xfrm>
+              <a:off x="887106" y="4995019"/>
+              <a:ext cx="7660515" cy="0"/>
+            </a:xfrm>
+            <a:custGeom>
+              <a:avLst/>
+              <a:pathLst>
+                <a:path w="7660515" h="0">
+                  <a:moveTo>
+                    <a:pt x="0" y="0"/>
+                  </a:moveTo>
+                  <a:lnTo>
+                    <a:pt x="7660515" y="0"/>
+                  </a:lnTo>
+                  <a:lnTo>
+                    <a:pt x="7660515" y="0"/>
+                  </a:lnTo>
+                </a:path>
+              </a:pathLst>
+            </a:custGeom>
+            <a:ln w="13550" cap="flat">
+              <a:solidFill>
+                <a:srgbClr val="EBEBEB">
+                  <a:alpha val="100000"/>
+                </a:srgbClr>
+              </a:solidFill>
+              <a:prstDash val="solid"/>
+              <a:round/>
+            </a:ln>
+          </p:spPr>
+          <p:txBody>
+            <a:bodyPr/>
+            <a:lstStyle/>
+            <a:p/>
+          </p:txBody>
+        </p:sp>
+        <p:sp>
+          <p:nvSpPr>
+            <p:cNvPr id="55" name="pl55"/>
+            <p:cNvSpPr/>
+            <p:nvPr/>
+          </p:nvSpPr>
+          <p:spPr>
+            <a:xfrm>
+              <a:off x="887106" y="4695685"/>
+              <a:ext cx="7660515" cy="0"/>
+            </a:xfrm>
+            <a:custGeom>
+              <a:avLst/>
+              <a:pathLst>
+                <a:path w="7660515" h="0">
+                  <a:moveTo>
+                    <a:pt x="0" y="0"/>
+                  </a:moveTo>
+                  <a:lnTo>
+                    <a:pt x="7660515" y="0"/>
+                  </a:lnTo>
+                  <a:lnTo>
+                    <a:pt x="7660515" y="0"/>
+                  </a:lnTo>
+                </a:path>
+              </a:pathLst>
+            </a:custGeom>
+            <a:ln w="13550" cap="flat">
+              <a:solidFill>
+                <a:srgbClr val="EBEBEB">
+                  <a:alpha val="100000"/>
+                </a:srgbClr>
+              </a:solidFill>
+              <a:prstDash val="solid"/>
+              <a:round/>
+            </a:ln>
+          </p:spPr>
+          <p:txBody>
+            <a:bodyPr/>
+            <a:lstStyle/>
+            <a:p/>
+          </p:txBody>
+        </p:sp>
+        <p:sp>
+          <p:nvSpPr>
+            <p:cNvPr id="56" name="pl56"/>
+            <p:cNvSpPr/>
+            <p:nvPr/>
+          </p:nvSpPr>
+          <p:spPr>
+            <a:xfrm>
+              <a:off x="887106" y="4396351"/>
+              <a:ext cx="7660515" cy="0"/>
+            </a:xfrm>
+            <a:custGeom>
+              <a:avLst/>
+              <a:pathLst>
+                <a:path w="7660515" h="0">
+                  <a:moveTo>
+                    <a:pt x="0" y="0"/>
+                  </a:moveTo>
+                  <a:lnTo>
+                    <a:pt x="7660515" y="0"/>
+                  </a:lnTo>
+                  <a:lnTo>
+                    <a:pt x="7660515" y="0"/>
+                  </a:lnTo>
+                </a:path>
+              </a:pathLst>
+            </a:custGeom>
+            <a:ln w="13550" cap="flat">
+              <a:solidFill>
+                <a:srgbClr val="EBEBEB">
+                  <a:alpha val="100000"/>
+                </a:srgbClr>
+              </a:solidFill>
+              <a:prstDash val="solid"/>
+              <a:round/>
+            </a:ln>
+          </p:spPr>
+          <p:txBody>
+            <a:bodyPr/>
+            <a:lstStyle/>
+            <a:p/>
+          </p:txBody>
+        </p:sp>
+        <p:sp>
+          <p:nvSpPr>
+            <p:cNvPr id="57" name="pl57"/>
+            <p:cNvSpPr/>
+            <p:nvPr/>
+          </p:nvSpPr>
+          <p:spPr>
+            <a:xfrm>
+              <a:off x="1214120" y="4336484"/>
+              <a:ext cx="0" cy="1317069"/>
+            </a:xfrm>
+            <a:custGeom>
+              <a:avLst/>
+              <a:pathLst>
+                <a:path w="0" h="1317069">
+                  <a:moveTo>
+                    <a:pt x="0" y="1317069"/>
+                  </a:moveTo>
+                  <a:lnTo>
+                    <a:pt x="0" y="0"/>
+                  </a:lnTo>
+                  <a:lnTo>
+                    <a:pt x="0" y="0"/>
+                  </a:lnTo>
+                </a:path>
+              </a:pathLst>
+            </a:custGeom>
+            <a:ln w="13550" cap="flat">
+              <a:solidFill>
+                <a:srgbClr val="EBEBEB">
+                  <a:alpha val="100000"/>
+                </a:srgbClr>
+              </a:solidFill>
+              <a:prstDash val="solid"/>
+              <a:round/>
+            </a:ln>
+          </p:spPr>
+          <p:txBody>
+            <a:bodyPr/>
+            <a:lstStyle/>
+            <a:p/>
+          </p:txBody>
+        </p:sp>
+        <p:sp>
+          <p:nvSpPr>
+            <p:cNvPr id="58" name="pl58"/>
+            <p:cNvSpPr/>
+            <p:nvPr/>
+          </p:nvSpPr>
+          <p:spPr>
+            <a:xfrm>
+              <a:off x="2059406" y="4336484"/>
+              <a:ext cx="0" cy="1317069"/>
+            </a:xfrm>
+            <a:custGeom>
+              <a:avLst/>
+              <a:pathLst>
+                <a:path w="0" h="1317069">
+                  <a:moveTo>
+                    <a:pt x="0" y="1317069"/>
+                  </a:moveTo>
+                  <a:lnTo>
+                    <a:pt x="0" y="0"/>
+                  </a:lnTo>
+                  <a:lnTo>
+                    <a:pt x="0" y="0"/>
+                  </a:lnTo>
+                </a:path>
+              </a:pathLst>
+            </a:custGeom>
+            <a:ln w="13550" cap="flat">
+              <a:solidFill>
+                <a:srgbClr val="EBEBEB">
+                  <a:alpha val="100000"/>
+                </a:srgbClr>
+              </a:solidFill>
+              <a:prstDash val="solid"/>
+              <a:round/>
+            </a:ln>
+          </p:spPr>
+          <p:txBody>
+            <a:bodyPr/>
+            <a:lstStyle/>
+            <a:p/>
+          </p:txBody>
+        </p:sp>
+        <p:sp>
+          <p:nvSpPr>
+            <p:cNvPr id="59" name="pl59"/>
+            <p:cNvSpPr/>
+            <p:nvPr/>
+          </p:nvSpPr>
+          <p:spPr>
+            <a:xfrm>
+              <a:off x="2904693" y="4336484"/>
+              <a:ext cx="0" cy="1317069"/>
+            </a:xfrm>
+            <a:custGeom>
+              <a:avLst/>
+              <a:pathLst>
+                <a:path w="0" h="1317069">
+                  <a:moveTo>
+                    <a:pt x="0" y="1317069"/>
+                  </a:moveTo>
+                  <a:lnTo>
+                    <a:pt x="0" y="0"/>
+                  </a:lnTo>
+                  <a:lnTo>
+                    <a:pt x="0" y="0"/>
+                  </a:lnTo>
+                </a:path>
+              </a:pathLst>
+            </a:custGeom>
+            <a:ln w="13550" cap="flat">
+              <a:solidFill>
+                <a:srgbClr val="EBEBEB">
+                  <a:alpha val="100000"/>
+                </a:srgbClr>
+              </a:solidFill>
+              <a:prstDash val="solid"/>
+              <a:round/>
+            </a:ln>
+          </p:spPr>
+          <p:txBody>
+            <a:bodyPr/>
+            <a:lstStyle/>
+            <a:p/>
+          </p:txBody>
+        </p:sp>
+        <p:sp>
+          <p:nvSpPr>
+            <p:cNvPr id="60" name="pl60"/>
+            <p:cNvSpPr/>
+            <p:nvPr/>
+          </p:nvSpPr>
+          <p:spPr>
+            <a:xfrm>
+              <a:off x="3749979" y="4336484"/>
+              <a:ext cx="0" cy="1317069"/>
+            </a:xfrm>
+            <a:custGeom>
+              <a:avLst/>
+              <a:pathLst>
+                <a:path w="0" h="1317069">
+                  <a:moveTo>
+                    <a:pt x="0" y="1317069"/>
+                  </a:moveTo>
+                  <a:lnTo>
+                    <a:pt x="0" y="0"/>
+                  </a:lnTo>
+                  <a:lnTo>
+                    <a:pt x="0" y="0"/>
+                  </a:lnTo>
+                </a:path>
+              </a:pathLst>
+            </a:custGeom>
+            <a:ln w="13550" cap="flat">
+              <a:solidFill>
+                <a:srgbClr val="EBEBEB">
+                  <a:alpha val="100000"/>
+                </a:srgbClr>
+              </a:solidFill>
+              <a:prstDash val="solid"/>
+              <a:round/>
+            </a:ln>
+          </p:spPr>
+          <p:txBody>
+            <a:bodyPr/>
+            <a:lstStyle/>
+            <a:p/>
+          </p:txBody>
+        </p:sp>
+        <p:sp>
+          <p:nvSpPr>
+            <p:cNvPr id="61" name="pl61"/>
+            <p:cNvSpPr/>
+            <p:nvPr/>
+          </p:nvSpPr>
+          <p:spPr>
+            <a:xfrm>
+              <a:off x="4595266" y="4336484"/>
+              <a:ext cx="0" cy="1317069"/>
+            </a:xfrm>
+            <a:custGeom>
+              <a:avLst/>
+              <a:pathLst>
+                <a:path w="0" h="1317069">
+                  <a:moveTo>
+                    <a:pt x="0" y="1317069"/>
+                  </a:moveTo>
+                  <a:lnTo>
+                    <a:pt x="0" y="0"/>
+                  </a:lnTo>
+                  <a:lnTo>
+                    <a:pt x="0" y="0"/>
+                  </a:lnTo>
+                </a:path>
+              </a:pathLst>
+            </a:custGeom>
+            <a:ln w="13550" cap="flat">
+              <a:solidFill>
+                <a:srgbClr val="EBEBEB">
+                  <a:alpha val="100000"/>
+                </a:srgbClr>
+              </a:solidFill>
+              <a:prstDash val="solid"/>
+              <a:round/>
+            </a:ln>
+          </p:spPr>
+          <p:txBody>
+            <a:bodyPr/>
+            <a:lstStyle/>
+            <a:p/>
+          </p:txBody>
+        </p:sp>
+        <p:sp>
+          <p:nvSpPr>
+            <p:cNvPr id="62" name="pl62"/>
+            <p:cNvSpPr/>
+            <p:nvPr/>
+          </p:nvSpPr>
+          <p:spPr>
+            <a:xfrm>
+              <a:off x="5440552" y="4336484"/>
+              <a:ext cx="0" cy="1317069"/>
+            </a:xfrm>
+            <a:custGeom>
+              <a:avLst/>
+              <a:pathLst>
+                <a:path w="0" h="1317069">
+                  <a:moveTo>
+                    <a:pt x="0" y="1317069"/>
+                  </a:moveTo>
+                  <a:lnTo>
+                    <a:pt x="0" y="0"/>
+                  </a:lnTo>
+                  <a:lnTo>
+                    <a:pt x="0" y="0"/>
+                  </a:lnTo>
+                </a:path>
+              </a:pathLst>
+            </a:custGeom>
+            <a:ln w="13550" cap="flat">
+              <a:solidFill>
+                <a:srgbClr val="EBEBEB">
+                  <a:alpha val="100000"/>
+                </a:srgbClr>
+              </a:solidFill>
+              <a:prstDash val="solid"/>
+              <a:round/>
+            </a:ln>
+          </p:spPr>
+          <p:txBody>
+            <a:bodyPr/>
+            <a:lstStyle/>
+            <a:p/>
+          </p:txBody>
+        </p:sp>
+        <p:sp>
+          <p:nvSpPr>
+            <p:cNvPr id="63" name="pl63"/>
+            <p:cNvSpPr/>
+            <p:nvPr/>
+          </p:nvSpPr>
+          <p:spPr>
+            <a:xfrm>
+              <a:off x="6285838" y="4336484"/>
+              <a:ext cx="0" cy="1317069"/>
+            </a:xfrm>
+            <a:custGeom>
+              <a:avLst/>
+              <a:pathLst>
+                <a:path w="0" h="1317069">
+                  <a:moveTo>
+                    <a:pt x="0" y="1317069"/>
+                  </a:moveTo>
+                  <a:lnTo>
+                    <a:pt x="0" y="0"/>
+                  </a:lnTo>
+                  <a:lnTo>
+                    <a:pt x="0" y="0"/>
+                  </a:lnTo>
+                </a:path>
+              </a:pathLst>
+            </a:custGeom>
+            <a:ln w="13550" cap="flat">
+              <a:solidFill>
+                <a:srgbClr val="EBEBEB">
+                  <a:alpha val="100000"/>
+                </a:srgbClr>
+              </a:solidFill>
+              <a:prstDash val="solid"/>
+              <a:round/>
+            </a:ln>
+          </p:spPr>
+          <p:txBody>
+            <a:bodyPr/>
+            <a:lstStyle/>
+            <a:p/>
+          </p:txBody>
+        </p:sp>
+        <p:sp>
+          <p:nvSpPr>
+            <p:cNvPr id="64" name="pl64"/>
+            <p:cNvSpPr/>
+            <p:nvPr/>
+          </p:nvSpPr>
+          <p:spPr>
+            <a:xfrm>
+              <a:off x="7131125" y="4336484"/>
+              <a:ext cx="0" cy="1317069"/>
+            </a:xfrm>
+            <a:custGeom>
+              <a:avLst/>
+              <a:pathLst>
+                <a:path w="0" h="1317069">
+                  <a:moveTo>
+                    <a:pt x="0" y="1317069"/>
+                  </a:moveTo>
+                  <a:lnTo>
+                    <a:pt x="0" y="0"/>
+                  </a:lnTo>
+                  <a:lnTo>
+                    <a:pt x="0" y="0"/>
+                  </a:lnTo>
+                </a:path>
+              </a:pathLst>
+            </a:custGeom>
+            <a:ln w="13550" cap="flat">
+              <a:solidFill>
+                <a:srgbClr val="EBEBEB">
+                  <a:alpha val="100000"/>
+                </a:srgbClr>
+              </a:solidFill>
+              <a:prstDash val="solid"/>
+              <a:round/>
+            </a:ln>
+          </p:spPr>
+          <p:txBody>
+            <a:bodyPr/>
+            <a:lstStyle/>
+            <a:p/>
+          </p:txBody>
+        </p:sp>
+        <p:sp>
+          <p:nvSpPr>
+            <p:cNvPr id="65" name="pl65"/>
+            <p:cNvSpPr/>
+            <p:nvPr/>
+          </p:nvSpPr>
+          <p:spPr>
+            <a:xfrm>
+              <a:off x="7976411" y="4336484"/>
+              <a:ext cx="0" cy="1317069"/>
+            </a:xfrm>
+            <a:custGeom>
+              <a:avLst/>
+              <a:pathLst>
+                <a:path w="0" h="1317069">
+                  <a:moveTo>
+                    <a:pt x="0" y="1317069"/>
+                  </a:moveTo>
+                  <a:lnTo>
+                    <a:pt x="0" y="0"/>
+                  </a:lnTo>
+                  <a:lnTo>
+                    <a:pt x="0" y="0"/>
+                  </a:lnTo>
+                </a:path>
+              </a:pathLst>
+            </a:custGeom>
+            <a:ln w="13550" cap="flat">
+              <a:solidFill>
+                <a:srgbClr val="EBEBEB">
+                  <a:alpha val="100000"/>
+                </a:srgbClr>
+              </a:solidFill>
+              <a:prstDash val="solid"/>
+              <a:round/>
+            </a:ln>
+          </p:spPr>
+          <p:txBody>
+            <a:bodyPr/>
+            <a:lstStyle/>
+            <a:p/>
+          </p:txBody>
+        </p:sp>
+        <p:sp>
+          <p:nvSpPr>
+            <p:cNvPr id="66" name="pg66"/>
+            <p:cNvSpPr/>
+            <p:nvPr/>
+          </p:nvSpPr>
+          <p:spPr>
+            <a:xfrm>
+              <a:off x="1235312" y="4450678"/>
+              <a:ext cx="6964104" cy="1072174"/>
+            </a:xfrm>
+            <a:custGeom>
+              <a:avLst/>
+              <a:pathLst>
+                <a:path w="6964104" h="1072174">
+                  <a:moveTo>
+                    <a:pt x="0" y="0"/>
+                  </a:moveTo>
+                  <a:lnTo>
+                    <a:pt x="70344" y="31662"/>
+                  </a:lnTo>
+                  <a:lnTo>
+                    <a:pt x="140688" y="62447"/>
+                  </a:lnTo>
+                  <a:lnTo>
+                    <a:pt x="211033" y="92379"/>
+                  </a:lnTo>
+                  <a:lnTo>
+                    <a:pt x="281377" y="121483"/>
+                  </a:lnTo>
+                  <a:lnTo>
+                    <a:pt x="351722" y="149780"/>
+                  </a:lnTo>
+                  <a:lnTo>
+                    <a:pt x="422066" y="177293"/>
+                  </a:lnTo>
+                  <a:lnTo>
+                    <a:pt x="492411" y="204044"/>
+                  </a:lnTo>
+                  <a:lnTo>
+                    <a:pt x="562755" y="230054"/>
+                  </a:lnTo>
+                  <a:lnTo>
+                    <a:pt x="633100" y="255344"/>
+                  </a:lnTo>
+                  <a:lnTo>
+                    <a:pt x="703444" y="279933"/>
+                  </a:lnTo>
+                  <a:lnTo>
+                    <a:pt x="773789" y="303841"/>
+                  </a:lnTo>
+                  <a:lnTo>
+                    <a:pt x="844133" y="327086"/>
+                  </a:lnTo>
+                  <a:lnTo>
+                    <a:pt x="914478" y="349688"/>
+                  </a:lnTo>
+                  <a:lnTo>
+                    <a:pt x="984822" y="371663"/>
+                  </a:lnTo>
+                  <a:lnTo>
+                    <a:pt x="1055167" y="393030"/>
+                  </a:lnTo>
+                  <a:lnTo>
+                    <a:pt x="1125511" y="413805"/>
+                  </a:lnTo>
+                  <a:lnTo>
+                    <a:pt x="1195856" y="434005"/>
+                  </a:lnTo>
+                  <a:lnTo>
+                    <a:pt x="1266200" y="453645"/>
+                  </a:lnTo>
+                  <a:lnTo>
+                    <a:pt x="1336545" y="472741"/>
+                  </a:lnTo>
+                  <a:lnTo>
+                    <a:pt x="1406889" y="491308"/>
+                  </a:lnTo>
+                  <a:lnTo>
+                    <a:pt x="1477234" y="509360"/>
+                  </a:lnTo>
+                  <a:lnTo>
+                    <a:pt x="1547578" y="526913"/>
+                  </a:lnTo>
+                  <a:lnTo>
+                    <a:pt x="1617923" y="543979"/>
+                  </a:lnTo>
+                  <a:lnTo>
+                    <a:pt x="1688267" y="560573"/>
+                  </a:lnTo>
+                  <a:lnTo>
+                    <a:pt x="1758612" y="576707"/>
+                  </a:lnTo>
+                  <a:lnTo>
+                    <a:pt x="1828956" y="592394"/>
+                  </a:lnTo>
+                  <a:lnTo>
+                    <a:pt x="1899301" y="607646"/>
+                  </a:lnTo>
+                  <a:lnTo>
+                    <a:pt x="1969645" y="622476"/>
+                  </a:lnTo>
+                  <a:lnTo>
+                    <a:pt x="2039990" y="636895"/>
+                  </a:lnTo>
+                  <a:lnTo>
+                    <a:pt x="2110334" y="650915"/>
+                  </a:lnTo>
+                  <a:lnTo>
+                    <a:pt x="2180679" y="664546"/>
+                  </a:lnTo>
+                  <a:lnTo>
+                    <a:pt x="2251023" y="677800"/>
+                  </a:lnTo>
+                  <a:lnTo>
+                    <a:pt x="2321368" y="690687"/>
+                  </a:lnTo>
+                  <a:lnTo>
+                    <a:pt x="2391712" y="703216"/>
+                  </a:lnTo>
+                  <a:lnTo>
+                    <a:pt x="2462057" y="715399"/>
+                  </a:lnTo>
+                  <a:lnTo>
+                    <a:pt x="2532401" y="727244"/>
+                  </a:lnTo>
+                  <a:lnTo>
+                    <a:pt x="2602746" y="738761"/>
+                  </a:lnTo>
+                  <a:lnTo>
+                    <a:pt x="2673090" y="749959"/>
+                  </a:lnTo>
+                  <a:lnTo>
+                    <a:pt x="2743435" y="760847"/>
+                  </a:lnTo>
+                  <a:lnTo>
+                    <a:pt x="2813779" y="771433"/>
+                  </a:lnTo>
+                  <a:lnTo>
+                    <a:pt x="2884124" y="781726"/>
+                  </a:lnTo>
+                  <a:lnTo>
+                    <a:pt x="2954468" y="791734"/>
+                  </a:lnTo>
+                  <a:lnTo>
+                    <a:pt x="3024813" y="801464"/>
+                  </a:lnTo>
+                  <a:lnTo>
+                    <a:pt x="3095157" y="810925"/>
+                  </a:lnTo>
+                  <a:lnTo>
+                    <a:pt x="3165502" y="820124"/>
+                  </a:lnTo>
+                  <a:lnTo>
+                    <a:pt x="3235846" y="829069"/>
+                  </a:lnTo>
+                  <a:lnTo>
+                    <a:pt x="3306191" y="837765"/>
+                  </a:lnTo>
+                  <a:lnTo>
+                    <a:pt x="3376535" y="843747"/>
+                  </a:lnTo>
+                  <a:lnTo>
+                    <a:pt x="3446880" y="843986"/>
+                  </a:lnTo>
+                  <a:lnTo>
+                    <a:pt x="3517224" y="844225"/>
+                  </a:lnTo>
+                  <a:lnTo>
+                    <a:pt x="3587569" y="844464"/>
+                  </a:lnTo>
+                  <a:lnTo>
+                    <a:pt x="3657913" y="844702"/>
+                  </a:lnTo>
+                  <a:lnTo>
+                    <a:pt x="3728257" y="844941"/>
+                  </a:lnTo>
+                  <a:lnTo>
+                    <a:pt x="3798602" y="845179"/>
+                  </a:lnTo>
+                  <a:lnTo>
+                    <a:pt x="3868946" y="845417"/>
+                  </a:lnTo>
+                  <a:lnTo>
+                    <a:pt x="3939291" y="845654"/>
+                  </a:lnTo>
+                  <a:lnTo>
+                    <a:pt x="4009635" y="845892"/>
+                  </a:lnTo>
+                  <a:lnTo>
+                    <a:pt x="4079980" y="846129"/>
+                  </a:lnTo>
+                  <a:lnTo>
+                    <a:pt x="4150324" y="846367"/>
+                  </a:lnTo>
+                  <a:lnTo>
+                    <a:pt x="4220669" y="846603"/>
+                  </a:lnTo>
+                  <a:lnTo>
+                    <a:pt x="4291013" y="846840"/>
+                  </a:lnTo>
+                  <a:lnTo>
+                    <a:pt x="4361358" y="847077"/>
+                  </a:lnTo>
+                  <a:lnTo>
+                    <a:pt x="4431702" y="847313"/>
+                  </a:lnTo>
+                  <a:lnTo>
+                    <a:pt x="4502047" y="847550"/>
+                  </a:lnTo>
+                  <a:lnTo>
+                    <a:pt x="4572391" y="847786"/>
+                  </a:lnTo>
+                  <a:lnTo>
+                    <a:pt x="4642736" y="848021"/>
+                  </a:lnTo>
+                  <a:lnTo>
+                    <a:pt x="4713080" y="848257"/>
+                  </a:lnTo>
+                  <a:lnTo>
+                    <a:pt x="4783425" y="848493"/>
+                  </a:lnTo>
+                  <a:lnTo>
+                    <a:pt x="4853769" y="848728"/>
+                  </a:lnTo>
+                  <a:lnTo>
+                    <a:pt x="4924114" y="848963"/>
+                  </a:lnTo>
+                  <a:lnTo>
+                    <a:pt x="4994458" y="849198"/>
+                  </a:lnTo>
+                  <a:lnTo>
+                    <a:pt x="5064803" y="849433"/>
+                  </a:lnTo>
+                  <a:lnTo>
+                    <a:pt x="5135147" y="849667"/>
+                  </a:lnTo>
+                  <a:lnTo>
+                    <a:pt x="5205492" y="849901"/>
+                  </a:lnTo>
+                  <a:lnTo>
+                    <a:pt x="5275836" y="850136"/>
+                  </a:lnTo>
+                  <a:lnTo>
+                    <a:pt x="5346181" y="850370"/>
+                  </a:lnTo>
+                  <a:lnTo>
+                    <a:pt x="5416525" y="850603"/>
+                  </a:lnTo>
+                  <a:lnTo>
+                    <a:pt x="5486870" y="850837"/>
+                  </a:lnTo>
+                  <a:lnTo>
+                    <a:pt x="5557214" y="851070"/>
+                  </a:lnTo>
+                  <a:lnTo>
+                    <a:pt x="5627559" y="851304"/>
+                  </a:lnTo>
+                  <a:lnTo>
+                    <a:pt x="5697903" y="851537"/>
+                  </a:lnTo>
+                  <a:lnTo>
+                    <a:pt x="5768248" y="851770"/>
+                  </a:lnTo>
+                  <a:lnTo>
+                    <a:pt x="5838592" y="852002"/>
+                  </a:lnTo>
+                  <a:lnTo>
+                    <a:pt x="5908937" y="852235"/>
+                  </a:lnTo>
+                  <a:lnTo>
+                    <a:pt x="5979281" y="852467"/>
+                  </a:lnTo>
+                  <a:lnTo>
+                    <a:pt x="6049626" y="852699"/>
+                  </a:lnTo>
+                  <a:lnTo>
+                    <a:pt x="6119970" y="852931"/>
+                  </a:lnTo>
+                  <a:lnTo>
+                    <a:pt x="6190315" y="853163"/>
+                  </a:lnTo>
+                  <a:lnTo>
+                    <a:pt x="6260659" y="853394"/>
+                  </a:lnTo>
+                  <a:lnTo>
+                    <a:pt x="6331004" y="853626"/>
+                  </a:lnTo>
+                  <a:lnTo>
+                    <a:pt x="6401348" y="853857"/>
+                  </a:lnTo>
+                  <a:lnTo>
+                    <a:pt x="6471693" y="854088"/>
+                  </a:lnTo>
+                  <a:lnTo>
+                    <a:pt x="6542037" y="854319"/>
+                  </a:lnTo>
+                  <a:lnTo>
+                    <a:pt x="6612382" y="854549"/>
+                  </a:lnTo>
+                  <a:lnTo>
+                    <a:pt x="6682726" y="854780"/>
+                  </a:lnTo>
+                  <a:lnTo>
+                    <a:pt x="6753071" y="855010"/>
+                  </a:lnTo>
+                  <a:lnTo>
+                    <a:pt x="6823415" y="855240"/>
+                  </a:lnTo>
+                  <a:lnTo>
+                    <a:pt x="6893760" y="855470"/>
+                  </a:lnTo>
+                  <a:lnTo>
+                    <a:pt x="6964104" y="855700"/>
+                  </a:lnTo>
+                  <a:lnTo>
+                    <a:pt x="6964104" y="1072174"/>
+                  </a:lnTo>
+                  <a:lnTo>
+                    <a:pt x="6893760" y="1070156"/>
+                  </a:lnTo>
+                  <a:lnTo>
+                    <a:pt x="6823415" y="1068081"/>
+                  </a:lnTo>
+                  <a:lnTo>
+                    <a:pt x="6753071" y="1065946"/>
+                  </a:lnTo>
+                  <a:lnTo>
+                    <a:pt x="6682726" y="1063750"/>
+                  </a:lnTo>
+                  <a:lnTo>
+                    <a:pt x="6612382" y="1061492"/>
+                  </a:lnTo>
+                  <a:lnTo>
+                    <a:pt x="6542037" y="1059170"/>
+                  </a:lnTo>
+                  <a:lnTo>
+                    <a:pt x="6471693" y="1056781"/>
+                  </a:lnTo>
+                  <a:lnTo>
+                    <a:pt x="6401348" y="1054325"/>
+                  </a:lnTo>
+                  <a:lnTo>
+                    <a:pt x="6331004" y="1051798"/>
+                  </a:lnTo>
+                  <a:lnTo>
+                    <a:pt x="6260659" y="1049200"/>
+                  </a:lnTo>
+                  <a:lnTo>
+                    <a:pt x="6190315" y="1046527"/>
+                  </a:lnTo>
+                  <a:lnTo>
+                    <a:pt x="6119970" y="1043778"/>
+                  </a:lnTo>
+                  <a:lnTo>
+                    <a:pt x="6049626" y="1040951"/>
+                  </a:lnTo>
+                  <a:lnTo>
+                    <a:pt x="5979281" y="1038044"/>
+                  </a:lnTo>
+                  <a:lnTo>
+                    <a:pt x="5908937" y="1035053"/>
+                  </a:lnTo>
+                  <a:lnTo>
+                    <a:pt x="5838592" y="1031977"/>
+                  </a:lnTo>
+                  <a:lnTo>
+                    <a:pt x="5768248" y="1028814"/>
+                  </a:lnTo>
+                  <a:lnTo>
+                    <a:pt x="5697903" y="1025561"/>
+                  </a:lnTo>
+                  <a:lnTo>
+                    <a:pt x="5627559" y="1022215"/>
+                  </a:lnTo>
+                  <a:lnTo>
+                    <a:pt x="5557214" y="1018773"/>
+                  </a:lnTo>
+                  <a:lnTo>
+                    <a:pt x="5486870" y="1015234"/>
+                  </a:lnTo>
+                  <a:lnTo>
+                    <a:pt x="5416525" y="1011594"/>
+                  </a:lnTo>
+                  <a:lnTo>
+                    <a:pt x="5346181" y="1007850"/>
+                  </a:lnTo>
+                  <a:lnTo>
+                    <a:pt x="5275836" y="1003999"/>
+                  </a:lnTo>
+                  <a:lnTo>
+                    <a:pt x="5205492" y="1000038"/>
+                  </a:lnTo>
+                  <a:lnTo>
+                    <a:pt x="5135147" y="995965"/>
+                  </a:lnTo>
+                  <a:lnTo>
+                    <a:pt x="5064803" y="991776"/>
+                  </a:lnTo>
+                  <a:lnTo>
+                    <a:pt x="4994458" y="987467"/>
+                  </a:lnTo>
+                  <a:lnTo>
+                    <a:pt x="4924114" y="983036"/>
+                  </a:lnTo>
+                  <a:lnTo>
+                    <a:pt x="4853769" y="978478"/>
+                  </a:lnTo>
+                  <a:lnTo>
+                    <a:pt x="4783425" y="973791"/>
+                  </a:lnTo>
+                  <a:lnTo>
+                    <a:pt x="4713080" y="968970"/>
+                  </a:lnTo>
+                  <a:lnTo>
+                    <a:pt x="4642736" y="964012"/>
+                  </a:lnTo>
+                  <a:lnTo>
+                    <a:pt x="4572391" y="958912"/>
+                  </a:lnTo>
+                  <a:lnTo>
+                    <a:pt x="4502047" y="953667"/>
+                  </a:lnTo>
+                  <a:lnTo>
+                    <a:pt x="4431702" y="948273"/>
+                  </a:lnTo>
+                  <a:lnTo>
+                    <a:pt x="4361358" y="942725"/>
+                  </a:lnTo>
+                  <a:lnTo>
+                    <a:pt x="4291013" y="937019"/>
+                  </a:lnTo>
+                  <a:lnTo>
+                    <a:pt x="4220669" y="931150"/>
+                  </a:lnTo>
+                  <a:lnTo>
+                    <a:pt x="4150324" y="925114"/>
+                  </a:lnTo>
+                  <a:lnTo>
+                    <a:pt x="4079980" y="918906"/>
+                  </a:lnTo>
+                  <a:lnTo>
+                    <a:pt x="4009635" y="912522"/>
+                  </a:lnTo>
+                  <a:lnTo>
+                    <a:pt x="3939291" y="905955"/>
+                  </a:lnTo>
+                  <a:lnTo>
+                    <a:pt x="3868946" y="899202"/>
+                  </a:lnTo>
+                  <a:lnTo>
+                    <a:pt x="3798602" y="892256"/>
+                  </a:lnTo>
+                  <a:lnTo>
+                    <a:pt x="3728257" y="885112"/>
+                  </a:lnTo>
+                  <a:lnTo>
+                    <a:pt x="3657913" y="877764"/>
+                  </a:lnTo>
+                  <a:lnTo>
+                    <a:pt x="3587569" y="870207"/>
+                  </a:lnTo>
+                  <a:lnTo>
+                    <a:pt x="3517224" y="862435"/>
+                  </a:lnTo>
+                  <a:lnTo>
+                    <a:pt x="3446880" y="854442"/>
+                  </a:lnTo>
+                  <a:lnTo>
+                    <a:pt x="3376535" y="846220"/>
+                  </a:lnTo>
+                  <a:lnTo>
+                    <a:pt x="3306191" y="843508"/>
+                  </a:lnTo>
+                  <a:lnTo>
+                    <a:pt x="3235846" y="843268"/>
+                  </a:lnTo>
+                  <a:lnTo>
+                    <a:pt x="3165502" y="843029"/>
+                  </a:lnTo>
+                  <a:lnTo>
+                    <a:pt x="3095157" y="842789"/>
+                  </a:lnTo>
+                  <a:lnTo>
+                    <a:pt x="3024813" y="842549"/>
+                  </a:lnTo>
+                  <a:lnTo>
+                    <a:pt x="2954468" y="842309"/>
+                  </a:lnTo>
+                  <a:lnTo>
+                    <a:pt x="2884124" y="842068"/>
+                  </a:lnTo>
+                  <a:lnTo>
+                    <a:pt x="2813779" y="841828"/>
+                  </a:lnTo>
+                  <a:lnTo>
+                    <a:pt x="2743435" y="841587"/>
+                  </a:lnTo>
+                  <a:lnTo>
+                    <a:pt x="2673090" y="841346"/>
+                  </a:lnTo>
+                  <a:lnTo>
+                    <a:pt x="2602746" y="841105"/>
+                  </a:lnTo>
+                  <a:lnTo>
+                    <a:pt x="2532401" y="840863"/>
+                  </a:lnTo>
+                  <a:lnTo>
+                    <a:pt x="2462057" y="840622"/>
+                  </a:lnTo>
+                  <a:lnTo>
+                    <a:pt x="2391712" y="840380"/>
+                  </a:lnTo>
+                  <a:lnTo>
+                    <a:pt x="2321368" y="840138"/>
+                  </a:lnTo>
+                  <a:lnTo>
+                    <a:pt x="2251023" y="839896"/>
+                  </a:lnTo>
+                  <a:lnTo>
+                    <a:pt x="2180679" y="839653"/>
+                  </a:lnTo>
+                  <a:lnTo>
+                    <a:pt x="2110334" y="839411"/>
+                  </a:lnTo>
+                  <a:lnTo>
+                    <a:pt x="2039990" y="839168"/>
+                  </a:lnTo>
+                  <a:lnTo>
+                    <a:pt x="1969645" y="838925"/>
+                  </a:lnTo>
+                  <a:lnTo>
+                    <a:pt x="1899301" y="838682"/>
+                  </a:lnTo>
+                  <a:lnTo>
+                    <a:pt x="1828956" y="838439"/>
+                  </a:lnTo>
+                  <a:lnTo>
+                    <a:pt x="1758612" y="838195"/>
+                  </a:lnTo>
+                  <a:lnTo>
+                    <a:pt x="1688267" y="837951"/>
+                  </a:lnTo>
+                  <a:lnTo>
+                    <a:pt x="1617923" y="837708"/>
+                  </a:lnTo>
+                  <a:lnTo>
+                    <a:pt x="1547578" y="837463"/>
+                  </a:lnTo>
+                  <a:lnTo>
+                    <a:pt x="1477234" y="837219"/>
+                  </a:lnTo>
+                  <a:lnTo>
+                    <a:pt x="1406889" y="836975"/>
+                  </a:lnTo>
+                  <a:lnTo>
+                    <a:pt x="1336545" y="836730"/>
+                  </a:lnTo>
+                  <a:lnTo>
+                    <a:pt x="1266200" y="836485"/>
+                  </a:lnTo>
+                  <a:lnTo>
+                    <a:pt x="1195856" y="836240"/>
+                  </a:lnTo>
+                  <a:lnTo>
+                    <a:pt x="1125511" y="835995"/>
+                  </a:lnTo>
+                  <a:lnTo>
+                    <a:pt x="1055167" y="835749"/>
+                  </a:lnTo>
+                  <a:lnTo>
+                    <a:pt x="984822" y="835504"/>
+                  </a:lnTo>
+                  <a:lnTo>
+                    <a:pt x="914478" y="835258"/>
+                  </a:lnTo>
+                  <a:lnTo>
+                    <a:pt x="844133" y="835012"/>
+                  </a:lnTo>
+                  <a:lnTo>
+                    <a:pt x="773789" y="834765"/>
+                  </a:lnTo>
+                  <a:lnTo>
+                    <a:pt x="703444" y="834519"/>
+                  </a:lnTo>
+                  <a:lnTo>
+                    <a:pt x="633100" y="834272"/>
+                  </a:lnTo>
+                  <a:lnTo>
+                    <a:pt x="562755" y="834026"/>
+                  </a:lnTo>
+                  <a:lnTo>
+                    <a:pt x="492411" y="833778"/>
+                  </a:lnTo>
+                  <a:lnTo>
+                    <a:pt x="422066" y="833531"/>
+                  </a:lnTo>
+                  <a:lnTo>
+                    <a:pt x="351722" y="833284"/>
+                  </a:lnTo>
+                  <a:lnTo>
+                    <a:pt x="281377" y="833036"/>
+                  </a:lnTo>
+                  <a:lnTo>
+                    <a:pt x="211033" y="832788"/>
+                  </a:lnTo>
+                  <a:lnTo>
+                    <a:pt x="140688" y="832540"/>
+                  </a:lnTo>
+                  <a:lnTo>
+                    <a:pt x="70344" y="832292"/>
+                  </a:lnTo>
+                  <a:lnTo>
+                    <a:pt x="0" y="832044"/>
+                  </a:lnTo>
+                  <a:close/>
+                </a:path>
+              </a:pathLst>
+            </a:custGeom>
+            <a:solidFill>
+              <a:srgbClr val="FF8C00">
+                <a:alpha val="20000"/>
+              </a:srgbClr>
+            </a:solidFill>
+          </p:spPr>
+          <p:txBody>
+            <a:bodyPr/>
+            <a:lstStyle/>
+            <a:p/>
+          </p:txBody>
+        </p:sp>
+        <p:sp>
+          <p:nvSpPr>
+            <p:cNvPr id="67" name="pl67"/>
+            <p:cNvSpPr/>
+            <p:nvPr/>
+          </p:nvSpPr>
+          <p:spPr>
+            <a:xfrm>
+              <a:off x="1235312" y="4450678"/>
+              <a:ext cx="6964104" cy="855700"/>
+            </a:xfrm>
+            <a:custGeom>
+              <a:avLst/>
+              <a:pathLst>
+                <a:path w="6964104" h="855700">
+                  <a:moveTo>
+                    <a:pt x="0" y="0"/>
+                  </a:moveTo>
+                  <a:lnTo>
+                    <a:pt x="70344" y="31662"/>
+                  </a:lnTo>
+                  <a:lnTo>
+                    <a:pt x="140688" y="62447"/>
+                  </a:lnTo>
+                  <a:lnTo>
+                    <a:pt x="211033" y="92379"/>
+                  </a:lnTo>
+                  <a:lnTo>
+                    <a:pt x="281377" y="121483"/>
+                  </a:lnTo>
+                  <a:lnTo>
+                    <a:pt x="351722" y="149780"/>
+                  </a:lnTo>
+                  <a:lnTo>
+                    <a:pt x="422066" y="177293"/>
+                  </a:lnTo>
+                  <a:lnTo>
+                    <a:pt x="492411" y="204044"/>
+                  </a:lnTo>
+                  <a:lnTo>
+                    <a:pt x="562755" y="230054"/>
+                  </a:lnTo>
+                  <a:lnTo>
+                    <a:pt x="633100" y="255344"/>
+                  </a:lnTo>
+                  <a:lnTo>
+                    <a:pt x="703444" y="279933"/>
+                  </a:lnTo>
+                  <a:lnTo>
+                    <a:pt x="773789" y="303841"/>
+                  </a:lnTo>
+                  <a:lnTo>
+                    <a:pt x="844133" y="327086"/>
+                  </a:lnTo>
+                  <a:lnTo>
+                    <a:pt x="914478" y="349688"/>
+                  </a:lnTo>
+                  <a:lnTo>
+                    <a:pt x="984822" y="371663"/>
+                  </a:lnTo>
+                  <a:lnTo>
+                    <a:pt x="1055167" y="393030"/>
+                  </a:lnTo>
+                  <a:lnTo>
+                    <a:pt x="1125511" y="413805"/>
+                  </a:lnTo>
+                  <a:lnTo>
+                    <a:pt x="1195856" y="434005"/>
+                  </a:lnTo>
+                  <a:lnTo>
+                    <a:pt x="1266200" y="453645"/>
+                  </a:lnTo>
+                  <a:lnTo>
+                    <a:pt x="1336545" y="472741"/>
+                  </a:lnTo>
+                  <a:lnTo>
+                    <a:pt x="1406889" y="491308"/>
+                  </a:lnTo>
+                  <a:lnTo>
+                    <a:pt x="1477234" y="509360"/>
+                  </a:lnTo>
+                  <a:lnTo>
+                    <a:pt x="1547578" y="526913"/>
+                  </a:lnTo>
+                  <a:lnTo>
+                    <a:pt x="1617923" y="543979"/>
+                  </a:lnTo>
+                  <a:lnTo>
+                    <a:pt x="1688267" y="560573"/>
+                  </a:lnTo>
+                  <a:lnTo>
+                    <a:pt x="1758612" y="576707"/>
+                  </a:lnTo>
+                  <a:lnTo>
+                    <a:pt x="1828956" y="592394"/>
+                  </a:lnTo>
+                  <a:lnTo>
+                    <a:pt x="1899301" y="607646"/>
+                  </a:lnTo>
+                  <a:lnTo>
+                    <a:pt x="1969645" y="622476"/>
+                  </a:lnTo>
+                  <a:lnTo>
+                    <a:pt x="2039990" y="636895"/>
+                  </a:lnTo>
+                  <a:lnTo>
+                    <a:pt x="2110334" y="650915"/>
+                  </a:lnTo>
+                  <a:lnTo>
+                    <a:pt x="2180679" y="664546"/>
+                  </a:lnTo>
+                  <a:lnTo>
+                    <a:pt x="2251023" y="677800"/>
+                  </a:lnTo>
+                  <a:lnTo>
+                    <a:pt x="2321368" y="690687"/>
+                  </a:lnTo>
+                  <a:lnTo>
+                    <a:pt x="2391712" y="703216"/>
+                  </a:lnTo>
+                  <a:lnTo>
+                    <a:pt x="2462057" y="715399"/>
+                  </a:lnTo>
+                  <a:lnTo>
+                    <a:pt x="2532401" y="727244"/>
+                  </a:lnTo>
+                  <a:lnTo>
+                    <a:pt x="2602746" y="738761"/>
+                  </a:lnTo>
+                  <a:lnTo>
+                    <a:pt x="2673090" y="749959"/>
+                  </a:lnTo>
+                  <a:lnTo>
+                    <a:pt x="2743435" y="760847"/>
+                  </a:lnTo>
+                  <a:lnTo>
+                    <a:pt x="2813779" y="771433"/>
+                  </a:lnTo>
+                  <a:lnTo>
+                    <a:pt x="2884124" y="781726"/>
+                  </a:lnTo>
+                  <a:lnTo>
+                    <a:pt x="2954468" y="791734"/>
+                  </a:lnTo>
+                  <a:lnTo>
+                    <a:pt x="3024813" y="801464"/>
+                  </a:lnTo>
+                  <a:lnTo>
+                    <a:pt x="3095157" y="810925"/>
+                  </a:lnTo>
+                  <a:lnTo>
+                    <a:pt x="3165502" y="820124"/>
+                  </a:lnTo>
+                  <a:lnTo>
+                    <a:pt x="3235846" y="829069"/>
+                  </a:lnTo>
+                  <a:lnTo>
+                    <a:pt x="3306191" y="837765"/>
+                  </a:lnTo>
+                  <a:lnTo>
+                    <a:pt x="3376535" y="843747"/>
+                  </a:lnTo>
+                  <a:lnTo>
+                    <a:pt x="3446880" y="843986"/>
+                  </a:lnTo>
+                  <a:lnTo>
+                    <a:pt x="3517224" y="844225"/>
+                  </a:lnTo>
+                  <a:lnTo>
+                    <a:pt x="3587569" y="844464"/>
+                  </a:lnTo>
+                  <a:lnTo>
+                    <a:pt x="3657913" y="844702"/>
+                  </a:lnTo>
+                  <a:lnTo>
+                    <a:pt x="3728257" y="844941"/>
+                  </a:lnTo>
+                  <a:lnTo>
+                    <a:pt x="3798602" y="845179"/>
+                  </a:lnTo>
+                  <a:lnTo>
+                    <a:pt x="3868946" y="845417"/>
+                  </a:lnTo>
+                  <a:lnTo>
+                    <a:pt x="3939291" y="845654"/>
+                  </a:lnTo>
+                  <a:lnTo>
+                    <a:pt x="4009635" y="845892"/>
+                  </a:lnTo>
+                  <a:lnTo>
+                    <a:pt x="4079980" y="846129"/>
+                  </a:lnTo>
+                  <a:lnTo>
+                    <a:pt x="4150324" y="846367"/>
+                  </a:lnTo>
+                  <a:lnTo>
+                    <a:pt x="4220669" y="846603"/>
+                  </a:lnTo>
+                  <a:lnTo>
+                    <a:pt x="4291013" y="846840"/>
+                  </a:lnTo>
+                  <a:lnTo>
+                    <a:pt x="4361358" y="847077"/>
+                  </a:lnTo>
+                  <a:lnTo>
+                    <a:pt x="4431702" y="847313"/>
+                  </a:lnTo>
+                  <a:lnTo>
+                    <a:pt x="4502047" y="847550"/>
+                  </a:lnTo>
+                  <a:lnTo>
+                    <a:pt x="4572391" y="847786"/>
+                  </a:lnTo>
+                  <a:lnTo>
+                    <a:pt x="4642736" y="848021"/>
+                  </a:lnTo>
+                  <a:lnTo>
+                    <a:pt x="4713080" y="848257"/>
+                  </a:lnTo>
+                  <a:lnTo>
+                    <a:pt x="4783425" y="848493"/>
+                  </a:lnTo>
+                  <a:lnTo>
+                    <a:pt x="4853769" y="848728"/>
+                  </a:lnTo>
+                  <a:lnTo>
+                    <a:pt x="4924114" y="848963"/>
+                  </a:lnTo>
+                  <a:lnTo>
+                    <a:pt x="4994458" y="849198"/>
+                  </a:lnTo>
+                  <a:lnTo>
+                    <a:pt x="5064803" y="849433"/>
+                  </a:lnTo>
+                  <a:lnTo>
+                    <a:pt x="5135147" y="849667"/>
+                  </a:lnTo>
+                  <a:lnTo>
+                    <a:pt x="5205492" y="849901"/>
+                  </a:lnTo>
+                  <a:lnTo>
+                    <a:pt x="5275836" y="850136"/>
+                  </a:lnTo>
+                  <a:lnTo>
+                    <a:pt x="5346181" y="850370"/>
+                  </a:lnTo>
+                  <a:lnTo>
+                    <a:pt x="5416525" y="850603"/>
+                  </a:lnTo>
+                  <a:lnTo>
+                    <a:pt x="5486870" y="850837"/>
+                  </a:lnTo>
+                  <a:lnTo>
+                    <a:pt x="5557214" y="851070"/>
+                  </a:lnTo>
+                  <a:lnTo>
+                    <a:pt x="5627559" y="851304"/>
+                  </a:lnTo>
+                  <a:lnTo>
+                    <a:pt x="5697903" y="851537"/>
+                  </a:lnTo>
+                  <a:lnTo>
+                    <a:pt x="5768248" y="851770"/>
+                  </a:lnTo>
+                  <a:lnTo>
+                    <a:pt x="5838592" y="852002"/>
+                  </a:lnTo>
+                  <a:lnTo>
+                    <a:pt x="5908937" y="852235"/>
+                  </a:lnTo>
+                  <a:lnTo>
+                    <a:pt x="5979281" y="852467"/>
+                  </a:lnTo>
+                  <a:lnTo>
+                    <a:pt x="6049626" y="852699"/>
+                  </a:lnTo>
+                  <a:lnTo>
+                    <a:pt x="6119970" y="852931"/>
+                  </a:lnTo>
+                  <a:lnTo>
+                    <a:pt x="6190315" y="853163"/>
+                  </a:lnTo>
+                  <a:lnTo>
+                    <a:pt x="6260659" y="853394"/>
+                  </a:lnTo>
+                  <a:lnTo>
+                    <a:pt x="6331004" y="853626"/>
+                  </a:lnTo>
+                  <a:lnTo>
+                    <a:pt x="6401348" y="853857"/>
+                  </a:lnTo>
+                  <a:lnTo>
+                    <a:pt x="6471693" y="854088"/>
+                  </a:lnTo>
+                  <a:lnTo>
+                    <a:pt x="6542037" y="854319"/>
+                  </a:lnTo>
+                  <a:lnTo>
+                    <a:pt x="6612382" y="854549"/>
+                  </a:lnTo>
+                  <a:lnTo>
+                    <a:pt x="6682726" y="854780"/>
+                  </a:lnTo>
+                  <a:lnTo>
+                    <a:pt x="6753071" y="855010"/>
+                  </a:lnTo>
+                  <a:lnTo>
+                    <a:pt x="6823415" y="855240"/>
+                  </a:lnTo>
+                  <a:lnTo>
+                    <a:pt x="6893760" y="855470"/>
+                  </a:lnTo>
+                  <a:lnTo>
+                    <a:pt x="6964104" y="855700"/>
+                  </a:lnTo>
+                </a:path>
+              </a:pathLst>
+            </a:custGeom>
+          </p:spPr>
+          <p:txBody>
+            <a:bodyPr/>
+            <a:lstStyle/>
+            <a:p/>
+          </p:txBody>
+        </p:sp>
+        <p:sp>
+          <p:nvSpPr>
+            <p:cNvPr id="68" name="pl68"/>
+            <p:cNvSpPr/>
+            <p:nvPr/>
+          </p:nvSpPr>
+          <p:spPr>
+            <a:xfrm>
+              <a:off x="1235312" y="5282722"/>
+              <a:ext cx="6964104" cy="240130"/>
+            </a:xfrm>
+            <a:custGeom>
+              <a:avLst/>
+              <a:pathLst>
+                <a:path w="6964104" h="240130">
+                  <a:moveTo>
+                    <a:pt x="6964104" y="240130"/>
+                  </a:moveTo>
+                  <a:lnTo>
+                    <a:pt x="6893760" y="238112"/>
+                  </a:lnTo>
+                  <a:lnTo>
+                    <a:pt x="6823415" y="236036"/>
+                  </a:lnTo>
+                  <a:lnTo>
+                    <a:pt x="6753071" y="233902"/>
+                  </a:lnTo>
+                  <a:lnTo>
+                    <a:pt x="6682726" y="231706"/>
+                  </a:lnTo>
+                  <a:lnTo>
+                    <a:pt x="6612382" y="229448"/>
+                  </a:lnTo>
+                  <a:lnTo>
+                    <a:pt x="6542037" y="227126"/>
+                  </a:lnTo>
+                  <a:lnTo>
+                    <a:pt x="6471693" y="224737"/>
+                  </a:lnTo>
+                  <a:lnTo>
+                    <a:pt x="6401348" y="222281"/>
+                  </a:lnTo>
+                  <a:lnTo>
+                    <a:pt x="6331004" y="219754"/>
+                  </a:lnTo>
+                  <a:lnTo>
+                    <a:pt x="6260659" y="217155"/>
+                  </a:lnTo>
+                  <a:lnTo>
+                    <a:pt x="6190315" y="214483"/>
+                  </a:lnTo>
+                  <a:lnTo>
+                    <a:pt x="6119970" y="211734"/>
+                  </a:lnTo>
+                  <a:lnTo>
+                    <a:pt x="6049626" y="208907"/>
+                  </a:lnTo>
+                  <a:lnTo>
+                    <a:pt x="5979281" y="205999"/>
+                  </a:lnTo>
+                  <a:lnTo>
+                    <a:pt x="5908937" y="203009"/>
+                  </a:lnTo>
+                  <a:lnTo>
+                    <a:pt x="5838592" y="199933"/>
+                  </a:lnTo>
+                  <a:lnTo>
+                    <a:pt x="5768248" y="196770"/>
+                  </a:lnTo>
+                  <a:lnTo>
+                    <a:pt x="5697903" y="193517"/>
+                  </a:lnTo>
+                  <a:lnTo>
+                    <a:pt x="5627559" y="190171"/>
+                  </a:lnTo>
+                  <a:lnTo>
+                    <a:pt x="5557214" y="186729"/>
+                  </a:lnTo>
+                  <a:lnTo>
+                    <a:pt x="5486870" y="183190"/>
+                  </a:lnTo>
+                  <a:lnTo>
+                    <a:pt x="5416525" y="179549"/>
+                  </a:lnTo>
+                  <a:lnTo>
+                    <a:pt x="5346181" y="175805"/>
+                  </a:lnTo>
+                  <a:lnTo>
+                    <a:pt x="5275836" y="171955"/>
+                  </a:lnTo>
+                  <a:lnTo>
+                    <a:pt x="5205492" y="167994"/>
+                  </a:lnTo>
+                  <a:lnTo>
+                    <a:pt x="5135147" y="163921"/>
+                  </a:lnTo>
+                  <a:lnTo>
+                    <a:pt x="5064803" y="159732"/>
+                  </a:lnTo>
+                  <a:lnTo>
+                    <a:pt x="4994458" y="155423"/>
+                  </a:lnTo>
+                  <a:lnTo>
+                    <a:pt x="4924114" y="150992"/>
+                  </a:lnTo>
+                  <a:lnTo>
+                    <a:pt x="4853769" y="146434"/>
+                  </a:lnTo>
+                  <a:lnTo>
+                    <a:pt x="4783425" y="141747"/>
+                  </a:lnTo>
+                  <a:lnTo>
+                    <a:pt x="4713080" y="136926"/>
+                  </a:lnTo>
+                  <a:lnTo>
+                    <a:pt x="4642736" y="131968"/>
+                  </a:lnTo>
+                  <a:lnTo>
+                    <a:pt x="4572391" y="126868"/>
+                  </a:lnTo>
+                  <a:lnTo>
+                    <a:pt x="4502047" y="121623"/>
+                  </a:lnTo>
+                  <a:lnTo>
+                    <a:pt x="4431702" y="116229"/>
+                  </a:lnTo>
+                  <a:lnTo>
+                    <a:pt x="4361358" y="110681"/>
+                  </a:lnTo>
+                  <a:lnTo>
+                    <a:pt x="4291013" y="104975"/>
+                  </a:lnTo>
+                  <a:lnTo>
+                    <a:pt x="4220669" y="99106"/>
+                  </a:lnTo>
+                  <a:lnTo>
+                    <a:pt x="4150324" y="93070"/>
+                  </a:lnTo>
+                  <a:lnTo>
+                    <a:pt x="4079980" y="86862"/>
+                  </a:lnTo>
+                  <a:lnTo>
+                    <a:pt x="4009635" y="80478"/>
+                  </a:lnTo>
+                  <a:lnTo>
+                    <a:pt x="3939291" y="73911"/>
+                  </a:lnTo>
+                  <a:lnTo>
+                    <a:pt x="3868946" y="67157"/>
+                  </a:lnTo>
+                  <a:lnTo>
+                    <a:pt x="3798602" y="60211"/>
+                  </a:lnTo>
+                  <a:lnTo>
+                    <a:pt x="3728257" y="53067"/>
+                  </a:lnTo>
+                  <a:lnTo>
+                    <a:pt x="3657913" y="45720"/>
+                  </a:lnTo>
+                  <a:lnTo>
+                    <a:pt x="3587569" y="38163"/>
+                  </a:lnTo>
+                  <a:lnTo>
+                    <a:pt x="3517224" y="30391"/>
+                  </a:lnTo>
+                  <a:lnTo>
+                    <a:pt x="3446880" y="22398"/>
+                  </a:lnTo>
+                  <a:lnTo>
+                    <a:pt x="3376535" y="14176"/>
+                  </a:lnTo>
+                  <a:lnTo>
+                    <a:pt x="3306191" y="11464"/>
+                  </a:lnTo>
+                  <a:lnTo>
+                    <a:pt x="3235846" y="11224"/>
+                  </a:lnTo>
+                  <a:lnTo>
+                    <a:pt x="3165502" y="10985"/>
+                  </a:lnTo>
+                  <a:lnTo>
+                    <a:pt x="3095157" y="10745"/>
+                  </a:lnTo>
+                  <a:lnTo>
+                    <a:pt x="3024813" y="10505"/>
+                  </a:lnTo>
+                  <a:lnTo>
+                    <a:pt x="2954468" y="10264"/>
+                  </a:lnTo>
+                  <a:lnTo>
+                    <a:pt x="2884124" y="10024"/>
+                  </a:lnTo>
+                  <a:lnTo>
+                    <a:pt x="2813779" y="9783"/>
+                  </a:lnTo>
+                  <a:lnTo>
+                    <a:pt x="2743435" y="9543"/>
+                  </a:lnTo>
+                  <a:lnTo>
+                    <a:pt x="2673090" y="9302"/>
+                  </a:lnTo>
+                  <a:lnTo>
+                    <a:pt x="2602746" y="9060"/>
+                  </a:lnTo>
+                  <a:lnTo>
+                    <a:pt x="2532401" y="8819"/>
+                  </a:lnTo>
+                  <a:lnTo>
+                    <a:pt x="2462057" y="8577"/>
+                  </a:lnTo>
+                  <a:lnTo>
+                    <a:pt x="2391712" y="8336"/>
+                  </a:lnTo>
+                  <a:lnTo>
+                    <a:pt x="2321368" y="8094"/>
+                  </a:lnTo>
+                  <a:lnTo>
+                    <a:pt x="2251023" y="7852"/>
+                  </a:lnTo>
+                  <a:lnTo>
+                    <a:pt x="2180679" y="7609"/>
+                  </a:lnTo>
+                  <a:lnTo>
+                    <a:pt x="2110334" y="7367"/>
+                  </a:lnTo>
+                  <a:lnTo>
+                    <a:pt x="2039990" y="7124"/>
+                  </a:lnTo>
+                  <a:lnTo>
+                    <a:pt x="1969645" y="6881"/>
+                  </a:lnTo>
+                  <a:lnTo>
+                    <a:pt x="1899301" y="6638"/>
+                  </a:lnTo>
+                  <a:lnTo>
+                    <a:pt x="1828956" y="6395"/>
+                  </a:lnTo>
+                  <a:lnTo>
+                    <a:pt x="1758612" y="6151"/>
+                  </a:lnTo>
+                  <a:lnTo>
+                    <a:pt x="1688267" y="5907"/>
+                  </a:lnTo>
+                  <a:lnTo>
+                    <a:pt x="1617923" y="5663"/>
+                  </a:lnTo>
+                  <a:lnTo>
+                    <a:pt x="1547578" y="5419"/>
+                  </a:lnTo>
+                  <a:lnTo>
+                    <a:pt x="1477234" y="5175"/>
+                  </a:lnTo>
+                  <a:lnTo>
+                    <a:pt x="1406889" y="4931"/>
+                  </a:lnTo>
+                  <a:lnTo>
+                    <a:pt x="1336545" y="4686"/>
+                  </a:lnTo>
+                  <a:lnTo>
+                    <a:pt x="1266200" y="4441"/>
+                  </a:lnTo>
+                  <a:lnTo>
+                    <a:pt x="1195856" y="4196"/>
+                  </a:lnTo>
+                  <a:lnTo>
+                    <a:pt x="1125511" y="3951"/>
+                  </a:lnTo>
+                  <a:lnTo>
+                    <a:pt x="1055167" y="3705"/>
+                  </a:lnTo>
+                  <a:lnTo>
+                    <a:pt x="984822" y="3460"/>
+                  </a:lnTo>
+                  <a:lnTo>
+                    <a:pt x="914478" y="3214"/>
+                  </a:lnTo>
+                  <a:lnTo>
+                    <a:pt x="844133" y="2968"/>
+                  </a:lnTo>
+                  <a:lnTo>
+                    <a:pt x="773789" y="2721"/>
+                  </a:lnTo>
+                  <a:lnTo>
+                    <a:pt x="703444" y="2475"/>
+                  </a:lnTo>
+                  <a:lnTo>
+                    <a:pt x="633100" y="2228"/>
+                  </a:lnTo>
+                  <a:lnTo>
+                    <a:pt x="562755" y="1981"/>
+                  </a:lnTo>
+                  <a:lnTo>
+                    <a:pt x="492411" y="1734"/>
+                  </a:lnTo>
+                  <a:lnTo>
+                    <a:pt x="422066" y="1487"/>
+                  </a:lnTo>
+                  <a:lnTo>
+                    <a:pt x="351722" y="1240"/>
+                  </a:lnTo>
+                  <a:lnTo>
+                    <a:pt x="281377" y="992"/>
+                  </a:lnTo>
+                  <a:lnTo>
+                    <a:pt x="211033" y="744"/>
+                  </a:lnTo>
+                  <a:lnTo>
+                    <a:pt x="140688" y="496"/>
+                  </a:lnTo>
+                  <a:lnTo>
+                    <a:pt x="70344" y="248"/>
+                  </a:lnTo>
+                  <a:lnTo>
+                    <a:pt x="0" y="0"/>
+                  </a:lnTo>
+                </a:path>
+              </a:pathLst>
+            </a:custGeom>
+          </p:spPr>
+          <p:txBody>
+            <a:bodyPr/>
+            <a:lstStyle/>
+            <a:p/>
+          </p:txBody>
+        </p:sp>
+        <p:sp>
+          <p:nvSpPr>
+            <p:cNvPr id="69" name="pl69"/>
+            <p:cNvSpPr/>
+            <p:nvPr/>
+          </p:nvSpPr>
+          <p:spPr>
+            <a:xfrm>
+              <a:off x="1235312" y="4997502"/>
+              <a:ext cx="6964104" cy="453526"/>
+            </a:xfrm>
+            <a:custGeom>
+              <a:avLst/>
+              <a:pathLst>
+                <a:path w="6964104" h="453526">
+                  <a:moveTo>
+                    <a:pt x="0" y="0"/>
+                  </a:moveTo>
+                  <a:lnTo>
+                    <a:pt x="70344" y="8550"/>
+                  </a:lnTo>
+                  <a:lnTo>
+                    <a:pt x="140688" y="16977"/>
+                  </a:lnTo>
+                  <a:lnTo>
+                    <a:pt x="211033" y="25284"/>
+                  </a:lnTo>
+                  <a:lnTo>
+                    <a:pt x="281377" y="33472"/>
+                  </a:lnTo>
+                  <a:lnTo>
+                    <a:pt x="351722" y="41542"/>
+                  </a:lnTo>
+                  <a:lnTo>
+                    <a:pt x="422066" y="49496"/>
+                  </a:lnTo>
+                  <a:lnTo>
+                    <a:pt x="492411" y="57337"/>
+                  </a:lnTo>
+                  <a:lnTo>
+                    <a:pt x="562755" y="65065"/>
+                  </a:lnTo>
+                  <a:lnTo>
+                    <a:pt x="633100" y="72682"/>
+                  </a:lnTo>
+                  <a:lnTo>
+                    <a:pt x="703444" y="80190"/>
+                  </a:lnTo>
+                  <a:lnTo>
+                    <a:pt x="773789" y="87590"/>
+                  </a:lnTo>
+                  <a:lnTo>
+                    <a:pt x="844133" y="94884"/>
+                  </a:lnTo>
+                  <a:lnTo>
+                    <a:pt x="914478" y="102073"/>
+                  </a:lnTo>
+                  <a:lnTo>
+                    <a:pt x="984822" y="109160"/>
+                  </a:lnTo>
+                  <a:lnTo>
+                    <a:pt x="1055167" y="116144"/>
+                  </a:lnTo>
+                  <a:lnTo>
+                    <a:pt x="1125511" y="123029"/>
+                  </a:lnTo>
+                  <a:lnTo>
+                    <a:pt x="1195856" y="129815"/>
+                  </a:lnTo>
+                  <a:lnTo>
+                    <a:pt x="1266200" y="136503"/>
+                  </a:lnTo>
+                  <a:lnTo>
+                    <a:pt x="1336545" y="143096"/>
+                  </a:lnTo>
+                  <a:lnTo>
+                    <a:pt x="1406889" y="149594"/>
+                  </a:lnTo>
+                  <a:lnTo>
+                    <a:pt x="1477234" y="155999"/>
+                  </a:lnTo>
+                  <a:lnTo>
+                    <a:pt x="1547578" y="162312"/>
+                  </a:lnTo>
+                  <a:lnTo>
+                    <a:pt x="1617923" y="168534"/>
+                  </a:lnTo>
+                  <a:lnTo>
+                    <a:pt x="1688267" y="174667"/>
+                  </a:lnTo>
+                  <a:lnTo>
+                    <a:pt x="1758612" y="180712"/>
+                  </a:lnTo>
+                  <a:lnTo>
+                    <a:pt x="1828956" y="186671"/>
+                  </a:lnTo>
+                  <a:lnTo>
+                    <a:pt x="1899301" y="192544"/>
+                  </a:lnTo>
+                  <a:lnTo>
+                    <a:pt x="1969645" y="198333"/>
+                  </a:lnTo>
+                  <a:lnTo>
+                    <a:pt x="2039990" y="204039"/>
+                  </a:lnTo>
+                  <a:lnTo>
+                    <a:pt x="2110334" y="209663"/>
+                  </a:lnTo>
+                  <a:lnTo>
+                    <a:pt x="2180679" y="215206"/>
+                  </a:lnTo>
+                  <a:lnTo>
+                    <a:pt x="2251023" y="220670"/>
+                  </a:lnTo>
+                  <a:lnTo>
+                    <a:pt x="2321368" y="226055"/>
+                  </a:lnTo>
+                  <a:lnTo>
+                    <a:pt x="2391712" y="231364"/>
+                  </a:lnTo>
+                  <a:lnTo>
+                    <a:pt x="2462057" y="236596"/>
+                  </a:lnTo>
+                  <a:lnTo>
+                    <a:pt x="2532401" y="241753"/>
+                  </a:lnTo>
+                  <a:lnTo>
+                    <a:pt x="2602746" y="246836"/>
+                  </a:lnTo>
+                  <a:lnTo>
+                    <a:pt x="2673090" y="251846"/>
+                  </a:lnTo>
+                  <a:lnTo>
+                    <a:pt x="2743435" y="256784"/>
+                  </a:lnTo>
+                  <a:lnTo>
+                    <a:pt x="2813779" y="261652"/>
+                  </a:lnTo>
+                  <a:lnTo>
+                    <a:pt x="2884124" y="266450"/>
+                  </a:lnTo>
+                  <a:lnTo>
+                    <a:pt x="2954468" y="271179"/>
+                  </a:lnTo>
+                  <a:lnTo>
+                    <a:pt x="3024813" y="275840"/>
+                  </a:lnTo>
+                  <a:lnTo>
+                    <a:pt x="3095157" y="280434"/>
+                  </a:lnTo>
+                  <a:lnTo>
+                    <a:pt x="3165502" y="284962"/>
+                  </a:lnTo>
+                  <a:lnTo>
+                    <a:pt x="3235846" y="289426"/>
+                  </a:lnTo>
+                  <a:lnTo>
+                    <a:pt x="3306191" y="293825"/>
+                  </a:lnTo>
+                  <a:lnTo>
+                    <a:pt x="3376535" y="298161"/>
+                  </a:lnTo>
+                  <a:lnTo>
+                    <a:pt x="3446880" y="302436"/>
+                  </a:lnTo>
+                  <a:lnTo>
+                    <a:pt x="3517224" y="306648"/>
+                  </a:lnTo>
+                  <a:lnTo>
+                    <a:pt x="3587569" y="310801"/>
+                  </a:lnTo>
+                  <a:lnTo>
+                    <a:pt x="3657913" y="314894"/>
+                  </a:lnTo>
+                  <a:lnTo>
+                    <a:pt x="3728257" y="318928"/>
+                  </a:lnTo>
+                  <a:lnTo>
+                    <a:pt x="3798602" y="322904"/>
+                  </a:lnTo>
+                  <a:lnTo>
+                    <a:pt x="3868946" y="326823"/>
+                  </a:lnTo>
+                  <a:lnTo>
+                    <a:pt x="3939291" y="330686"/>
+                  </a:lnTo>
+                  <a:lnTo>
+                    <a:pt x="4009635" y="334494"/>
+                  </a:lnTo>
+                  <a:lnTo>
+                    <a:pt x="4079980" y="338247"/>
+                  </a:lnTo>
+                  <a:lnTo>
+                    <a:pt x="4150324" y="341946"/>
+                  </a:lnTo>
+                  <a:lnTo>
+                    <a:pt x="4220669" y="345593"/>
+                  </a:lnTo>
+                  <a:lnTo>
+                    <a:pt x="4291013" y="349186"/>
+                  </a:lnTo>
+                  <a:lnTo>
+                    <a:pt x="4361358" y="352729"/>
+                  </a:lnTo>
+                  <a:lnTo>
+                    <a:pt x="4431702" y="356220"/>
+                  </a:lnTo>
+                  <a:lnTo>
+                    <a:pt x="4502047" y="359662"/>
+                  </a:lnTo>
+                  <a:lnTo>
+                    <a:pt x="4572391" y="363054"/>
+                  </a:lnTo>
+                  <a:lnTo>
+                    <a:pt x="4642736" y="366397"/>
+                  </a:lnTo>
+                  <a:lnTo>
+                    <a:pt x="4713080" y="369693"/>
+                  </a:lnTo>
+                  <a:lnTo>
+                    <a:pt x="4783425" y="372941"/>
+                  </a:lnTo>
+                  <a:lnTo>
+                    <a:pt x="4853769" y="376143"/>
+                  </a:lnTo>
+                  <a:lnTo>
+                    <a:pt x="4924114" y="379299"/>
+                  </a:lnTo>
+                  <a:lnTo>
+                    <a:pt x="4994458" y="382409"/>
+                  </a:lnTo>
+                  <a:lnTo>
+                    <a:pt x="5064803" y="385475"/>
+                  </a:lnTo>
+                  <a:lnTo>
+                    <a:pt x="5135147" y="388497"/>
+                  </a:lnTo>
+                  <a:lnTo>
+                    <a:pt x="5205492" y="391475"/>
+                  </a:lnTo>
+                  <a:lnTo>
+                    <a:pt x="5275836" y="394411"/>
+                  </a:lnTo>
+                  <a:lnTo>
+                    <a:pt x="5346181" y="397305"/>
+                  </a:lnTo>
+                  <a:lnTo>
+                    <a:pt x="5416525" y="400157"/>
+                  </a:lnTo>
+                  <a:lnTo>
+                    <a:pt x="5486870" y="402968"/>
+                  </a:lnTo>
+                  <a:lnTo>
+                    <a:pt x="5557214" y="405740"/>
+                  </a:lnTo>
+                  <a:lnTo>
+                    <a:pt x="5627559" y="408471"/>
+                  </a:lnTo>
+                  <a:lnTo>
+                    <a:pt x="5697903" y="411163"/>
+                  </a:lnTo>
+                  <a:lnTo>
+                    <a:pt x="5768248" y="413816"/>
+                  </a:lnTo>
+                  <a:lnTo>
+                    <a:pt x="5838592" y="416432"/>
+                  </a:lnTo>
+                  <a:lnTo>
+                    <a:pt x="5908937" y="419010"/>
+                  </a:lnTo>
+                  <a:lnTo>
+                    <a:pt x="5979281" y="421551"/>
+                  </a:lnTo>
+                  <a:lnTo>
+                    <a:pt x="6049626" y="424055"/>
+                  </a:lnTo>
+                  <a:lnTo>
+                    <a:pt x="6119970" y="426524"/>
+                  </a:lnTo>
+                  <a:lnTo>
+                    <a:pt x="6190315" y="428957"/>
+                  </a:lnTo>
+                  <a:lnTo>
+                    <a:pt x="6260659" y="431355"/>
+                  </a:lnTo>
+                  <a:lnTo>
+                    <a:pt x="6331004" y="433719"/>
+                  </a:lnTo>
+                  <a:lnTo>
+                    <a:pt x="6401348" y="436049"/>
+                  </a:lnTo>
+                  <a:lnTo>
+                    <a:pt x="6471693" y="438346"/>
+                  </a:lnTo>
+                  <a:lnTo>
+                    <a:pt x="6542037" y="440609"/>
+                  </a:lnTo>
+                  <a:lnTo>
+                    <a:pt x="6612382" y="442841"/>
+                  </a:lnTo>
+                  <a:lnTo>
+                    <a:pt x="6682726" y="445040"/>
+                  </a:lnTo>
+                  <a:lnTo>
+                    <a:pt x="6753071" y="447207"/>
+                  </a:lnTo>
+                  <a:lnTo>
+                    <a:pt x="6823415" y="449344"/>
+                  </a:lnTo>
+                  <a:lnTo>
+                    <a:pt x="6893760" y="451450"/>
+                  </a:lnTo>
+                  <a:lnTo>
+                    <a:pt x="6964104" y="453526"/>
+                  </a:lnTo>
+                </a:path>
+              </a:pathLst>
+            </a:custGeom>
+            <a:ln w="27101" cap="flat">
+              <a:solidFill>
+                <a:srgbClr val="FF8C00">
+                  <a:alpha val="100000"/>
+                </a:srgbClr>
+              </a:solidFill>
+              <a:prstDash val="solid"/>
+              <a:round/>
+            </a:ln>
+          </p:spPr>
+          <p:txBody>
+            <a:bodyPr/>
+            <a:lstStyle/>
+            <a:p/>
+          </p:txBody>
+        </p:sp>
+        <p:sp>
+          <p:nvSpPr>
+            <p:cNvPr id="70" name="pl70"/>
+            <p:cNvSpPr/>
+            <p:nvPr/>
+          </p:nvSpPr>
+          <p:spPr>
+            <a:xfrm>
+              <a:off x="887106" y="5294352"/>
+              <a:ext cx="7660515" cy="0"/>
+            </a:xfrm>
+            <a:custGeom>
+              <a:avLst/>
+              <a:pathLst>
+                <a:path w="7660515" h="0">
+                  <a:moveTo>
+                    <a:pt x="0" y="0"/>
+                  </a:moveTo>
+                  <a:lnTo>
+                    <a:pt x="7660515" y="0"/>
+                  </a:lnTo>
+                  <a:lnTo>
+                    <a:pt x="7660515" y="0"/>
+                  </a:lnTo>
+                </a:path>
+              </a:pathLst>
+            </a:custGeom>
+            <a:ln w="13550" cap="flat">
+              <a:solidFill>
+                <a:srgbClr val="7F7F7F">
+                  <a:alpha val="100000"/>
+                </a:srgbClr>
+              </a:solidFill>
+              <a:prstDash val="dash"/>
+              <a:round/>
+            </a:ln>
+          </p:spPr>
+          <p:txBody>
+            <a:bodyPr/>
+            <a:lstStyle/>
+            <a:p/>
+          </p:txBody>
+        </p:sp>
+        <p:sp>
+          <p:nvSpPr>
+            <p:cNvPr id="71" name="pl71"/>
+            <p:cNvSpPr/>
+            <p:nvPr/>
+          </p:nvSpPr>
+          <p:spPr>
+            <a:xfrm>
+              <a:off x="4590457" y="4336484"/>
+              <a:ext cx="0" cy="1317069"/>
+            </a:xfrm>
+            <a:custGeom>
+              <a:avLst/>
+              <a:pathLst>
+                <a:path w="0" h="1317069">
+                  <a:moveTo>
+                    <a:pt x="0" y="1317069"/>
+                  </a:moveTo>
+                  <a:lnTo>
+                    <a:pt x="0" y="0"/>
+                  </a:lnTo>
+                  <a:lnTo>
+                    <a:pt x="0" y="0"/>
+                  </a:lnTo>
+                </a:path>
+              </a:pathLst>
+            </a:custGeom>
+            <a:ln w="13550" cap="flat">
+              <a:solidFill>
+                <a:srgbClr val="666666">
+                  <a:alpha val="100000"/>
+                </a:srgbClr>
+              </a:solidFill>
+              <a:prstDash val="dot"/>
+              <a:round/>
+            </a:ln>
+          </p:spPr>
+          <p:txBody>
+            <a:bodyPr/>
+            <a:lstStyle/>
+            <a:p/>
+          </p:txBody>
+        </p:sp>
+        <p:sp>
+          <p:nvSpPr>
+            <p:cNvPr id="72" name="tx72"/>
+            <p:cNvSpPr/>
+            <p:nvPr/>
+          </p:nvSpPr>
+          <p:spPr>
+            <a:xfrm>
+              <a:off x="762297" y="5553636"/>
+              <a:ext cx="62179" cy="80101"/>
+            </a:xfrm>
+            <a:prstGeom prst="rect">
+              <a:avLst/>
+            </a:prstGeom>
+            <a:noFill/>
+          </p:spPr>
+          <p:txBody>
+            <a:bodyPr lIns="0" rIns="0" tIns="0" bIns="0" anchorCtr="1" anchor="ctr" wrap="none"/>
+            <a:lstStyle/>
+            <a:p>
+              <a:pPr algn="l" marL="0" marR="0" indent="0">
+                <a:lnSpc>
+                  <a:spcPts val="880"/>
+                </a:lnSpc>
+                <a:spcBef>
+                  <a:spcPts val="0"/>
+                </a:spcBef>
+                <a:spcAft>
+                  <a:spcPts val="0"/>
+                </a:spcAft>
+              </a:pPr>
+              <a:r>
+                <a:rPr sz="880">
+                  <a:solidFill>
+                    <a:srgbClr val="4D4D4D">
+                      <a:alpha val="100000"/>
+                    </a:srgbClr>
+                  </a:solidFill>
+                  <a:latin typeface="Helvetica"/>
+                  <a:cs typeface="Helvetica"/>
+                </a:rPr>
+                <a:t>0</a:t>
+              </a:r>
+            </a:p>
+          </p:txBody>
+        </p:sp>
+        <p:sp>
+          <p:nvSpPr>
+            <p:cNvPr id="73" name="tx73"/>
+            <p:cNvSpPr/>
+            <p:nvPr/>
+          </p:nvSpPr>
+          <p:spPr>
+            <a:xfrm>
+              <a:off x="762297" y="5254302"/>
+              <a:ext cx="62179" cy="80101"/>
+            </a:xfrm>
+            <a:prstGeom prst="rect">
+              <a:avLst/>
+            </a:prstGeom>
+            <a:noFill/>
+          </p:spPr>
+          <p:txBody>
+            <a:bodyPr lIns="0" rIns="0" tIns="0" bIns="0" anchorCtr="1" anchor="ctr" wrap="none"/>
+            <a:lstStyle/>
+            <a:p>
+              <a:pPr algn="l" marL="0" marR="0" indent="0">
+                <a:lnSpc>
+                  <a:spcPts val="880"/>
+                </a:lnSpc>
+                <a:spcBef>
+                  <a:spcPts val="0"/>
+                </a:spcBef>
+                <a:spcAft>
+                  <a:spcPts val="0"/>
+                </a:spcAft>
+              </a:pPr>
+              <a:r>
+                <a:rPr sz="880">
+                  <a:solidFill>
+                    <a:srgbClr val="4D4D4D">
+                      <a:alpha val="100000"/>
+                    </a:srgbClr>
+                  </a:solidFill>
+                  <a:latin typeface="Helvetica"/>
+                  <a:cs typeface="Helvetica"/>
+                </a:rPr>
+                <a:t>1</a:t>
+              </a:r>
+            </a:p>
+          </p:txBody>
+        </p:sp>
+        <p:sp>
+          <p:nvSpPr>
+            <p:cNvPr id="74" name="tx74"/>
+            <p:cNvSpPr/>
+            <p:nvPr/>
+          </p:nvSpPr>
+          <p:spPr>
+            <a:xfrm>
+              <a:off x="762297" y="4954968"/>
+              <a:ext cx="62179" cy="80101"/>
+            </a:xfrm>
+            <a:prstGeom prst="rect">
+              <a:avLst/>
+            </a:prstGeom>
+            <a:noFill/>
+          </p:spPr>
+          <p:txBody>
+            <a:bodyPr lIns="0" rIns="0" tIns="0" bIns="0" anchorCtr="1" anchor="ctr" wrap="none"/>
+            <a:lstStyle/>
+            <a:p>
+              <a:pPr algn="l" marL="0" marR="0" indent="0">
+                <a:lnSpc>
+                  <a:spcPts val="880"/>
+                </a:lnSpc>
+                <a:spcBef>
+                  <a:spcPts val="0"/>
+                </a:spcBef>
+                <a:spcAft>
+                  <a:spcPts val="0"/>
+                </a:spcAft>
+              </a:pPr>
+              <a:r>
+                <a:rPr sz="880">
+                  <a:solidFill>
+                    <a:srgbClr val="4D4D4D">
+                      <a:alpha val="100000"/>
+                    </a:srgbClr>
+                  </a:solidFill>
+                  <a:latin typeface="Helvetica"/>
+                  <a:cs typeface="Helvetica"/>
+                </a:rPr>
+                <a:t>2</a:t>
+              </a:r>
+            </a:p>
+          </p:txBody>
+        </p:sp>
+        <p:sp>
+          <p:nvSpPr>
+            <p:cNvPr id="75" name="tx75"/>
+            <p:cNvSpPr/>
+            <p:nvPr/>
+          </p:nvSpPr>
+          <p:spPr>
+            <a:xfrm>
+              <a:off x="762297" y="4655634"/>
+              <a:ext cx="62179" cy="80101"/>
+            </a:xfrm>
+            <a:prstGeom prst="rect">
+              <a:avLst/>
+            </a:prstGeom>
+            <a:noFill/>
+          </p:spPr>
+          <p:txBody>
+            <a:bodyPr lIns="0" rIns="0" tIns="0" bIns="0" anchorCtr="1" anchor="ctr" wrap="none"/>
+            <a:lstStyle/>
+            <a:p>
+              <a:pPr algn="l" marL="0" marR="0" indent="0">
+                <a:lnSpc>
+                  <a:spcPts val="880"/>
+                </a:lnSpc>
+                <a:spcBef>
+                  <a:spcPts val="0"/>
+                </a:spcBef>
+                <a:spcAft>
+                  <a:spcPts val="0"/>
+                </a:spcAft>
+              </a:pPr>
+              <a:r>
+                <a:rPr sz="880">
+                  <a:solidFill>
+                    <a:srgbClr val="4D4D4D">
+                      <a:alpha val="100000"/>
+                    </a:srgbClr>
+                  </a:solidFill>
+                  <a:latin typeface="Helvetica"/>
+                  <a:cs typeface="Helvetica"/>
+                </a:rPr>
+                <a:t>3</a:t>
+              </a:r>
+            </a:p>
+          </p:txBody>
+        </p:sp>
+        <p:sp>
+          <p:nvSpPr>
+            <p:cNvPr id="76" name="tx76"/>
+            <p:cNvSpPr/>
+            <p:nvPr/>
+          </p:nvSpPr>
+          <p:spPr>
+            <a:xfrm>
+              <a:off x="762297" y="4356300"/>
+              <a:ext cx="62179" cy="80101"/>
+            </a:xfrm>
+            <a:prstGeom prst="rect">
+              <a:avLst/>
+            </a:prstGeom>
+            <a:noFill/>
+          </p:spPr>
+          <p:txBody>
+            <a:bodyPr lIns="0" rIns="0" tIns="0" bIns="0" anchorCtr="1" anchor="ctr" wrap="none"/>
+            <a:lstStyle/>
+            <a:p>
+              <a:pPr algn="l" marL="0" marR="0" indent="0">
+                <a:lnSpc>
+                  <a:spcPts val="880"/>
+                </a:lnSpc>
+                <a:spcBef>
+                  <a:spcPts val="0"/>
+                </a:spcBef>
+                <a:spcAft>
+                  <a:spcPts val="0"/>
+                </a:spcAft>
+              </a:pPr>
+              <a:r>
+                <a:rPr sz="880">
+                  <a:solidFill>
+                    <a:srgbClr val="4D4D4D">
+                      <a:alpha val="100000"/>
+                    </a:srgbClr>
+                  </a:solidFill>
+                  <a:latin typeface="Helvetica"/>
+                  <a:cs typeface="Helvetica"/>
+                </a:rPr>
+                <a:t>4</a:t>
+              </a:r>
+            </a:p>
+          </p:txBody>
+        </p:sp>
+        <p:sp>
+          <p:nvSpPr>
+            <p:cNvPr id="77" name="tx77"/>
+            <p:cNvSpPr/>
+            <p:nvPr/>
+          </p:nvSpPr>
+          <p:spPr>
+            <a:xfrm>
+              <a:off x="1133333" y="5716183"/>
+              <a:ext cx="161574" cy="80101"/>
+            </a:xfrm>
+            <a:prstGeom prst="rect">
+              <a:avLst/>
+            </a:prstGeom>
+            <a:noFill/>
+          </p:spPr>
+          <p:txBody>
+            <a:bodyPr lIns="0" rIns="0" tIns="0" bIns="0" anchorCtr="1" anchor="ctr" wrap="none"/>
+            <a:lstStyle/>
+            <a:p>
+              <a:pPr algn="l" marL="0" marR="0" indent="0">
+                <a:lnSpc>
+                  <a:spcPts val="880"/>
+                </a:lnSpc>
+                <a:spcBef>
+                  <a:spcPts val="0"/>
+                </a:spcBef>
+                <a:spcAft>
+                  <a:spcPts val="0"/>
+                </a:spcAft>
+              </a:pPr>
+              <a:r>
+                <a:rPr sz="880">
+                  <a:solidFill>
+                    <a:srgbClr val="4D4D4D">
+                      <a:alpha val="100000"/>
+                    </a:srgbClr>
+                  </a:solidFill>
+                  <a:latin typeface="Helvetica"/>
+                  <a:cs typeface="Helvetica"/>
+                </a:rPr>
+                <a:t>-40</a:t>
+              </a:r>
+            </a:p>
+          </p:txBody>
+        </p:sp>
+        <p:sp>
+          <p:nvSpPr>
+            <p:cNvPr id="78" name="tx78"/>
+            <p:cNvSpPr/>
+            <p:nvPr/>
+          </p:nvSpPr>
+          <p:spPr>
+            <a:xfrm>
+              <a:off x="1978619" y="5716183"/>
+              <a:ext cx="161574" cy="80101"/>
+            </a:xfrm>
+            <a:prstGeom prst="rect">
+              <a:avLst/>
+            </a:prstGeom>
+            <a:noFill/>
+          </p:spPr>
+          <p:txBody>
+            <a:bodyPr lIns="0" rIns="0" tIns="0" bIns="0" anchorCtr="1" anchor="ctr" wrap="none"/>
+            <a:lstStyle/>
+            <a:p>
+              <a:pPr algn="l" marL="0" marR="0" indent="0">
+                <a:lnSpc>
+                  <a:spcPts val="880"/>
+                </a:lnSpc>
+                <a:spcBef>
+                  <a:spcPts val="0"/>
+                </a:spcBef>
+                <a:spcAft>
+                  <a:spcPts val="0"/>
+                </a:spcAft>
+              </a:pPr>
+              <a:r>
+                <a:rPr sz="880">
+                  <a:solidFill>
+                    <a:srgbClr val="4D4D4D">
+                      <a:alpha val="100000"/>
+                    </a:srgbClr>
+                  </a:solidFill>
+                  <a:latin typeface="Helvetica"/>
+                  <a:cs typeface="Helvetica"/>
+                </a:rPr>
+                <a:t>-30</a:t>
+              </a:r>
+            </a:p>
+          </p:txBody>
+        </p:sp>
+        <p:sp>
+          <p:nvSpPr>
+            <p:cNvPr id="79" name="tx79"/>
+            <p:cNvSpPr/>
+            <p:nvPr/>
+          </p:nvSpPr>
+          <p:spPr>
+            <a:xfrm>
+              <a:off x="2823906" y="5716183"/>
+              <a:ext cx="161574" cy="80101"/>
+            </a:xfrm>
+            <a:prstGeom prst="rect">
+              <a:avLst/>
+            </a:prstGeom>
+            <a:noFill/>
+          </p:spPr>
+          <p:txBody>
+            <a:bodyPr lIns="0" rIns="0" tIns="0" bIns="0" anchorCtr="1" anchor="ctr" wrap="none"/>
+            <a:lstStyle/>
+            <a:p>
+              <a:pPr algn="l" marL="0" marR="0" indent="0">
+                <a:lnSpc>
+                  <a:spcPts val="880"/>
+                </a:lnSpc>
+                <a:spcBef>
+                  <a:spcPts val="0"/>
+                </a:spcBef>
+                <a:spcAft>
+                  <a:spcPts val="0"/>
+                </a:spcAft>
+              </a:pPr>
+              <a:r>
+                <a:rPr sz="880">
+                  <a:solidFill>
+                    <a:srgbClr val="4D4D4D">
+                      <a:alpha val="100000"/>
+                    </a:srgbClr>
+                  </a:solidFill>
+                  <a:latin typeface="Helvetica"/>
+                  <a:cs typeface="Helvetica"/>
+                </a:rPr>
+                <a:t>-20</a:t>
+              </a:r>
+            </a:p>
+          </p:txBody>
+        </p:sp>
+        <p:sp>
+          <p:nvSpPr>
+            <p:cNvPr id="80" name="tx80"/>
+            <p:cNvSpPr/>
+            <p:nvPr/>
+          </p:nvSpPr>
+          <p:spPr>
+            <a:xfrm>
+              <a:off x="3669192" y="5716183"/>
+              <a:ext cx="161574" cy="80101"/>
+            </a:xfrm>
+            <a:prstGeom prst="rect">
+              <a:avLst/>
+            </a:prstGeom>
+            <a:noFill/>
+          </p:spPr>
+          <p:txBody>
+            <a:bodyPr lIns="0" rIns="0" tIns="0" bIns="0" anchorCtr="1" anchor="ctr" wrap="none"/>
+            <a:lstStyle/>
+            <a:p>
+              <a:pPr algn="l" marL="0" marR="0" indent="0">
+                <a:lnSpc>
+                  <a:spcPts val="880"/>
+                </a:lnSpc>
+                <a:spcBef>
+                  <a:spcPts val="0"/>
+                </a:spcBef>
+                <a:spcAft>
+                  <a:spcPts val="0"/>
+                </a:spcAft>
+              </a:pPr>
+              <a:r>
+                <a:rPr sz="880">
+                  <a:solidFill>
+                    <a:srgbClr val="4D4D4D">
+                      <a:alpha val="100000"/>
+                    </a:srgbClr>
+                  </a:solidFill>
+                  <a:latin typeface="Helvetica"/>
+                  <a:cs typeface="Helvetica"/>
+                </a:rPr>
+                <a:t>-10</a:t>
+              </a:r>
+            </a:p>
+          </p:txBody>
+        </p:sp>
+        <p:sp>
+          <p:nvSpPr>
+            <p:cNvPr id="81" name="tx81"/>
+            <p:cNvSpPr/>
+            <p:nvPr/>
+          </p:nvSpPr>
+          <p:spPr>
+            <a:xfrm>
+              <a:off x="4564176" y="5716183"/>
+              <a:ext cx="62179" cy="80101"/>
+            </a:xfrm>
+            <a:prstGeom prst="rect">
+              <a:avLst/>
+            </a:prstGeom>
+            <a:noFill/>
+          </p:spPr>
+          <p:txBody>
+            <a:bodyPr lIns="0" rIns="0" tIns="0" bIns="0" anchorCtr="1" anchor="ctr" wrap="none"/>
+            <a:lstStyle/>
+            <a:p>
+              <a:pPr algn="l" marL="0" marR="0" indent="0">
+                <a:lnSpc>
+                  <a:spcPts val="880"/>
+                </a:lnSpc>
+                <a:spcBef>
+                  <a:spcPts val="0"/>
+                </a:spcBef>
+                <a:spcAft>
+                  <a:spcPts val="0"/>
+                </a:spcAft>
+              </a:pPr>
+              <a:r>
+                <a:rPr sz="880">
+                  <a:solidFill>
+                    <a:srgbClr val="4D4D4D">
+                      <a:alpha val="100000"/>
+                    </a:srgbClr>
+                  </a:solidFill>
+                  <a:latin typeface="Helvetica"/>
+                  <a:cs typeface="Helvetica"/>
+                </a:rPr>
+                <a:t>0</a:t>
+              </a:r>
+            </a:p>
+          </p:txBody>
+        </p:sp>
+        <p:sp>
+          <p:nvSpPr>
+            <p:cNvPr id="82" name="tx82"/>
+            <p:cNvSpPr/>
+            <p:nvPr/>
+          </p:nvSpPr>
+          <p:spPr>
+            <a:xfrm>
+              <a:off x="5378373" y="5716183"/>
+              <a:ext cx="124358" cy="80101"/>
+            </a:xfrm>
+            <a:prstGeom prst="rect">
+              <a:avLst/>
+            </a:prstGeom>
+            <a:noFill/>
+          </p:spPr>
+          <p:txBody>
+            <a:bodyPr lIns="0" rIns="0" tIns="0" bIns="0" anchorCtr="1" anchor="ctr" wrap="none"/>
+            <a:lstStyle/>
+            <a:p>
+              <a:pPr algn="l" marL="0" marR="0" indent="0">
+                <a:lnSpc>
+                  <a:spcPts val="880"/>
+                </a:lnSpc>
+                <a:spcBef>
+                  <a:spcPts val="0"/>
+                </a:spcBef>
+                <a:spcAft>
+                  <a:spcPts val="0"/>
+                </a:spcAft>
+              </a:pPr>
+              <a:r>
+                <a:rPr sz="880">
+                  <a:solidFill>
+                    <a:srgbClr val="4D4D4D">
+                      <a:alpha val="100000"/>
+                    </a:srgbClr>
+                  </a:solidFill>
+                  <a:latin typeface="Helvetica"/>
+                  <a:cs typeface="Helvetica"/>
+                </a:rPr>
+                <a:t>10</a:t>
+              </a:r>
+            </a:p>
+          </p:txBody>
+        </p:sp>
+        <p:sp>
+          <p:nvSpPr>
+            <p:cNvPr id="83" name="tx83"/>
+            <p:cNvSpPr/>
+            <p:nvPr/>
+          </p:nvSpPr>
+          <p:spPr>
+            <a:xfrm>
+              <a:off x="6223659" y="5716183"/>
+              <a:ext cx="124358" cy="80101"/>
+            </a:xfrm>
+            <a:prstGeom prst="rect">
+              <a:avLst/>
+            </a:prstGeom>
+            <a:noFill/>
+          </p:spPr>
+          <p:txBody>
+            <a:bodyPr lIns="0" rIns="0" tIns="0" bIns="0" anchorCtr="1" anchor="ctr" wrap="none"/>
+            <a:lstStyle/>
+            <a:p>
+              <a:pPr algn="l" marL="0" marR="0" indent="0">
+                <a:lnSpc>
+                  <a:spcPts val="880"/>
+                </a:lnSpc>
+                <a:spcBef>
+                  <a:spcPts val="0"/>
+                </a:spcBef>
+                <a:spcAft>
+                  <a:spcPts val="0"/>
+                </a:spcAft>
+              </a:pPr>
+              <a:r>
+                <a:rPr sz="880">
+                  <a:solidFill>
+                    <a:srgbClr val="4D4D4D">
+                      <a:alpha val="100000"/>
+                    </a:srgbClr>
+                  </a:solidFill>
+                  <a:latin typeface="Helvetica"/>
+                  <a:cs typeface="Helvetica"/>
+                </a:rPr>
+                <a:t>20</a:t>
+              </a:r>
+            </a:p>
+          </p:txBody>
+        </p:sp>
+        <p:sp>
+          <p:nvSpPr>
+            <p:cNvPr id="84" name="tx84"/>
+            <p:cNvSpPr/>
+            <p:nvPr/>
+          </p:nvSpPr>
+          <p:spPr>
+            <a:xfrm>
+              <a:off x="7068946" y="5716183"/>
+              <a:ext cx="124358" cy="80101"/>
+            </a:xfrm>
+            <a:prstGeom prst="rect">
+              <a:avLst/>
+            </a:prstGeom>
+            <a:noFill/>
+          </p:spPr>
+          <p:txBody>
+            <a:bodyPr lIns="0" rIns="0" tIns="0" bIns="0" anchorCtr="1" anchor="ctr" wrap="none"/>
+            <a:lstStyle/>
+            <a:p>
+              <a:pPr algn="l" marL="0" marR="0" indent="0">
+                <a:lnSpc>
+                  <a:spcPts val="880"/>
+                </a:lnSpc>
+                <a:spcBef>
+                  <a:spcPts val="0"/>
+                </a:spcBef>
+                <a:spcAft>
+                  <a:spcPts val="0"/>
+                </a:spcAft>
+              </a:pPr>
+              <a:r>
+                <a:rPr sz="880">
+                  <a:solidFill>
+                    <a:srgbClr val="4D4D4D">
+                      <a:alpha val="100000"/>
+                    </a:srgbClr>
+                  </a:solidFill>
+                  <a:latin typeface="Helvetica"/>
+                  <a:cs typeface="Helvetica"/>
+                </a:rPr>
+                <a:t>30</a:t>
+              </a:r>
+            </a:p>
+          </p:txBody>
+        </p:sp>
+        <p:sp>
+          <p:nvSpPr>
+            <p:cNvPr id="85" name="tx85"/>
+            <p:cNvSpPr/>
+            <p:nvPr/>
+          </p:nvSpPr>
+          <p:spPr>
+            <a:xfrm>
+              <a:off x="7914232" y="5716183"/>
+              <a:ext cx="124358" cy="80101"/>
+            </a:xfrm>
+            <a:prstGeom prst="rect">
+              <a:avLst/>
+            </a:prstGeom>
+            <a:noFill/>
+          </p:spPr>
+          <p:txBody>
+            <a:bodyPr lIns="0" rIns="0" tIns="0" bIns="0" anchorCtr="1" anchor="ctr" wrap="none"/>
+            <a:lstStyle/>
+            <a:p>
+              <a:pPr algn="l" marL="0" marR="0" indent="0">
+                <a:lnSpc>
+                  <a:spcPts val="880"/>
+                </a:lnSpc>
+                <a:spcBef>
+                  <a:spcPts val="0"/>
+                </a:spcBef>
+                <a:spcAft>
+                  <a:spcPts val="0"/>
+                </a:spcAft>
+              </a:pPr>
+              <a:r>
+                <a:rPr sz="880">
+                  <a:solidFill>
+                    <a:srgbClr val="4D4D4D">
+                      <a:alpha val="100000"/>
+                    </a:srgbClr>
+                  </a:solidFill>
+                  <a:latin typeface="Helvetica"/>
+                  <a:cs typeface="Helvetica"/>
+                </a:rPr>
+                <a:t>40</a:t>
+              </a:r>
+            </a:p>
+          </p:txBody>
+        </p:sp>
+        <p:sp>
+          <p:nvSpPr>
+            <p:cNvPr id="86" name="tx86"/>
+            <p:cNvSpPr/>
+            <p:nvPr/>
+          </p:nvSpPr>
+          <p:spPr>
+            <a:xfrm>
+              <a:off x="2928340" y="5855859"/>
+              <a:ext cx="3578047" cy="100218"/>
+            </a:xfrm>
+            <a:prstGeom prst="rect">
+              <a:avLst/>
+            </a:prstGeom>
+            <a:noFill/>
+          </p:spPr>
+          <p:txBody>
+            <a:bodyPr lIns="0" rIns="0" tIns="0" bIns="0" anchorCtr="1" anchor="ctr" wrap="none"/>
+            <a:lstStyle/>
+            <a:p>
+              <a:pPr algn="l" marL="0" marR="0" indent="0">
+                <a:lnSpc>
+                  <a:spcPts val="1100"/>
+                </a:lnSpc>
+                <a:spcBef>
+                  <a:spcPts val="0"/>
+                </a:spcBef>
+                <a:spcAft>
+                  <a:spcPts val="0"/>
+                </a:spcAft>
+              </a:pPr>
+              <a:r>
+                <a:rPr sz="1100">
+                  <a:solidFill>
+                    <a:srgbClr val="000000">
+                      <a:alpha val="100000"/>
+                    </a:srgbClr>
+                  </a:solidFill>
+                  <a:latin typeface="Helvetica"/>
+                  <a:cs typeface="Helvetica"/>
+                </a:rPr>
+                <a:t>eGFR difference (%): 100 × (CKD-EPI Cr-Cys − CG) / CG</a:t>
+              </a:r>
+            </a:p>
+          </p:txBody>
+        </p:sp>
+        <p:sp>
+          <p:nvSpPr>
+            <p:cNvPr id="87" name="tx87"/>
+            <p:cNvSpPr/>
+            <p:nvPr/>
+          </p:nvSpPr>
+          <p:spPr>
+            <a:xfrm rot="-5400000">
+              <a:off x="138035" y="4944909"/>
+              <a:ext cx="1016904" cy="100218"/>
+            </a:xfrm>
+            <a:prstGeom prst="rect">
+              <a:avLst/>
+            </a:prstGeom>
+            <a:noFill/>
+          </p:spPr>
+          <p:txBody>
+            <a:bodyPr lIns="0" rIns="0" tIns="0" bIns="0" anchorCtr="1" anchor="ctr" wrap="none"/>
+            <a:lstStyle/>
+            <a:p>
+              <a:pPr algn="l" marL="0" marR="0" indent="0">
+                <a:lnSpc>
+                  <a:spcPts val="1100"/>
+                </a:lnSpc>
+                <a:spcBef>
+                  <a:spcPts val="0"/>
+                </a:spcBef>
+                <a:spcAft>
+                  <a:spcPts val="0"/>
+                </a:spcAft>
+              </a:pPr>
+              <a:r>
+                <a:rPr sz="1100">
+                  <a:solidFill>
+                    <a:srgbClr val="000000">
+                      <a:alpha val="100000"/>
+                    </a:srgbClr>
+                  </a:solidFill>
+                  <a:latin typeface="Helvetica"/>
+                  <a:cs typeface="Helvetica"/>
+                </a:rPr>
+                <a:t>subHR (95% CI)</a:t>
+              </a:r>
+            </a:p>
+          </p:txBody>
+        </p:sp>
+        <p:sp>
+          <p:nvSpPr>
+            <p:cNvPr id="88" name="tx88"/>
+            <p:cNvSpPr/>
+            <p:nvPr/>
+          </p:nvSpPr>
+          <p:spPr>
+            <a:xfrm>
+              <a:off x="887106" y="4159544"/>
+              <a:ext cx="6321612" cy="82021"/>
+            </a:xfrm>
+            <a:prstGeom prst="rect">
+              <a:avLst/>
+            </a:prstGeom>
+            <a:noFill/>
+          </p:spPr>
+          <p:txBody>
+            <a:bodyPr lIns="0" rIns="0" tIns="0" bIns="0" anchorCtr="1" anchor="ctr" wrap="none"/>
+            <a:lstStyle/>
+            <a:p>
+              <a:pPr algn="l" marL="0" marR="0" indent="0">
+                <a:lnSpc>
+                  <a:spcPts val="900"/>
+                </a:lnSpc>
+                <a:spcBef>
+                  <a:spcPts val="0"/>
+                </a:spcBef>
+                <a:spcAft>
+                  <a:spcPts val="0"/>
+                </a:spcAft>
+              </a:pPr>
+              <a:r>
+                <a:rPr sz="900">
+                  <a:solidFill>
+                    <a:srgbClr val="404040">
+                      <a:alpha val="100000"/>
+                    </a:srgbClr>
+                  </a:solidFill>
+                  <a:latin typeface="Helvetica"/>
+                  <a:cs typeface="Helvetica"/>
+                </a:rPr>
+                <a:t>subHR per 10 % decline: 1.19 (1.01-1.40), p = 0.038  |  per IQR decline (Δ = 29.3 %): 1.66 (1.03-2.69)  |  IQR: [-14.6, 14.7] %</a:t>
+              </a:r>
+            </a:p>
+          </p:txBody>
+        </p:sp>
+        <p:sp>
+          <p:nvSpPr>
+            <p:cNvPr id="89" name="tx89"/>
+            <p:cNvSpPr/>
+            <p:nvPr/>
+          </p:nvSpPr>
+          <p:spPr>
+            <a:xfrm>
+              <a:off x="887106" y="3932770"/>
               <a:ext cx="1480505" cy="120152"/>
             </a:xfrm>
             <a:prstGeom prst="rect">
